--- a/downloads/presentations/modules/lesson-49-public-accountability-and-ai-transparency-reporting.pptx
+++ b/downloads/presentations/modules/lesson-49-public-accountability-and-ai-transparency-reporting.pptx
@@ -24,9 +24,11 @@
     <p:sldId id="272" r:id="rId18"/>
     <p:sldId id="273" r:id="rId19"/>
     <p:sldId id="274" r:id="rId20"/>
+    <p:sldId id="275" r:id="rId21"/>
+    <p:sldId id="276" r:id="rId22"/>
   </p:sldIdLst>
   <p:notesMasterIdLst>
-    <p:notesMasterId r:id="rId21"/>
+    <p:notesMasterId r:id="rId23"/>
   </p:notesMasterIdLst>
   <p:sldSz cx="12192000" cy="6858000"/>
   <p:notesSz cx="6858000" cy="12192000"/>
@@ -609,8 +611,10 @@
           <a:p>
             <a:r>
               <a:rPr lang="en-US" dirty="0"/>
-              <a:t>Application to AI-Supported Workflows
-Generative AI transparency may explain when AI assists drafting and how human review occurs. Predictive analytics transparency may explain what the model supports, what decisions remain human, and how fairness is monitored. Agentic AI transparency may explain what actions are automated, what approvals are required, and how errors can be reported.</a:t>
+              <a:t>Technical and Governance Deep Dive
+Transparency reporting should be risk-based. Low-risk internal tools may be documented in an internal registry. Tools that influence public communication, prioritization, access, enforcement, or public-facing interactions may require public notice. High-impact tools may require more detailed documentation, such as intended use, data sources, validation approach, human review, limitations, contact information, and review schedule.
+The reporting process should be accessible. Public-facing explanations should use plain language, avoid technical jargon, and be available in appropriate languages and accessible formats. Transparency is not achieved by publishing a dense technical document that affected communities cannot understand. Agencies should consider how communities, partners, and staff will actually interpret the information.
+Transparency should also include mechanisms for accountability. A notice or registry should identify how concerns can be raised, how corrections can be requested when appropriate, and how the agency reviews incidents or complaints. Public reporting should connect to internal governance processes so that feedback can lead to action.</a:t>
             </a:r>
             <a:endParaRPr lang="en-US" dirty="0"/>
           </a:p>
@@ -698,10 +702,9 @@
           <a:p>
             <a:r>
               <a:rPr lang="en-US" dirty="0"/>
-              <a:t>Reflection Questions
-Which current or proposed AI use case in your agency raises this leadership or governance issue most clearly?
-Who currently has authority to make decisions about this issue, and is that authority documented?
-What evidence would governance or leadership need before approving the use case?</a:t>
+              <a:t>Risks, Failure Modes, and Guardrails
+One risk is transparency theater. Agencies may publish broad statements about responsible AI without disclosing actual uses, owners, or safeguards. A guardrail is to maintain an AI use registry with concrete information about approved and operational use cases.
+Another risk is over-disclosure of sensitive details. Publishing system architecture, vulnerabilities, or confidential data flows could create security or privacy risks. A guardrail is to review transparency materials through privacy, legal, security, and communications before release.</a:t>
             </a:r>
             <a:endParaRPr lang="en-US" dirty="0"/>
           </a:p>
@@ -789,9 +792,8 @@
           <a:p>
             <a:r>
               <a:rPr lang="en-US" dirty="0"/>
-              <a:t>Reflection Questions
-Which staff, partners, or communities would be affected if this issue were handled poorly?
-What policy, process, or artifact should be created or updated after this module?</a:t>
+              <a:t>Application to AI-Supported Workflows
+Generative AI transparency may explain when AI assists drafting and how human review occurs. Predictive analytics transparency may explain what the model supports, what decisions remain human, and how fairness is monitored. Agentic AI transparency may explain what actions are automated, what approvals are required, and how errors can be reported.</a:t>
             </a:r>
             <a:endParaRPr lang="en-US" dirty="0"/>
           </a:p>
@@ -879,8 +881,10 @@
           <a:p>
             <a:r>
               <a:rPr lang="en-US" dirty="0"/>
-              <a:t>Practical Exercise
-Create a transparency reporting template and apply it to one AI use case. Include purpose, owner, users, data categories, risk level, safeguards, human review, limitations, review date, and contact pathway.</a:t>
+              <a:t>Reflection Questions
+Which current or proposed AI use case in your agency raises this leadership or governance issue most clearly?
+Who currently has authority to make decisions about this issue, and is that authority documented?
+What evidence would governance or leadership need before approving the use case?</a:t>
             </a:r>
             <a:endParaRPr lang="en-US" dirty="0"/>
           </a:p>
@@ -968,8 +972,9 @@
           <a:p>
             <a:r>
               <a:rPr lang="en-US" dirty="0"/>
-              <a:t>Before You Begin
-Choose a real or realistic public health AI use case. Document assumptions, unresolved questions, and which agency roles would need to review the artifact before it is adopted. The exercise should produce a work product that could support governance review, leadership discussion, implementation planning, or policy development.</a:t>
+              <a:t>Reflection Questions
+Which staff, partners, or communities would be affected if this issue were handled poorly?
+What policy, process, or artifact should be created or updated after this module?</a:t>
             </a:r>
             <a:endParaRPr lang="en-US" dirty="0"/>
           </a:p>
@@ -1057,8 +1062,8 @@
           <a:p>
             <a:r>
               <a:rPr lang="en-US" dirty="0"/>
-              <a:t>Expected Artifact or Evidence
-AI transparency template; sample AI use registry entry; public notice draft; internal review checklist.</a:t>
+              <a:t>Practical Exercise
+Create a transparency reporting template and apply it to one AI use case. Include purpose, owner, users, data categories, risk level, safeguards, human review, limitations, review date, and contact pathway.</a:t>
             </a:r>
             <a:endParaRPr lang="en-US" dirty="0"/>
           </a:p>
@@ -1146,8 +1151,8 @@
           <a:p>
             <a:r>
               <a:rPr lang="en-US" dirty="0"/>
-              <a:t>Expected Assignment
-AI transparency template; sample AI use registry entry; public notice draft; internal review checklist.</a:t>
+              <a:t>Before You Begin
+Choose a real or realistic public health AI use case. Document assumptions, unresolved questions, and which agency roles would need to review the artifact before it is adopted. The exercise should produce a work product that could support governance review, leadership discussion, implementation planning, or policy development.</a:t>
             </a:r>
             <a:endParaRPr lang="en-US" dirty="0"/>
           </a:p>
@@ -1235,12 +1240,8 @@
           <a:p>
             <a:r>
               <a:rPr lang="en-US" dirty="0"/>
-              <a:t>Knowledge Check
-1. What is the strongest reason this module topic belongs in AI leadership and governance training?
-2. Which practice best supports accountable public health AI governance?
-3. When should an AI use case be escalated for leadership or governance review?
-4. What is weak evidence of completion for a leadership and governance module?
-5. What should leaders do when an AI use case has meaningful benefits but unresolved risks?</a:t>
+              <a:t>Expected Artifact or Evidence
+AI transparency template; sample AI use registry entry; public notice draft; internal review checklist.</a:t>
             </a:r>
             <a:endParaRPr lang="en-US" dirty="0"/>
           </a:p>
@@ -1328,12 +1329,8 @@
           <a:p>
             <a:r>
               <a:rPr lang="en-US" dirty="0"/>
-              <a:t>References and Resources
-NIST Artificial Intelligence Risk Management Framework (AI RMF 1.0): https://www.nist.gov/itl/ai-risk-management-framework
-NIST Generative AI Profile: https://www.nist.gov/publications/artificial-intelligence-risk-management-framework-generative-artificial-intelligence
-NIST Privacy Framework
-CDC Public Health Data Strategy and Data Modernization resources: https://www.cdc.gov/public-health-data-strategy/php/about/index.html
-WHO Ethics and Governance of Artificial Intelligence for Health: https://www.who.int/publications/i/item/9789240029200</a:t>
+              <a:t>Expected Assignment
+AI transparency template; sample AI use registry entry; public notice draft; internal review checklist.</a:t>
             </a:r>
             <a:endParaRPr lang="en-US" dirty="0"/>
           </a:p>
@@ -1421,9 +1418,12 @@
           <a:p>
             <a:r>
               <a:rPr lang="en-US" dirty="0"/>
-              <a:t>References and Resources
-OMB Memorandum M-24-10 on federal AI governance, risk management, and innovation, where relevant to public-sector governance models
-Agency strategic plans, procurement policies, privacy policies, cybersecurity policies, records policies, and equity plans</a:t>
+              <a:t>Knowledge Check
+1. What is the strongest reason this module topic belongs in AI leadership and governance training?
+2. Which practice best supports accountable public health AI governance?
+3. When should an AI use case be escalated for leadership or governance review?
+4. What is weak evidence of completion for a leadership and governance module?
+5. What should leaders do when an AI use case has meaningful benefits but unresolved risks?</a:t>
             </a:r>
             <a:endParaRPr lang="en-US" dirty="0"/>
           </a:p>
@@ -1557,6 +1557,189 @@
 </p:notes>
 </file>
 
+<file path=ppt/notesSlides/notesSlide20.xml><?xml version="1.0" encoding="utf-8"?>
+<p:notes xmlns:a="http://schemas.openxmlformats.org/drawingml/2006/main" xmlns:r="http://schemas.openxmlformats.org/officeDocument/2006/relationships" xmlns:p="http://schemas.openxmlformats.org/presentationml/2006/main">
+  <p:cSld>
+    <p:spTree>
+      <p:nvGrpSpPr>
+        <p:cNvPr id="1" name=""/>
+        <p:cNvGrpSpPr/>
+        <p:nvPr/>
+      </p:nvGrpSpPr>
+      <p:grpSpPr>
+        <a:xfrm>
+          <a:off x="0" y="0"/>
+          <a:ext cx="0" cy="0"/>
+          <a:chOff x="0" y="0"/>
+          <a:chExt cx="0" cy="0"/>
+        </a:xfrm>
+      </p:grpSpPr>
+      <p:sp>
+        <p:nvSpPr>
+          <p:cNvPr id="2" name="Slide Image Placeholder 1"/>
+          <p:cNvSpPr>
+            <a:spLocks noGrp="1" noRot="1" noChangeAspect="1"/>
+          </p:cNvSpPr>
+          <p:nvPr>
+            <p:ph type="sldImg"/>
+          </p:nvPr>
+        </p:nvSpPr>
+        <p:spPr/>
+      </p:sp>
+      <p:sp>
+        <p:nvSpPr>
+          <p:cNvPr id="3" name="Notes Placeholder 2"/>
+          <p:cNvSpPr>
+            <a:spLocks noGrp="1"/>
+          </p:cNvSpPr>
+          <p:nvPr>
+            <p:ph type="body" idx="1"/>
+          </p:nvPr>
+        </p:nvSpPr>
+        <p:spPr/>
+        <p:txBody>
+          <a:bodyPr/>
+          <a:lstStyle/>
+          <a:p>
+            <a:r>
+              <a:rPr lang="en-US" dirty="0"/>
+              <a:t>References and Resources
+NIST Artificial Intelligence Risk Management Framework (AI RMF 1.0): https://www.nist.gov/itl/ai-risk-management-framework
+NIST Generative AI Profile: https://www.nist.gov/publications/artificial-intelligence-risk-management-framework-generative-artificial-intelligence
+NIST Privacy Framework
+CDC Public Health Data Strategy and Data Modernization resources: https://www.cdc.gov/public-health-data-strategy/php/about/index.html
+WHO Ethics and Governance of Artificial Intelligence for Health: https://www.who.int/publications/i/item/9789240029200</a:t>
+            </a:r>
+            <a:endParaRPr lang="en-US" dirty="0"/>
+          </a:p>
+        </p:txBody>
+      </p:sp>
+      <p:sp>
+        <p:nvSpPr>
+          <p:cNvPr id="4" name="Slide Number Placeholder 3"/>
+          <p:cNvSpPr>
+            <a:spLocks noGrp="1"/>
+          </p:cNvSpPr>
+          <p:nvPr>
+            <p:ph type="sldNum" sz="quarter" idx="10"/>
+          </p:nvPr>
+        </p:nvSpPr>
+        <p:spPr/>
+        <p:txBody>
+          <a:bodyPr/>
+          <a:lstStyle/>
+          <a:p>
+            <a:fld id="{F7021451-1387-4CA6-816F-3879F97B5CBC}" type="slidenum">
+              <a:rPr lang="en-US"/>
+              <a:t>20</a:t>
+            </a:fld>
+            <a:endParaRPr lang="en-US"/>
+          </a:p>
+        </p:txBody>
+      </p:sp>
+    </p:spTree>
+    <p:extLst>
+      <p:ext uri="{BB962C8B-B14F-4D97-AF65-F5344CB8AC3E}">
+        <p14:creationId xmlns:p14="http://schemas.microsoft.com/office/powerpoint/2010/main" val="1024086991"/>
+      </p:ext>
+    </p:extLst>
+  </p:cSld>
+  <p:clrMapOvr>
+    <a:masterClrMapping/>
+  </p:clrMapOvr>
+</p:notes>
+</file>
+
+<file path=ppt/notesSlides/notesSlide21.xml><?xml version="1.0" encoding="utf-8"?>
+<p:notes xmlns:a="http://schemas.openxmlformats.org/drawingml/2006/main" xmlns:r="http://schemas.openxmlformats.org/officeDocument/2006/relationships" xmlns:p="http://schemas.openxmlformats.org/presentationml/2006/main">
+  <p:cSld>
+    <p:spTree>
+      <p:nvGrpSpPr>
+        <p:cNvPr id="1" name=""/>
+        <p:cNvGrpSpPr/>
+        <p:nvPr/>
+      </p:nvGrpSpPr>
+      <p:grpSpPr>
+        <a:xfrm>
+          <a:off x="0" y="0"/>
+          <a:ext cx="0" cy="0"/>
+          <a:chOff x="0" y="0"/>
+          <a:chExt cx="0" cy="0"/>
+        </a:xfrm>
+      </p:grpSpPr>
+      <p:sp>
+        <p:nvSpPr>
+          <p:cNvPr id="2" name="Slide Image Placeholder 1"/>
+          <p:cNvSpPr>
+            <a:spLocks noGrp="1" noRot="1" noChangeAspect="1"/>
+          </p:cNvSpPr>
+          <p:nvPr>
+            <p:ph type="sldImg"/>
+          </p:nvPr>
+        </p:nvSpPr>
+        <p:spPr/>
+      </p:sp>
+      <p:sp>
+        <p:nvSpPr>
+          <p:cNvPr id="3" name="Notes Placeholder 2"/>
+          <p:cNvSpPr>
+            <a:spLocks noGrp="1"/>
+          </p:cNvSpPr>
+          <p:nvPr>
+            <p:ph type="body" idx="1"/>
+          </p:nvPr>
+        </p:nvSpPr>
+        <p:spPr/>
+        <p:txBody>
+          <a:bodyPr/>
+          <a:lstStyle/>
+          <a:p>
+            <a:r>
+              <a:rPr lang="en-US" dirty="0"/>
+              <a:t>References and Resources
+OMB Memorandum M-24-10 on federal AI governance, risk management, and innovation, where relevant to public-sector governance models
+Agency strategic plans, procurement policies, privacy policies, cybersecurity policies, records policies, and equity plans</a:t>
+            </a:r>
+            <a:endParaRPr lang="en-US" dirty="0"/>
+          </a:p>
+        </p:txBody>
+      </p:sp>
+      <p:sp>
+        <p:nvSpPr>
+          <p:cNvPr id="4" name="Slide Number Placeholder 3"/>
+          <p:cNvSpPr>
+            <a:spLocks noGrp="1"/>
+          </p:cNvSpPr>
+          <p:nvPr>
+            <p:ph type="sldNum" sz="quarter" idx="10"/>
+          </p:nvPr>
+        </p:nvSpPr>
+        <p:spPr/>
+        <p:txBody>
+          <a:bodyPr/>
+          <a:lstStyle/>
+          <a:p>
+            <a:fld id="{F7021451-1387-4CA6-816F-3879F97B5CBC}" type="slidenum">
+              <a:rPr lang="en-US"/>
+              <a:t>21</a:t>
+            </a:fld>
+            <a:endParaRPr lang="en-US"/>
+          </a:p>
+        </p:txBody>
+      </p:sp>
+    </p:spTree>
+    <p:extLst>
+      <p:ext uri="{BB962C8B-B14F-4D97-AF65-F5344CB8AC3E}">
+        <p14:creationId xmlns:p14="http://schemas.microsoft.com/office/powerpoint/2010/main" val="1024086991"/>
+      </p:ext>
+    </p:extLst>
+  </p:cSld>
+  <p:clrMapOvr>
+    <a:masterClrMapping/>
+  </p:clrMapOvr>
+</p:notes>
+</file>
+
 <file path=ppt/notesSlides/notesSlide3.xml><?xml version="1.0" encoding="utf-8"?>
 <p:notes xmlns:a="http://schemas.openxmlformats.org/drawingml/2006/main" xmlns:r="http://schemas.openxmlformats.org/officeDocument/2006/relationships" xmlns:p="http://schemas.openxmlformats.org/presentationml/2006/main">
   <p:cSld>
@@ -1603,12 +1786,11 @@
           <a:p>
             <a:r>
               <a:rPr lang="en-US" dirty="0"/>
-              <a:t>Learning Objectives
-Explain why transparency reporting matters for public health AI.
-Identify which AI uses should be disclosed internally, publicly, or to specific partners.
-Develop contents for an AI transparency notice or AI use registry.
-Balance transparency with privacy, security, confidentiality, and operational sensitivity.
-Produce a draft AI transparency reporting template.</a:t>
+              <a:t>Related Playbook Plays
+Play 11: Build and Deploy AI Solutions - This lesson informs Play 11 by helping learners connect the lesson topic to build and deploy ai solutions work in the AI Playbook.
+Play 7: Prioritize Use Cases - This lesson informs Play 7 by helping learners connect the lesson topic to prioritize use cases work in the AI Playbook sequence.
+Play 1: Vision &amp; Guardrails - This lesson informs Play 1 by helping learners connect the lesson topic to vision &amp; guardrails work in the AI Playbook sequence.
+Play 2: Readiness Assessment - This lesson informs Play 2 by helping learners connect the lesson topic to readiness assessment work in the AI Playbook sequence.</a:t>
             </a:r>
             <a:endParaRPr lang="en-US" dirty="0"/>
           </a:p>
@@ -1696,9 +1878,13 @@
           <a:p>
             <a:r>
               <a:rPr lang="en-US" dirty="0"/>
-              <a:t>Module Overview
-Public health agencies have a responsibility to explain how AI is used in ways that affect public services, public communication, surveillance, resource allocation, or community trust. Transparency reporting helps agencies communicate what AI tools are in use, why they are used, what safeguards are in place, and how the public or partners can raise concerns.
-This module helps leaders design AI transparency practices that are meaningful, not performative. Transparency should be understandable, accessible, and proportionate to risk. It should support public accountability while protecting security, privacy, confidential data, and sensitive operational details.</a:t>
+              <a:t>Related Toolkit Resources
+Tool 3: Equity Impact Assessment Checklist (Checklist) - Use this tool to complete or strengthen the practical exercise for the module using fictional, de-identified, or generalized.
+Tool 4: AI Policy Landscape Scan (Worksheet) - Use AI Policy Landscape Scan to translate this lesson into a documented public health AI planning, governance, implementation,.
+Tool 5: AI Environmental and Resource Impact Review (Checklist) - Use AI Environmental and Resource Impact Review to translate this lesson into a documented public health AI planning,.
+Tool 6: Human-Centered AI Decision Rule Checklist (Checklist) - Use this tool to complete or strengthen the practical exercise for the module using fictional, de-identified, or generalized.
+Tool 8: AI Project Charter (Planning) - Use AI Project Charter to translate this lesson into a documented public health AI planning, governance, implementation, or.
+Tool 9: Data Quality Assessment Checklist (Checklist) - Use this tool to complete or strengthen the practical exercise for the module using fictional, de-identified, or generalized.</a:t>
             </a:r>
             <a:endParaRPr lang="en-US" dirty="0"/>
           </a:p>
@@ -1786,8 +1972,12 @@
           <a:p>
             <a:r>
               <a:rPr lang="en-US" dirty="0"/>
-              <a:t>Jurisdiction and Agency Policy Note
-This module provides national-level training guidance for public health agencies and partners. It is not legal advice and does not replace review by agency legal counsel, privacy officers, procurement officials, civil rights staff, records officers, or other authorized decision-makers. Requirements may vary by state, locality, territory, Tribe, agency, funding source, data-sharing agreement, emergency authority, and organizational policy. Learners should use this module to identify the issues that require review and should confirm applicable requirements before approving, procuring, deploying, or publicly communicating about AI-supported work.</a:t>
+              <a:t>Learning Objectives
+Explain why transparency reporting matters for public health AI.
+Identify which AI uses should be disclosed internally, publicly, or to specific partners.
+Develop contents for an AI transparency notice or AI use registry.
+Balance transparency with privacy, security, confidentiality, and operational sensitivity.
+Produce a draft AI transparency reporting template.</a:t>
             </a:r>
             <a:endParaRPr lang="en-US" dirty="0"/>
           </a:p>
@@ -1875,9 +2065,9 @@
           <a:p>
             <a:r>
               <a:rPr lang="en-US" dirty="0"/>
-              <a:t>Why This Topic Matters for Public Health AI
-Public health depends on trust. If communities discover that AI is being used in surveillance, communication, service routing, or resource allocation without explanation, they may question whether decisions are fair, accurate, or accountable. Transparency does not require agencies to disclose every technical detail, but it does require clear communication about the purpose and safeguards of consequential AI uses.
-Transparency also improves internal accountability. A registry of AI use cases helps leaders know what tools are active, who owns them, what data they use, and when they were last reviewed. It reduces the chance that tools continue operating after their purpose, vendor terms, data sources, or risk profile changes.</a:t>
+              <a:t>Module Overview
+Public health agencies have a responsibility to explain how AI is used in ways that affect public services, public communication, surveillance, resource allocation, or community trust. Transparency reporting helps agencies communicate what AI tools are in use, why they are used, what safeguards are in place, and how the public or partners can raise concerns.
+This module helps leaders design AI transparency practices that are meaningful, not performative. Transparency should be understandable, accessible, and proportionate to risk. It should support public accountability while protecting security, privacy, confidential data, and sensitive operational details.</a:t>
             </a:r>
             <a:endParaRPr lang="en-US" dirty="0"/>
           </a:p>
@@ -1965,9 +2155,8 @@
           <a:p>
             <a:r>
               <a:rPr lang="en-US" dirty="0"/>
-              <a:t>Public Health Example
-A health department uses AI to draft public health messages, summarize internal reports, and prioritize inspection follow-up. Some uses may not require broad public disclosure, while others may affect public services and should be listed in an AI use registry. The registry does not need to reveal sensitive security details, but it should identify the purpose, owner, data categories, review process, and human oversight.
-For a public-facing tool, the agency may also create a plain-language notice explaining that AI assists with initial responses, that staff review high-risk content, that personal information should not be entered unless requested through approved channels, and that users can contact the agency for help or correction. This type of notice supports trust and sets realistic expectations.</a:t>
+              <a:t>Jurisdiction and Agency Policy Note
+This module provides national-level training guidance for public health agencies and partners. It is not legal advice and does not replace review by agency legal counsel, privacy officers, procurement officials, civil rights staff, records officers, or other authorized decision-makers. Requirements may vary by state, locality, territory, Tribe, agency, funding source, data-sharing agreement, emergency authority, and organizational policy. Learners should use this module to identify the issues that require review and should confirm applicable requirements before approving, procuring, deploying, or publicly communicating about AI-supported work.</a:t>
             </a:r>
             <a:endParaRPr lang="en-US" dirty="0"/>
           </a:p>
@@ -2055,10 +2244,9 @@
           <a:p>
             <a:r>
               <a:rPr lang="en-US" dirty="0"/>
-              <a:t>Technical and Governance Deep Dive
-Transparency reporting should be risk-based. Low-risk internal tools may be documented in an internal registry. Tools that influence public communication, prioritization, access, enforcement, or public-facing interactions may require public notice. High-impact tools may require more detailed documentation, such as intended use, data sources, validation approach, human review, limitations, contact information, and review schedule.
-The reporting process should be accessible. Public-facing explanations should use plain language, avoid technical jargon, and be available in appropriate languages and accessible formats. Transparency is not achieved by publishing a dense technical document that affected communities cannot understand. Agencies should consider how communities, partners, and staff will actually interpret the information.
-Transparency should also include mechanisms for accountability. A notice or registry should identify how concerns can be raised, how corrections can be requested when appropriate, and how the agency reviews incidents or complaints. Public reporting should connect to internal governance processes so that feedback can lead to action.</a:t>
+              <a:t>Why This Topic Matters for Public Health AI
+Public health depends on trust. If communities discover that AI is being used in surveillance, communication, service routing, or resource allocation without explanation, they may question whether decisions are fair, accurate, or accountable. Transparency does not require agencies to disclose every technical detail, but it does require clear communication about the purpose and safeguards of consequential AI uses.
+Transparency also improves internal accountability. A registry of AI use cases helps leaders know what tools are active, who owns them, what data they use, and when they were last reviewed. It reduces the chance that tools continue operating after their purpose, vendor terms, data sources, or risk profile changes.</a:t>
             </a:r>
             <a:endParaRPr lang="en-US" dirty="0"/>
           </a:p>
@@ -2146,9 +2334,9 @@
           <a:p>
             <a:r>
               <a:rPr lang="en-US" dirty="0"/>
-              <a:t>Risks, Failure Modes, and Guardrails
-One risk is transparency theater. Agencies may publish broad statements about responsible AI without disclosing actual uses, owners, or safeguards. A guardrail is to maintain an AI use registry with concrete information about approved and operational use cases.
-Another risk is over-disclosure of sensitive details. Publishing system architecture, vulnerabilities, or confidential data flows could create security or privacy risks. A guardrail is to review transparency materials through privacy, legal, security, and communications before release.</a:t>
+              <a:t>Public Health Example
+A health department uses AI to draft public health messages, summarize internal reports, and prioritize inspection follow-up. Some uses may not require broad public disclosure, while others may affect public services and should be listed in an AI use registry. The registry does not need to reveal sensitive security details, but it should identify the purpose, owner, data categories, review process, and human oversight.
+For a public-facing tool, the agency may also create a plain-language notice explaining that AI assists with initial responses, that staff review high-risk content, that personal information should not be entered unless requested through approved channels, and that users can contact the agency for help or correction. This type of notice supports trust and sets realistic expectations.</a:t>
             </a:r>
             <a:endParaRPr lang="en-US" dirty="0"/>
           </a:p>
@@ -2771,7 +2959,32 @@
       </p:sp>
       <p:sp>
         <p:nvSpPr>
-          <p:cNvPr id="3" name="Text 1"/>
+          <p:cNvPr id="3" name="Shape 1"/>
+          <p:cNvSpPr/>
+          <p:nvPr/>
+        </p:nvSpPr>
+        <p:spPr>
+          <a:xfrm>
+            <a:off x="0" y="164592"/>
+            <a:ext cx="146304" cy="6693408"/>
+          </a:xfrm>
+          <a:prstGeom prst="rect">
+            <a:avLst/>
+          </a:prstGeom>
+          <a:solidFill>
+            <a:srgbClr val="2F8A28"/>
+          </a:solidFill>
+          <a:ln w="12700">
+            <a:solidFill>
+              <a:srgbClr val="2F8A28"/>
+            </a:solidFill>
+            <a:prstDash val="solid"/>
+          </a:ln>
+        </p:spPr>
+      </p:sp>
+      <p:sp>
+        <p:nvSpPr>
+          <p:cNvPr id="4" name="Text 2"/>
           <p:cNvSpPr/>
           <p:nvPr/>
         </p:nvSpPr>
@@ -2810,7 +3023,7 @@
       </p:sp>
       <p:sp>
         <p:nvSpPr>
-          <p:cNvPr id="4" name="Text 2"/>
+          <p:cNvPr id="5" name="Text 3"/>
           <p:cNvSpPr/>
           <p:nvPr/>
         </p:nvSpPr>
@@ -2849,7 +3062,7 @@
       </p:sp>
       <p:sp>
         <p:nvSpPr>
-          <p:cNvPr id="5" name="Text 3"/>
+          <p:cNvPr id="6" name="Text 4"/>
           <p:cNvSpPr/>
           <p:nvPr/>
         </p:nvSpPr>
@@ -2888,13 +3101,77 @@
       </p:sp>
       <p:sp>
         <p:nvSpPr>
-          <p:cNvPr id="6" name="Text 4"/>
+          <p:cNvPr id="7" name="Shape 5"/>
           <p:cNvSpPr/>
           <p:nvPr/>
         </p:nvSpPr>
         <p:spPr>
           <a:xfrm>
             <a:off x="640080" y="658368"/>
+            <a:ext cx="420624" cy="420624"/>
+          </a:xfrm>
+          <a:prstGeom prst="ellipse">
+            <a:avLst/>
+          </a:prstGeom>
+          <a:solidFill>
+            <a:srgbClr val="0068B7"/>
+          </a:solidFill>
+          <a:ln w="12700">
+            <a:solidFill>
+              <a:srgbClr val="0068B7"/>
+            </a:solidFill>
+            <a:prstDash val="solid"/>
+          </a:ln>
+        </p:spPr>
+      </p:sp>
+      <p:sp>
+        <p:nvSpPr>
+          <p:cNvPr id="8" name="Text 6"/>
+          <p:cNvSpPr/>
+          <p:nvPr/>
+        </p:nvSpPr>
+        <p:spPr>
+          <a:xfrm>
+            <a:off x="640080" y="731520"/>
+            <a:ext cx="420624" cy="164592"/>
+          </a:xfrm>
+          <a:prstGeom prst="rect">
+            <a:avLst/>
+          </a:prstGeom>
+          <a:noFill/>
+          <a:ln/>
+        </p:spPr>
+        <p:txBody>
+          <a:bodyPr wrap="square" lIns="0" tIns="0" rIns="0" bIns="0" rtlCol="0" anchor="ctr"/>
+          <a:lstStyle/>
+          <a:p>
+            <a:pPr algn="ctr" indent="0" marL="0">
+              <a:buNone/>
+            </a:pPr>
+            <a:r>
+              <a:rPr lang="en-US" sz="1100" b="1" dirty="0">
+                <a:solidFill>
+                  <a:srgbClr val="FFFFFF"/>
+                </a:solidFill>
+                <a:latin typeface="Aptos" pitchFamily="34" charset="0"/>
+                <a:ea typeface="Aptos" pitchFamily="34" charset="-122"/>
+                <a:cs typeface="Aptos" pitchFamily="34" charset="-120"/>
+              </a:rPr>
+              <a:t>6</a:t>
+            </a:r>
+            <a:endParaRPr lang="en-US" sz="1100" dirty="0"/>
+          </a:p>
+        </p:txBody>
+      </p:sp>
+      <p:sp>
+        <p:nvSpPr>
+          <p:cNvPr id="9" name="Text 7"/>
+          <p:cNvSpPr/>
+          <p:nvPr/>
+        </p:nvSpPr>
+        <p:spPr>
+          <a:xfrm>
+            <a:off x="640080" y="621792"/>
             <a:ext cx="10881360" cy="566928"/>
           </a:xfrm>
           <a:prstGeom prst="rect">
@@ -2921,7 +3198,7 @@
                 <a:ea typeface="Aptos Display" pitchFamily="34" charset="-122"/>
                 <a:cs typeface="Aptos Display" pitchFamily="34" charset="-120"/>
               </a:rPr>
-              <a:t>Application to AI-Supported Workflows</a:t>
+              <a:t>Technical and Governance Deep Dive</a:t>
             </a:r>
             <a:endParaRPr lang="en-US" sz="2700" dirty="0"/>
           </a:p>
@@ -2929,32 +3206,178 @@
       </p:sp>
       <p:sp>
         <p:nvSpPr>
-          <p:cNvPr id="7" name="Text 5"/>
-          <p:cNvSpPr/>
-          <p:nvPr/>
-        </p:nvSpPr>
-        <p:spPr>
-          <a:xfrm>
-            <a:off x="822960" y="1325880"/>
-            <a:ext cx="10378440" cy="4800600"/>
-          </a:xfrm>
-          <a:prstGeom prst="rect">
-            <a:avLst/>
-          </a:prstGeom>
-          <a:noFill/>
-          <a:ln/>
-        </p:spPr>
-        <p:txBody>
-          <a:bodyPr wrap="square" lIns="1016" tIns="1016" rIns="1016" bIns="1016" rtlCol="0" anchor="t">
+          <p:cNvPr id="10" name="Text 8"/>
+          <p:cNvSpPr/>
+          <p:nvPr/>
+        </p:nvSpPr>
+        <p:spPr>
+          <a:xfrm>
+            <a:off x="868680" y="1417320"/>
+            <a:ext cx="6675120" cy="4434840"/>
+          </a:xfrm>
+          <a:prstGeom prst="rect">
+            <a:avLst/>
+          </a:prstGeom>
+          <a:noFill/>
+          <a:ln/>
+        </p:spPr>
+        <p:txBody>
+          <a:bodyPr wrap="square" lIns="635" tIns="635" rIns="635" bIns="635" rtlCol="0" anchor="t">
             <a:normAutofit/>
           </a:bodyPr>
           <a:lstStyle/>
           <a:p>
+            <a:r>
+              <a:rPr lang="en-US" sz="1700" dirty="0">
+                <a:solidFill>
+                  <a:srgbClr val="17364A"/>
+                </a:solidFill>
+                <a:latin typeface="Aptos" pitchFamily="34" charset="0"/>
+                <a:ea typeface="Aptos" pitchFamily="34" charset="-122"/>
+                <a:cs typeface="Aptos" pitchFamily="34" charset="-120"/>
+              </a:rPr>
+              <a:t>Transparency reporting should be risk-based.</a:t>
+            </a:r>
+            <a:endParaRPr lang="en-US" sz="1700" dirty="0"/>
+          </a:p>
+          <a:p>
+            <a:r>
+              <a:rPr lang="en-US" sz="1700" dirty="0">
+                <a:solidFill>
+                  <a:srgbClr val="17364A"/>
+                </a:solidFill>
+                <a:latin typeface="Aptos" pitchFamily="34" charset="0"/>
+                <a:ea typeface="Aptos" pitchFamily="34" charset="-122"/>
+                <a:cs typeface="Aptos" pitchFamily="34" charset="-120"/>
+              </a:rPr>
+              <a:t>Low-risk internal tools may be documented in an internal registry.</a:t>
+            </a:r>
+            <a:endParaRPr lang="en-US" sz="1700" dirty="0"/>
+          </a:p>
+          <a:p>
+            <a:r>
+              <a:rPr lang="en-US" sz="1700" dirty="0">
+                <a:solidFill>
+                  <a:srgbClr val="17364A"/>
+                </a:solidFill>
+                <a:latin typeface="Aptos" pitchFamily="34" charset="0"/>
+                <a:ea typeface="Aptos" pitchFamily="34" charset="-122"/>
+                <a:cs typeface="Aptos" pitchFamily="34" charset="-120"/>
+              </a:rPr>
+              <a:t>Tools that influence public communication, prioritization, access, enforcement, or public-facing interactions may require.</a:t>
+            </a:r>
+            <a:endParaRPr lang="en-US" sz="1700" dirty="0"/>
+          </a:p>
+          <a:p>
+            <a:r>
+              <a:rPr lang="en-US" sz="1700" dirty="0">
+                <a:solidFill>
+                  <a:srgbClr val="17364A"/>
+                </a:solidFill>
+                <a:latin typeface="Aptos" pitchFamily="34" charset="0"/>
+                <a:ea typeface="Aptos" pitchFamily="34" charset="-122"/>
+                <a:cs typeface="Aptos" pitchFamily="34" charset="-120"/>
+              </a:rPr>
+              <a:t>High-impact tools may require more detailed documentation, such as intended use, data sources, validation approach, human.</a:t>
+            </a:r>
+            <a:endParaRPr lang="en-US" sz="1700" dirty="0"/>
+          </a:p>
+        </p:txBody>
+      </p:sp>
+      <p:sp>
+        <p:nvSpPr>
+          <p:cNvPr id="11" name="Shape 9"/>
+          <p:cNvSpPr/>
+          <p:nvPr/>
+        </p:nvSpPr>
+        <p:spPr>
+          <a:xfrm>
+            <a:off x="7909560" y="1417320"/>
+            <a:ext cx="3154680" cy="1828800"/>
+          </a:xfrm>
+          <a:prstGeom prst="roundRect">
+            <a:avLst>
+              <a:gd name="adj" fmla="val 6000"/>
+            </a:avLst>
+          </a:prstGeom>
+          <a:solidFill>
+            <a:srgbClr val="EEF8ED"/>
+          </a:solidFill>
+          <a:ln w="12700">
+            <a:solidFill>
+              <a:srgbClr val="B9D7E6"/>
+            </a:solidFill>
+            <a:prstDash val="solid"/>
+          </a:ln>
+        </p:spPr>
+      </p:sp>
+      <p:sp>
+        <p:nvSpPr>
+          <p:cNvPr id="12" name="Text 10"/>
+          <p:cNvSpPr/>
+          <p:nvPr/>
+        </p:nvSpPr>
+        <p:spPr>
+          <a:xfrm>
+            <a:off x="8074152" y="1563624"/>
+            <a:ext cx="2825496" cy="201168"/>
+          </a:xfrm>
+          <a:prstGeom prst="rect">
+            <a:avLst/>
+          </a:prstGeom>
+          <a:noFill/>
+          <a:ln/>
+        </p:spPr>
+        <p:txBody>
+          <a:bodyPr wrap="square" lIns="0" tIns="0" rIns="0" bIns="0" rtlCol="0" anchor="ctr"/>
+          <a:lstStyle/>
+          <a:p>
             <a:pPr indent="0" marL="0">
               <a:buNone/>
             </a:pPr>
             <a:r>
-              <a:rPr lang="en-US" sz="1420" dirty="0">
+              <a:rPr lang="en-US" sz="950" b="1" dirty="0">
+                <a:solidFill>
+                  <a:srgbClr val="0068B7"/>
+                </a:solidFill>
+                <a:latin typeface="Aptos" pitchFamily="34" charset="0"/>
+                <a:ea typeface="Aptos" pitchFamily="34" charset="-122"/>
+                <a:cs typeface="Aptos" pitchFamily="34" charset="-120"/>
+              </a:rPr>
+              <a:t>Key idea</a:t>
+            </a:r>
+            <a:endParaRPr lang="en-US" sz="950" dirty="0"/>
+          </a:p>
+        </p:txBody>
+      </p:sp>
+      <p:sp>
+        <p:nvSpPr>
+          <p:cNvPr id="13" name="Text 11"/>
+          <p:cNvSpPr/>
+          <p:nvPr/>
+        </p:nvSpPr>
+        <p:spPr>
+          <a:xfrm>
+            <a:off x="8074152" y="1856232"/>
+            <a:ext cx="2825496" cy="1261872"/>
+          </a:xfrm>
+          <a:prstGeom prst="rect">
+            <a:avLst/>
+          </a:prstGeom>
+          <a:noFill/>
+          <a:ln/>
+        </p:spPr>
+        <p:txBody>
+          <a:bodyPr wrap="square" lIns="0" tIns="0" rIns="0" bIns="0" rtlCol="0" anchor="t">
+            <a:normAutofit/>
+          </a:bodyPr>
+          <a:lstStyle/>
+          <a:p>
+            <a:pPr indent="0" marL="0">
+              <a:buNone/>
+            </a:pPr>
+            <a:r>
+              <a:rPr lang="en-US" sz="1250" dirty="0">
                 <a:solidFill>
                   <a:srgbClr val="17364A"/>
                 </a:solidFill>
@@ -2962,9 +3385,116 @@
                 <a:ea typeface="Aptos" pitchFamily="34" charset="-122"/>
                 <a:cs typeface="Aptos" pitchFamily="34" charset="-120"/>
               </a:rPr>
-              <a:t>Generative AI transparency may explain when AI assists drafting and how human review occurs. Predictive analytics transparency may explain what the model supports, what decisions remain human, and how fairness is monitored. Agentic AI transparency may explain what actions are automated, what approvals are required, and how errors can be reported.</a:t>
-            </a:r>
-            <a:endParaRPr lang="en-US" sz="1420" dirty="0"/>
+              <a:t>Transparency reporting should be risk-based.</a:t>
+            </a:r>
+            <a:endParaRPr lang="en-US" sz="1250" dirty="0"/>
+          </a:p>
+        </p:txBody>
+      </p:sp>
+      <p:sp>
+        <p:nvSpPr>
+          <p:cNvPr id="14" name="Shape 12"/>
+          <p:cNvSpPr/>
+          <p:nvPr/>
+        </p:nvSpPr>
+        <p:spPr>
+          <a:xfrm>
+            <a:off x="7909560" y="3520440"/>
+            <a:ext cx="3154680" cy="1737360"/>
+          </a:xfrm>
+          <a:prstGeom prst="roundRect">
+            <a:avLst>
+              <a:gd name="adj" fmla="val 6316"/>
+            </a:avLst>
+          </a:prstGeom>
+          <a:solidFill>
+            <a:srgbClr val="EAF6F8"/>
+          </a:solidFill>
+          <a:ln w="12700">
+            <a:solidFill>
+              <a:srgbClr val="B9D7E6"/>
+            </a:solidFill>
+            <a:prstDash val="solid"/>
+          </a:ln>
+        </p:spPr>
+      </p:sp>
+      <p:sp>
+        <p:nvSpPr>
+          <p:cNvPr id="15" name="Text 13"/>
+          <p:cNvSpPr/>
+          <p:nvPr/>
+        </p:nvSpPr>
+        <p:spPr>
+          <a:xfrm>
+            <a:off x="8074152" y="3666744"/>
+            <a:ext cx="2825496" cy="201168"/>
+          </a:xfrm>
+          <a:prstGeom prst="rect">
+            <a:avLst/>
+          </a:prstGeom>
+          <a:noFill/>
+          <a:ln/>
+        </p:spPr>
+        <p:txBody>
+          <a:bodyPr wrap="square" lIns="0" tIns="0" rIns="0" bIns="0" rtlCol="0" anchor="ctr"/>
+          <a:lstStyle/>
+          <a:p>
+            <a:pPr indent="0" marL="0">
+              <a:buNone/>
+            </a:pPr>
+            <a:r>
+              <a:rPr lang="en-US" sz="950" b="1" dirty="0">
+                <a:solidFill>
+                  <a:srgbClr val="0068B7"/>
+                </a:solidFill>
+                <a:latin typeface="Aptos" pitchFamily="34" charset="0"/>
+                <a:ea typeface="Aptos" pitchFamily="34" charset="-122"/>
+                <a:cs typeface="Aptos" pitchFamily="34" charset="-120"/>
+              </a:rPr>
+              <a:t>Use this for</a:t>
+            </a:r>
+            <a:endParaRPr lang="en-US" sz="950" dirty="0"/>
+          </a:p>
+        </p:txBody>
+      </p:sp>
+      <p:sp>
+        <p:nvSpPr>
+          <p:cNvPr id="16" name="Text 14"/>
+          <p:cNvSpPr/>
+          <p:nvPr/>
+        </p:nvSpPr>
+        <p:spPr>
+          <a:xfrm>
+            <a:off x="8074152" y="3959352"/>
+            <a:ext cx="2825496" cy="1170432"/>
+          </a:xfrm>
+          <a:prstGeom prst="rect">
+            <a:avLst/>
+          </a:prstGeom>
+          <a:noFill/>
+          <a:ln/>
+        </p:spPr>
+        <p:txBody>
+          <a:bodyPr wrap="square" lIns="0" tIns="0" rIns="0" bIns="0" rtlCol="0" anchor="t">
+            <a:normAutofit/>
+          </a:bodyPr>
+          <a:lstStyle/>
+          <a:p>
+            <a:pPr indent="0" marL="0">
+              <a:buNone/>
+            </a:pPr>
+            <a:r>
+              <a:rPr lang="en-US" sz="1250" dirty="0">
+                <a:solidFill>
+                  <a:srgbClr val="17364A"/>
+                </a:solidFill>
+                <a:latin typeface="Aptos" pitchFamily="34" charset="0"/>
+                <a:ea typeface="Aptos" pitchFamily="34" charset="-122"/>
+                <a:cs typeface="Aptos" pitchFamily="34" charset="-120"/>
+              </a:rPr>
+              <a:t>Connect the concept to public health decisions, safeguards, documentation, or implementation work.</a:t>
+            </a:r>
+            <a:endParaRPr lang="en-US" sz="1250" dirty="0"/>
           </a:p>
         </p:txBody>
       </p:sp>
@@ -3027,7 +3557,32 @@
       </p:sp>
       <p:sp>
         <p:nvSpPr>
-          <p:cNvPr id="3" name="Text 1"/>
+          <p:cNvPr id="3" name="Shape 1"/>
+          <p:cNvSpPr/>
+          <p:nvPr/>
+        </p:nvSpPr>
+        <p:spPr>
+          <a:xfrm>
+            <a:off x="0" y="164592"/>
+            <a:ext cx="146304" cy="6693408"/>
+          </a:xfrm>
+          <a:prstGeom prst="rect">
+            <a:avLst/>
+          </a:prstGeom>
+          <a:solidFill>
+            <a:srgbClr val="2F8A28"/>
+          </a:solidFill>
+          <a:ln w="12700">
+            <a:solidFill>
+              <a:srgbClr val="2F8A28"/>
+            </a:solidFill>
+            <a:prstDash val="solid"/>
+          </a:ln>
+        </p:spPr>
+      </p:sp>
+      <p:sp>
+        <p:nvSpPr>
+          <p:cNvPr id="4" name="Text 2"/>
           <p:cNvSpPr/>
           <p:nvPr/>
         </p:nvSpPr>
@@ -3066,7 +3621,7 @@
       </p:sp>
       <p:sp>
         <p:nvSpPr>
-          <p:cNvPr id="4" name="Text 2"/>
+          <p:cNvPr id="5" name="Text 3"/>
           <p:cNvSpPr/>
           <p:nvPr/>
         </p:nvSpPr>
@@ -3105,7 +3660,7 @@
       </p:sp>
       <p:sp>
         <p:nvSpPr>
-          <p:cNvPr id="5" name="Text 3"/>
+          <p:cNvPr id="6" name="Text 4"/>
           <p:cNvSpPr/>
           <p:nvPr/>
         </p:nvSpPr>
@@ -3144,13 +3699,77 @@
       </p:sp>
       <p:sp>
         <p:nvSpPr>
-          <p:cNvPr id="6" name="Text 4"/>
+          <p:cNvPr id="7" name="Shape 5"/>
           <p:cNvSpPr/>
           <p:nvPr/>
         </p:nvSpPr>
         <p:spPr>
           <a:xfrm>
             <a:off x="640080" y="658368"/>
+            <a:ext cx="420624" cy="420624"/>
+          </a:xfrm>
+          <a:prstGeom prst="ellipse">
+            <a:avLst/>
+          </a:prstGeom>
+          <a:solidFill>
+            <a:srgbClr val="0068B7"/>
+          </a:solidFill>
+          <a:ln w="12700">
+            <a:solidFill>
+              <a:srgbClr val="0068B7"/>
+            </a:solidFill>
+            <a:prstDash val="solid"/>
+          </a:ln>
+        </p:spPr>
+      </p:sp>
+      <p:sp>
+        <p:nvSpPr>
+          <p:cNvPr id="8" name="Text 6"/>
+          <p:cNvSpPr/>
+          <p:nvPr/>
+        </p:nvSpPr>
+        <p:spPr>
+          <a:xfrm>
+            <a:off x="640080" y="731520"/>
+            <a:ext cx="420624" cy="164592"/>
+          </a:xfrm>
+          <a:prstGeom prst="rect">
+            <a:avLst/>
+          </a:prstGeom>
+          <a:noFill/>
+          <a:ln/>
+        </p:spPr>
+        <p:txBody>
+          <a:bodyPr wrap="square" lIns="0" tIns="0" rIns="0" bIns="0" rtlCol="0" anchor="ctr"/>
+          <a:lstStyle/>
+          <a:p>
+            <a:pPr algn="ctr" indent="0" marL="0">
+              <a:buNone/>
+            </a:pPr>
+            <a:r>
+              <a:rPr lang="en-US" sz="1100" b="1" dirty="0">
+                <a:solidFill>
+                  <a:srgbClr val="FFFFFF"/>
+                </a:solidFill>
+                <a:latin typeface="Aptos" pitchFamily="34" charset="0"/>
+                <a:ea typeface="Aptos" pitchFamily="34" charset="-122"/>
+                <a:cs typeface="Aptos" pitchFamily="34" charset="-120"/>
+              </a:rPr>
+              <a:t>7</a:t>
+            </a:r>
+            <a:endParaRPr lang="en-US" sz="1100" dirty="0"/>
+          </a:p>
+        </p:txBody>
+      </p:sp>
+      <p:sp>
+        <p:nvSpPr>
+          <p:cNvPr id="9" name="Text 7"/>
+          <p:cNvSpPr/>
+          <p:nvPr/>
+        </p:nvSpPr>
+        <p:spPr>
+          <a:xfrm>
+            <a:off x="640080" y="621792"/>
             <a:ext cx="10881360" cy="566928"/>
           </a:xfrm>
           <a:prstGeom prst="rect">
@@ -3177,7 +3796,7 @@
                 <a:ea typeface="Aptos Display" pitchFamily="34" charset="-122"/>
                 <a:cs typeface="Aptos Display" pitchFamily="34" charset="-120"/>
               </a:rPr>
-              <a:t>Reflection Questions</a:t>
+              <a:t>Risks, Failure Modes, and Guardrails</a:t>
             </a:r>
             <a:endParaRPr lang="en-US" sz="2700" dirty="0"/>
           </a:p>
@@ -3185,32 +3804,178 @@
       </p:sp>
       <p:sp>
         <p:nvSpPr>
-          <p:cNvPr id="7" name="Text 5"/>
-          <p:cNvSpPr/>
-          <p:nvPr/>
-        </p:nvSpPr>
-        <p:spPr>
-          <a:xfrm>
-            <a:off x="822960" y="1325880"/>
-            <a:ext cx="10378440" cy="4800600"/>
-          </a:xfrm>
-          <a:prstGeom prst="rect">
-            <a:avLst/>
-          </a:prstGeom>
-          <a:noFill/>
-          <a:ln/>
-        </p:spPr>
-        <p:txBody>
-          <a:bodyPr wrap="square" lIns="1016" tIns="1016" rIns="1016" bIns="1016" rtlCol="0" anchor="t">
+          <p:cNvPr id="10" name="Text 8"/>
+          <p:cNvSpPr/>
+          <p:nvPr/>
+        </p:nvSpPr>
+        <p:spPr>
+          <a:xfrm>
+            <a:off x="868680" y="1417320"/>
+            <a:ext cx="6675120" cy="4434840"/>
+          </a:xfrm>
+          <a:prstGeom prst="rect">
+            <a:avLst/>
+          </a:prstGeom>
+          <a:noFill/>
+          <a:ln/>
+        </p:spPr>
+        <p:txBody>
+          <a:bodyPr wrap="square" lIns="635" tIns="635" rIns="635" bIns="635" rtlCol="0" anchor="t">
             <a:normAutofit/>
           </a:bodyPr>
           <a:lstStyle/>
           <a:p>
+            <a:r>
+              <a:rPr lang="en-US" sz="1700" dirty="0">
+                <a:solidFill>
+                  <a:srgbClr val="17364A"/>
+                </a:solidFill>
+                <a:latin typeface="Aptos" pitchFamily="34" charset="0"/>
+                <a:ea typeface="Aptos" pitchFamily="34" charset="-122"/>
+                <a:cs typeface="Aptos" pitchFamily="34" charset="-120"/>
+              </a:rPr>
+              <a:t>One risk is transparency theater.</a:t>
+            </a:r>
+            <a:endParaRPr lang="en-US" sz="1700" dirty="0"/>
+          </a:p>
+          <a:p>
+            <a:r>
+              <a:rPr lang="en-US" sz="1700" dirty="0">
+                <a:solidFill>
+                  <a:srgbClr val="17364A"/>
+                </a:solidFill>
+                <a:latin typeface="Aptos" pitchFamily="34" charset="0"/>
+                <a:ea typeface="Aptos" pitchFamily="34" charset="-122"/>
+                <a:cs typeface="Aptos" pitchFamily="34" charset="-120"/>
+              </a:rPr>
+              <a:t>Agencies may publish broad statements about responsible AI without disclosing actual uses, owners, or safeguards.</a:t>
+            </a:r>
+            <a:endParaRPr lang="en-US" sz="1700" dirty="0"/>
+          </a:p>
+          <a:p>
+            <a:r>
+              <a:rPr lang="en-US" sz="1700" dirty="0">
+                <a:solidFill>
+                  <a:srgbClr val="17364A"/>
+                </a:solidFill>
+                <a:latin typeface="Aptos" pitchFamily="34" charset="0"/>
+                <a:ea typeface="Aptos" pitchFamily="34" charset="-122"/>
+                <a:cs typeface="Aptos" pitchFamily="34" charset="-120"/>
+              </a:rPr>
+              <a:t>A guardrail is to maintain an AI use registry with concrete information about approved and operational use cases.</a:t>
+            </a:r>
+            <a:endParaRPr lang="en-US" sz="1700" dirty="0"/>
+          </a:p>
+          <a:p>
+            <a:r>
+              <a:rPr lang="en-US" sz="1700" dirty="0">
+                <a:solidFill>
+                  <a:srgbClr val="17364A"/>
+                </a:solidFill>
+                <a:latin typeface="Aptos" pitchFamily="34" charset="0"/>
+                <a:ea typeface="Aptos" pitchFamily="34" charset="-122"/>
+                <a:cs typeface="Aptos" pitchFamily="34" charset="-120"/>
+              </a:rPr>
+              <a:t>Another risk is over-disclosure of sensitive details.</a:t>
+            </a:r>
+            <a:endParaRPr lang="en-US" sz="1700" dirty="0"/>
+          </a:p>
+        </p:txBody>
+      </p:sp>
+      <p:sp>
+        <p:nvSpPr>
+          <p:cNvPr id="11" name="Shape 9"/>
+          <p:cNvSpPr/>
+          <p:nvPr/>
+        </p:nvSpPr>
+        <p:spPr>
+          <a:xfrm>
+            <a:off x="7909560" y="1417320"/>
+            <a:ext cx="3154680" cy="1828800"/>
+          </a:xfrm>
+          <a:prstGeom prst="roundRect">
+            <a:avLst>
+              <a:gd name="adj" fmla="val 6000"/>
+            </a:avLst>
+          </a:prstGeom>
+          <a:solidFill>
+            <a:srgbClr val="EEF8ED"/>
+          </a:solidFill>
+          <a:ln w="12700">
+            <a:solidFill>
+              <a:srgbClr val="B9D7E6"/>
+            </a:solidFill>
+            <a:prstDash val="solid"/>
+          </a:ln>
+        </p:spPr>
+      </p:sp>
+      <p:sp>
+        <p:nvSpPr>
+          <p:cNvPr id="12" name="Text 10"/>
+          <p:cNvSpPr/>
+          <p:nvPr/>
+        </p:nvSpPr>
+        <p:spPr>
+          <a:xfrm>
+            <a:off x="8074152" y="1563624"/>
+            <a:ext cx="2825496" cy="201168"/>
+          </a:xfrm>
+          <a:prstGeom prst="rect">
+            <a:avLst/>
+          </a:prstGeom>
+          <a:noFill/>
+          <a:ln/>
+        </p:spPr>
+        <p:txBody>
+          <a:bodyPr wrap="square" lIns="0" tIns="0" rIns="0" bIns="0" rtlCol="0" anchor="ctr"/>
+          <a:lstStyle/>
+          <a:p>
             <a:pPr indent="0" marL="0">
               <a:buNone/>
             </a:pPr>
             <a:r>
-              <a:rPr lang="en-US" sz="1420" dirty="0">
+              <a:rPr lang="en-US" sz="950" b="1" dirty="0">
+                <a:solidFill>
+                  <a:srgbClr val="0068B7"/>
+                </a:solidFill>
+                <a:latin typeface="Aptos" pitchFamily="34" charset="0"/>
+                <a:ea typeface="Aptos" pitchFamily="34" charset="-122"/>
+                <a:cs typeface="Aptos" pitchFamily="34" charset="-120"/>
+              </a:rPr>
+              <a:t>Key idea</a:t>
+            </a:r>
+            <a:endParaRPr lang="en-US" sz="950" dirty="0"/>
+          </a:p>
+        </p:txBody>
+      </p:sp>
+      <p:sp>
+        <p:nvSpPr>
+          <p:cNvPr id="13" name="Text 11"/>
+          <p:cNvSpPr/>
+          <p:nvPr/>
+        </p:nvSpPr>
+        <p:spPr>
+          <a:xfrm>
+            <a:off x="8074152" y="1856232"/>
+            <a:ext cx="2825496" cy="1261872"/>
+          </a:xfrm>
+          <a:prstGeom prst="rect">
+            <a:avLst/>
+          </a:prstGeom>
+          <a:noFill/>
+          <a:ln/>
+        </p:spPr>
+        <p:txBody>
+          <a:bodyPr wrap="square" lIns="0" tIns="0" rIns="0" bIns="0" rtlCol="0" anchor="t">
+            <a:normAutofit/>
+          </a:bodyPr>
+          <a:lstStyle/>
+          <a:p>
+            <a:pPr indent="0" marL="0">
+              <a:buNone/>
+            </a:pPr>
+            <a:r>
+              <a:rPr lang="en-US" sz="1250" dirty="0">
                 <a:solidFill>
                   <a:srgbClr val="17364A"/>
                 </a:solidFill>
@@ -3218,9 +3983,116 @@
                 <a:ea typeface="Aptos" pitchFamily="34" charset="-122"/>
                 <a:cs typeface="Aptos" pitchFamily="34" charset="-120"/>
               </a:rPr>
-              <a:t>Which current or proposed AI use case in your agency raises this leadership or governance issue most clearly? Who currently has authority to make decisions about this issue, and is that authority documented? What evidence would governance or leadership need before approving the use case?</a:t>
-            </a:r>
-            <a:endParaRPr lang="en-US" sz="1420" dirty="0"/>
+              <a:t>One risk is transparency theater.</a:t>
+            </a:r>
+            <a:endParaRPr lang="en-US" sz="1250" dirty="0"/>
+          </a:p>
+        </p:txBody>
+      </p:sp>
+      <p:sp>
+        <p:nvSpPr>
+          <p:cNvPr id="14" name="Shape 12"/>
+          <p:cNvSpPr/>
+          <p:nvPr/>
+        </p:nvSpPr>
+        <p:spPr>
+          <a:xfrm>
+            <a:off x="7909560" y="3520440"/>
+            <a:ext cx="3154680" cy="1737360"/>
+          </a:xfrm>
+          <a:prstGeom prst="roundRect">
+            <a:avLst>
+              <a:gd name="adj" fmla="val 6316"/>
+            </a:avLst>
+          </a:prstGeom>
+          <a:solidFill>
+            <a:srgbClr val="EAF6F8"/>
+          </a:solidFill>
+          <a:ln w="12700">
+            <a:solidFill>
+              <a:srgbClr val="B9D7E6"/>
+            </a:solidFill>
+            <a:prstDash val="solid"/>
+          </a:ln>
+        </p:spPr>
+      </p:sp>
+      <p:sp>
+        <p:nvSpPr>
+          <p:cNvPr id="15" name="Text 13"/>
+          <p:cNvSpPr/>
+          <p:nvPr/>
+        </p:nvSpPr>
+        <p:spPr>
+          <a:xfrm>
+            <a:off x="8074152" y="3666744"/>
+            <a:ext cx="2825496" cy="201168"/>
+          </a:xfrm>
+          <a:prstGeom prst="rect">
+            <a:avLst/>
+          </a:prstGeom>
+          <a:noFill/>
+          <a:ln/>
+        </p:spPr>
+        <p:txBody>
+          <a:bodyPr wrap="square" lIns="0" tIns="0" rIns="0" bIns="0" rtlCol="0" anchor="ctr"/>
+          <a:lstStyle/>
+          <a:p>
+            <a:pPr indent="0" marL="0">
+              <a:buNone/>
+            </a:pPr>
+            <a:r>
+              <a:rPr lang="en-US" sz="950" b="1" dirty="0">
+                <a:solidFill>
+                  <a:srgbClr val="0068B7"/>
+                </a:solidFill>
+                <a:latin typeface="Aptos" pitchFamily="34" charset="0"/>
+                <a:ea typeface="Aptos" pitchFamily="34" charset="-122"/>
+                <a:cs typeface="Aptos" pitchFamily="34" charset="-120"/>
+              </a:rPr>
+              <a:t>Use this for</a:t>
+            </a:r>
+            <a:endParaRPr lang="en-US" sz="950" dirty="0"/>
+          </a:p>
+        </p:txBody>
+      </p:sp>
+      <p:sp>
+        <p:nvSpPr>
+          <p:cNvPr id="16" name="Text 14"/>
+          <p:cNvSpPr/>
+          <p:nvPr/>
+        </p:nvSpPr>
+        <p:spPr>
+          <a:xfrm>
+            <a:off x="8074152" y="3959352"/>
+            <a:ext cx="2825496" cy="1170432"/>
+          </a:xfrm>
+          <a:prstGeom prst="rect">
+            <a:avLst/>
+          </a:prstGeom>
+          <a:noFill/>
+          <a:ln/>
+        </p:spPr>
+        <p:txBody>
+          <a:bodyPr wrap="square" lIns="0" tIns="0" rIns="0" bIns="0" rtlCol="0" anchor="t">
+            <a:normAutofit/>
+          </a:bodyPr>
+          <a:lstStyle/>
+          <a:p>
+            <a:pPr indent="0" marL="0">
+              <a:buNone/>
+            </a:pPr>
+            <a:r>
+              <a:rPr lang="en-US" sz="1250" dirty="0">
+                <a:solidFill>
+                  <a:srgbClr val="17364A"/>
+                </a:solidFill>
+                <a:latin typeface="Aptos" pitchFamily="34" charset="0"/>
+                <a:ea typeface="Aptos" pitchFamily="34" charset="-122"/>
+                <a:cs typeface="Aptos" pitchFamily="34" charset="-120"/>
+              </a:rPr>
+              <a:t>Connect the concept to public health decisions, safeguards, documentation, or implementation work.</a:t>
+            </a:r>
+            <a:endParaRPr lang="en-US" sz="1250" dirty="0"/>
           </a:p>
         </p:txBody>
       </p:sp>
@@ -3283,7 +4155,32 @@
       </p:sp>
       <p:sp>
         <p:nvSpPr>
-          <p:cNvPr id="3" name="Text 1"/>
+          <p:cNvPr id="3" name="Shape 1"/>
+          <p:cNvSpPr/>
+          <p:nvPr/>
+        </p:nvSpPr>
+        <p:spPr>
+          <a:xfrm>
+            <a:off x="0" y="164592"/>
+            <a:ext cx="146304" cy="6693408"/>
+          </a:xfrm>
+          <a:prstGeom prst="rect">
+            <a:avLst/>
+          </a:prstGeom>
+          <a:solidFill>
+            <a:srgbClr val="2F8A28"/>
+          </a:solidFill>
+          <a:ln w="12700">
+            <a:solidFill>
+              <a:srgbClr val="2F8A28"/>
+            </a:solidFill>
+            <a:prstDash val="solid"/>
+          </a:ln>
+        </p:spPr>
+      </p:sp>
+      <p:sp>
+        <p:nvSpPr>
+          <p:cNvPr id="4" name="Text 2"/>
           <p:cNvSpPr/>
           <p:nvPr/>
         </p:nvSpPr>
@@ -3322,7 +4219,7 @@
       </p:sp>
       <p:sp>
         <p:nvSpPr>
-          <p:cNvPr id="4" name="Text 2"/>
+          <p:cNvPr id="5" name="Text 3"/>
           <p:cNvSpPr/>
           <p:nvPr/>
         </p:nvSpPr>
@@ -3361,7 +4258,7 @@
       </p:sp>
       <p:sp>
         <p:nvSpPr>
-          <p:cNvPr id="5" name="Text 3"/>
+          <p:cNvPr id="6" name="Text 4"/>
           <p:cNvSpPr/>
           <p:nvPr/>
         </p:nvSpPr>
@@ -3400,13 +4297,77 @@
       </p:sp>
       <p:sp>
         <p:nvSpPr>
-          <p:cNvPr id="6" name="Text 4"/>
+          <p:cNvPr id="7" name="Shape 5"/>
           <p:cNvSpPr/>
           <p:nvPr/>
         </p:nvSpPr>
         <p:spPr>
           <a:xfrm>
             <a:off x="640080" y="658368"/>
+            <a:ext cx="420624" cy="420624"/>
+          </a:xfrm>
+          <a:prstGeom prst="ellipse">
+            <a:avLst/>
+          </a:prstGeom>
+          <a:solidFill>
+            <a:srgbClr val="0068B7"/>
+          </a:solidFill>
+          <a:ln w="12700">
+            <a:solidFill>
+              <a:srgbClr val="0068B7"/>
+            </a:solidFill>
+            <a:prstDash val="solid"/>
+          </a:ln>
+        </p:spPr>
+      </p:sp>
+      <p:sp>
+        <p:nvSpPr>
+          <p:cNvPr id="8" name="Text 6"/>
+          <p:cNvSpPr/>
+          <p:nvPr/>
+        </p:nvSpPr>
+        <p:spPr>
+          <a:xfrm>
+            <a:off x="640080" y="731520"/>
+            <a:ext cx="420624" cy="164592"/>
+          </a:xfrm>
+          <a:prstGeom prst="rect">
+            <a:avLst/>
+          </a:prstGeom>
+          <a:noFill/>
+          <a:ln/>
+        </p:spPr>
+        <p:txBody>
+          <a:bodyPr wrap="square" lIns="0" tIns="0" rIns="0" bIns="0" rtlCol="0" anchor="ctr"/>
+          <a:lstStyle/>
+          <a:p>
+            <a:pPr algn="ctr" indent="0" marL="0">
+              <a:buNone/>
+            </a:pPr>
+            <a:r>
+              <a:rPr lang="en-US" sz="1100" b="1" dirty="0">
+                <a:solidFill>
+                  <a:srgbClr val="FFFFFF"/>
+                </a:solidFill>
+                <a:latin typeface="Aptos" pitchFamily="34" charset="0"/>
+                <a:ea typeface="Aptos" pitchFamily="34" charset="-122"/>
+                <a:cs typeface="Aptos" pitchFamily="34" charset="-120"/>
+              </a:rPr>
+              <a:t>8</a:t>
+            </a:r>
+            <a:endParaRPr lang="en-US" sz="1100" dirty="0"/>
+          </a:p>
+        </p:txBody>
+      </p:sp>
+      <p:sp>
+        <p:nvSpPr>
+          <p:cNvPr id="9" name="Text 7"/>
+          <p:cNvSpPr/>
+          <p:nvPr/>
+        </p:nvSpPr>
+        <p:spPr>
+          <a:xfrm>
+            <a:off x="640080" y="621792"/>
             <a:ext cx="10881360" cy="566928"/>
           </a:xfrm>
           <a:prstGeom prst="rect">
@@ -3433,7 +4394,7 @@
                 <a:ea typeface="Aptos Display" pitchFamily="34" charset="-122"/>
                 <a:cs typeface="Aptos Display" pitchFamily="34" charset="-120"/>
               </a:rPr>
-              <a:t>Reflection Questions Continued</a:t>
+              <a:t>Application to AI-Supported Workflows</a:t>
             </a:r>
             <a:endParaRPr lang="en-US" sz="2700" dirty="0"/>
           </a:p>
@@ -3441,32 +4402,164 @@
       </p:sp>
       <p:sp>
         <p:nvSpPr>
-          <p:cNvPr id="7" name="Text 5"/>
-          <p:cNvSpPr/>
-          <p:nvPr/>
-        </p:nvSpPr>
-        <p:spPr>
-          <a:xfrm>
-            <a:off x="822960" y="1325880"/>
-            <a:ext cx="10378440" cy="4800600"/>
-          </a:xfrm>
-          <a:prstGeom prst="rect">
-            <a:avLst/>
-          </a:prstGeom>
-          <a:noFill/>
-          <a:ln/>
-        </p:spPr>
-        <p:txBody>
-          <a:bodyPr wrap="square" lIns="1016" tIns="1016" rIns="1016" bIns="1016" rtlCol="0" anchor="t">
+          <p:cNvPr id="10" name="Text 8"/>
+          <p:cNvSpPr/>
+          <p:nvPr/>
+        </p:nvSpPr>
+        <p:spPr>
+          <a:xfrm>
+            <a:off x="868680" y="1417320"/>
+            <a:ext cx="6675120" cy="4434840"/>
+          </a:xfrm>
+          <a:prstGeom prst="rect">
+            <a:avLst/>
+          </a:prstGeom>
+          <a:noFill/>
+          <a:ln/>
+        </p:spPr>
+        <p:txBody>
+          <a:bodyPr wrap="square" lIns="635" tIns="635" rIns="635" bIns="635" rtlCol="0" anchor="t">
             <a:normAutofit/>
           </a:bodyPr>
           <a:lstStyle/>
           <a:p>
+            <a:r>
+              <a:rPr lang="en-US" sz="1700" dirty="0">
+                <a:solidFill>
+                  <a:srgbClr val="17364A"/>
+                </a:solidFill>
+                <a:latin typeface="Aptos" pitchFamily="34" charset="0"/>
+                <a:ea typeface="Aptos" pitchFamily="34" charset="-122"/>
+                <a:cs typeface="Aptos" pitchFamily="34" charset="-120"/>
+              </a:rPr>
+              <a:t>Generative AI transparency may explain when AI assists drafting and how human review occurs.</a:t>
+            </a:r>
+            <a:endParaRPr lang="en-US" sz="1700" dirty="0"/>
+          </a:p>
+          <a:p>
+            <a:r>
+              <a:rPr lang="en-US" sz="1700" dirty="0">
+                <a:solidFill>
+                  <a:srgbClr val="17364A"/>
+                </a:solidFill>
+                <a:latin typeface="Aptos" pitchFamily="34" charset="0"/>
+                <a:ea typeface="Aptos" pitchFamily="34" charset="-122"/>
+                <a:cs typeface="Aptos" pitchFamily="34" charset="-120"/>
+              </a:rPr>
+              <a:t>Predictive analytics transparency may explain what the model supports, what decisions remain human, and how fairness is.</a:t>
+            </a:r>
+            <a:endParaRPr lang="en-US" sz="1700" dirty="0"/>
+          </a:p>
+          <a:p>
+            <a:r>
+              <a:rPr lang="en-US" sz="1700" dirty="0">
+                <a:solidFill>
+                  <a:srgbClr val="17364A"/>
+                </a:solidFill>
+                <a:latin typeface="Aptos" pitchFamily="34" charset="0"/>
+                <a:ea typeface="Aptos" pitchFamily="34" charset="-122"/>
+                <a:cs typeface="Aptos" pitchFamily="34" charset="-120"/>
+              </a:rPr>
+              <a:t>Agentic AI transparency may explain what actions are automated, what approvals are required, and how errors can be reported.</a:t>
+            </a:r>
+            <a:endParaRPr lang="en-US" sz="1700" dirty="0"/>
+          </a:p>
+        </p:txBody>
+      </p:sp>
+      <p:sp>
+        <p:nvSpPr>
+          <p:cNvPr id="11" name="Shape 9"/>
+          <p:cNvSpPr/>
+          <p:nvPr/>
+        </p:nvSpPr>
+        <p:spPr>
+          <a:xfrm>
+            <a:off x="7909560" y="1417320"/>
+            <a:ext cx="3154680" cy="1828800"/>
+          </a:xfrm>
+          <a:prstGeom prst="roundRect">
+            <a:avLst>
+              <a:gd name="adj" fmla="val 6000"/>
+            </a:avLst>
+          </a:prstGeom>
+          <a:solidFill>
+            <a:srgbClr val="EEF8ED"/>
+          </a:solidFill>
+          <a:ln w="12700">
+            <a:solidFill>
+              <a:srgbClr val="B9D7E6"/>
+            </a:solidFill>
+            <a:prstDash val="solid"/>
+          </a:ln>
+        </p:spPr>
+      </p:sp>
+      <p:sp>
+        <p:nvSpPr>
+          <p:cNvPr id="12" name="Text 10"/>
+          <p:cNvSpPr/>
+          <p:nvPr/>
+        </p:nvSpPr>
+        <p:spPr>
+          <a:xfrm>
+            <a:off x="8074152" y="1563624"/>
+            <a:ext cx="2825496" cy="201168"/>
+          </a:xfrm>
+          <a:prstGeom prst="rect">
+            <a:avLst/>
+          </a:prstGeom>
+          <a:noFill/>
+          <a:ln/>
+        </p:spPr>
+        <p:txBody>
+          <a:bodyPr wrap="square" lIns="0" tIns="0" rIns="0" bIns="0" rtlCol="0" anchor="ctr"/>
+          <a:lstStyle/>
+          <a:p>
             <a:pPr indent="0" marL="0">
               <a:buNone/>
             </a:pPr>
             <a:r>
-              <a:rPr lang="en-US" sz="1420" dirty="0">
+              <a:rPr lang="en-US" sz="950" b="1" dirty="0">
+                <a:solidFill>
+                  <a:srgbClr val="0068B7"/>
+                </a:solidFill>
+                <a:latin typeface="Aptos" pitchFamily="34" charset="0"/>
+                <a:ea typeface="Aptos" pitchFamily="34" charset="-122"/>
+                <a:cs typeface="Aptos" pitchFamily="34" charset="-120"/>
+              </a:rPr>
+              <a:t>Key idea</a:t>
+            </a:r>
+            <a:endParaRPr lang="en-US" sz="950" dirty="0"/>
+          </a:p>
+        </p:txBody>
+      </p:sp>
+      <p:sp>
+        <p:nvSpPr>
+          <p:cNvPr id="13" name="Text 11"/>
+          <p:cNvSpPr/>
+          <p:nvPr/>
+        </p:nvSpPr>
+        <p:spPr>
+          <a:xfrm>
+            <a:off x="8074152" y="1856232"/>
+            <a:ext cx="2825496" cy="1261872"/>
+          </a:xfrm>
+          <a:prstGeom prst="rect">
+            <a:avLst/>
+          </a:prstGeom>
+          <a:noFill/>
+          <a:ln/>
+        </p:spPr>
+        <p:txBody>
+          <a:bodyPr wrap="square" lIns="0" tIns="0" rIns="0" bIns="0" rtlCol="0" anchor="t">
+            <a:normAutofit/>
+          </a:bodyPr>
+          <a:lstStyle/>
+          <a:p>
+            <a:pPr indent="0" marL="0">
+              <a:buNone/>
+            </a:pPr>
+            <a:r>
+              <a:rPr lang="en-US" sz="1250" dirty="0">
                 <a:solidFill>
                   <a:srgbClr val="17364A"/>
                 </a:solidFill>
@@ -3474,9 +4567,116 @@
                 <a:ea typeface="Aptos" pitchFamily="34" charset="-122"/>
                 <a:cs typeface="Aptos" pitchFamily="34" charset="-120"/>
               </a:rPr>
-              <a:t>Which staff, partners, or communities would be affected if this issue were handled poorly? What policy, process, or artifact should be created or updated after this module?</a:t>
-            </a:r>
-            <a:endParaRPr lang="en-US" sz="1420" dirty="0"/>
+              <a:t>Generative AI transparency may explain when AI assists drafting and how human review occurs.</a:t>
+            </a:r>
+            <a:endParaRPr lang="en-US" sz="1250" dirty="0"/>
+          </a:p>
+        </p:txBody>
+      </p:sp>
+      <p:sp>
+        <p:nvSpPr>
+          <p:cNvPr id="14" name="Shape 12"/>
+          <p:cNvSpPr/>
+          <p:nvPr/>
+        </p:nvSpPr>
+        <p:spPr>
+          <a:xfrm>
+            <a:off x="7909560" y="3520440"/>
+            <a:ext cx="3154680" cy="1737360"/>
+          </a:xfrm>
+          <a:prstGeom prst="roundRect">
+            <a:avLst>
+              <a:gd name="adj" fmla="val 6316"/>
+            </a:avLst>
+          </a:prstGeom>
+          <a:solidFill>
+            <a:srgbClr val="EAF6F8"/>
+          </a:solidFill>
+          <a:ln w="12700">
+            <a:solidFill>
+              <a:srgbClr val="B9D7E6"/>
+            </a:solidFill>
+            <a:prstDash val="solid"/>
+          </a:ln>
+        </p:spPr>
+      </p:sp>
+      <p:sp>
+        <p:nvSpPr>
+          <p:cNvPr id="15" name="Text 13"/>
+          <p:cNvSpPr/>
+          <p:nvPr/>
+        </p:nvSpPr>
+        <p:spPr>
+          <a:xfrm>
+            <a:off x="8074152" y="3666744"/>
+            <a:ext cx="2825496" cy="201168"/>
+          </a:xfrm>
+          <a:prstGeom prst="rect">
+            <a:avLst/>
+          </a:prstGeom>
+          <a:noFill/>
+          <a:ln/>
+        </p:spPr>
+        <p:txBody>
+          <a:bodyPr wrap="square" lIns="0" tIns="0" rIns="0" bIns="0" rtlCol="0" anchor="ctr"/>
+          <a:lstStyle/>
+          <a:p>
+            <a:pPr indent="0" marL="0">
+              <a:buNone/>
+            </a:pPr>
+            <a:r>
+              <a:rPr lang="en-US" sz="950" b="1" dirty="0">
+                <a:solidFill>
+                  <a:srgbClr val="0068B7"/>
+                </a:solidFill>
+                <a:latin typeface="Aptos" pitchFamily="34" charset="0"/>
+                <a:ea typeface="Aptos" pitchFamily="34" charset="-122"/>
+                <a:cs typeface="Aptos" pitchFamily="34" charset="-120"/>
+              </a:rPr>
+              <a:t>Use this for</a:t>
+            </a:r>
+            <a:endParaRPr lang="en-US" sz="950" dirty="0"/>
+          </a:p>
+        </p:txBody>
+      </p:sp>
+      <p:sp>
+        <p:nvSpPr>
+          <p:cNvPr id="16" name="Text 14"/>
+          <p:cNvSpPr/>
+          <p:nvPr/>
+        </p:nvSpPr>
+        <p:spPr>
+          <a:xfrm>
+            <a:off x="8074152" y="3959352"/>
+            <a:ext cx="2825496" cy="1170432"/>
+          </a:xfrm>
+          <a:prstGeom prst="rect">
+            <a:avLst/>
+          </a:prstGeom>
+          <a:noFill/>
+          <a:ln/>
+        </p:spPr>
+        <p:txBody>
+          <a:bodyPr wrap="square" lIns="0" tIns="0" rIns="0" bIns="0" rtlCol="0" anchor="t">
+            <a:normAutofit/>
+          </a:bodyPr>
+          <a:lstStyle/>
+          <a:p>
+            <a:pPr indent="0" marL="0">
+              <a:buNone/>
+            </a:pPr>
+            <a:r>
+              <a:rPr lang="en-US" sz="1250" dirty="0">
+                <a:solidFill>
+                  <a:srgbClr val="17364A"/>
+                </a:solidFill>
+                <a:latin typeface="Aptos" pitchFamily="34" charset="0"/>
+                <a:ea typeface="Aptos" pitchFamily="34" charset="-122"/>
+                <a:cs typeface="Aptos" pitchFamily="34" charset="-120"/>
+              </a:rPr>
+              <a:t>Connect the concept to public health decisions, safeguards, documentation, or implementation work.</a:t>
+            </a:r>
+            <a:endParaRPr lang="en-US" sz="1250" dirty="0"/>
           </a:p>
         </p:txBody>
       </p:sp>
@@ -3539,7 +4739,32 @@
       </p:sp>
       <p:sp>
         <p:nvSpPr>
-          <p:cNvPr id="3" name="Text 1"/>
+          <p:cNvPr id="3" name="Shape 1"/>
+          <p:cNvSpPr/>
+          <p:nvPr/>
+        </p:nvSpPr>
+        <p:spPr>
+          <a:xfrm>
+            <a:off x="0" y="164592"/>
+            <a:ext cx="146304" cy="6693408"/>
+          </a:xfrm>
+          <a:prstGeom prst="rect">
+            <a:avLst/>
+          </a:prstGeom>
+          <a:solidFill>
+            <a:srgbClr val="2F8A28"/>
+          </a:solidFill>
+          <a:ln w="12700">
+            <a:solidFill>
+              <a:srgbClr val="2F8A28"/>
+            </a:solidFill>
+            <a:prstDash val="solid"/>
+          </a:ln>
+        </p:spPr>
+      </p:sp>
+      <p:sp>
+        <p:nvSpPr>
+          <p:cNvPr id="4" name="Text 2"/>
           <p:cNvSpPr/>
           <p:nvPr/>
         </p:nvSpPr>
@@ -3578,7 +4803,7 @@
       </p:sp>
       <p:sp>
         <p:nvSpPr>
-          <p:cNvPr id="4" name="Text 2"/>
+          <p:cNvPr id="5" name="Text 3"/>
           <p:cNvSpPr/>
           <p:nvPr/>
         </p:nvSpPr>
@@ -3617,7 +4842,7 @@
       </p:sp>
       <p:sp>
         <p:nvSpPr>
-          <p:cNvPr id="5" name="Text 3"/>
+          <p:cNvPr id="6" name="Text 4"/>
           <p:cNvSpPr/>
           <p:nvPr/>
         </p:nvSpPr>
@@ -3656,13 +4881,77 @@
       </p:sp>
       <p:sp>
         <p:nvSpPr>
-          <p:cNvPr id="6" name="Text 4"/>
+          <p:cNvPr id="7" name="Shape 5"/>
           <p:cNvSpPr/>
           <p:nvPr/>
         </p:nvSpPr>
         <p:spPr>
           <a:xfrm>
             <a:off x="640080" y="658368"/>
+            <a:ext cx="420624" cy="420624"/>
+          </a:xfrm>
+          <a:prstGeom prst="ellipse">
+            <a:avLst/>
+          </a:prstGeom>
+          <a:solidFill>
+            <a:srgbClr val="0068B7"/>
+          </a:solidFill>
+          <a:ln w="12700">
+            <a:solidFill>
+              <a:srgbClr val="0068B7"/>
+            </a:solidFill>
+            <a:prstDash val="solid"/>
+          </a:ln>
+        </p:spPr>
+      </p:sp>
+      <p:sp>
+        <p:nvSpPr>
+          <p:cNvPr id="8" name="Text 6"/>
+          <p:cNvSpPr/>
+          <p:nvPr/>
+        </p:nvSpPr>
+        <p:spPr>
+          <a:xfrm>
+            <a:off x="640080" y="731520"/>
+            <a:ext cx="420624" cy="164592"/>
+          </a:xfrm>
+          <a:prstGeom prst="rect">
+            <a:avLst/>
+          </a:prstGeom>
+          <a:noFill/>
+          <a:ln/>
+        </p:spPr>
+        <p:txBody>
+          <a:bodyPr wrap="square" lIns="0" tIns="0" rIns="0" bIns="0" rtlCol="0" anchor="ctr"/>
+          <a:lstStyle/>
+          <a:p>
+            <a:pPr algn="ctr" indent="0" marL="0">
+              <a:buNone/>
+            </a:pPr>
+            <a:r>
+              <a:rPr lang="en-US" sz="1100" b="1" dirty="0">
+                <a:solidFill>
+                  <a:srgbClr val="FFFFFF"/>
+                </a:solidFill>
+                <a:latin typeface="Aptos" pitchFamily="34" charset="0"/>
+                <a:ea typeface="Aptos" pitchFamily="34" charset="-122"/>
+                <a:cs typeface="Aptos" pitchFamily="34" charset="-120"/>
+              </a:rPr>
+              <a:t>9</a:t>
+            </a:r>
+            <a:endParaRPr lang="en-US" sz="1100" dirty="0"/>
+          </a:p>
+        </p:txBody>
+      </p:sp>
+      <p:sp>
+        <p:nvSpPr>
+          <p:cNvPr id="9" name="Text 7"/>
+          <p:cNvSpPr/>
+          <p:nvPr/>
+        </p:nvSpPr>
+        <p:spPr>
+          <a:xfrm>
+            <a:off x="640080" y="621792"/>
             <a:ext cx="10881360" cy="566928"/>
           </a:xfrm>
           <a:prstGeom prst="rect">
@@ -3689,7 +4978,7 @@
                 <a:ea typeface="Aptos Display" pitchFamily="34" charset="-122"/>
                 <a:cs typeface="Aptos Display" pitchFamily="34" charset="-120"/>
               </a:rPr>
-              <a:t>Practical Exercise</a:t>
+              <a:t>Reflection Questions</a:t>
             </a:r>
             <a:endParaRPr lang="en-US" sz="2700" dirty="0"/>
           </a:p>
@@ -3697,32 +4986,164 @@
       </p:sp>
       <p:sp>
         <p:nvSpPr>
-          <p:cNvPr id="7" name="Text 5"/>
-          <p:cNvSpPr/>
-          <p:nvPr/>
-        </p:nvSpPr>
-        <p:spPr>
-          <a:xfrm>
-            <a:off x="822960" y="1325880"/>
-            <a:ext cx="10378440" cy="4800600"/>
-          </a:xfrm>
-          <a:prstGeom prst="rect">
-            <a:avLst/>
-          </a:prstGeom>
-          <a:noFill/>
-          <a:ln/>
-        </p:spPr>
-        <p:txBody>
-          <a:bodyPr wrap="square" lIns="1016" tIns="1016" rIns="1016" bIns="1016" rtlCol="0" anchor="t">
+          <p:cNvPr id="10" name="Text 8"/>
+          <p:cNvSpPr/>
+          <p:nvPr/>
+        </p:nvSpPr>
+        <p:spPr>
+          <a:xfrm>
+            <a:off x="868680" y="1417320"/>
+            <a:ext cx="6675120" cy="4434840"/>
+          </a:xfrm>
+          <a:prstGeom prst="rect">
+            <a:avLst/>
+          </a:prstGeom>
+          <a:noFill/>
+          <a:ln/>
+        </p:spPr>
+        <p:txBody>
+          <a:bodyPr wrap="square" lIns="635" tIns="635" rIns="635" bIns="635" rtlCol="0" anchor="t">
             <a:normAutofit/>
           </a:bodyPr>
           <a:lstStyle/>
           <a:p>
+            <a:r>
+              <a:rPr lang="en-US" sz="1700" dirty="0">
+                <a:solidFill>
+                  <a:srgbClr val="17364A"/>
+                </a:solidFill>
+                <a:latin typeface="Aptos" pitchFamily="34" charset="0"/>
+                <a:ea typeface="Aptos" pitchFamily="34" charset="-122"/>
+                <a:cs typeface="Aptos" pitchFamily="34" charset="-120"/>
+              </a:rPr>
+              <a:t>Which current or proposed AI use case in your agency raises this leadership or governance issue most clearly?</a:t>
+            </a:r>
+            <a:endParaRPr lang="en-US" sz="1700" dirty="0"/>
+          </a:p>
+          <a:p>
+            <a:r>
+              <a:rPr lang="en-US" sz="1700" dirty="0">
+                <a:solidFill>
+                  <a:srgbClr val="17364A"/>
+                </a:solidFill>
+                <a:latin typeface="Aptos" pitchFamily="34" charset="0"/>
+                <a:ea typeface="Aptos" pitchFamily="34" charset="-122"/>
+                <a:cs typeface="Aptos" pitchFamily="34" charset="-120"/>
+              </a:rPr>
+              <a:t>Who currently has authority to make decisions about this issue, and is that authority documented?</a:t>
+            </a:r>
+            <a:endParaRPr lang="en-US" sz="1700" dirty="0"/>
+          </a:p>
+          <a:p>
+            <a:r>
+              <a:rPr lang="en-US" sz="1700" dirty="0">
+                <a:solidFill>
+                  <a:srgbClr val="17364A"/>
+                </a:solidFill>
+                <a:latin typeface="Aptos" pitchFamily="34" charset="0"/>
+                <a:ea typeface="Aptos" pitchFamily="34" charset="-122"/>
+                <a:cs typeface="Aptos" pitchFamily="34" charset="-120"/>
+              </a:rPr>
+              <a:t>What evidence would governance or leadership need before approving the use case?</a:t>
+            </a:r>
+            <a:endParaRPr lang="en-US" sz="1700" dirty="0"/>
+          </a:p>
+        </p:txBody>
+      </p:sp>
+      <p:sp>
+        <p:nvSpPr>
+          <p:cNvPr id="11" name="Shape 9"/>
+          <p:cNvSpPr/>
+          <p:nvPr/>
+        </p:nvSpPr>
+        <p:spPr>
+          <a:xfrm>
+            <a:off x="7909560" y="1417320"/>
+            <a:ext cx="3154680" cy="1828800"/>
+          </a:xfrm>
+          <a:prstGeom prst="roundRect">
+            <a:avLst>
+              <a:gd name="adj" fmla="val 6000"/>
+            </a:avLst>
+          </a:prstGeom>
+          <a:solidFill>
+            <a:srgbClr val="EEF8ED"/>
+          </a:solidFill>
+          <a:ln w="12700">
+            <a:solidFill>
+              <a:srgbClr val="B9D7E6"/>
+            </a:solidFill>
+            <a:prstDash val="solid"/>
+          </a:ln>
+        </p:spPr>
+      </p:sp>
+      <p:sp>
+        <p:nvSpPr>
+          <p:cNvPr id="12" name="Text 10"/>
+          <p:cNvSpPr/>
+          <p:nvPr/>
+        </p:nvSpPr>
+        <p:spPr>
+          <a:xfrm>
+            <a:off x="8074152" y="1563624"/>
+            <a:ext cx="2825496" cy="201168"/>
+          </a:xfrm>
+          <a:prstGeom prst="rect">
+            <a:avLst/>
+          </a:prstGeom>
+          <a:noFill/>
+          <a:ln/>
+        </p:spPr>
+        <p:txBody>
+          <a:bodyPr wrap="square" lIns="0" tIns="0" rIns="0" bIns="0" rtlCol="0" anchor="ctr"/>
+          <a:lstStyle/>
+          <a:p>
             <a:pPr indent="0" marL="0">
               <a:buNone/>
             </a:pPr>
             <a:r>
-              <a:rPr lang="en-US" sz="1420" dirty="0">
+              <a:rPr lang="en-US" sz="950" b="1" dirty="0">
+                <a:solidFill>
+                  <a:srgbClr val="0068B7"/>
+                </a:solidFill>
+                <a:latin typeface="Aptos" pitchFamily="34" charset="0"/>
+                <a:ea typeface="Aptos" pitchFamily="34" charset="-122"/>
+                <a:cs typeface="Aptos" pitchFamily="34" charset="-120"/>
+              </a:rPr>
+              <a:t>Key idea</a:t>
+            </a:r>
+            <a:endParaRPr lang="en-US" sz="950" dirty="0"/>
+          </a:p>
+        </p:txBody>
+      </p:sp>
+      <p:sp>
+        <p:nvSpPr>
+          <p:cNvPr id="13" name="Text 11"/>
+          <p:cNvSpPr/>
+          <p:nvPr/>
+        </p:nvSpPr>
+        <p:spPr>
+          <a:xfrm>
+            <a:off x="8074152" y="1856232"/>
+            <a:ext cx="2825496" cy="1261872"/>
+          </a:xfrm>
+          <a:prstGeom prst="rect">
+            <a:avLst/>
+          </a:prstGeom>
+          <a:noFill/>
+          <a:ln/>
+        </p:spPr>
+        <p:txBody>
+          <a:bodyPr wrap="square" lIns="0" tIns="0" rIns="0" bIns="0" rtlCol="0" anchor="t">
+            <a:normAutofit/>
+          </a:bodyPr>
+          <a:lstStyle/>
+          <a:p>
+            <a:pPr indent="0" marL="0">
+              <a:buNone/>
+            </a:pPr>
+            <a:r>
+              <a:rPr lang="en-US" sz="1250" dirty="0">
                 <a:solidFill>
                   <a:srgbClr val="17364A"/>
                 </a:solidFill>
@@ -3730,9 +5151,116 @@
                 <a:ea typeface="Aptos" pitchFamily="34" charset="-122"/>
                 <a:cs typeface="Aptos" pitchFamily="34" charset="-120"/>
               </a:rPr>
-              <a:t>Create a transparency reporting template and apply it to one AI use case. Include purpose, owner, users, data categories, risk level, safeguards, human review, limitations, review date, and contact pathway.</a:t>
-            </a:r>
-            <a:endParaRPr lang="en-US" sz="1420" dirty="0"/>
+              <a:t>Which current or proposed AI use case in your agency raises this leadership or governance issue most clearly?</a:t>
+            </a:r>
+            <a:endParaRPr lang="en-US" sz="1250" dirty="0"/>
+          </a:p>
+        </p:txBody>
+      </p:sp>
+      <p:sp>
+        <p:nvSpPr>
+          <p:cNvPr id="14" name="Shape 12"/>
+          <p:cNvSpPr/>
+          <p:nvPr/>
+        </p:nvSpPr>
+        <p:spPr>
+          <a:xfrm>
+            <a:off x="7909560" y="3520440"/>
+            <a:ext cx="3154680" cy="1737360"/>
+          </a:xfrm>
+          <a:prstGeom prst="roundRect">
+            <a:avLst>
+              <a:gd name="adj" fmla="val 6316"/>
+            </a:avLst>
+          </a:prstGeom>
+          <a:solidFill>
+            <a:srgbClr val="EAF6F8"/>
+          </a:solidFill>
+          <a:ln w="12700">
+            <a:solidFill>
+              <a:srgbClr val="B9D7E6"/>
+            </a:solidFill>
+            <a:prstDash val="solid"/>
+          </a:ln>
+        </p:spPr>
+      </p:sp>
+      <p:sp>
+        <p:nvSpPr>
+          <p:cNvPr id="15" name="Text 13"/>
+          <p:cNvSpPr/>
+          <p:nvPr/>
+        </p:nvSpPr>
+        <p:spPr>
+          <a:xfrm>
+            <a:off x="8074152" y="3666744"/>
+            <a:ext cx="2825496" cy="201168"/>
+          </a:xfrm>
+          <a:prstGeom prst="rect">
+            <a:avLst/>
+          </a:prstGeom>
+          <a:noFill/>
+          <a:ln/>
+        </p:spPr>
+        <p:txBody>
+          <a:bodyPr wrap="square" lIns="0" tIns="0" rIns="0" bIns="0" rtlCol="0" anchor="ctr"/>
+          <a:lstStyle/>
+          <a:p>
+            <a:pPr indent="0" marL="0">
+              <a:buNone/>
+            </a:pPr>
+            <a:r>
+              <a:rPr lang="en-US" sz="950" b="1" dirty="0">
+                <a:solidFill>
+                  <a:srgbClr val="0068B7"/>
+                </a:solidFill>
+                <a:latin typeface="Aptos" pitchFamily="34" charset="0"/>
+                <a:ea typeface="Aptos" pitchFamily="34" charset="-122"/>
+                <a:cs typeface="Aptos" pitchFamily="34" charset="-120"/>
+              </a:rPr>
+              <a:t>Use this for</a:t>
+            </a:r>
+            <a:endParaRPr lang="en-US" sz="950" dirty="0"/>
+          </a:p>
+        </p:txBody>
+      </p:sp>
+      <p:sp>
+        <p:nvSpPr>
+          <p:cNvPr id="16" name="Text 14"/>
+          <p:cNvSpPr/>
+          <p:nvPr/>
+        </p:nvSpPr>
+        <p:spPr>
+          <a:xfrm>
+            <a:off x="8074152" y="3959352"/>
+            <a:ext cx="2825496" cy="1170432"/>
+          </a:xfrm>
+          <a:prstGeom prst="rect">
+            <a:avLst/>
+          </a:prstGeom>
+          <a:noFill/>
+          <a:ln/>
+        </p:spPr>
+        <p:txBody>
+          <a:bodyPr wrap="square" lIns="0" tIns="0" rIns="0" bIns="0" rtlCol="0" anchor="t">
+            <a:normAutofit/>
+          </a:bodyPr>
+          <a:lstStyle/>
+          <a:p>
+            <a:pPr indent="0" marL="0">
+              <a:buNone/>
+            </a:pPr>
+            <a:r>
+              <a:rPr lang="en-US" sz="1250" dirty="0">
+                <a:solidFill>
+                  <a:srgbClr val="17364A"/>
+                </a:solidFill>
+                <a:latin typeface="Aptos" pitchFamily="34" charset="0"/>
+                <a:ea typeface="Aptos" pitchFamily="34" charset="-122"/>
+                <a:cs typeface="Aptos" pitchFamily="34" charset="-120"/>
+              </a:rPr>
+              <a:t>Connect the concept to public health decisions, safeguards, documentation, or implementation work.</a:t>
+            </a:r>
+            <a:endParaRPr lang="en-US" sz="1250" dirty="0"/>
           </a:p>
         </p:txBody>
       </p:sp>
@@ -3795,7 +5323,32 @@
       </p:sp>
       <p:sp>
         <p:nvSpPr>
-          <p:cNvPr id="3" name="Text 1"/>
+          <p:cNvPr id="3" name="Shape 1"/>
+          <p:cNvSpPr/>
+          <p:nvPr/>
+        </p:nvSpPr>
+        <p:spPr>
+          <a:xfrm>
+            <a:off x="0" y="164592"/>
+            <a:ext cx="146304" cy="6693408"/>
+          </a:xfrm>
+          <a:prstGeom prst="rect">
+            <a:avLst/>
+          </a:prstGeom>
+          <a:solidFill>
+            <a:srgbClr val="2F8A28"/>
+          </a:solidFill>
+          <a:ln w="12700">
+            <a:solidFill>
+              <a:srgbClr val="2F8A28"/>
+            </a:solidFill>
+            <a:prstDash val="solid"/>
+          </a:ln>
+        </p:spPr>
+      </p:sp>
+      <p:sp>
+        <p:nvSpPr>
+          <p:cNvPr id="4" name="Text 2"/>
           <p:cNvSpPr/>
           <p:nvPr/>
         </p:nvSpPr>
@@ -3834,7 +5387,7 @@
       </p:sp>
       <p:sp>
         <p:nvSpPr>
-          <p:cNvPr id="4" name="Text 2"/>
+          <p:cNvPr id="5" name="Text 3"/>
           <p:cNvSpPr/>
           <p:nvPr/>
         </p:nvSpPr>
@@ -3873,7 +5426,7 @@
       </p:sp>
       <p:sp>
         <p:nvSpPr>
-          <p:cNvPr id="5" name="Text 3"/>
+          <p:cNvPr id="6" name="Text 4"/>
           <p:cNvSpPr/>
           <p:nvPr/>
         </p:nvSpPr>
@@ -3912,7 +5465,7 @@
       </p:sp>
       <p:sp>
         <p:nvSpPr>
-          <p:cNvPr id="6" name="Text 4"/>
+          <p:cNvPr id="7" name="Text 5"/>
           <p:cNvSpPr/>
           <p:nvPr/>
         </p:nvSpPr>
@@ -3945,7 +5498,7 @@
                 <a:ea typeface="Aptos Display" pitchFamily="34" charset="-122"/>
                 <a:cs typeface="Aptos Display" pitchFamily="34" charset="-120"/>
               </a:rPr>
-              <a:t>Before You Begin</a:t>
+              <a:t>Reflection Questions Continued</a:t>
             </a:r>
             <a:endParaRPr lang="en-US" sz="2700" dirty="0"/>
           </a:p>
@@ -3953,32 +5506,150 @@
       </p:sp>
       <p:sp>
         <p:nvSpPr>
-          <p:cNvPr id="7" name="Text 5"/>
-          <p:cNvSpPr/>
-          <p:nvPr/>
-        </p:nvSpPr>
-        <p:spPr>
-          <a:xfrm>
-            <a:off x="822960" y="1325880"/>
-            <a:ext cx="10378440" cy="4800600"/>
-          </a:xfrm>
-          <a:prstGeom prst="rect">
-            <a:avLst/>
-          </a:prstGeom>
-          <a:noFill/>
-          <a:ln/>
-        </p:spPr>
-        <p:txBody>
-          <a:bodyPr wrap="square" lIns="1016" tIns="1016" rIns="1016" bIns="1016" rtlCol="0" anchor="t">
+          <p:cNvPr id="8" name="Text 6"/>
+          <p:cNvSpPr/>
+          <p:nvPr/>
+        </p:nvSpPr>
+        <p:spPr>
+          <a:xfrm>
+            <a:off x="868680" y="1417320"/>
+            <a:ext cx="6675120" cy="4434840"/>
+          </a:xfrm>
+          <a:prstGeom prst="rect">
+            <a:avLst/>
+          </a:prstGeom>
+          <a:noFill/>
+          <a:ln/>
+        </p:spPr>
+        <p:txBody>
+          <a:bodyPr wrap="square" lIns="635" tIns="635" rIns="635" bIns="635" rtlCol="0" anchor="t">
             <a:normAutofit/>
           </a:bodyPr>
           <a:lstStyle/>
           <a:p>
+            <a:r>
+              <a:rPr lang="en-US" sz="1700" dirty="0">
+                <a:solidFill>
+                  <a:srgbClr val="17364A"/>
+                </a:solidFill>
+                <a:latin typeface="Aptos" pitchFamily="34" charset="0"/>
+                <a:ea typeface="Aptos" pitchFamily="34" charset="-122"/>
+                <a:cs typeface="Aptos" pitchFamily="34" charset="-120"/>
+              </a:rPr>
+              <a:t>Which staff, partners, or communities would be affected if this issue were handled poorly?</a:t>
+            </a:r>
+            <a:endParaRPr lang="en-US" sz="1700" dirty="0"/>
+          </a:p>
+          <a:p>
+            <a:r>
+              <a:rPr lang="en-US" sz="1700" dirty="0">
+                <a:solidFill>
+                  <a:srgbClr val="17364A"/>
+                </a:solidFill>
+                <a:latin typeface="Aptos" pitchFamily="34" charset="0"/>
+                <a:ea typeface="Aptos" pitchFamily="34" charset="-122"/>
+                <a:cs typeface="Aptos" pitchFamily="34" charset="-120"/>
+              </a:rPr>
+              <a:t>What policy, process, or artifact should be created or updated after this module?</a:t>
+            </a:r>
+            <a:endParaRPr lang="en-US" sz="1700" dirty="0"/>
+          </a:p>
+        </p:txBody>
+      </p:sp>
+      <p:sp>
+        <p:nvSpPr>
+          <p:cNvPr id="9" name="Shape 7"/>
+          <p:cNvSpPr/>
+          <p:nvPr/>
+        </p:nvSpPr>
+        <p:spPr>
+          <a:xfrm>
+            <a:off x="7909560" y="1417320"/>
+            <a:ext cx="3154680" cy="1828800"/>
+          </a:xfrm>
+          <a:prstGeom prst="roundRect">
+            <a:avLst>
+              <a:gd name="adj" fmla="val 6000"/>
+            </a:avLst>
+          </a:prstGeom>
+          <a:solidFill>
+            <a:srgbClr val="EEF8ED"/>
+          </a:solidFill>
+          <a:ln w="12700">
+            <a:solidFill>
+              <a:srgbClr val="B9D7E6"/>
+            </a:solidFill>
+            <a:prstDash val="solid"/>
+          </a:ln>
+        </p:spPr>
+      </p:sp>
+      <p:sp>
+        <p:nvSpPr>
+          <p:cNvPr id="10" name="Text 8"/>
+          <p:cNvSpPr/>
+          <p:nvPr/>
+        </p:nvSpPr>
+        <p:spPr>
+          <a:xfrm>
+            <a:off x="8074152" y="1563624"/>
+            <a:ext cx="2825496" cy="201168"/>
+          </a:xfrm>
+          <a:prstGeom prst="rect">
+            <a:avLst/>
+          </a:prstGeom>
+          <a:noFill/>
+          <a:ln/>
+        </p:spPr>
+        <p:txBody>
+          <a:bodyPr wrap="square" lIns="0" tIns="0" rIns="0" bIns="0" rtlCol="0" anchor="ctr"/>
+          <a:lstStyle/>
+          <a:p>
             <a:pPr indent="0" marL="0">
               <a:buNone/>
             </a:pPr>
             <a:r>
-              <a:rPr lang="en-US" sz="1420" dirty="0">
+              <a:rPr lang="en-US" sz="950" b="1" dirty="0">
+                <a:solidFill>
+                  <a:srgbClr val="0068B7"/>
+                </a:solidFill>
+                <a:latin typeface="Aptos" pitchFamily="34" charset="0"/>
+                <a:ea typeface="Aptos" pitchFamily="34" charset="-122"/>
+                <a:cs typeface="Aptos" pitchFamily="34" charset="-120"/>
+              </a:rPr>
+              <a:t>Key idea</a:t>
+            </a:r>
+            <a:endParaRPr lang="en-US" sz="950" dirty="0"/>
+          </a:p>
+        </p:txBody>
+      </p:sp>
+      <p:sp>
+        <p:nvSpPr>
+          <p:cNvPr id="11" name="Text 9"/>
+          <p:cNvSpPr/>
+          <p:nvPr/>
+        </p:nvSpPr>
+        <p:spPr>
+          <a:xfrm>
+            <a:off x="8074152" y="1856232"/>
+            <a:ext cx="2825496" cy="1261872"/>
+          </a:xfrm>
+          <a:prstGeom prst="rect">
+            <a:avLst/>
+          </a:prstGeom>
+          <a:noFill/>
+          <a:ln/>
+        </p:spPr>
+        <p:txBody>
+          <a:bodyPr wrap="square" lIns="0" tIns="0" rIns="0" bIns="0" rtlCol="0" anchor="t">
+            <a:normAutofit/>
+          </a:bodyPr>
+          <a:lstStyle/>
+          <a:p>
+            <a:pPr indent="0" marL="0">
+              <a:buNone/>
+            </a:pPr>
+            <a:r>
+              <a:rPr lang="en-US" sz="1250" dirty="0">
                 <a:solidFill>
                   <a:srgbClr val="17364A"/>
                 </a:solidFill>
@@ -3986,9 +5657,116 @@
                 <a:ea typeface="Aptos" pitchFamily="34" charset="-122"/>
                 <a:cs typeface="Aptos" pitchFamily="34" charset="-120"/>
               </a:rPr>
-              <a:t>Choose a real or realistic public health AI use case. Document assumptions, unresolved questions, and which agency roles would need to review the artifact before it is adopted. The exercise should produce a work product that could support governance review, leadership discussion, implementation planning, or policy development.</a:t>
-            </a:r>
-            <a:endParaRPr lang="en-US" sz="1420" dirty="0"/>
+              <a:t>Which staff, partners, or communities would be affected if this issue were handled poorly?</a:t>
+            </a:r>
+            <a:endParaRPr lang="en-US" sz="1250" dirty="0"/>
+          </a:p>
+        </p:txBody>
+      </p:sp>
+      <p:sp>
+        <p:nvSpPr>
+          <p:cNvPr id="12" name="Shape 10"/>
+          <p:cNvSpPr/>
+          <p:nvPr/>
+        </p:nvSpPr>
+        <p:spPr>
+          <a:xfrm>
+            <a:off x="7909560" y="3520440"/>
+            <a:ext cx="3154680" cy="1737360"/>
+          </a:xfrm>
+          <a:prstGeom prst="roundRect">
+            <a:avLst>
+              <a:gd name="adj" fmla="val 6316"/>
+            </a:avLst>
+          </a:prstGeom>
+          <a:solidFill>
+            <a:srgbClr val="EAF6F8"/>
+          </a:solidFill>
+          <a:ln w="12700">
+            <a:solidFill>
+              <a:srgbClr val="B9D7E6"/>
+            </a:solidFill>
+            <a:prstDash val="solid"/>
+          </a:ln>
+        </p:spPr>
+      </p:sp>
+      <p:sp>
+        <p:nvSpPr>
+          <p:cNvPr id="13" name="Text 11"/>
+          <p:cNvSpPr/>
+          <p:nvPr/>
+        </p:nvSpPr>
+        <p:spPr>
+          <a:xfrm>
+            <a:off x="8074152" y="3666744"/>
+            <a:ext cx="2825496" cy="201168"/>
+          </a:xfrm>
+          <a:prstGeom prst="rect">
+            <a:avLst/>
+          </a:prstGeom>
+          <a:noFill/>
+          <a:ln/>
+        </p:spPr>
+        <p:txBody>
+          <a:bodyPr wrap="square" lIns="0" tIns="0" rIns="0" bIns="0" rtlCol="0" anchor="ctr"/>
+          <a:lstStyle/>
+          <a:p>
+            <a:pPr indent="0" marL="0">
+              <a:buNone/>
+            </a:pPr>
+            <a:r>
+              <a:rPr lang="en-US" sz="950" b="1" dirty="0">
+                <a:solidFill>
+                  <a:srgbClr val="0068B7"/>
+                </a:solidFill>
+                <a:latin typeface="Aptos" pitchFamily="34" charset="0"/>
+                <a:ea typeface="Aptos" pitchFamily="34" charset="-122"/>
+                <a:cs typeface="Aptos" pitchFamily="34" charset="-120"/>
+              </a:rPr>
+              <a:t>Use this for</a:t>
+            </a:r>
+            <a:endParaRPr lang="en-US" sz="950" dirty="0"/>
+          </a:p>
+        </p:txBody>
+      </p:sp>
+      <p:sp>
+        <p:nvSpPr>
+          <p:cNvPr id="14" name="Text 12"/>
+          <p:cNvSpPr/>
+          <p:nvPr/>
+        </p:nvSpPr>
+        <p:spPr>
+          <a:xfrm>
+            <a:off x="8074152" y="3959352"/>
+            <a:ext cx="2825496" cy="1170432"/>
+          </a:xfrm>
+          <a:prstGeom prst="rect">
+            <a:avLst/>
+          </a:prstGeom>
+          <a:noFill/>
+          <a:ln/>
+        </p:spPr>
+        <p:txBody>
+          <a:bodyPr wrap="square" lIns="0" tIns="0" rIns="0" bIns="0" rtlCol="0" anchor="t">
+            <a:normAutofit/>
+          </a:bodyPr>
+          <a:lstStyle/>
+          <a:p>
+            <a:pPr indent="0" marL="0">
+              <a:buNone/>
+            </a:pPr>
+            <a:r>
+              <a:rPr lang="en-US" sz="1250" dirty="0">
+                <a:solidFill>
+                  <a:srgbClr val="17364A"/>
+                </a:solidFill>
+                <a:latin typeface="Aptos" pitchFamily="34" charset="0"/>
+                <a:ea typeface="Aptos" pitchFamily="34" charset="-122"/>
+                <a:cs typeface="Aptos" pitchFamily="34" charset="-120"/>
+              </a:rPr>
+              <a:t>Connect the concept to public health decisions, safeguards, documentation, or implementation work.</a:t>
+            </a:r>
+            <a:endParaRPr lang="en-US" sz="1250" dirty="0"/>
           </a:p>
         </p:txBody>
       </p:sp>
@@ -4051,7 +5829,32 @@
       </p:sp>
       <p:sp>
         <p:nvSpPr>
-          <p:cNvPr id="3" name="Text 1"/>
+          <p:cNvPr id="3" name="Shape 1"/>
+          <p:cNvSpPr/>
+          <p:nvPr/>
+        </p:nvSpPr>
+        <p:spPr>
+          <a:xfrm>
+            <a:off x="0" y="164592"/>
+            <a:ext cx="146304" cy="6693408"/>
+          </a:xfrm>
+          <a:prstGeom prst="rect">
+            <a:avLst/>
+          </a:prstGeom>
+          <a:solidFill>
+            <a:srgbClr val="2F8A28"/>
+          </a:solidFill>
+          <a:ln w="12700">
+            <a:solidFill>
+              <a:srgbClr val="2F8A28"/>
+            </a:solidFill>
+            <a:prstDash val="solid"/>
+          </a:ln>
+        </p:spPr>
+      </p:sp>
+      <p:sp>
+        <p:nvSpPr>
+          <p:cNvPr id="4" name="Text 2"/>
           <p:cNvSpPr/>
           <p:nvPr/>
         </p:nvSpPr>
@@ -4090,7 +5893,7 @@
       </p:sp>
       <p:sp>
         <p:nvSpPr>
-          <p:cNvPr id="4" name="Text 2"/>
+          <p:cNvPr id="5" name="Text 3"/>
           <p:cNvSpPr/>
           <p:nvPr/>
         </p:nvSpPr>
@@ -4129,7 +5932,7 @@
       </p:sp>
       <p:sp>
         <p:nvSpPr>
-          <p:cNvPr id="5" name="Text 3"/>
+          <p:cNvPr id="6" name="Text 4"/>
           <p:cNvSpPr/>
           <p:nvPr/>
         </p:nvSpPr>
@@ -4168,13 +5971,77 @@
       </p:sp>
       <p:sp>
         <p:nvSpPr>
-          <p:cNvPr id="6" name="Text 4"/>
+          <p:cNvPr id="7" name="Shape 5"/>
           <p:cNvSpPr/>
           <p:nvPr/>
         </p:nvSpPr>
         <p:spPr>
           <a:xfrm>
             <a:off x="640080" y="658368"/>
+            <a:ext cx="420624" cy="420624"/>
+          </a:xfrm>
+          <a:prstGeom prst="ellipse">
+            <a:avLst/>
+          </a:prstGeom>
+          <a:solidFill>
+            <a:srgbClr val="0068B7"/>
+          </a:solidFill>
+          <a:ln w="12700">
+            <a:solidFill>
+              <a:srgbClr val="0068B7"/>
+            </a:solidFill>
+            <a:prstDash val="solid"/>
+          </a:ln>
+        </p:spPr>
+      </p:sp>
+      <p:sp>
+        <p:nvSpPr>
+          <p:cNvPr id="8" name="Text 6"/>
+          <p:cNvSpPr/>
+          <p:nvPr/>
+        </p:nvSpPr>
+        <p:spPr>
+          <a:xfrm>
+            <a:off x="640080" y="731520"/>
+            <a:ext cx="420624" cy="164592"/>
+          </a:xfrm>
+          <a:prstGeom prst="rect">
+            <a:avLst/>
+          </a:prstGeom>
+          <a:noFill/>
+          <a:ln/>
+        </p:spPr>
+        <p:txBody>
+          <a:bodyPr wrap="square" lIns="0" tIns="0" rIns="0" bIns="0" rtlCol="0" anchor="ctr"/>
+          <a:lstStyle/>
+          <a:p>
+            <a:pPr algn="ctr" indent="0" marL="0">
+              <a:buNone/>
+            </a:pPr>
+            <a:r>
+              <a:rPr lang="en-US" sz="1100" b="1" dirty="0">
+                <a:solidFill>
+                  <a:srgbClr val="FFFFFF"/>
+                </a:solidFill>
+                <a:latin typeface="Aptos" pitchFamily="34" charset="0"/>
+                <a:ea typeface="Aptos" pitchFamily="34" charset="-122"/>
+                <a:cs typeface="Aptos" pitchFamily="34" charset="-120"/>
+              </a:rPr>
+              <a:t>10</a:t>
+            </a:r>
+            <a:endParaRPr lang="en-US" sz="1100" dirty="0"/>
+          </a:p>
+        </p:txBody>
+      </p:sp>
+      <p:sp>
+        <p:nvSpPr>
+          <p:cNvPr id="9" name="Text 7"/>
+          <p:cNvSpPr/>
+          <p:nvPr/>
+        </p:nvSpPr>
+        <p:spPr>
+          <a:xfrm>
+            <a:off x="640080" y="621792"/>
             <a:ext cx="10881360" cy="566928"/>
           </a:xfrm>
           <a:prstGeom prst="rect">
@@ -4201,7 +6068,7 @@
                 <a:ea typeface="Aptos Display" pitchFamily="34" charset="-122"/>
                 <a:cs typeface="Aptos Display" pitchFamily="34" charset="-120"/>
               </a:rPr>
-              <a:t>Expected Artifact or Evidence</a:t>
+              <a:t>Practical Exercise</a:t>
             </a:r>
             <a:endParaRPr lang="en-US" sz="2700" dirty="0"/>
           </a:p>
@@ -4209,32 +6076,150 @@
       </p:sp>
       <p:sp>
         <p:nvSpPr>
-          <p:cNvPr id="7" name="Text 5"/>
-          <p:cNvSpPr/>
-          <p:nvPr/>
-        </p:nvSpPr>
-        <p:spPr>
-          <a:xfrm>
-            <a:off x="822960" y="1325880"/>
-            <a:ext cx="10378440" cy="4800600"/>
-          </a:xfrm>
-          <a:prstGeom prst="rect">
-            <a:avLst/>
-          </a:prstGeom>
-          <a:noFill/>
-          <a:ln/>
-        </p:spPr>
-        <p:txBody>
-          <a:bodyPr wrap="square" lIns="1016" tIns="1016" rIns="1016" bIns="1016" rtlCol="0" anchor="t">
+          <p:cNvPr id="10" name="Text 8"/>
+          <p:cNvSpPr/>
+          <p:nvPr/>
+        </p:nvSpPr>
+        <p:spPr>
+          <a:xfrm>
+            <a:off x="868680" y="1417320"/>
+            <a:ext cx="6675120" cy="4434840"/>
+          </a:xfrm>
+          <a:prstGeom prst="rect">
+            <a:avLst/>
+          </a:prstGeom>
+          <a:noFill/>
+          <a:ln/>
+        </p:spPr>
+        <p:txBody>
+          <a:bodyPr wrap="square" lIns="635" tIns="635" rIns="635" bIns="635" rtlCol="0" anchor="t">
             <a:normAutofit/>
           </a:bodyPr>
           <a:lstStyle/>
           <a:p>
+            <a:r>
+              <a:rPr lang="en-US" sz="1700" dirty="0">
+                <a:solidFill>
+                  <a:srgbClr val="17364A"/>
+                </a:solidFill>
+                <a:latin typeface="Aptos" pitchFamily="34" charset="0"/>
+                <a:ea typeface="Aptos" pitchFamily="34" charset="-122"/>
+                <a:cs typeface="Aptos" pitchFamily="34" charset="-120"/>
+              </a:rPr>
+              <a:t>Create a transparency reporting template and apply it to one AI use case.</a:t>
+            </a:r>
+            <a:endParaRPr lang="en-US" sz="1700" dirty="0"/>
+          </a:p>
+          <a:p>
+            <a:r>
+              <a:rPr lang="en-US" sz="1700" dirty="0">
+                <a:solidFill>
+                  <a:srgbClr val="17364A"/>
+                </a:solidFill>
+                <a:latin typeface="Aptos" pitchFamily="34" charset="0"/>
+                <a:ea typeface="Aptos" pitchFamily="34" charset="-122"/>
+                <a:cs typeface="Aptos" pitchFamily="34" charset="-120"/>
+              </a:rPr>
+              <a:t>Include purpose, owner, users, data categories, risk level, safeguards, human review, limitations, review date, and contact.</a:t>
+            </a:r>
+            <a:endParaRPr lang="en-US" sz="1700" dirty="0"/>
+          </a:p>
+        </p:txBody>
+      </p:sp>
+      <p:sp>
+        <p:nvSpPr>
+          <p:cNvPr id="11" name="Shape 9"/>
+          <p:cNvSpPr/>
+          <p:nvPr/>
+        </p:nvSpPr>
+        <p:spPr>
+          <a:xfrm>
+            <a:off x="7909560" y="1417320"/>
+            <a:ext cx="3154680" cy="1828800"/>
+          </a:xfrm>
+          <a:prstGeom prst="roundRect">
+            <a:avLst>
+              <a:gd name="adj" fmla="val 6000"/>
+            </a:avLst>
+          </a:prstGeom>
+          <a:solidFill>
+            <a:srgbClr val="EEF8ED"/>
+          </a:solidFill>
+          <a:ln w="12700">
+            <a:solidFill>
+              <a:srgbClr val="B9D7E6"/>
+            </a:solidFill>
+            <a:prstDash val="solid"/>
+          </a:ln>
+        </p:spPr>
+      </p:sp>
+      <p:sp>
+        <p:nvSpPr>
+          <p:cNvPr id="12" name="Text 10"/>
+          <p:cNvSpPr/>
+          <p:nvPr/>
+        </p:nvSpPr>
+        <p:spPr>
+          <a:xfrm>
+            <a:off x="8074152" y="1563624"/>
+            <a:ext cx="2825496" cy="201168"/>
+          </a:xfrm>
+          <a:prstGeom prst="rect">
+            <a:avLst/>
+          </a:prstGeom>
+          <a:noFill/>
+          <a:ln/>
+        </p:spPr>
+        <p:txBody>
+          <a:bodyPr wrap="square" lIns="0" tIns="0" rIns="0" bIns="0" rtlCol="0" anchor="ctr"/>
+          <a:lstStyle/>
+          <a:p>
             <a:pPr indent="0" marL="0">
               <a:buNone/>
             </a:pPr>
             <a:r>
-              <a:rPr lang="en-US" sz="1420" dirty="0">
+              <a:rPr lang="en-US" sz="950" b="1" dirty="0">
+                <a:solidFill>
+                  <a:srgbClr val="0068B7"/>
+                </a:solidFill>
+                <a:latin typeface="Aptos" pitchFamily="34" charset="0"/>
+                <a:ea typeface="Aptos" pitchFamily="34" charset="-122"/>
+                <a:cs typeface="Aptos" pitchFamily="34" charset="-120"/>
+              </a:rPr>
+              <a:t>Key idea</a:t>
+            </a:r>
+            <a:endParaRPr lang="en-US" sz="950" dirty="0"/>
+          </a:p>
+        </p:txBody>
+      </p:sp>
+      <p:sp>
+        <p:nvSpPr>
+          <p:cNvPr id="13" name="Text 11"/>
+          <p:cNvSpPr/>
+          <p:nvPr/>
+        </p:nvSpPr>
+        <p:spPr>
+          <a:xfrm>
+            <a:off x="8074152" y="1856232"/>
+            <a:ext cx="2825496" cy="1261872"/>
+          </a:xfrm>
+          <a:prstGeom prst="rect">
+            <a:avLst/>
+          </a:prstGeom>
+          <a:noFill/>
+          <a:ln/>
+        </p:spPr>
+        <p:txBody>
+          <a:bodyPr wrap="square" lIns="0" tIns="0" rIns="0" bIns="0" rtlCol="0" anchor="t">
+            <a:normAutofit/>
+          </a:bodyPr>
+          <a:lstStyle/>
+          <a:p>
+            <a:pPr indent="0" marL="0">
+              <a:buNone/>
+            </a:pPr>
+            <a:r>
+              <a:rPr lang="en-US" sz="1250" dirty="0">
                 <a:solidFill>
                   <a:srgbClr val="17364A"/>
                 </a:solidFill>
@@ -4242,9 +6227,116 @@
                 <a:ea typeface="Aptos" pitchFamily="34" charset="-122"/>
                 <a:cs typeface="Aptos" pitchFamily="34" charset="-120"/>
               </a:rPr>
-              <a:t>AI transparency template; sample AI use registry entry; public notice draft; internal review checklist.</a:t>
-            </a:r>
-            <a:endParaRPr lang="en-US" sz="1420" dirty="0"/>
+              <a:t>Create a transparency reporting template and apply it to one AI use case.</a:t>
+            </a:r>
+            <a:endParaRPr lang="en-US" sz="1250" dirty="0"/>
+          </a:p>
+        </p:txBody>
+      </p:sp>
+      <p:sp>
+        <p:nvSpPr>
+          <p:cNvPr id="14" name="Shape 12"/>
+          <p:cNvSpPr/>
+          <p:nvPr/>
+        </p:nvSpPr>
+        <p:spPr>
+          <a:xfrm>
+            <a:off x="7909560" y="3520440"/>
+            <a:ext cx="3154680" cy="1737360"/>
+          </a:xfrm>
+          <a:prstGeom prst="roundRect">
+            <a:avLst>
+              <a:gd name="adj" fmla="val 6316"/>
+            </a:avLst>
+          </a:prstGeom>
+          <a:solidFill>
+            <a:srgbClr val="EAF6F8"/>
+          </a:solidFill>
+          <a:ln w="12700">
+            <a:solidFill>
+              <a:srgbClr val="B9D7E6"/>
+            </a:solidFill>
+            <a:prstDash val="solid"/>
+          </a:ln>
+        </p:spPr>
+      </p:sp>
+      <p:sp>
+        <p:nvSpPr>
+          <p:cNvPr id="15" name="Text 13"/>
+          <p:cNvSpPr/>
+          <p:nvPr/>
+        </p:nvSpPr>
+        <p:spPr>
+          <a:xfrm>
+            <a:off x="8074152" y="3666744"/>
+            <a:ext cx="2825496" cy="201168"/>
+          </a:xfrm>
+          <a:prstGeom prst="rect">
+            <a:avLst/>
+          </a:prstGeom>
+          <a:noFill/>
+          <a:ln/>
+        </p:spPr>
+        <p:txBody>
+          <a:bodyPr wrap="square" lIns="0" tIns="0" rIns="0" bIns="0" rtlCol="0" anchor="ctr"/>
+          <a:lstStyle/>
+          <a:p>
+            <a:pPr indent="0" marL="0">
+              <a:buNone/>
+            </a:pPr>
+            <a:r>
+              <a:rPr lang="en-US" sz="950" b="1" dirty="0">
+                <a:solidFill>
+                  <a:srgbClr val="0068B7"/>
+                </a:solidFill>
+                <a:latin typeface="Aptos" pitchFamily="34" charset="0"/>
+                <a:ea typeface="Aptos" pitchFamily="34" charset="-122"/>
+                <a:cs typeface="Aptos" pitchFamily="34" charset="-120"/>
+              </a:rPr>
+              <a:t>Use this for</a:t>
+            </a:r>
+            <a:endParaRPr lang="en-US" sz="950" dirty="0"/>
+          </a:p>
+        </p:txBody>
+      </p:sp>
+      <p:sp>
+        <p:nvSpPr>
+          <p:cNvPr id="16" name="Text 14"/>
+          <p:cNvSpPr/>
+          <p:nvPr/>
+        </p:nvSpPr>
+        <p:spPr>
+          <a:xfrm>
+            <a:off x="8074152" y="3959352"/>
+            <a:ext cx="2825496" cy="1170432"/>
+          </a:xfrm>
+          <a:prstGeom prst="rect">
+            <a:avLst/>
+          </a:prstGeom>
+          <a:noFill/>
+          <a:ln/>
+        </p:spPr>
+        <p:txBody>
+          <a:bodyPr wrap="square" lIns="0" tIns="0" rIns="0" bIns="0" rtlCol="0" anchor="t">
+            <a:normAutofit/>
+          </a:bodyPr>
+          <a:lstStyle/>
+          <a:p>
+            <a:pPr indent="0" marL="0">
+              <a:buNone/>
+            </a:pPr>
+            <a:r>
+              <a:rPr lang="en-US" sz="1250" dirty="0">
+                <a:solidFill>
+                  <a:srgbClr val="17364A"/>
+                </a:solidFill>
+                <a:latin typeface="Aptos" pitchFamily="34" charset="0"/>
+                <a:ea typeface="Aptos" pitchFamily="34" charset="-122"/>
+                <a:cs typeface="Aptos" pitchFamily="34" charset="-120"/>
+              </a:rPr>
+              <a:t>Connect the concept to public health decisions, safeguards, documentation, or implementation work.</a:t>
+            </a:r>
+            <a:endParaRPr lang="en-US" sz="1250" dirty="0"/>
           </a:p>
         </p:txBody>
       </p:sp>
@@ -4307,7 +6399,32 @@
       </p:sp>
       <p:sp>
         <p:nvSpPr>
-          <p:cNvPr id="3" name="Text 1"/>
+          <p:cNvPr id="3" name="Shape 1"/>
+          <p:cNvSpPr/>
+          <p:nvPr/>
+        </p:nvSpPr>
+        <p:spPr>
+          <a:xfrm>
+            <a:off x="0" y="164592"/>
+            <a:ext cx="146304" cy="6693408"/>
+          </a:xfrm>
+          <a:prstGeom prst="rect">
+            <a:avLst/>
+          </a:prstGeom>
+          <a:solidFill>
+            <a:srgbClr val="2F8A28"/>
+          </a:solidFill>
+          <a:ln w="12700">
+            <a:solidFill>
+              <a:srgbClr val="2F8A28"/>
+            </a:solidFill>
+            <a:prstDash val="solid"/>
+          </a:ln>
+        </p:spPr>
+      </p:sp>
+      <p:sp>
+        <p:nvSpPr>
+          <p:cNvPr id="4" name="Text 2"/>
           <p:cNvSpPr/>
           <p:nvPr/>
         </p:nvSpPr>
@@ -4346,7 +6463,7 @@
       </p:sp>
       <p:sp>
         <p:nvSpPr>
-          <p:cNvPr id="4" name="Text 2"/>
+          <p:cNvPr id="5" name="Text 3"/>
           <p:cNvSpPr/>
           <p:nvPr/>
         </p:nvSpPr>
@@ -4385,7 +6502,7 @@
       </p:sp>
       <p:sp>
         <p:nvSpPr>
-          <p:cNvPr id="5" name="Text 3"/>
+          <p:cNvPr id="6" name="Text 4"/>
           <p:cNvSpPr/>
           <p:nvPr/>
         </p:nvSpPr>
@@ -4424,13 +6541,77 @@
       </p:sp>
       <p:sp>
         <p:nvSpPr>
-          <p:cNvPr id="6" name="Text 4"/>
+          <p:cNvPr id="7" name="Shape 5"/>
           <p:cNvSpPr/>
           <p:nvPr/>
         </p:nvSpPr>
         <p:spPr>
           <a:xfrm>
             <a:off x="640080" y="658368"/>
+            <a:ext cx="420624" cy="420624"/>
+          </a:xfrm>
+          <a:prstGeom prst="ellipse">
+            <a:avLst/>
+          </a:prstGeom>
+          <a:solidFill>
+            <a:srgbClr val="0068B7"/>
+          </a:solidFill>
+          <a:ln w="12700">
+            <a:solidFill>
+              <a:srgbClr val="0068B7"/>
+            </a:solidFill>
+            <a:prstDash val="solid"/>
+          </a:ln>
+        </p:spPr>
+      </p:sp>
+      <p:sp>
+        <p:nvSpPr>
+          <p:cNvPr id="8" name="Text 6"/>
+          <p:cNvSpPr/>
+          <p:nvPr/>
+        </p:nvSpPr>
+        <p:spPr>
+          <a:xfrm>
+            <a:off x="640080" y="731520"/>
+            <a:ext cx="420624" cy="164592"/>
+          </a:xfrm>
+          <a:prstGeom prst="rect">
+            <a:avLst/>
+          </a:prstGeom>
+          <a:noFill/>
+          <a:ln/>
+        </p:spPr>
+        <p:txBody>
+          <a:bodyPr wrap="square" lIns="0" tIns="0" rIns="0" bIns="0" rtlCol="0" anchor="ctr"/>
+          <a:lstStyle/>
+          <a:p>
+            <a:pPr algn="ctr" indent="0" marL="0">
+              <a:buNone/>
+            </a:pPr>
+            <a:r>
+              <a:rPr lang="en-US" sz="1100" b="1" dirty="0">
+                <a:solidFill>
+                  <a:srgbClr val="FFFFFF"/>
+                </a:solidFill>
+                <a:latin typeface="Aptos" pitchFamily="34" charset="0"/>
+                <a:ea typeface="Aptos" pitchFamily="34" charset="-122"/>
+                <a:cs typeface="Aptos" pitchFamily="34" charset="-120"/>
+              </a:rPr>
+              <a:t>11</a:t>
+            </a:r>
+            <a:endParaRPr lang="en-US" sz="1100" dirty="0"/>
+          </a:p>
+        </p:txBody>
+      </p:sp>
+      <p:sp>
+        <p:nvSpPr>
+          <p:cNvPr id="9" name="Text 7"/>
+          <p:cNvSpPr/>
+          <p:nvPr/>
+        </p:nvSpPr>
+        <p:spPr>
+          <a:xfrm>
+            <a:off x="640080" y="621792"/>
             <a:ext cx="10881360" cy="566928"/>
           </a:xfrm>
           <a:prstGeom prst="rect">
@@ -4457,7 +6638,7 @@
                 <a:ea typeface="Aptos Display" pitchFamily="34" charset="-122"/>
                 <a:cs typeface="Aptos Display" pitchFamily="34" charset="-120"/>
               </a:rPr>
-              <a:t>Expected Assignment</a:t>
+              <a:t>Before You Begin</a:t>
             </a:r>
             <a:endParaRPr lang="en-US" sz="2700" dirty="0"/>
           </a:p>
@@ -4465,14 +6646,14 @@
       </p:sp>
       <p:sp>
         <p:nvSpPr>
-          <p:cNvPr id="7" name="Text 5"/>
-          <p:cNvSpPr/>
-          <p:nvPr/>
-        </p:nvSpPr>
-        <p:spPr>
-          <a:xfrm>
-            <a:off x="822960" y="1325880"/>
-            <a:ext cx="10378440" cy="4800600"/>
+          <p:cNvPr id="10" name="Text 8"/>
+          <p:cNvSpPr/>
+          <p:nvPr/>
+        </p:nvSpPr>
+        <p:spPr>
+          <a:xfrm>
+            <a:off x="868680" y="1417320"/>
+            <a:ext cx="6675120" cy="4434840"/>
           </a:xfrm>
           <a:prstGeom prst="rect">
             <a:avLst/>
@@ -4487,7 +6668,7 @@
           <a:lstStyle/>
           <a:p>
             <a:r>
-              <a:rPr lang="en-US" sz="1450" dirty="0">
+              <a:rPr lang="en-US" sz="1700" dirty="0">
                 <a:solidFill>
                   <a:srgbClr val="17364A"/>
                 </a:solidFill>
@@ -4495,9 +6676,251 @@
                 <a:ea typeface="Aptos" pitchFamily="34" charset="-122"/>
                 <a:cs typeface="Aptos" pitchFamily="34" charset="-120"/>
               </a:rPr>
-              <a:t>AI transparency template; sample AI use registry entry; public notice draft; internal review checklist.</a:t>
-            </a:r>
-            <a:endParaRPr lang="en-US" sz="1450" dirty="0"/>
+              <a:t>Choose a real or realistic public health AI use case.</a:t>
+            </a:r>
+            <a:endParaRPr lang="en-US" sz="1700" dirty="0"/>
+          </a:p>
+          <a:p>
+            <a:r>
+              <a:rPr lang="en-US" sz="1700" dirty="0">
+                <a:solidFill>
+                  <a:srgbClr val="17364A"/>
+                </a:solidFill>
+                <a:latin typeface="Aptos" pitchFamily="34" charset="0"/>
+                <a:ea typeface="Aptos" pitchFamily="34" charset="-122"/>
+                <a:cs typeface="Aptos" pitchFamily="34" charset="-120"/>
+              </a:rPr>
+              <a:t>Document assumptions, unresolved questions, and which agency roles would need to review the artifact before it is adopted.</a:t>
+            </a:r>
+            <a:endParaRPr lang="en-US" sz="1700" dirty="0"/>
+          </a:p>
+          <a:p>
+            <a:r>
+              <a:rPr lang="en-US" sz="1700" dirty="0">
+                <a:solidFill>
+                  <a:srgbClr val="17364A"/>
+                </a:solidFill>
+                <a:latin typeface="Aptos" pitchFamily="34" charset="0"/>
+                <a:ea typeface="Aptos" pitchFamily="34" charset="-122"/>
+                <a:cs typeface="Aptos" pitchFamily="34" charset="-120"/>
+              </a:rPr>
+              <a:t>The exercise should produce a work product that could support governance review, leadership discussion, implementation.</a:t>
+            </a:r>
+            <a:endParaRPr lang="en-US" sz="1700" dirty="0"/>
+          </a:p>
+        </p:txBody>
+      </p:sp>
+      <p:sp>
+        <p:nvSpPr>
+          <p:cNvPr id="11" name="Shape 9"/>
+          <p:cNvSpPr/>
+          <p:nvPr/>
+        </p:nvSpPr>
+        <p:spPr>
+          <a:xfrm>
+            <a:off x="7909560" y="1417320"/>
+            <a:ext cx="3154680" cy="1828800"/>
+          </a:xfrm>
+          <a:prstGeom prst="roundRect">
+            <a:avLst>
+              <a:gd name="adj" fmla="val 6000"/>
+            </a:avLst>
+          </a:prstGeom>
+          <a:solidFill>
+            <a:srgbClr val="EEF8ED"/>
+          </a:solidFill>
+          <a:ln w="12700">
+            <a:solidFill>
+              <a:srgbClr val="B9D7E6"/>
+            </a:solidFill>
+            <a:prstDash val="solid"/>
+          </a:ln>
+        </p:spPr>
+      </p:sp>
+      <p:sp>
+        <p:nvSpPr>
+          <p:cNvPr id="12" name="Text 10"/>
+          <p:cNvSpPr/>
+          <p:nvPr/>
+        </p:nvSpPr>
+        <p:spPr>
+          <a:xfrm>
+            <a:off x="8074152" y="1563624"/>
+            <a:ext cx="2825496" cy="201168"/>
+          </a:xfrm>
+          <a:prstGeom prst="rect">
+            <a:avLst/>
+          </a:prstGeom>
+          <a:noFill/>
+          <a:ln/>
+        </p:spPr>
+        <p:txBody>
+          <a:bodyPr wrap="square" lIns="0" tIns="0" rIns="0" bIns="0" rtlCol="0" anchor="ctr"/>
+          <a:lstStyle/>
+          <a:p>
+            <a:pPr indent="0" marL="0">
+              <a:buNone/>
+            </a:pPr>
+            <a:r>
+              <a:rPr lang="en-US" sz="950" b="1" dirty="0">
+                <a:solidFill>
+                  <a:srgbClr val="0068B7"/>
+                </a:solidFill>
+                <a:latin typeface="Aptos" pitchFamily="34" charset="0"/>
+                <a:ea typeface="Aptos" pitchFamily="34" charset="-122"/>
+                <a:cs typeface="Aptos" pitchFamily="34" charset="-120"/>
+              </a:rPr>
+              <a:t>Key idea</a:t>
+            </a:r>
+            <a:endParaRPr lang="en-US" sz="950" dirty="0"/>
+          </a:p>
+        </p:txBody>
+      </p:sp>
+      <p:sp>
+        <p:nvSpPr>
+          <p:cNvPr id="13" name="Text 11"/>
+          <p:cNvSpPr/>
+          <p:nvPr/>
+        </p:nvSpPr>
+        <p:spPr>
+          <a:xfrm>
+            <a:off x="8074152" y="1856232"/>
+            <a:ext cx="2825496" cy="1261872"/>
+          </a:xfrm>
+          <a:prstGeom prst="rect">
+            <a:avLst/>
+          </a:prstGeom>
+          <a:noFill/>
+          <a:ln/>
+        </p:spPr>
+        <p:txBody>
+          <a:bodyPr wrap="square" lIns="0" tIns="0" rIns="0" bIns="0" rtlCol="0" anchor="t">
+            <a:normAutofit/>
+          </a:bodyPr>
+          <a:lstStyle/>
+          <a:p>
+            <a:pPr indent="0" marL="0">
+              <a:buNone/>
+            </a:pPr>
+            <a:r>
+              <a:rPr lang="en-US" sz="1250" dirty="0">
+                <a:solidFill>
+                  <a:srgbClr val="17364A"/>
+                </a:solidFill>
+                <a:latin typeface="Aptos" pitchFamily="34" charset="0"/>
+                <a:ea typeface="Aptos" pitchFamily="34" charset="-122"/>
+                <a:cs typeface="Aptos" pitchFamily="34" charset="-120"/>
+              </a:rPr>
+              <a:t>Choose a real or realistic public health AI use case.</a:t>
+            </a:r>
+            <a:endParaRPr lang="en-US" sz="1250" dirty="0"/>
+          </a:p>
+        </p:txBody>
+      </p:sp>
+      <p:sp>
+        <p:nvSpPr>
+          <p:cNvPr id="14" name="Shape 12"/>
+          <p:cNvSpPr/>
+          <p:nvPr/>
+        </p:nvSpPr>
+        <p:spPr>
+          <a:xfrm>
+            <a:off x="7909560" y="3520440"/>
+            <a:ext cx="3154680" cy="1737360"/>
+          </a:xfrm>
+          <a:prstGeom prst="roundRect">
+            <a:avLst>
+              <a:gd name="adj" fmla="val 6316"/>
+            </a:avLst>
+          </a:prstGeom>
+          <a:solidFill>
+            <a:srgbClr val="EAF6F8"/>
+          </a:solidFill>
+          <a:ln w="12700">
+            <a:solidFill>
+              <a:srgbClr val="B9D7E6"/>
+            </a:solidFill>
+            <a:prstDash val="solid"/>
+          </a:ln>
+        </p:spPr>
+      </p:sp>
+      <p:sp>
+        <p:nvSpPr>
+          <p:cNvPr id="15" name="Text 13"/>
+          <p:cNvSpPr/>
+          <p:nvPr/>
+        </p:nvSpPr>
+        <p:spPr>
+          <a:xfrm>
+            <a:off x="8074152" y="3666744"/>
+            <a:ext cx="2825496" cy="201168"/>
+          </a:xfrm>
+          <a:prstGeom prst="rect">
+            <a:avLst/>
+          </a:prstGeom>
+          <a:noFill/>
+          <a:ln/>
+        </p:spPr>
+        <p:txBody>
+          <a:bodyPr wrap="square" lIns="0" tIns="0" rIns="0" bIns="0" rtlCol="0" anchor="ctr"/>
+          <a:lstStyle/>
+          <a:p>
+            <a:pPr indent="0" marL="0">
+              <a:buNone/>
+            </a:pPr>
+            <a:r>
+              <a:rPr lang="en-US" sz="950" b="1" dirty="0">
+                <a:solidFill>
+                  <a:srgbClr val="0068B7"/>
+                </a:solidFill>
+                <a:latin typeface="Aptos" pitchFamily="34" charset="0"/>
+                <a:ea typeface="Aptos" pitchFamily="34" charset="-122"/>
+                <a:cs typeface="Aptos" pitchFamily="34" charset="-120"/>
+              </a:rPr>
+              <a:t>Use this for</a:t>
+            </a:r>
+            <a:endParaRPr lang="en-US" sz="950" dirty="0"/>
+          </a:p>
+        </p:txBody>
+      </p:sp>
+      <p:sp>
+        <p:nvSpPr>
+          <p:cNvPr id="16" name="Text 14"/>
+          <p:cNvSpPr/>
+          <p:nvPr/>
+        </p:nvSpPr>
+        <p:spPr>
+          <a:xfrm>
+            <a:off x="8074152" y="3959352"/>
+            <a:ext cx="2825496" cy="1170432"/>
+          </a:xfrm>
+          <a:prstGeom prst="rect">
+            <a:avLst/>
+          </a:prstGeom>
+          <a:noFill/>
+          <a:ln/>
+        </p:spPr>
+        <p:txBody>
+          <a:bodyPr wrap="square" lIns="0" tIns="0" rIns="0" bIns="0" rtlCol="0" anchor="t">
+            <a:normAutofit/>
+          </a:bodyPr>
+          <a:lstStyle/>
+          <a:p>
+            <a:pPr indent="0" marL="0">
+              <a:buNone/>
+            </a:pPr>
+            <a:r>
+              <a:rPr lang="en-US" sz="1250" dirty="0">
+                <a:solidFill>
+                  <a:srgbClr val="17364A"/>
+                </a:solidFill>
+                <a:latin typeface="Aptos" pitchFamily="34" charset="0"/>
+                <a:ea typeface="Aptos" pitchFamily="34" charset="-122"/>
+                <a:cs typeface="Aptos" pitchFamily="34" charset="-120"/>
+              </a:rPr>
+              <a:t>Connect the concept to public health decisions, safeguards, documentation, or implementation work.</a:t>
+            </a:r>
+            <a:endParaRPr lang="en-US" sz="1250" dirty="0"/>
           </a:p>
         </p:txBody>
       </p:sp>
@@ -4560,7 +6983,32 @@
       </p:sp>
       <p:sp>
         <p:nvSpPr>
-          <p:cNvPr id="3" name="Text 1"/>
+          <p:cNvPr id="3" name="Shape 1"/>
+          <p:cNvSpPr/>
+          <p:nvPr/>
+        </p:nvSpPr>
+        <p:spPr>
+          <a:xfrm>
+            <a:off x="0" y="164592"/>
+            <a:ext cx="146304" cy="6693408"/>
+          </a:xfrm>
+          <a:prstGeom prst="rect">
+            <a:avLst/>
+          </a:prstGeom>
+          <a:solidFill>
+            <a:srgbClr val="2F8A28"/>
+          </a:solidFill>
+          <a:ln w="12700">
+            <a:solidFill>
+              <a:srgbClr val="2F8A28"/>
+            </a:solidFill>
+            <a:prstDash val="solid"/>
+          </a:ln>
+        </p:spPr>
+      </p:sp>
+      <p:sp>
+        <p:nvSpPr>
+          <p:cNvPr id="4" name="Text 2"/>
           <p:cNvSpPr/>
           <p:nvPr/>
         </p:nvSpPr>
@@ -4599,7 +7047,7 @@
       </p:sp>
       <p:sp>
         <p:nvSpPr>
-          <p:cNvPr id="4" name="Text 2"/>
+          <p:cNvPr id="5" name="Text 3"/>
           <p:cNvSpPr/>
           <p:nvPr/>
         </p:nvSpPr>
@@ -4638,7 +7086,7 @@
       </p:sp>
       <p:sp>
         <p:nvSpPr>
-          <p:cNvPr id="5" name="Text 3"/>
+          <p:cNvPr id="6" name="Text 4"/>
           <p:cNvSpPr/>
           <p:nvPr/>
         </p:nvSpPr>
@@ -4677,13 +7125,77 @@
       </p:sp>
       <p:sp>
         <p:nvSpPr>
-          <p:cNvPr id="6" name="Text 4"/>
+          <p:cNvPr id="7" name="Shape 5"/>
           <p:cNvSpPr/>
           <p:nvPr/>
         </p:nvSpPr>
         <p:spPr>
           <a:xfrm>
             <a:off x="640080" y="658368"/>
+            <a:ext cx="420624" cy="420624"/>
+          </a:xfrm>
+          <a:prstGeom prst="ellipse">
+            <a:avLst/>
+          </a:prstGeom>
+          <a:solidFill>
+            <a:srgbClr val="0068B7"/>
+          </a:solidFill>
+          <a:ln w="12700">
+            <a:solidFill>
+              <a:srgbClr val="0068B7"/>
+            </a:solidFill>
+            <a:prstDash val="solid"/>
+          </a:ln>
+        </p:spPr>
+      </p:sp>
+      <p:sp>
+        <p:nvSpPr>
+          <p:cNvPr id="8" name="Text 6"/>
+          <p:cNvSpPr/>
+          <p:nvPr/>
+        </p:nvSpPr>
+        <p:spPr>
+          <a:xfrm>
+            <a:off x="640080" y="731520"/>
+            <a:ext cx="420624" cy="164592"/>
+          </a:xfrm>
+          <a:prstGeom prst="rect">
+            <a:avLst/>
+          </a:prstGeom>
+          <a:noFill/>
+          <a:ln/>
+        </p:spPr>
+        <p:txBody>
+          <a:bodyPr wrap="square" lIns="0" tIns="0" rIns="0" bIns="0" rtlCol="0" anchor="ctr"/>
+          <a:lstStyle/>
+          <a:p>
+            <a:pPr algn="ctr" indent="0" marL="0">
+              <a:buNone/>
+            </a:pPr>
+            <a:r>
+              <a:rPr lang="en-US" sz="1100" b="1" dirty="0">
+                <a:solidFill>
+                  <a:srgbClr val="FFFFFF"/>
+                </a:solidFill>
+                <a:latin typeface="Aptos" pitchFamily="34" charset="0"/>
+                <a:ea typeface="Aptos" pitchFamily="34" charset="-122"/>
+                <a:cs typeface="Aptos" pitchFamily="34" charset="-120"/>
+              </a:rPr>
+              <a:t>12</a:t>
+            </a:r>
+            <a:endParaRPr lang="en-US" sz="1100" dirty="0"/>
+          </a:p>
+        </p:txBody>
+      </p:sp>
+      <p:sp>
+        <p:nvSpPr>
+          <p:cNvPr id="9" name="Text 7"/>
+          <p:cNvSpPr/>
+          <p:nvPr/>
+        </p:nvSpPr>
+        <p:spPr>
+          <a:xfrm>
+            <a:off x="640080" y="621792"/>
             <a:ext cx="10881360" cy="566928"/>
           </a:xfrm>
           <a:prstGeom prst="rect">
@@ -4710,7 +7222,7 @@
                 <a:ea typeface="Aptos Display" pitchFamily="34" charset="-122"/>
                 <a:cs typeface="Aptos Display" pitchFamily="34" charset="-120"/>
               </a:rPr>
-              <a:t>Knowledge Check</a:t>
+              <a:t>Expected Artifact or Evidence</a:t>
             </a:r>
             <a:endParaRPr lang="en-US" sz="2700" dirty="0"/>
           </a:p>
@@ -4718,14 +7230,14 @@
       </p:sp>
       <p:sp>
         <p:nvSpPr>
-          <p:cNvPr id="7" name="Text 5"/>
-          <p:cNvSpPr/>
-          <p:nvPr/>
-        </p:nvSpPr>
-        <p:spPr>
-          <a:xfrm>
-            <a:off x="822960" y="1325880"/>
-            <a:ext cx="10378440" cy="4800600"/>
+          <p:cNvPr id="10" name="Text 8"/>
+          <p:cNvSpPr/>
+          <p:nvPr/>
+        </p:nvSpPr>
+        <p:spPr>
+          <a:xfrm>
+            <a:off x="868680" y="1417320"/>
+            <a:ext cx="6675120" cy="4434840"/>
           </a:xfrm>
           <a:prstGeom prst="rect">
             <a:avLst/>
@@ -4740,7 +7252,7 @@
           <a:lstStyle/>
           <a:p>
             <a:r>
-              <a:rPr lang="en-US" sz="1450" dirty="0">
+              <a:rPr lang="en-US" sz="1700" dirty="0">
                 <a:solidFill>
                   <a:srgbClr val="17364A"/>
                 </a:solidFill>
@@ -4748,13 +7260,106 @@
                 <a:ea typeface="Aptos" pitchFamily="34" charset="-122"/>
                 <a:cs typeface="Aptos" pitchFamily="34" charset="-120"/>
               </a:rPr>
-              <a:t>1. What is the strongest reason this module topic belongs in AI leadership and governance training?</a:t>
-            </a:r>
-            <a:endParaRPr lang="en-US" sz="1450" dirty="0"/>
-          </a:p>
-          <a:p>
-            <a:r>
-              <a:rPr lang="en-US" sz="1450" dirty="0">
+              <a:t>AI transparency template; sample AI use registry entry; public notice draft; internal review checklist.</a:t>
+            </a:r>
+            <a:endParaRPr lang="en-US" sz="1700" dirty="0"/>
+          </a:p>
+        </p:txBody>
+      </p:sp>
+      <p:sp>
+        <p:nvSpPr>
+          <p:cNvPr id="11" name="Shape 9"/>
+          <p:cNvSpPr/>
+          <p:nvPr/>
+        </p:nvSpPr>
+        <p:spPr>
+          <a:xfrm>
+            <a:off x="7909560" y="1417320"/>
+            <a:ext cx="3154680" cy="1828800"/>
+          </a:xfrm>
+          <a:prstGeom prst="roundRect">
+            <a:avLst>
+              <a:gd name="adj" fmla="val 6000"/>
+            </a:avLst>
+          </a:prstGeom>
+          <a:solidFill>
+            <a:srgbClr val="EEF8ED"/>
+          </a:solidFill>
+          <a:ln w="12700">
+            <a:solidFill>
+              <a:srgbClr val="B9D7E6"/>
+            </a:solidFill>
+            <a:prstDash val="solid"/>
+          </a:ln>
+        </p:spPr>
+      </p:sp>
+      <p:sp>
+        <p:nvSpPr>
+          <p:cNvPr id="12" name="Text 10"/>
+          <p:cNvSpPr/>
+          <p:nvPr/>
+        </p:nvSpPr>
+        <p:spPr>
+          <a:xfrm>
+            <a:off x="8074152" y="1563624"/>
+            <a:ext cx="2825496" cy="201168"/>
+          </a:xfrm>
+          <a:prstGeom prst="rect">
+            <a:avLst/>
+          </a:prstGeom>
+          <a:noFill/>
+          <a:ln/>
+        </p:spPr>
+        <p:txBody>
+          <a:bodyPr wrap="square" lIns="0" tIns="0" rIns="0" bIns="0" rtlCol="0" anchor="ctr"/>
+          <a:lstStyle/>
+          <a:p>
+            <a:pPr indent="0" marL="0">
+              <a:buNone/>
+            </a:pPr>
+            <a:r>
+              <a:rPr lang="en-US" sz="950" b="1" dirty="0">
+                <a:solidFill>
+                  <a:srgbClr val="0068B7"/>
+                </a:solidFill>
+                <a:latin typeface="Aptos" pitchFamily="34" charset="0"/>
+                <a:ea typeface="Aptos" pitchFamily="34" charset="-122"/>
+                <a:cs typeface="Aptos" pitchFamily="34" charset="-120"/>
+              </a:rPr>
+              <a:t>Key idea</a:t>
+            </a:r>
+            <a:endParaRPr lang="en-US" sz="950" dirty="0"/>
+          </a:p>
+        </p:txBody>
+      </p:sp>
+      <p:sp>
+        <p:nvSpPr>
+          <p:cNvPr id="13" name="Text 11"/>
+          <p:cNvSpPr/>
+          <p:nvPr/>
+        </p:nvSpPr>
+        <p:spPr>
+          <a:xfrm>
+            <a:off x="8074152" y="1856232"/>
+            <a:ext cx="2825496" cy="1261872"/>
+          </a:xfrm>
+          <a:prstGeom prst="rect">
+            <a:avLst/>
+          </a:prstGeom>
+          <a:noFill/>
+          <a:ln/>
+        </p:spPr>
+        <p:txBody>
+          <a:bodyPr wrap="square" lIns="0" tIns="0" rIns="0" bIns="0" rtlCol="0" anchor="t">
+            <a:normAutofit/>
+          </a:bodyPr>
+          <a:lstStyle/>
+          <a:p>
+            <a:pPr indent="0" marL="0">
+              <a:buNone/>
+            </a:pPr>
+            <a:r>
+              <a:rPr lang="en-US" sz="1250" dirty="0">
                 <a:solidFill>
                   <a:srgbClr val="17364A"/>
                 </a:solidFill>
@@ -4762,13 +7367,106 @@
                 <a:ea typeface="Aptos" pitchFamily="34" charset="-122"/>
                 <a:cs typeface="Aptos" pitchFamily="34" charset="-120"/>
               </a:rPr>
-              <a:t>2. Which practice best supports accountable public health AI governance?</a:t>
-            </a:r>
-            <a:endParaRPr lang="en-US" sz="1450" dirty="0"/>
-          </a:p>
-          <a:p>
-            <a:r>
-              <a:rPr lang="en-US" sz="1450" dirty="0">
+              <a:t>AI transparency template; sample AI use registry entry; public notice draft; internal review checklist.</a:t>
+            </a:r>
+            <a:endParaRPr lang="en-US" sz="1250" dirty="0"/>
+          </a:p>
+        </p:txBody>
+      </p:sp>
+      <p:sp>
+        <p:nvSpPr>
+          <p:cNvPr id="14" name="Shape 12"/>
+          <p:cNvSpPr/>
+          <p:nvPr/>
+        </p:nvSpPr>
+        <p:spPr>
+          <a:xfrm>
+            <a:off x="7909560" y="3520440"/>
+            <a:ext cx="3154680" cy="1737360"/>
+          </a:xfrm>
+          <a:prstGeom prst="roundRect">
+            <a:avLst>
+              <a:gd name="adj" fmla="val 6316"/>
+            </a:avLst>
+          </a:prstGeom>
+          <a:solidFill>
+            <a:srgbClr val="EAF6F8"/>
+          </a:solidFill>
+          <a:ln w="12700">
+            <a:solidFill>
+              <a:srgbClr val="B9D7E6"/>
+            </a:solidFill>
+            <a:prstDash val="solid"/>
+          </a:ln>
+        </p:spPr>
+      </p:sp>
+      <p:sp>
+        <p:nvSpPr>
+          <p:cNvPr id="15" name="Text 13"/>
+          <p:cNvSpPr/>
+          <p:nvPr/>
+        </p:nvSpPr>
+        <p:spPr>
+          <a:xfrm>
+            <a:off x="8074152" y="3666744"/>
+            <a:ext cx="2825496" cy="201168"/>
+          </a:xfrm>
+          <a:prstGeom prst="rect">
+            <a:avLst/>
+          </a:prstGeom>
+          <a:noFill/>
+          <a:ln/>
+        </p:spPr>
+        <p:txBody>
+          <a:bodyPr wrap="square" lIns="0" tIns="0" rIns="0" bIns="0" rtlCol="0" anchor="ctr"/>
+          <a:lstStyle/>
+          <a:p>
+            <a:pPr indent="0" marL="0">
+              <a:buNone/>
+            </a:pPr>
+            <a:r>
+              <a:rPr lang="en-US" sz="950" b="1" dirty="0">
+                <a:solidFill>
+                  <a:srgbClr val="0068B7"/>
+                </a:solidFill>
+                <a:latin typeface="Aptos" pitchFamily="34" charset="0"/>
+                <a:ea typeface="Aptos" pitchFamily="34" charset="-122"/>
+                <a:cs typeface="Aptos" pitchFamily="34" charset="-120"/>
+              </a:rPr>
+              <a:t>Use this for</a:t>
+            </a:r>
+            <a:endParaRPr lang="en-US" sz="950" dirty="0"/>
+          </a:p>
+        </p:txBody>
+      </p:sp>
+      <p:sp>
+        <p:nvSpPr>
+          <p:cNvPr id="16" name="Text 14"/>
+          <p:cNvSpPr/>
+          <p:nvPr/>
+        </p:nvSpPr>
+        <p:spPr>
+          <a:xfrm>
+            <a:off x="8074152" y="3959352"/>
+            <a:ext cx="2825496" cy="1170432"/>
+          </a:xfrm>
+          <a:prstGeom prst="rect">
+            <a:avLst/>
+          </a:prstGeom>
+          <a:noFill/>
+          <a:ln/>
+        </p:spPr>
+        <p:txBody>
+          <a:bodyPr wrap="square" lIns="0" tIns="0" rIns="0" bIns="0" rtlCol="0" anchor="t">
+            <a:normAutofit/>
+          </a:bodyPr>
+          <a:lstStyle/>
+          <a:p>
+            <a:pPr indent="0" marL="0">
+              <a:buNone/>
+            </a:pPr>
+            <a:r>
+              <a:rPr lang="en-US" sz="1250" dirty="0">
                 <a:solidFill>
                   <a:srgbClr val="17364A"/>
                 </a:solidFill>
@@ -4776,37 +7474,9 @@
                 <a:ea typeface="Aptos" pitchFamily="34" charset="-122"/>
                 <a:cs typeface="Aptos" pitchFamily="34" charset="-120"/>
               </a:rPr>
-              <a:t>3. When should an AI use case be escalated for leadership or governance review?</a:t>
-            </a:r>
-            <a:endParaRPr lang="en-US" sz="1450" dirty="0"/>
-          </a:p>
-          <a:p>
-            <a:r>
-              <a:rPr lang="en-US" sz="1450" dirty="0">
-                <a:solidFill>
-                  <a:srgbClr val="17364A"/>
-                </a:solidFill>
-                <a:latin typeface="Aptos" pitchFamily="34" charset="0"/>
-                <a:ea typeface="Aptos" pitchFamily="34" charset="-122"/>
-                <a:cs typeface="Aptos" pitchFamily="34" charset="-120"/>
-              </a:rPr>
-              <a:t>4. What is weak evidence of completion for a leadership and governance module?</a:t>
-            </a:r>
-            <a:endParaRPr lang="en-US" sz="1450" dirty="0"/>
-          </a:p>
-          <a:p>
-            <a:r>
-              <a:rPr lang="en-US" sz="1450" dirty="0">
-                <a:solidFill>
-                  <a:srgbClr val="17364A"/>
-                </a:solidFill>
-                <a:latin typeface="Aptos" pitchFamily="34" charset="0"/>
-                <a:ea typeface="Aptos" pitchFamily="34" charset="-122"/>
-                <a:cs typeface="Aptos" pitchFamily="34" charset="-120"/>
-              </a:rPr>
-              <a:t>5. What should leaders do when an AI use case has meaningful benefits but unresolved risks?</a:t>
-            </a:r>
-            <a:endParaRPr lang="en-US" sz="1450" dirty="0"/>
+              <a:t>Connect the concept to public health decisions, safeguards, documentation, or implementation work.</a:t>
+            </a:r>
+            <a:endParaRPr lang="en-US" sz="1250" dirty="0"/>
           </a:p>
         </p:txBody>
       </p:sp>
@@ -4869,7 +7539,32 @@
       </p:sp>
       <p:sp>
         <p:nvSpPr>
-          <p:cNvPr id="3" name="Text 1"/>
+          <p:cNvPr id="3" name="Shape 1"/>
+          <p:cNvSpPr/>
+          <p:nvPr/>
+        </p:nvSpPr>
+        <p:spPr>
+          <a:xfrm>
+            <a:off x="0" y="164592"/>
+            <a:ext cx="146304" cy="6693408"/>
+          </a:xfrm>
+          <a:prstGeom prst="rect">
+            <a:avLst/>
+          </a:prstGeom>
+          <a:solidFill>
+            <a:srgbClr val="2F8A28"/>
+          </a:solidFill>
+          <a:ln w="12700">
+            <a:solidFill>
+              <a:srgbClr val="2F8A28"/>
+            </a:solidFill>
+            <a:prstDash val="solid"/>
+          </a:ln>
+        </p:spPr>
+      </p:sp>
+      <p:sp>
+        <p:nvSpPr>
+          <p:cNvPr id="4" name="Text 2"/>
           <p:cNvSpPr/>
           <p:nvPr/>
         </p:nvSpPr>
@@ -4908,7 +7603,7 @@
       </p:sp>
       <p:sp>
         <p:nvSpPr>
-          <p:cNvPr id="4" name="Text 2"/>
+          <p:cNvPr id="5" name="Text 3"/>
           <p:cNvSpPr/>
           <p:nvPr/>
         </p:nvSpPr>
@@ -4947,7 +7642,7 @@
       </p:sp>
       <p:sp>
         <p:nvSpPr>
-          <p:cNvPr id="5" name="Text 3"/>
+          <p:cNvPr id="6" name="Text 4"/>
           <p:cNvSpPr/>
           <p:nvPr/>
         </p:nvSpPr>
@@ -4986,13 +7681,77 @@
       </p:sp>
       <p:sp>
         <p:nvSpPr>
-          <p:cNvPr id="6" name="Text 4"/>
+          <p:cNvPr id="7" name="Shape 5"/>
           <p:cNvSpPr/>
           <p:nvPr/>
         </p:nvSpPr>
         <p:spPr>
           <a:xfrm>
             <a:off x="640080" y="658368"/>
+            <a:ext cx="420624" cy="420624"/>
+          </a:xfrm>
+          <a:prstGeom prst="ellipse">
+            <a:avLst/>
+          </a:prstGeom>
+          <a:solidFill>
+            <a:srgbClr val="0068B7"/>
+          </a:solidFill>
+          <a:ln w="12700">
+            <a:solidFill>
+              <a:srgbClr val="0068B7"/>
+            </a:solidFill>
+            <a:prstDash val="solid"/>
+          </a:ln>
+        </p:spPr>
+      </p:sp>
+      <p:sp>
+        <p:nvSpPr>
+          <p:cNvPr id="8" name="Text 6"/>
+          <p:cNvSpPr/>
+          <p:nvPr/>
+        </p:nvSpPr>
+        <p:spPr>
+          <a:xfrm>
+            <a:off x="640080" y="731520"/>
+            <a:ext cx="420624" cy="164592"/>
+          </a:xfrm>
+          <a:prstGeom prst="rect">
+            <a:avLst/>
+          </a:prstGeom>
+          <a:noFill/>
+          <a:ln/>
+        </p:spPr>
+        <p:txBody>
+          <a:bodyPr wrap="square" lIns="0" tIns="0" rIns="0" bIns="0" rtlCol="0" anchor="ctr"/>
+          <a:lstStyle/>
+          <a:p>
+            <a:pPr algn="ctr" indent="0" marL="0">
+              <a:buNone/>
+            </a:pPr>
+            <a:r>
+              <a:rPr lang="en-US" sz="1100" b="1" dirty="0">
+                <a:solidFill>
+                  <a:srgbClr val="FFFFFF"/>
+                </a:solidFill>
+                <a:latin typeface="Aptos" pitchFamily="34" charset="0"/>
+                <a:ea typeface="Aptos" pitchFamily="34" charset="-122"/>
+                <a:cs typeface="Aptos" pitchFamily="34" charset="-120"/>
+              </a:rPr>
+              <a:t>13</a:t>
+            </a:r>
+            <a:endParaRPr lang="en-US" sz="1100" dirty="0"/>
+          </a:p>
+        </p:txBody>
+      </p:sp>
+      <p:sp>
+        <p:nvSpPr>
+          <p:cNvPr id="9" name="Text 7"/>
+          <p:cNvSpPr/>
+          <p:nvPr/>
+        </p:nvSpPr>
+        <p:spPr>
+          <a:xfrm>
+            <a:off x="640080" y="621792"/>
             <a:ext cx="10881360" cy="566928"/>
           </a:xfrm>
           <a:prstGeom prst="rect">
@@ -5019,7 +7778,7 @@
                 <a:ea typeface="Aptos Display" pitchFamily="34" charset="-122"/>
                 <a:cs typeface="Aptos Display" pitchFamily="34" charset="-120"/>
               </a:rPr>
-              <a:t>References and Resources</a:t>
+              <a:t>Expected Assignment</a:t>
             </a:r>
             <a:endParaRPr lang="en-US" sz="2700" dirty="0"/>
           </a:p>
@@ -5027,14 +7786,14 @@
       </p:sp>
       <p:sp>
         <p:nvSpPr>
-          <p:cNvPr id="7" name="Text 5"/>
-          <p:cNvSpPr/>
-          <p:nvPr/>
-        </p:nvSpPr>
-        <p:spPr>
-          <a:xfrm>
-            <a:off x="822960" y="1325880"/>
-            <a:ext cx="10378440" cy="4800600"/>
+          <p:cNvPr id="10" name="Text 8"/>
+          <p:cNvSpPr/>
+          <p:nvPr/>
+        </p:nvSpPr>
+        <p:spPr>
+          <a:xfrm>
+            <a:off x="868680" y="1417320"/>
+            <a:ext cx="6675120" cy="4434840"/>
           </a:xfrm>
           <a:prstGeom prst="rect">
             <a:avLst/>
@@ -5049,7 +7808,7 @@
           <a:lstStyle/>
           <a:p>
             <a:r>
-              <a:rPr lang="en-US" sz="1450" dirty="0">
+              <a:rPr lang="en-US" sz="1700" dirty="0">
                 <a:solidFill>
                   <a:srgbClr val="17364A"/>
                 </a:solidFill>
@@ -5057,13 +7816,106 @@
                 <a:ea typeface="Aptos" pitchFamily="34" charset="-122"/>
                 <a:cs typeface="Aptos" pitchFamily="34" charset="-120"/>
               </a:rPr>
-              <a:t>NIST Artificial Intelligence Risk Management Framework (AI RMF 1.0): https://www.nist.gov/itl/ai-risk-management-framework</a:t>
-            </a:r>
-            <a:endParaRPr lang="en-US" sz="1450" dirty="0"/>
-          </a:p>
-          <a:p>
-            <a:r>
-              <a:rPr lang="en-US" sz="1450" dirty="0">
+              <a:t>AI transparency template; sample AI use registry entry; public notice draft; internal review checklist.</a:t>
+            </a:r>
+            <a:endParaRPr lang="en-US" sz="1700" dirty="0"/>
+          </a:p>
+        </p:txBody>
+      </p:sp>
+      <p:sp>
+        <p:nvSpPr>
+          <p:cNvPr id="11" name="Shape 9"/>
+          <p:cNvSpPr/>
+          <p:nvPr/>
+        </p:nvSpPr>
+        <p:spPr>
+          <a:xfrm>
+            <a:off x="7909560" y="1417320"/>
+            <a:ext cx="3154680" cy="1828800"/>
+          </a:xfrm>
+          <a:prstGeom prst="roundRect">
+            <a:avLst>
+              <a:gd name="adj" fmla="val 6000"/>
+            </a:avLst>
+          </a:prstGeom>
+          <a:solidFill>
+            <a:srgbClr val="EEF8ED"/>
+          </a:solidFill>
+          <a:ln w="12700">
+            <a:solidFill>
+              <a:srgbClr val="B9D7E6"/>
+            </a:solidFill>
+            <a:prstDash val="solid"/>
+          </a:ln>
+        </p:spPr>
+      </p:sp>
+      <p:sp>
+        <p:nvSpPr>
+          <p:cNvPr id="12" name="Text 10"/>
+          <p:cNvSpPr/>
+          <p:nvPr/>
+        </p:nvSpPr>
+        <p:spPr>
+          <a:xfrm>
+            <a:off x="8074152" y="1563624"/>
+            <a:ext cx="2825496" cy="201168"/>
+          </a:xfrm>
+          <a:prstGeom prst="rect">
+            <a:avLst/>
+          </a:prstGeom>
+          <a:noFill/>
+          <a:ln/>
+        </p:spPr>
+        <p:txBody>
+          <a:bodyPr wrap="square" lIns="0" tIns="0" rIns="0" bIns="0" rtlCol="0" anchor="ctr"/>
+          <a:lstStyle/>
+          <a:p>
+            <a:pPr indent="0" marL="0">
+              <a:buNone/>
+            </a:pPr>
+            <a:r>
+              <a:rPr lang="en-US" sz="950" b="1" dirty="0">
+                <a:solidFill>
+                  <a:srgbClr val="0068B7"/>
+                </a:solidFill>
+                <a:latin typeface="Aptos" pitchFamily="34" charset="0"/>
+                <a:ea typeface="Aptos" pitchFamily="34" charset="-122"/>
+                <a:cs typeface="Aptos" pitchFamily="34" charset="-120"/>
+              </a:rPr>
+              <a:t>Key idea</a:t>
+            </a:r>
+            <a:endParaRPr lang="en-US" sz="950" dirty="0"/>
+          </a:p>
+        </p:txBody>
+      </p:sp>
+      <p:sp>
+        <p:nvSpPr>
+          <p:cNvPr id="13" name="Text 11"/>
+          <p:cNvSpPr/>
+          <p:nvPr/>
+        </p:nvSpPr>
+        <p:spPr>
+          <a:xfrm>
+            <a:off x="8074152" y="1856232"/>
+            <a:ext cx="2825496" cy="1261872"/>
+          </a:xfrm>
+          <a:prstGeom prst="rect">
+            <a:avLst/>
+          </a:prstGeom>
+          <a:noFill/>
+          <a:ln/>
+        </p:spPr>
+        <p:txBody>
+          <a:bodyPr wrap="square" lIns="0" tIns="0" rIns="0" bIns="0" rtlCol="0" anchor="t">
+            <a:normAutofit/>
+          </a:bodyPr>
+          <a:lstStyle/>
+          <a:p>
+            <a:pPr indent="0" marL="0">
+              <a:buNone/>
+            </a:pPr>
+            <a:r>
+              <a:rPr lang="en-US" sz="1250" dirty="0">
                 <a:solidFill>
                   <a:srgbClr val="17364A"/>
                 </a:solidFill>
@@ -5071,13 +7923,106 @@
                 <a:ea typeface="Aptos" pitchFamily="34" charset="-122"/>
                 <a:cs typeface="Aptos" pitchFamily="34" charset="-120"/>
               </a:rPr>
-              <a:t>NIST Generative AI Profile: https://www.nist.gov/publications/artificial-intelligence-risk-management-framework-generative-artificial-intelligence</a:t>
-            </a:r>
-            <a:endParaRPr lang="en-US" sz="1450" dirty="0"/>
-          </a:p>
-          <a:p>
-            <a:r>
-              <a:rPr lang="en-US" sz="1450" dirty="0">
+              <a:t>AI transparency template; sample AI use registry entry; public notice draft; internal review checklist.</a:t>
+            </a:r>
+            <a:endParaRPr lang="en-US" sz="1250" dirty="0"/>
+          </a:p>
+        </p:txBody>
+      </p:sp>
+      <p:sp>
+        <p:nvSpPr>
+          <p:cNvPr id="14" name="Shape 12"/>
+          <p:cNvSpPr/>
+          <p:nvPr/>
+        </p:nvSpPr>
+        <p:spPr>
+          <a:xfrm>
+            <a:off x="7909560" y="3520440"/>
+            <a:ext cx="3154680" cy="1737360"/>
+          </a:xfrm>
+          <a:prstGeom prst="roundRect">
+            <a:avLst>
+              <a:gd name="adj" fmla="val 6316"/>
+            </a:avLst>
+          </a:prstGeom>
+          <a:solidFill>
+            <a:srgbClr val="EAF6F8"/>
+          </a:solidFill>
+          <a:ln w="12700">
+            <a:solidFill>
+              <a:srgbClr val="B9D7E6"/>
+            </a:solidFill>
+            <a:prstDash val="solid"/>
+          </a:ln>
+        </p:spPr>
+      </p:sp>
+      <p:sp>
+        <p:nvSpPr>
+          <p:cNvPr id="15" name="Text 13"/>
+          <p:cNvSpPr/>
+          <p:nvPr/>
+        </p:nvSpPr>
+        <p:spPr>
+          <a:xfrm>
+            <a:off x="8074152" y="3666744"/>
+            <a:ext cx="2825496" cy="201168"/>
+          </a:xfrm>
+          <a:prstGeom prst="rect">
+            <a:avLst/>
+          </a:prstGeom>
+          <a:noFill/>
+          <a:ln/>
+        </p:spPr>
+        <p:txBody>
+          <a:bodyPr wrap="square" lIns="0" tIns="0" rIns="0" bIns="0" rtlCol="0" anchor="ctr"/>
+          <a:lstStyle/>
+          <a:p>
+            <a:pPr indent="0" marL="0">
+              <a:buNone/>
+            </a:pPr>
+            <a:r>
+              <a:rPr lang="en-US" sz="950" b="1" dirty="0">
+                <a:solidFill>
+                  <a:srgbClr val="0068B7"/>
+                </a:solidFill>
+                <a:latin typeface="Aptos" pitchFamily="34" charset="0"/>
+                <a:ea typeface="Aptos" pitchFamily="34" charset="-122"/>
+                <a:cs typeface="Aptos" pitchFamily="34" charset="-120"/>
+              </a:rPr>
+              <a:t>Use this for</a:t>
+            </a:r>
+            <a:endParaRPr lang="en-US" sz="950" dirty="0"/>
+          </a:p>
+        </p:txBody>
+      </p:sp>
+      <p:sp>
+        <p:nvSpPr>
+          <p:cNvPr id="16" name="Text 14"/>
+          <p:cNvSpPr/>
+          <p:nvPr/>
+        </p:nvSpPr>
+        <p:spPr>
+          <a:xfrm>
+            <a:off x="8074152" y="3959352"/>
+            <a:ext cx="2825496" cy="1170432"/>
+          </a:xfrm>
+          <a:prstGeom prst="rect">
+            <a:avLst/>
+          </a:prstGeom>
+          <a:noFill/>
+          <a:ln/>
+        </p:spPr>
+        <p:txBody>
+          <a:bodyPr wrap="square" lIns="0" tIns="0" rIns="0" bIns="0" rtlCol="0" anchor="t">
+            <a:normAutofit/>
+          </a:bodyPr>
+          <a:lstStyle/>
+          <a:p>
+            <a:pPr indent="0" marL="0">
+              <a:buNone/>
+            </a:pPr>
+            <a:r>
+              <a:rPr lang="en-US" sz="1250" dirty="0">
                 <a:solidFill>
                   <a:srgbClr val="17364A"/>
                 </a:solidFill>
@@ -5085,37 +8030,9 @@
                 <a:ea typeface="Aptos" pitchFamily="34" charset="-122"/>
                 <a:cs typeface="Aptos" pitchFamily="34" charset="-120"/>
               </a:rPr>
-              <a:t>NIST Privacy Framework</a:t>
-            </a:r>
-            <a:endParaRPr lang="en-US" sz="1450" dirty="0"/>
-          </a:p>
-          <a:p>
-            <a:r>
-              <a:rPr lang="en-US" sz="1450" dirty="0">
-                <a:solidFill>
-                  <a:srgbClr val="17364A"/>
-                </a:solidFill>
-                <a:latin typeface="Aptos" pitchFamily="34" charset="0"/>
-                <a:ea typeface="Aptos" pitchFamily="34" charset="-122"/>
-                <a:cs typeface="Aptos" pitchFamily="34" charset="-120"/>
-              </a:rPr>
-              <a:t>CDC Public Health Data Strategy and Data Modernization resources: https://www.cdc.gov/public-health-data-strategy/php/about/index.html</a:t>
-            </a:r>
-            <a:endParaRPr lang="en-US" sz="1450" dirty="0"/>
-          </a:p>
-          <a:p>
-            <a:r>
-              <a:rPr lang="en-US" sz="1450" dirty="0">
-                <a:solidFill>
-                  <a:srgbClr val="17364A"/>
-                </a:solidFill>
-                <a:latin typeface="Aptos" pitchFamily="34" charset="0"/>
-                <a:ea typeface="Aptos" pitchFamily="34" charset="-122"/>
-                <a:cs typeface="Aptos" pitchFamily="34" charset="-120"/>
-              </a:rPr>
-              <a:t>WHO Ethics and Governance of Artificial Intelligence for Health: https://www.who.int/publications/i/item/9789240029200</a:t>
-            </a:r>
-            <a:endParaRPr lang="en-US" sz="1450" dirty="0"/>
+              <a:t>Connect the concept to public health decisions, safeguards, documentation, or implementation work.</a:t>
+            </a:r>
+            <a:endParaRPr lang="en-US" sz="1250" dirty="0"/>
           </a:p>
         </p:txBody>
       </p:sp>
@@ -5178,7 +8095,32 @@
       </p:sp>
       <p:sp>
         <p:nvSpPr>
-          <p:cNvPr id="3" name="Text 1"/>
+          <p:cNvPr id="3" name="Shape 1"/>
+          <p:cNvSpPr/>
+          <p:nvPr/>
+        </p:nvSpPr>
+        <p:spPr>
+          <a:xfrm>
+            <a:off x="0" y="164592"/>
+            <a:ext cx="146304" cy="6693408"/>
+          </a:xfrm>
+          <a:prstGeom prst="rect">
+            <a:avLst/>
+          </a:prstGeom>
+          <a:solidFill>
+            <a:srgbClr val="2F8A28"/>
+          </a:solidFill>
+          <a:ln w="12700">
+            <a:solidFill>
+              <a:srgbClr val="2F8A28"/>
+            </a:solidFill>
+            <a:prstDash val="solid"/>
+          </a:ln>
+        </p:spPr>
+      </p:sp>
+      <p:sp>
+        <p:nvSpPr>
+          <p:cNvPr id="4" name="Text 2"/>
           <p:cNvSpPr/>
           <p:nvPr/>
         </p:nvSpPr>
@@ -5217,7 +8159,7 @@
       </p:sp>
       <p:sp>
         <p:nvSpPr>
-          <p:cNvPr id="4" name="Text 2"/>
+          <p:cNvPr id="5" name="Text 3"/>
           <p:cNvSpPr/>
           <p:nvPr/>
         </p:nvSpPr>
@@ -5256,7 +8198,7 @@
       </p:sp>
       <p:sp>
         <p:nvSpPr>
-          <p:cNvPr id="5" name="Text 3"/>
+          <p:cNvPr id="6" name="Text 4"/>
           <p:cNvSpPr/>
           <p:nvPr/>
         </p:nvSpPr>
@@ -5295,13 +8237,77 @@
       </p:sp>
       <p:sp>
         <p:nvSpPr>
-          <p:cNvPr id="6" name="Text 4"/>
+          <p:cNvPr id="7" name="Shape 5"/>
           <p:cNvSpPr/>
           <p:nvPr/>
         </p:nvSpPr>
         <p:spPr>
           <a:xfrm>
             <a:off x="640080" y="658368"/>
+            <a:ext cx="420624" cy="420624"/>
+          </a:xfrm>
+          <a:prstGeom prst="ellipse">
+            <a:avLst/>
+          </a:prstGeom>
+          <a:solidFill>
+            <a:srgbClr val="0068B7"/>
+          </a:solidFill>
+          <a:ln w="12700">
+            <a:solidFill>
+              <a:srgbClr val="0068B7"/>
+            </a:solidFill>
+            <a:prstDash val="solid"/>
+          </a:ln>
+        </p:spPr>
+      </p:sp>
+      <p:sp>
+        <p:nvSpPr>
+          <p:cNvPr id="8" name="Text 6"/>
+          <p:cNvSpPr/>
+          <p:nvPr/>
+        </p:nvSpPr>
+        <p:spPr>
+          <a:xfrm>
+            <a:off x="640080" y="731520"/>
+            <a:ext cx="420624" cy="164592"/>
+          </a:xfrm>
+          <a:prstGeom prst="rect">
+            <a:avLst/>
+          </a:prstGeom>
+          <a:noFill/>
+          <a:ln/>
+        </p:spPr>
+        <p:txBody>
+          <a:bodyPr wrap="square" lIns="0" tIns="0" rIns="0" bIns="0" rtlCol="0" anchor="ctr"/>
+          <a:lstStyle/>
+          <a:p>
+            <a:pPr algn="ctr" indent="0" marL="0">
+              <a:buNone/>
+            </a:pPr>
+            <a:r>
+              <a:rPr lang="en-US" sz="1100" b="1" dirty="0">
+                <a:solidFill>
+                  <a:srgbClr val="FFFFFF"/>
+                </a:solidFill>
+                <a:latin typeface="Aptos" pitchFamily="34" charset="0"/>
+                <a:ea typeface="Aptos" pitchFamily="34" charset="-122"/>
+                <a:cs typeface="Aptos" pitchFamily="34" charset="-120"/>
+              </a:rPr>
+              <a:t>14</a:t>
+            </a:r>
+            <a:endParaRPr lang="en-US" sz="1100" dirty="0"/>
+          </a:p>
+        </p:txBody>
+      </p:sp>
+      <p:sp>
+        <p:nvSpPr>
+          <p:cNvPr id="9" name="Text 7"/>
+          <p:cNvSpPr/>
+          <p:nvPr/>
+        </p:nvSpPr>
+        <p:spPr>
+          <a:xfrm>
+            <a:off x="640080" y="621792"/>
             <a:ext cx="10881360" cy="566928"/>
           </a:xfrm>
           <a:prstGeom prst="rect">
@@ -5328,7 +8334,7 @@
                 <a:ea typeface="Aptos Display" pitchFamily="34" charset="-122"/>
                 <a:cs typeface="Aptos Display" pitchFamily="34" charset="-120"/>
               </a:rPr>
-              <a:t>References and Resources Continued</a:t>
+              <a:t>Knowledge Check</a:t>
             </a:r>
             <a:endParaRPr lang="en-US" sz="2700" dirty="0"/>
           </a:p>
@@ -5336,14 +8342,14 @@
       </p:sp>
       <p:sp>
         <p:nvSpPr>
-          <p:cNvPr id="7" name="Text 5"/>
-          <p:cNvSpPr/>
-          <p:nvPr/>
-        </p:nvSpPr>
-        <p:spPr>
-          <a:xfrm>
-            <a:off x="822960" y="1325880"/>
-            <a:ext cx="10378440" cy="4800600"/>
+          <p:cNvPr id="10" name="Text 8"/>
+          <p:cNvSpPr/>
+          <p:nvPr/>
+        </p:nvSpPr>
+        <p:spPr>
+          <a:xfrm>
+            <a:off x="868680" y="1417320"/>
+            <a:ext cx="6675120" cy="4434840"/>
           </a:xfrm>
           <a:prstGeom prst="rect">
             <a:avLst/>
@@ -5358,7 +8364,7 @@
           <a:lstStyle/>
           <a:p>
             <a:r>
-              <a:rPr lang="en-US" sz="1450" dirty="0">
+              <a:rPr lang="en-US" sz="1700" dirty="0">
                 <a:solidFill>
                   <a:srgbClr val="17364A"/>
                 </a:solidFill>
@@ -5366,13 +8372,13 @@
                 <a:ea typeface="Aptos" pitchFamily="34" charset="-122"/>
                 <a:cs typeface="Aptos" pitchFamily="34" charset="-120"/>
               </a:rPr>
-              <a:t>OMB Memorandum M-24-10 on federal AI governance, risk management, and innovation, where relevant to public-sector governance models</a:t>
-            </a:r>
-            <a:endParaRPr lang="en-US" sz="1450" dirty="0"/>
-          </a:p>
-          <a:p>
-            <a:r>
-              <a:rPr lang="en-US" sz="1450" dirty="0">
+              <a:t>1. What is the strongest reason this module topic belongs in AI leadership and governance training?</a:t>
+            </a:r>
+            <a:endParaRPr lang="en-US" sz="1700" dirty="0"/>
+          </a:p>
+          <a:p>
+            <a:r>
+              <a:rPr lang="en-US" sz="1700" dirty="0">
                 <a:solidFill>
                   <a:srgbClr val="17364A"/>
                 </a:solidFill>
@@ -5380,9 +8386,251 @@
                 <a:ea typeface="Aptos" pitchFamily="34" charset="-122"/>
                 <a:cs typeface="Aptos" pitchFamily="34" charset="-120"/>
               </a:rPr>
-              <a:t>Agency strategic plans, procurement policies, privacy policies, cybersecurity policies, records policies, and equity plans</a:t>
-            </a:r>
-            <a:endParaRPr lang="en-US" sz="1450" dirty="0"/>
+              <a:t>2. Which practice best supports accountable public health AI governance?</a:t>
+            </a:r>
+            <a:endParaRPr lang="en-US" sz="1700" dirty="0"/>
+          </a:p>
+          <a:p>
+            <a:r>
+              <a:rPr lang="en-US" sz="1700" dirty="0">
+                <a:solidFill>
+                  <a:srgbClr val="17364A"/>
+                </a:solidFill>
+                <a:latin typeface="Aptos" pitchFamily="34" charset="0"/>
+                <a:ea typeface="Aptos" pitchFamily="34" charset="-122"/>
+                <a:cs typeface="Aptos" pitchFamily="34" charset="-120"/>
+              </a:rPr>
+              <a:t>3. When should an AI use case be escalated for leadership or governance review?</a:t>
+            </a:r>
+            <a:endParaRPr lang="en-US" sz="1700" dirty="0"/>
+          </a:p>
+          <a:p>
+            <a:r>
+              <a:rPr lang="en-US" sz="1700" dirty="0">
+                <a:solidFill>
+                  <a:srgbClr val="17364A"/>
+                </a:solidFill>
+                <a:latin typeface="Aptos" pitchFamily="34" charset="0"/>
+                <a:ea typeface="Aptos" pitchFamily="34" charset="-122"/>
+                <a:cs typeface="Aptos" pitchFamily="34" charset="-120"/>
+              </a:rPr>
+              <a:t>4. What is weak evidence of completion for a leadership and governance module?</a:t>
+            </a:r>
+            <a:endParaRPr lang="en-US" sz="1700" dirty="0"/>
+          </a:p>
+        </p:txBody>
+      </p:sp>
+      <p:sp>
+        <p:nvSpPr>
+          <p:cNvPr id="11" name="Shape 9"/>
+          <p:cNvSpPr/>
+          <p:nvPr/>
+        </p:nvSpPr>
+        <p:spPr>
+          <a:xfrm>
+            <a:off x="7909560" y="1417320"/>
+            <a:ext cx="3154680" cy="1828800"/>
+          </a:xfrm>
+          <a:prstGeom prst="roundRect">
+            <a:avLst>
+              <a:gd name="adj" fmla="val 6000"/>
+            </a:avLst>
+          </a:prstGeom>
+          <a:solidFill>
+            <a:srgbClr val="EEF8ED"/>
+          </a:solidFill>
+          <a:ln w="12700">
+            <a:solidFill>
+              <a:srgbClr val="B9D7E6"/>
+            </a:solidFill>
+            <a:prstDash val="solid"/>
+          </a:ln>
+        </p:spPr>
+      </p:sp>
+      <p:sp>
+        <p:nvSpPr>
+          <p:cNvPr id="12" name="Text 10"/>
+          <p:cNvSpPr/>
+          <p:nvPr/>
+        </p:nvSpPr>
+        <p:spPr>
+          <a:xfrm>
+            <a:off x="8074152" y="1563624"/>
+            <a:ext cx="2825496" cy="201168"/>
+          </a:xfrm>
+          <a:prstGeom prst="rect">
+            <a:avLst/>
+          </a:prstGeom>
+          <a:noFill/>
+          <a:ln/>
+        </p:spPr>
+        <p:txBody>
+          <a:bodyPr wrap="square" lIns="0" tIns="0" rIns="0" bIns="0" rtlCol="0" anchor="ctr"/>
+          <a:lstStyle/>
+          <a:p>
+            <a:pPr indent="0" marL="0">
+              <a:buNone/>
+            </a:pPr>
+            <a:r>
+              <a:rPr lang="en-US" sz="950" b="1" dirty="0">
+                <a:solidFill>
+                  <a:srgbClr val="0068B7"/>
+                </a:solidFill>
+                <a:latin typeface="Aptos" pitchFamily="34" charset="0"/>
+                <a:ea typeface="Aptos" pitchFamily="34" charset="-122"/>
+                <a:cs typeface="Aptos" pitchFamily="34" charset="-120"/>
+              </a:rPr>
+              <a:t>Key idea</a:t>
+            </a:r>
+            <a:endParaRPr lang="en-US" sz="950" dirty="0"/>
+          </a:p>
+        </p:txBody>
+      </p:sp>
+      <p:sp>
+        <p:nvSpPr>
+          <p:cNvPr id="13" name="Text 11"/>
+          <p:cNvSpPr/>
+          <p:nvPr/>
+        </p:nvSpPr>
+        <p:spPr>
+          <a:xfrm>
+            <a:off x="8074152" y="1856232"/>
+            <a:ext cx="2825496" cy="1261872"/>
+          </a:xfrm>
+          <a:prstGeom prst="rect">
+            <a:avLst/>
+          </a:prstGeom>
+          <a:noFill/>
+          <a:ln/>
+        </p:spPr>
+        <p:txBody>
+          <a:bodyPr wrap="square" lIns="0" tIns="0" rIns="0" bIns="0" rtlCol="0" anchor="t">
+            <a:normAutofit/>
+          </a:bodyPr>
+          <a:lstStyle/>
+          <a:p>
+            <a:pPr indent="0" marL="0">
+              <a:buNone/>
+            </a:pPr>
+            <a:r>
+              <a:rPr lang="en-US" sz="1250" dirty="0">
+                <a:solidFill>
+                  <a:srgbClr val="17364A"/>
+                </a:solidFill>
+                <a:latin typeface="Aptos" pitchFamily="34" charset="0"/>
+                <a:ea typeface="Aptos" pitchFamily="34" charset="-122"/>
+                <a:cs typeface="Aptos" pitchFamily="34" charset="-120"/>
+              </a:rPr>
+              <a:t>1. What is the strongest reason this module topic belongs in AI leadership and governance training?</a:t>
+            </a:r>
+            <a:endParaRPr lang="en-US" sz="1250" dirty="0"/>
+          </a:p>
+        </p:txBody>
+      </p:sp>
+      <p:sp>
+        <p:nvSpPr>
+          <p:cNvPr id="14" name="Shape 12"/>
+          <p:cNvSpPr/>
+          <p:nvPr/>
+        </p:nvSpPr>
+        <p:spPr>
+          <a:xfrm>
+            <a:off x="7909560" y="3520440"/>
+            <a:ext cx="3154680" cy="1737360"/>
+          </a:xfrm>
+          <a:prstGeom prst="roundRect">
+            <a:avLst>
+              <a:gd name="adj" fmla="val 6316"/>
+            </a:avLst>
+          </a:prstGeom>
+          <a:solidFill>
+            <a:srgbClr val="EAF6F8"/>
+          </a:solidFill>
+          <a:ln w="12700">
+            <a:solidFill>
+              <a:srgbClr val="B9D7E6"/>
+            </a:solidFill>
+            <a:prstDash val="solid"/>
+          </a:ln>
+        </p:spPr>
+      </p:sp>
+      <p:sp>
+        <p:nvSpPr>
+          <p:cNvPr id="15" name="Text 13"/>
+          <p:cNvSpPr/>
+          <p:nvPr/>
+        </p:nvSpPr>
+        <p:spPr>
+          <a:xfrm>
+            <a:off x="8074152" y="3666744"/>
+            <a:ext cx="2825496" cy="201168"/>
+          </a:xfrm>
+          <a:prstGeom prst="rect">
+            <a:avLst/>
+          </a:prstGeom>
+          <a:noFill/>
+          <a:ln/>
+        </p:spPr>
+        <p:txBody>
+          <a:bodyPr wrap="square" lIns="0" tIns="0" rIns="0" bIns="0" rtlCol="0" anchor="ctr"/>
+          <a:lstStyle/>
+          <a:p>
+            <a:pPr indent="0" marL="0">
+              <a:buNone/>
+            </a:pPr>
+            <a:r>
+              <a:rPr lang="en-US" sz="950" b="1" dirty="0">
+                <a:solidFill>
+                  <a:srgbClr val="0068B7"/>
+                </a:solidFill>
+                <a:latin typeface="Aptos" pitchFamily="34" charset="0"/>
+                <a:ea typeface="Aptos" pitchFamily="34" charset="-122"/>
+                <a:cs typeface="Aptos" pitchFamily="34" charset="-120"/>
+              </a:rPr>
+              <a:t>Use this for</a:t>
+            </a:r>
+            <a:endParaRPr lang="en-US" sz="950" dirty="0"/>
+          </a:p>
+        </p:txBody>
+      </p:sp>
+      <p:sp>
+        <p:nvSpPr>
+          <p:cNvPr id="16" name="Text 14"/>
+          <p:cNvSpPr/>
+          <p:nvPr/>
+        </p:nvSpPr>
+        <p:spPr>
+          <a:xfrm>
+            <a:off x="8074152" y="3959352"/>
+            <a:ext cx="2825496" cy="1170432"/>
+          </a:xfrm>
+          <a:prstGeom prst="rect">
+            <a:avLst/>
+          </a:prstGeom>
+          <a:noFill/>
+          <a:ln/>
+        </p:spPr>
+        <p:txBody>
+          <a:bodyPr wrap="square" lIns="0" tIns="0" rIns="0" bIns="0" rtlCol="0" anchor="t">
+            <a:normAutofit/>
+          </a:bodyPr>
+          <a:lstStyle/>
+          <a:p>
+            <a:pPr indent="0" marL="0">
+              <a:buNone/>
+            </a:pPr>
+            <a:r>
+              <a:rPr lang="en-US" sz="1250" dirty="0">
+                <a:solidFill>
+                  <a:srgbClr val="17364A"/>
+                </a:solidFill>
+                <a:latin typeface="Aptos" pitchFamily="34" charset="0"/>
+                <a:ea typeface="Aptos" pitchFamily="34" charset="-122"/>
+                <a:cs typeface="Aptos" pitchFamily="34" charset="-120"/>
+              </a:rPr>
+              <a:t>Connect the concept to public health decisions, safeguards, documentation, or implementation work.</a:t>
+            </a:r>
+            <a:endParaRPr lang="en-US" sz="1250" dirty="0"/>
           </a:p>
         </p:txBody>
       </p:sp>
@@ -5445,7 +8693,32 @@
       </p:sp>
       <p:sp>
         <p:nvSpPr>
-          <p:cNvPr id="3" name="Text 1"/>
+          <p:cNvPr id="3" name="Shape 1"/>
+          <p:cNvSpPr/>
+          <p:nvPr/>
+        </p:nvSpPr>
+        <p:spPr>
+          <a:xfrm>
+            <a:off x="0" y="164592"/>
+            <a:ext cx="146304" cy="6693408"/>
+          </a:xfrm>
+          <a:prstGeom prst="rect">
+            <a:avLst/>
+          </a:prstGeom>
+          <a:solidFill>
+            <a:srgbClr val="2F8A28"/>
+          </a:solidFill>
+          <a:ln w="12700">
+            <a:solidFill>
+              <a:srgbClr val="2F8A28"/>
+            </a:solidFill>
+            <a:prstDash val="solid"/>
+          </a:ln>
+        </p:spPr>
+      </p:sp>
+      <p:sp>
+        <p:nvSpPr>
+          <p:cNvPr id="4" name="Text 2"/>
           <p:cNvSpPr/>
           <p:nvPr/>
         </p:nvSpPr>
@@ -5484,7 +8757,7 @@
       </p:sp>
       <p:sp>
         <p:nvSpPr>
-          <p:cNvPr id="4" name="Text 2"/>
+          <p:cNvPr id="5" name="Text 3"/>
           <p:cNvSpPr/>
           <p:nvPr/>
         </p:nvSpPr>
@@ -5523,7 +8796,7 @@
       </p:sp>
       <p:sp>
         <p:nvSpPr>
-          <p:cNvPr id="5" name="Text 3"/>
+          <p:cNvPr id="6" name="Text 4"/>
           <p:cNvSpPr/>
           <p:nvPr/>
         </p:nvSpPr>
@@ -5562,7 +8835,7 @@
       </p:sp>
       <p:sp>
         <p:nvSpPr>
-          <p:cNvPr id="6" name="Text 4"/>
+          <p:cNvPr id="7" name="Text 5"/>
           <p:cNvSpPr/>
           <p:nvPr/>
         </p:nvSpPr>
@@ -5595,7 +8868,7 @@
                 <a:ea typeface="Aptos Display" pitchFamily="34" charset="-122"/>
                 <a:cs typeface="Aptos Display" pitchFamily="34" charset="-120"/>
               </a:rPr>
-              <a:t>Module Context</a:t>
+              <a:t>What this module helps you do</a:t>
             </a:r>
             <a:endParaRPr lang="en-US" sz="2700" dirty="0"/>
           </a:p>
@@ -5603,14 +8876,14 @@
       </p:sp>
       <p:sp>
         <p:nvSpPr>
-          <p:cNvPr id="7" name="Text 5"/>
-          <p:cNvSpPr/>
-          <p:nvPr/>
-        </p:nvSpPr>
-        <p:spPr>
-          <a:xfrm>
-            <a:off x="822960" y="1325880"/>
-            <a:ext cx="10378440" cy="1371600"/>
+          <p:cNvPr id="8" name="Text 6"/>
+          <p:cNvSpPr/>
+          <p:nvPr/>
+        </p:nvSpPr>
+        <p:spPr>
+          <a:xfrm>
+            <a:off x="868680" y="1417320"/>
+            <a:ext cx="6675120" cy="3291840"/>
           </a:xfrm>
           <a:prstGeom prst="rect">
             <a:avLst/>
@@ -5625,7 +8898,7 @@
           <a:lstStyle/>
           <a:p>
             <a:r>
-              <a:rPr lang="en-US" sz="1600" dirty="0">
+              <a:rPr lang="en-US" sz="1700" dirty="0">
                 <a:solidFill>
                   <a:srgbClr val="17364A"/>
                 </a:solidFill>
@@ -5633,13 +8906,13 @@
                 <a:ea typeface="Aptos" pitchFamily="34" charset="-122"/>
                 <a:cs typeface="Aptos" pitchFamily="34" charset="-120"/>
               </a:rPr>
-              <a:t>Level: advanced/leadership</a:t>
-            </a:r>
-            <a:endParaRPr lang="en-US" sz="1600" dirty="0"/>
-          </a:p>
-          <a:p>
-            <a:r>
-              <a:rPr lang="en-US" sz="1600" dirty="0">
+              <a:t>Public health agencies have a responsibility to explain how AI is used in ways that affect public services, public communication, surveillance,.</a:t>
+            </a:r>
+            <a:endParaRPr lang="en-US" sz="1700" dirty="0"/>
+          </a:p>
+          <a:p>
+            <a:r>
+              <a:rPr lang="en-US" sz="1700" dirty="0">
                 <a:solidFill>
                   <a:srgbClr val="17364A"/>
                 </a:solidFill>
@@ -5647,13 +8920,13 @@
                 <a:ea typeface="Aptos" pitchFamily="34" charset="-122"/>
                 <a:cs typeface="Aptos" pitchFamily="34" charset="-120"/>
               </a:rPr>
-              <a:t>Primary track: Governance and Security Track</a:t>
-            </a:r>
-            <a:endParaRPr lang="en-US" sz="1600" dirty="0"/>
-          </a:p>
-          <a:p>
-            <a:r>
-              <a:rPr lang="en-US" sz="1600" dirty="0">
+              <a:t>Transparency reporting helps agencies communicate what AI tools are in use, why they are used, what safeguards are in place, and how the public or.</a:t>
+            </a:r>
+            <a:endParaRPr lang="en-US" sz="1700" dirty="0"/>
+          </a:p>
+          <a:p>
+            <a:r>
+              <a:rPr lang="en-US" sz="1700" dirty="0">
                 <a:solidFill>
                   <a:srgbClr val="17364A"/>
                 </a:solidFill>
@@ -5661,31 +8934,111 @@
                 <a:ea typeface="Aptos" pitchFamily="34" charset="-122"/>
                 <a:cs typeface="Aptos" pitchFamily="34" charset="-120"/>
               </a:rPr>
-              <a:t>Appears in tracks: governance-security</a:t>
-            </a:r>
-            <a:endParaRPr lang="en-US" sz="1600" dirty="0"/>
-          </a:p>
-        </p:txBody>
-      </p:sp>
-      <p:sp>
-        <p:nvSpPr>
-          <p:cNvPr id="8" name="Text 6"/>
-          <p:cNvSpPr/>
-          <p:nvPr/>
-        </p:nvSpPr>
-        <p:spPr>
-          <a:xfrm>
-            <a:off x="822960" y="2743200"/>
-            <a:ext cx="10378440" cy="2834640"/>
-          </a:xfrm>
-          <a:prstGeom prst="rect">
-            <a:avLst/>
-          </a:prstGeom>
-          <a:noFill/>
-          <a:ln/>
-        </p:spPr>
-        <p:txBody>
-          <a:bodyPr wrap="square" lIns="1016" tIns="1016" rIns="1016" bIns="1016" rtlCol="0" anchor="t">
+              <a:t>This module helps leaders design AI transparency practices that are meaningful, not performative.</a:t>
+            </a:r>
+            <a:endParaRPr lang="en-US" sz="1700" dirty="0"/>
+          </a:p>
+          <a:p>
+            <a:r>
+              <a:rPr lang="en-US" sz="1700" dirty="0">
+                <a:solidFill>
+                  <a:srgbClr val="17364A"/>
+                </a:solidFill>
+                <a:latin typeface="Aptos" pitchFamily="34" charset="0"/>
+                <a:ea typeface="Aptos" pitchFamily="34" charset="-122"/>
+                <a:cs typeface="Aptos" pitchFamily="34" charset="-120"/>
+              </a:rPr>
+              <a:t>Transparency should be understandable, accessible, and proportionate to risk.</a:t>
+            </a:r>
+            <a:endParaRPr lang="en-US" sz="1700" dirty="0"/>
+          </a:p>
+        </p:txBody>
+      </p:sp>
+      <p:sp>
+        <p:nvSpPr>
+          <p:cNvPr id="9" name="Shape 7"/>
+          <p:cNvSpPr/>
+          <p:nvPr/>
+        </p:nvSpPr>
+        <p:spPr>
+          <a:xfrm>
+            <a:off x="7909560" y="1417320"/>
+            <a:ext cx="3154680" cy="1920240"/>
+          </a:xfrm>
+          <a:prstGeom prst="roundRect">
+            <a:avLst>
+              <a:gd name="adj" fmla="val 5714"/>
+            </a:avLst>
+          </a:prstGeom>
+          <a:solidFill>
+            <a:srgbClr val="EAF6F8"/>
+          </a:solidFill>
+          <a:ln w="12700">
+            <a:solidFill>
+              <a:srgbClr val="B9D7E6"/>
+            </a:solidFill>
+            <a:prstDash val="solid"/>
+          </a:ln>
+        </p:spPr>
+      </p:sp>
+      <p:sp>
+        <p:nvSpPr>
+          <p:cNvPr id="10" name="Text 8"/>
+          <p:cNvSpPr/>
+          <p:nvPr/>
+        </p:nvSpPr>
+        <p:spPr>
+          <a:xfrm>
+            <a:off x="8074152" y="1563624"/>
+            <a:ext cx="2825496" cy="201168"/>
+          </a:xfrm>
+          <a:prstGeom prst="rect">
+            <a:avLst/>
+          </a:prstGeom>
+          <a:noFill/>
+          <a:ln/>
+        </p:spPr>
+        <p:txBody>
+          <a:bodyPr wrap="square" lIns="0" tIns="0" rIns="0" bIns="0" rtlCol="0" anchor="ctr"/>
+          <a:lstStyle/>
+          <a:p>
+            <a:pPr indent="0" marL="0">
+              <a:buNone/>
+            </a:pPr>
+            <a:r>
+              <a:rPr lang="en-US" sz="950" b="1" dirty="0">
+                <a:solidFill>
+                  <a:srgbClr val="0068B7"/>
+                </a:solidFill>
+                <a:latin typeface="Aptos" pitchFamily="34" charset="0"/>
+                <a:ea typeface="Aptos" pitchFamily="34" charset="-122"/>
+                <a:cs typeface="Aptos" pitchFamily="34" charset="-120"/>
+              </a:rPr>
+              <a:t>Module details</a:t>
+            </a:r>
+            <a:endParaRPr lang="en-US" sz="950" dirty="0"/>
+          </a:p>
+        </p:txBody>
+      </p:sp>
+      <p:sp>
+        <p:nvSpPr>
+          <p:cNvPr id="11" name="Text 9"/>
+          <p:cNvSpPr/>
+          <p:nvPr/>
+        </p:nvSpPr>
+        <p:spPr>
+          <a:xfrm>
+            <a:off x="8074152" y="1856232"/>
+            <a:ext cx="2825496" cy="1353312"/>
+          </a:xfrm>
+          <a:prstGeom prst="rect">
+            <a:avLst/>
+          </a:prstGeom>
+          <a:noFill/>
+          <a:ln/>
+        </p:spPr>
+        <p:txBody>
+          <a:bodyPr wrap="square" lIns="0" tIns="0" rIns="0" bIns="0" rtlCol="0" anchor="t">
             <a:normAutofit/>
           </a:bodyPr>
           <a:lstStyle/>
@@ -5694,7 +9047,7 @@
               <a:buNone/>
             </a:pPr>
             <a:r>
-              <a:rPr lang="en-US" sz="1400" dirty="0">
+              <a:rPr lang="en-US" sz="1250" dirty="0">
                 <a:solidFill>
                   <a:srgbClr val="17364A"/>
                 </a:solidFill>
@@ -5702,9 +9055,1254 @@
                 <a:ea typeface="Aptos" pitchFamily="34" charset="-122"/>
                 <a:cs typeface="Aptos" pitchFamily="34" charset="-120"/>
               </a:rPr>
-              <a:t>Public health agencies have a responsibility to explain how AI is used in ways that affect public services, public communication, surveillance, resource allocation, or community trust. Transparency reporting helps agencies communicate what AI tools are in use, why they are used, what safeguards are in place, and how the public or partners can raise concerns. This module helps leaders design AI transparency practices that are meaningful, not performative. Transparency should be understandable, accessible, and proportionate to risk. It should support public accountability while protecting security, privacy, confidential data, and sensitive operational details.</a:t>
-            </a:r>
-            <a:endParaRPr lang="en-US" sz="1400" dirty="0"/>
+              <a:t>Level: advanced/leadership</a:t>
+            </a:r>
+            <a:endParaRPr lang="en-US" sz="1250" dirty="0"/>
+          </a:p>
+          <a:p>
+            <a:pPr indent="0" marL="0">
+              <a:buNone/>
+            </a:pPr>
+            <a:r>
+              <a:rPr lang="en-US" sz="1250" dirty="0">
+                <a:solidFill>
+                  <a:srgbClr val="17364A"/>
+                </a:solidFill>
+                <a:latin typeface="Aptos" pitchFamily="34" charset="0"/>
+                <a:ea typeface="Aptos" pitchFamily="34" charset="-122"/>
+                <a:cs typeface="Aptos" pitchFamily="34" charset="-120"/>
+              </a:rPr>
+              <a:t>Primary track: Governance and Security Track</a:t>
+            </a:r>
+            <a:endParaRPr lang="en-US" sz="1250" dirty="0"/>
+          </a:p>
+          <a:p>
+            <a:pPr indent="0" marL="0">
+              <a:buNone/>
+            </a:pPr>
+            <a:r>
+              <a:rPr lang="en-US" sz="1250" dirty="0">
+                <a:solidFill>
+                  <a:srgbClr val="17364A"/>
+                </a:solidFill>
+                <a:latin typeface="Aptos" pitchFamily="34" charset="0"/>
+                <a:ea typeface="Aptos" pitchFamily="34" charset="-122"/>
+                <a:cs typeface="Aptos" pitchFamily="34" charset="-120"/>
+              </a:rPr>
+              <a:t>Appears in tracks: governance-security</a:t>
+            </a:r>
+            <a:endParaRPr lang="en-US" sz="1250" dirty="0"/>
+          </a:p>
+        </p:txBody>
+      </p:sp>
+      <p:sp>
+        <p:nvSpPr>
+          <p:cNvPr id="12" name="Shape 10"/>
+          <p:cNvSpPr/>
+          <p:nvPr/>
+        </p:nvSpPr>
+        <p:spPr>
+          <a:xfrm>
+            <a:off x="7909560" y="3611880"/>
+            <a:ext cx="3154680" cy="1783080"/>
+          </a:xfrm>
+          <a:prstGeom prst="roundRect">
+            <a:avLst>
+              <a:gd name="adj" fmla="val 6154"/>
+            </a:avLst>
+          </a:prstGeom>
+          <a:solidFill>
+            <a:srgbClr val="EEF8ED"/>
+          </a:solidFill>
+          <a:ln w="12700">
+            <a:solidFill>
+              <a:srgbClr val="B9D7E6"/>
+            </a:solidFill>
+            <a:prstDash val="solid"/>
+          </a:ln>
+        </p:spPr>
+      </p:sp>
+      <p:sp>
+        <p:nvSpPr>
+          <p:cNvPr id="13" name="Text 11"/>
+          <p:cNvSpPr/>
+          <p:nvPr/>
+        </p:nvSpPr>
+        <p:spPr>
+          <a:xfrm>
+            <a:off x="8074152" y="3758184"/>
+            <a:ext cx="2825496" cy="201168"/>
+          </a:xfrm>
+          <a:prstGeom prst="rect">
+            <a:avLst/>
+          </a:prstGeom>
+          <a:noFill/>
+          <a:ln/>
+        </p:spPr>
+        <p:txBody>
+          <a:bodyPr wrap="square" lIns="0" tIns="0" rIns="0" bIns="0" rtlCol="0" anchor="ctr"/>
+          <a:lstStyle/>
+          <a:p>
+            <a:pPr indent="0" marL="0">
+              <a:buNone/>
+            </a:pPr>
+            <a:r>
+              <a:rPr lang="en-US" sz="950" b="1" dirty="0">
+                <a:solidFill>
+                  <a:srgbClr val="0068B7"/>
+                </a:solidFill>
+                <a:latin typeface="Aptos" pitchFamily="34" charset="0"/>
+                <a:ea typeface="Aptos" pitchFamily="34" charset="-122"/>
+                <a:cs typeface="Aptos" pitchFamily="34" charset="-120"/>
+              </a:rPr>
+              <a:t>Learning approach</a:t>
+            </a:r>
+            <a:endParaRPr lang="en-US" sz="950" dirty="0"/>
+          </a:p>
+        </p:txBody>
+      </p:sp>
+      <p:sp>
+        <p:nvSpPr>
+          <p:cNvPr id="14" name="Text 12"/>
+          <p:cNvSpPr/>
+          <p:nvPr/>
+        </p:nvSpPr>
+        <p:spPr>
+          <a:xfrm>
+            <a:off x="8074152" y="4050792"/>
+            <a:ext cx="2825496" cy="1216152"/>
+          </a:xfrm>
+          <a:prstGeom prst="rect">
+            <a:avLst/>
+          </a:prstGeom>
+          <a:noFill/>
+          <a:ln/>
+        </p:spPr>
+        <p:txBody>
+          <a:bodyPr wrap="square" lIns="0" tIns="0" rIns="0" bIns="0" rtlCol="0" anchor="t">
+            <a:normAutofit/>
+          </a:bodyPr>
+          <a:lstStyle/>
+          <a:p>
+            <a:pPr indent="0" marL="0">
+              <a:buNone/>
+            </a:pPr>
+            <a:r>
+              <a:rPr lang="en-US" sz="1250" dirty="0">
+                <a:solidFill>
+                  <a:srgbClr val="17364A"/>
+                </a:solidFill>
+                <a:latin typeface="Aptos" pitchFamily="34" charset="0"/>
+                <a:ea typeface="Aptos" pitchFamily="34" charset="-122"/>
+                <a:cs typeface="Aptos" pitchFamily="34" charset="-120"/>
+              </a:rPr>
+              <a:t>Review the core ideas, complete the practical exercise, check your understanding, and use the related plays and tools to apply the lesson.</a:t>
+            </a:r>
+            <a:endParaRPr lang="en-US" sz="1250" dirty="0"/>
+          </a:p>
+        </p:txBody>
+      </p:sp>
+    </p:spTree>
+  </p:cSld>
+  <p:clrMapOvr>
+    <a:masterClrMapping/>
+  </p:clrMapOvr>
+</p:sld>
+</file>
+
+<file path=ppt/slides/slide20.xml><?xml version="1.0" encoding="utf-8"?>
+<p:sld xmlns:a="http://schemas.openxmlformats.org/drawingml/2006/main" xmlns:r="http://schemas.openxmlformats.org/officeDocument/2006/relationships" xmlns:p="http://schemas.openxmlformats.org/presentationml/2006/main">
+  <p:cSld name="Slide 20">
+    <p:bg>
+      <p:bgPr>
+        <a:solidFill>
+          <a:srgbClr val="F7FBFD"/>
+        </a:solidFill>
+      </p:bgPr>
+    </p:bg>
+    <p:spTree>
+      <p:nvGrpSpPr>
+        <p:cNvPr id="1" name=""/>
+        <p:cNvGrpSpPr/>
+        <p:nvPr/>
+      </p:nvGrpSpPr>
+      <p:grpSpPr>
+        <a:xfrm>
+          <a:off x="0" y="0"/>
+          <a:ext cx="0" cy="0"/>
+          <a:chOff x="0" y="0"/>
+          <a:chExt cx="0" cy="0"/>
+        </a:xfrm>
+      </p:grpSpPr>
+      <p:sp>
+        <p:nvSpPr>
+          <p:cNvPr id="2" name="Shape 0"/>
+          <p:cNvSpPr/>
+          <p:nvPr/>
+        </p:nvSpPr>
+        <p:spPr>
+          <a:xfrm>
+            <a:off x="0" y="0"/>
+            <a:ext cx="12191695" cy="164592"/>
+          </a:xfrm>
+          <a:prstGeom prst="rect">
+            <a:avLst/>
+          </a:prstGeom>
+          <a:solidFill>
+            <a:srgbClr val="0068B7"/>
+          </a:solidFill>
+          <a:ln w="12700">
+            <a:solidFill>
+              <a:srgbClr val="0068B7"/>
+            </a:solidFill>
+            <a:prstDash val="solid"/>
+          </a:ln>
+        </p:spPr>
+      </p:sp>
+      <p:sp>
+        <p:nvSpPr>
+          <p:cNvPr id="3" name="Shape 1"/>
+          <p:cNvSpPr/>
+          <p:nvPr/>
+        </p:nvSpPr>
+        <p:spPr>
+          <a:xfrm>
+            <a:off x="0" y="164592"/>
+            <a:ext cx="146304" cy="6693408"/>
+          </a:xfrm>
+          <a:prstGeom prst="rect">
+            <a:avLst/>
+          </a:prstGeom>
+          <a:solidFill>
+            <a:srgbClr val="2F8A28"/>
+          </a:solidFill>
+          <a:ln w="12700">
+            <a:solidFill>
+              <a:srgbClr val="2F8A28"/>
+            </a:solidFill>
+            <a:prstDash val="solid"/>
+          </a:ln>
+        </p:spPr>
+      </p:sp>
+      <p:sp>
+        <p:nvSpPr>
+          <p:cNvPr id="4" name="Text 2"/>
+          <p:cNvSpPr/>
+          <p:nvPr/>
+        </p:nvSpPr>
+        <p:spPr>
+          <a:xfrm>
+            <a:off x="502920" y="292608"/>
+            <a:ext cx="10149840" cy="256032"/>
+          </a:xfrm>
+          <a:prstGeom prst="rect">
+            <a:avLst/>
+          </a:prstGeom>
+          <a:noFill/>
+          <a:ln/>
+        </p:spPr>
+        <p:txBody>
+          <a:bodyPr wrap="square" lIns="0" tIns="0" rIns="0" bIns="0" rtlCol="0" anchor="ctr"/>
+          <a:lstStyle/>
+          <a:p>
+            <a:pPr indent="0" marL="0">
+              <a:buNone/>
+            </a:pPr>
+            <a:r>
+              <a:rPr lang="en-US" sz="900" b="1" dirty="0">
+                <a:solidFill>
+                  <a:srgbClr val="5F7181"/>
+                </a:solidFill>
+                <a:latin typeface="Aptos" pitchFamily="34" charset="0"/>
+                <a:ea typeface="Aptos" pitchFamily="34" charset="-122"/>
+                <a:cs typeface="Aptos" pitchFamily="34" charset="-120"/>
+              </a:rPr>
+              <a:t>Public Accountability and AI Transparency Reporting</a:t>
+            </a:r>
+            <a:endParaRPr lang="en-US" sz="900" dirty="0"/>
+          </a:p>
+        </p:txBody>
+      </p:sp>
+      <p:sp>
+        <p:nvSpPr>
+          <p:cNvPr id="5" name="Text 3"/>
+          <p:cNvSpPr/>
+          <p:nvPr/>
+        </p:nvSpPr>
+        <p:spPr>
+          <a:xfrm>
+            <a:off x="502920" y="6537960"/>
+            <a:ext cx="7772400" cy="201168"/>
+          </a:xfrm>
+          <a:prstGeom prst="rect">
+            <a:avLst/>
+          </a:prstGeom>
+          <a:noFill/>
+          <a:ln/>
+        </p:spPr>
+        <p:txBody>
+          <a:bodyPr wrap="square" lIns="0" tIns="0" rIns="0" bIns="0" rtlCol="0" anchor="ctr"/>
+          <a:lstStyle/>
+          <a:p>
+            <a:pPr indent="0" marL="0">
+              <a:buNone/>
+            </a:pPr>
+            <a:r>
+              <a:rPr lang="en-US" sz="800" dirty="0">
+                <a:solidFill>
+                  <a:srgbClr val="5F7181"/>
+                </a:solidFill>
+                <a:latin typeface="Aptos" pitchFamily="34" charset="0"/>
+                <a:ea typeface="Aptos" pitchFamily="34" charset="-122"/>
+                <a:cs typeface="Aptos" pitchFamily="34" charset="-120"/>
+              </a:rPr>
+              <a:t>AI Playbook and Toolkit for Public Health Departments</a:t>
+            </a:r>
+            <a:endParaRPr lang="en-US" sz="800" dirty="0"/>
+          </a:p>
+        </p:txBody>
+      </p:sp>
+      <p:sp>
+        <p:nvSpPr>
+          <p:cNvPr id="6" name="Text 4"/>
+          <p:cNvSpPr/>
+          <p:nvPr/>
+        </p:nvSpPr>
+        <p:spPr>
+          <a:xfrm>
+            <a:off x="9966960" y="6537960"/>
+            <a:ext cx="1645920" cy="201168"/>
+          </a:xfrm>
+          <a:prstGeom prst="rect">
+            <a:avLst/>
+          </a:prstGeom>
+          <a:noFill/>
+          <a:ln/>
+        </p:spPr>
+        <p:txBody>
+          <a:bodyPr wrap="square" lIns="0" tIns="0" rIns="0" bIns="0" rtlCol="0" anchor="ctr"/>
+          <a:lstStyle/>
+          <a:p>
+            <a:pPr algn="r" indent="0" marL="0">
+              <a:buNone/>
+            </a:pPr>
+            <a:r>
+              <a:rPr lang="en-US" sz="800" dirty="0">
+                <a:solidFill>
+                  <a:srgbClr val="5F7181"/>
+                </a:solidFill>
+                <a:latin typeface="Aptos" pitchFamily="34" charset="0"/>
+                <a:ea typeface="Aptos" pitchFamily="34" charset="-122"/>
+                <a:cs typeface="Aptos" pitchFamily="34" charset="-120"/>
+              </a:rPr>
+              <a:t>© Paula Soper</a:t>
+            </a:r>
+            <a:endParaRPr lang="en-US" sz="800" dirty="0"/>
+          </a:p>
+        </p:txBody>
+      </p:sp>
+      <p:sp>
+        <p:nvSpPr>
+          <p:cNvPr id="7" name="Shape 5"/>
+          <p:cNvSpPr/>
+          <p:nvPr/>
+        </p:nvSpPr>
+        <p:spPr>
+          <a:xfrm>
+            <a:off x="640080" y="658368"/>
+            <a:ext cx="420624" cy="420624"/>
+          </a:xfrm>
+          <a:prstGeom prst="ellipse">
+            <a:avLst/>
+          </a:prstGeom>
+          <a:solidFill>
+            <a:srgbClr val="0068B7"/>
+          </a:solidFill>
+          <a:ln w="12700">
+            <a:solidFill>
+              <a:srgbClr val="0068B7"/>
+            </a:solidFill>
+            <a:prstDash val="solid"/>
+          </a:ln>
+        </p:spPr>
+      </p:sp>
+      <p:sp>
+        <p:nvSpPr>
+          <p:cNvPr id="8" name="Text 6"/>
+          <p:cNvSpPr/>
+          <p:nvPr/>
+        </p:nvSpPr>
+        <p:spPr>
+          <a:xfrm>
+            <a:off x="640080" y="731520"/>
+            <a:ext cx="420624" cy="164592"/>
+          </a:xfrm>
+          <a:prstGeom prst="rect">
+            <a:avLst/>
+          </a:prstGeom>
+          <a:noFill/>
+          <a:ln/>
+        </p:spPr>
+        <p:txBody>
+          <a:bodyPr wrap="square" lIns="0" tIns="0" rIns="0" bIns="0" rtlCol="0" anchor="ctr"/>
+          <a:lstStyle/>
+          <a:p>
+            <a:pPr algn="ctr" indent="0" marL="0">
+              <a:buNone/>
+            </a:pPr>
+            <a:r>
+              <a:rPr lang="en-US" sz="1100" b="1" dirty="0">
+                <a:solidFill>
+                  <a:srgbClr val="FFFFFF"/>
+                </a:solidFill>
+                <a:latin typeface="Aptos" pitchFamily="34" charset="0"/>
+                <a:ea typeface="Aptos" pitchFamily="34" charset="-122"/>
+                <a:cs typeface="Aptos" pitchFamily="34" charset="-120"/>
+              </a:rPr>
+              <a:t>15</a:t>
+            </a:r>
+            <a:endParaRPr lang="en-US" sz="1100" dirty="0"/>
+          </a:p>
+        </p:txBody>
+      </p:sp>
+      <p:sp>
+        <p:nvSpPr>
+          <p:cNvPr id="9" name="Text 7"/>
+          <p:cNvSpPr/>
+          <p:nvPr/>
+        </p:nvSpPr>
+        <p:spPr>
+          <a:xfrm>
+            <a:off x="640080" y="621792"/>
+            <a:ext cx="10881360" cy="566928"/>
+          </a:xfrm>
+          <a:prstGeom prst="rect">
+            <a:avLst/>
+          </a:prstGeom>
+          <a:noFill/>
+          <a:ln/>
+        </p:spPr>
+        <p:txBody>
+          <a:bodyPr wrap="square" lIns="0" tIns="0" rIns="0" bIns="0" rtlCol="0" anchor="ctr">
+            <a:normAutofit/>
+          </a:bodyPr>
+          <a:lstStyle/>
+          <a:p>
+            <a:pPr indent="0" marL="0">
+              <a:buNone/>
+            </a:pPr>
+            <a:r>
+              <a:rPr lang="en-US" sz="2700" b="1" dirty="0">
+                <a:solidFill>
+                  <a:srgbClr val="003A63"/>
+                </a:solidFill>
+                <a:latin typeface="Aptos Display" pitchFamily="34" charset="0"/>
+                <a:ea typeface="Aptos Display" pitchFamily="34" charset="-122"/>
+                <a:cs typeface="Aptos Display" pitchFamily="34" charset="-120"/>
+              </a:rPr>
+              <a:t>References and Resources</a:t>
+            </a:r>
+            <a:endParaRPr lang="en-US" sz="2700" dirty="0"/>
+          </a:p>
+        </p:txBody>
+      </p:sp>
+      <p:sp>
+        <p:nvSpPr>
+          <p:cNvPr id="10" name="Text 8"/>
+          <p:cNvSpPr/>
+          <p:nvPr/>
+        </p:nvSpPr>
+        <p:spPr>
+          <a:xfrm>
+            <a:off x="868680" y="1417320"/>
+            <a:ext cx="6675120" cy="4434840"/>
+          </a:xfrm>
+          <a:prstGeom prst="rect">
+            <a:avLst/>
+          </a:prstGeom>
+          <a:noFill/>
+          <a:ln/>
+        </p:spPr>
+        <p:txBody>
+          <a:bodyPr wrap="square" lIns="635" tIns="635" rIns="635" bIns="635" rtlCol="0" anchor="t">
+            <a:normAutofit/>
+          </a:bodyPr>
+          <a:lstStyle/>
+          <a:p>
+            <a:r>
+              <a:rPr lang="en-US" sz="1700" dirty="0">
+                <a:solidFill>
+                  <a:srgbClr val="17364A"/>
+                </a:solidFill>
+                <a:latin typeface="Aptos" pitchFamily="34" charset="0"/>
+                <a:ea typeface="Aptos" pitchFamily="34" charset="-122"/>
+                <a:cs typeface="Aptos" pitchFamily="34" charset="-120"/>
+              </a:rPr>
+              <a:t>NIST Artificial Intelligence Risk Management Framework (AI RMF 1.0): https://www.nist.gov/itl/ai-risk-management-framework</a:t>
+            </a:r>
+            <a:endParaRPr lang="en-US" sz="1700" dirty="0"/>
+          </a:p>
+          <a:p>
+            <a:r>
+              <a:rPr lang="en-US" sz="1700" dirty="0">
+                <a:solidFill>
+                  <a:srgbClr val="17364A"/>
+                </a:solidFill>
+                <a:latin typeface="Aptos" pitchFamily="34" charset="0"/>
+                <a:ea typeface="Aptos" pitchFamily="34" charset="-122"/>
+                <a:cs typeface="Aptos" pitchFamily="34" charset="-120"/>
+              </a:rPr>
+              <a:t>NIST Generative AI Profile:.</a:t>
+            </a:r>
+            <a:endParaRPr lang="en-US" sz="1700" dirty="0"/>
+          </a:p>
+          <a:p>
+            <a:r>
+              <a:rPr lang="en-US" sz="1700" dirty="0">
+                <a:solidFill>
+                  <a:srgbClr val="17364A"/>
+                </a:solidFill>
+                <a:latin typeface="Aptos" pitchFamily="34" charset="0"/>
+                <a:ea typeface="Aptos" pitchFamily="34" charset="-122"/>
+                <a:cs typeface="Aptos" pitchFamily="34" charset="-120"/>
+              </a:rPr>
+              <a:t>NIST Privacy Framework</a:t>
+            </a:r>
+            <a:endParaRPr lang="en-US" sz="1700" dirty="0"/>
+          </a:p>
+          <a:p>
+            <a:r>
+              <a:rPr lang="en-US" sz="1700" dirty="0">
+                <a:solidFill>
+                  <a:srgbClr val="17364A"/>
+                </a:solidFill>
+                <a:latin typeface="Aptos" pitchFamily="34" charset="0"/>
+                <a:ea typeface="Aptos" pitchFamily="34" charset="-122"/>
+                <a:cs typeface="Aptos" pitchFamily="34" charset="-120"/>
+              </a:rPr>
+              <a:t>CDC Public Health Data Strategy and Data Modernization resources:.</a:t>
+            </a:r>
+            <a:endParaRPr lang="en-US" sz="1700" dirty="0"/>
+          </a:p>
+        </p:txBody>
+      </p:sp>
+      <p:sp>
+        <p:nvSpPr>
+          <p:cNvPr id="11" name="Shape 9"/>
+          <p:cNvSpPr/>
+          <p:nvPr/>
+        </p:nvSpPr>
+        <p:spPr>
+          <a:xfrm>
+            <a:off x="7909560" y="1417320"/>
+            <a:ext cx="3154680" cy="1828800"/>
+          </a:xfrm>
+          <a:prstGeom prst="roundRect">
+            <a:avLst>
+              <a:gd name="adj" fmla="val 6000"/>
+            </a:avLst>
+          </a:prstGeom>
+          <a:solidFill>
+            <a:srgbClr val="EEF8ED"/>
+          </a:solidFill>
+          <a:ln w="12700">
+            <a:solidFill>
+              <a:srgbClr val="B9D7E6"/>
+            </a:solidFill>
+            <a:prstDash val="solid"/>
+          </a:ln>
+        </p:spPr>
+      </p:sp>
+      <p:sp>
+        <p:nvSpPr>
+          <p:cNvPr id="12" name="Text 10"/>
+          <p:cNvSpPr/>
+          <p:nvPr/>
+        </p:nvSpPr>
+        <p:spPr>
+          <a:xfrm>
+            <a:off x="8074152" y="1563624"/>
+            <a:ext cx="2825496" cy="201168"/>
+          </a:xfrm>
+          <a:prstGeom prst="rect">
+            <a:avLst/>
+          </a:prstGeom>
+          <a:noFill/>
+          <a:ln/>
+        </p:spPr>
+        <p:txBody>
+          <a:bodyPr wrap="square" lIns="0" tIns="0" rIns="0" bIns="0" rtlCol="0" anchor="ctr"/>
+          <a:lstStyle/>
+          <a:p>
+            <a:pPr indent="0" marL="0">
+              <a:buNone/>
+            </a:pPr>
+            <a:r>
+              <a:rPr lang="en-US" sz="950" b="1" dirty="0">
+                <a:solidFill>
+                  <a:srgbClr val="0068B7"/>
+                </a:solidFill>
+                <a:latin typeface="Aptos" pitchFamily="34" charset="0"/>
+                <a:ea typeface="Aptos" pitchFamily="34" charset="-122"/>
+                <a:cs typeface="Aptos" pitchFamily="34" charset="-120"/>
+              </a:rPr>
+              <a:t>Key idea</a:t>
+            </a:r>
+            <a:endParaRPr lang="en-US" sz="950" dirty="0"/>
+          </a:p>
+        </p:txBody>
+      </p:sp>
+      <p:sp>
+        <p:nvSpPr>
+          <p:cNvPr id="13" name="Text 11"/>
+          <p:cNvSpPr/>
+          <p:nvPr/>
+        </p:nvSpPr>
+        <p:spPr>
+          <a:xfrm>
+            <a:off x="8074152" y="1856232"/>
+            <a:ext cx="2825496" cy="1261872"/>
+          </a:xfrm>
+          <a:prstGeom prst="rect">
+            <a:avLst/>
+          </a:prstGeom>
+          <a:noFill/>
+          <a:ln/>
+        </p:spPr>
+        <p:txBody>
+          <a:bodyPr wrap="square" lIns="0" tIns="0" rIns="0" bIns="0" rtlCol="0" anchor="t">
+            <a:normAutofit/>
+          </a:bodyPr>
+          <a:lstStyle/>
+          <a:p>
+            <a:pPr indent="0" marL="0">
+              <a:buNone/>
+            </a:pPr>
+            <a:r>
+              <a:rPr lang="en-US" sz="1250" dirty="0">
+                <a:solidFill>
+                  <a:srgbClr val="17364A"/>
+                </a:solidFill>
+                <a:latin typeface="Aptos" pitchFamily="34" charset="0"/>
+                <a:ea typeface="Aptos" pitchFamily="34" charset="-122"/>
+                <a:cs typeface="Aptos" pitchFamily="34" charset="-120"/>
+              </a:rPr>
+              <a:t>NIST Artificial Intelligence Risk Management Framework (AI RMF 1.0): https://www.nist.gov/itl/ai-risk-management-framework</a:t>
+            </a:r>
+            <a:endParaRPr lang="en-US" sz="1250" dirty="0"/>
+          </a:p>
+        </p:txBody>
+      </p:sp>
+      <p:sp>
+        <p:nvSpPr>
+          <p:cNvPr id="14" name="Shape 12"/>
+          <p:cNvSpPr/>
+          <p:nvPr/>
+        </p:nvSpPr>
+        <p:spPr>
+          <a:xfrm>
+            <a:off x="7909560" y="3520440"/>
+            <a:ext cx="3154680" cy="1737360"/>
+          </a:xfrm>
+          <a:prstGeom prst="roundRect">
+            <a:avLst>
+              <a:gd name="adj" fmla="val 6316"/>
+            </a:avLst>
+          </a:prstGeom>
+          <a:solidFill>
+            <a:srgbClr val="EAF6F8"/>
+          </a:solidFill>
+          <a:ln w="12700">
+            <a:solidFill>
+              <a:srgbClr val="B9D7E6"/>
+            </a:solidFill>
+            <a:prstDash val="solid"/>
+          </a:ln>
+        </p:spPr>
+      </p:sp>
+      <p:sp>
+        <p:nvSpPr>
+          <p:cNvPr id="15" name="Text 13"/>
+          <p:cNvSpPr/>
+          <p:nvPr/>
+        </p:nvSpPr>
+        <p:spPr>
+          <a:xfrm>
+            <a:off x="8074152" y="3666744"/>
+            <a:ext cx="2825496" cy="201168"/>
+          </a:xfrm>
+          <a:prstGeom prst="rect">
+            <a:avLst/>
+          </a:prstGeom>
+          <a:noFill/>
+          <a:ln/>
+        </p:spPr>
+        <p:txBody>
+          <a:bodyPr wrap="square" lIns="0" tIns="0" rIns="0" bIns="0" rtlCol="0" anchor="ctr"/>
+          <a:lstStyle/>
+          <a:p>
+            <a:pPr indent="0" marL="0">
+              <a:buNone/>
+            </a:pPr>
+            <a:r>
+              <a:rPr lang="en-US" sz="950" b="1" dirty="0">
+                <a:solidFill>
+                  <a:srgbClr val="0068B7"/>
+                </a:solidFill>
+                <a:latin typeface="Aptos" pitchFamily="34" charset="0"/>
+                <a:ea typeface="Aptos" pitchFamily="34" charset="-122"/>
+                <a:cs typeface="Aptos" pitchFamily="34" charset="-120"/>
+              </a:rPr>
+              <a:t>Use this for</a:t>
+            </a:r>
+            <a:endParaRPr lang="en-US" sz="950" dirty="0"/>
+          </a:p>
+        </p:txBody>
+      </p:sp>
+      <p:sp>
+        <p:nvSpPr>
+          <p:cNvPr id="16" name="Text 14"/>
+          <p:cNvSpPr/>
+          <p:nvPr/>
+        </p:nvSpPr>
+        <p:spPr>
+          <a:xfrm>
+            <a:off x="8074152" y="3959352"/>
+            <a:ext cx="2825496" cy="1170432"/>
+          </a:xfrm>
+          <a:prstGeom prst="rect">
+            <a:avLst/>
+          </a:prstGeom>
+          <a:noFill/>
+          <a:ln/>
+        </p:spPr>
+        <p:txBody>
+          <a:bodyPr wrap="square" lIns="0" tIns="0" rIns="0" bIns="0" rtlCol="0" anchor="t">
+            <a:normAutofit/>
+          </a:bodyPr>
+          <a:lstStyle/>
+          <a:p>
+            <a:pPr indent="0" marL="0">
+              <a:buNone/>
+            </a:pPr>
+            <a:r>
+              <a:rPr lang="en-US" sz="1250" dirty="0">
+                <a:solidFill>
+                  <a:srgbClr val="17364A"/>
+                </a:solidFill>
+                <a:latin typeface="Aptos" pitchFamily="34" charset="0"/>
+                <a:ea typeface="Aptos" pitchFamily="34" charset="-122"/>
+                <a:cs typeface="Aptos" pitchFamily="34" charset="-120"/>
+              </a:rPr>
+              <a:t>Connect the concept to public health decisions, safeguards, documentation, or implementation work.</a:t>
+            </a:r>
+            <a:endParaRPr lang="en-US" sz="1250" dirty="0"/>
+          </a:p>
+        </p:txBody>
+      </p:sp>
+    </p:spTree>
+  </p:cSld>
+  <p:clrMapOvr>
+    <a:masterClrMapping/>
+  </p:clrMapOvr>
+</p:sld>
+</file>
+
+<file path=ppt/slides/slide21.xml><?xml version="1.0" encoding="utf-8"?>
+<p:sld xmlns:a="http://schemas.openxmlformats.org/drawingml/2006/main" xmlns:r="http://schemas.openxmlformats.org/officeDocument/2006/relationships" xmlns:p="http://schemas.openxmlformats.org/presentationml/2006/main">
+  <p:cSld name="Slide 21">
+    <p:bg>
+      <p:bgPr>
+        <a:solidFill>
+          <a:srgbClr val="F7FBFD"/>
+        </a:solidFill>
+      </p:bgPr>
+    </p:bg>
+    <p:spTree>
+      <p:nvGrpSpPr>
+        <p:cNvPr id="1" name=""/>
+        <p:cNvGrpSpPr/>
+        <p:nvPr/>
+      </p:nvGrpSpPr>
+      <p:grpSpPr>
+        <a:xfrm>
+          <a:off x="0" y="0"/>
+          <a:ext cx="0" cy="0"/>
+          <a:chOff x="0" y="0"/>
+          <a:chExt cx="0" cy="0"/>
+        </a:xfrm>
+      </p:grpSpPr>
+      <p:sp>
+        <p:nvSpPr>
+          <p:cNvPr id="2" name="Shape 0"/>
+          <p:cNvSpPr/>
+          <p:nvPr/>
+        </p:nvSpPr>
+        <p:spPr>
+          <a:xfrm>
+            <a:off x="0" y="0"/>
+            <a:ext cx="12191695" cy="164592"/>
+          </a:xfrm>
+          <a:prstGeom prst="rect">
+            <a:avLst/>
+          </a:prstGeom>
+          <a:solidFill>
+            <a:srgbClr val="0068B7"/>
+          </a:solidFill>
+          <a:ln w="12700">
+            <a:solidFill>
+              <a:srgbClr val="0068B7"/>
+            </a:solidFill>
+            <a:prstDash val="solid"/>
+          </a:ln>
+        </p:spPr>
+      </p:sp>
+      <p:sp>
+        <p:nvSpPr>
+          <p:cNvPr id="3" name="Shape 1"/>
+          <p:cNvSpPr/>
+          <p:nvPr/>
+        </p:nvSpPr>
+        <p:spPr>
+          <a:xfrm>
+            <a:off x="0" y="164592"/>
+            <a:ext cx="146304" cy="6693408"/>
+          </a:xfrm>
+          <a:prstGeom prst="rect">
+            <a:avLst/>
+          </a:prstGeom>
+          <a:solidFill>
+            <a:srgbClr val="2F8A28"/>
+          </a:solidFill>
+          <a:ln w="12700">
+            <a:solidFill>
+              <a:srgbClr val="2F8A28"/>
+            </a:solidFill>
+            <a:prstDash val="solid"/>
+          </a:ln>
+        </p:spPr>
+      </p:sp>
+      <p:sp>
+        <p:nvSpPr>
+          <p:cNvPr id="4" name="Text 2"/>
+          <p:cNvSpPr/>
+          <p:nvPr/>
+        </p:nvSpPr>
+        <p:spPr>
+          <a:xfrm>
+            <a:off x="502920" y="292608"/>
+            <a:ext cx="10149840" cy="256032"/>
+          </a:xfrm>
+          <a:prstGeom prst="rect">
+            <a:avLst/>
+          </a:prstGeom>
+          <a:noFill/>
+          <a:ln/>
+        </p:spPr>
+        <p:txBody>
+          <a:bodyPr wrap="square" lIns="0" tIns="0" rIns="0" bIns="0" rtlCol="0" anchor="ctr"/>
+          <a:lstStyle/>
+          <a:p>
+            <a:pPr indent="0" marL="0">
+              <a:buNone/>
+            </a:pPr>
+            <a:r>
+              <a:rPr lang="en-US" sz="900" b="1" dirty="0">
+                <a:solidFill>
+                  <a:srgbClr val="5F7181"/>
+                </a:solidFill>
+                <a:latin typeface="Aptos" pitchFamily="34" charset="0"/>
+                <a:ea typeface="Aptos" pitchFamily="34" charset="-122"/>
+                <a:cs typeface="Aptos" pitchFamily="34" charset="-120"/>
+              </a:rPr>
+              <a:t>Public Accountability and AI Transparency Reporting</a:t>
+            </a:r>
+            <a:endParaRPr lang="en-US" sz="900" dirty="0"/>
+          </a:p>
+        </p:txBody>
+      </p:sp>
+      <p:sp>
+        <p:nvSpPr>
+          <p:cNvPr id="5" name="Text 3"/>
+          <p:cNvSpPr/>
+          <p:nvPr/>
+        </p:nvSpPr>
+        <p:spPr>
+          <a:xfrm>
+            <a:off x="502920" y="6537960"/>
+            <a:ext cx="7772400" cy="201168"/>
+          </a:xfrm>
+          <a:prstGeom prst="rect">
+            <a:avLst/>
+          </a:prstGeom>
+          <a:noFill/>
+          <a:ln/>
+        </p:spPr>
+        <p:txBody>
+          <a:bodyPr wrap="square" lIns="0" tIns="0" rIns="0" bIns="0" rtlCol="0" anchor="ctr"/>
+          <a:lstStyle/>
+          <a:p>
+            <a:pPr indent="0" marL="0">
+              <a:buNone/>
+            </a:pPr>
+            <a:r>
+              <a:rPr lang="en-US" sz="800" dirty="0">
+                <a:solidFill>
+                  <a:srgbClr val="5F7181"/>
+                </a:solidFill>
+                <a:latin typeface="Aptos" pitchFamily="34" charset="0"/>
+                <a:ea typeface="Aptos" pitchFamily="34" charset="-122"/>
+                <a:cs typeface="Aptos" pitchFamily="34" charset="-120"/>
+              </a:rPr>
+              <a:t>AI Playbook and Toolkit for Public Health Departments</a:t>
+            </a:r>
+            <a:endParaRPr lang="en-US" sz="800" dirty="0"/>
+          </a:p>
+        </p:txBody>
+      </p:sp>
+      <p:sp>
+        <p:nvSpPr>
+          <p:cNvPr id="6" name="Text 4"/>
+          <p:cNvSpPr/>
+          <p:nvPr/>
+        </p:nvSpPr>
+        <p:spPr>
+          <a:xfrm>
+            <a:off x="9966960" y="6537960"/>
+            <a:ext cx="1645920" cy="201168"/>
+          </a:xfrm>
+          <a:prstGeom prst="rect">
+            <a:avLst/>
+          </a:prstGeom>
+          <a:noFill/>
+          <a:ln/>
+        </p:spPr>
+        <p:txBody>
+          <a:bodyPr wrap="square" lIns="0" tIns="0" rIns="0" bIns="0" rtlCol="0" anchor="ctr"/>
+          <a:lstStyle/>
+          <a:p>
+            <a:pPr algn="r" indent="0" marL="0">
+              <a:buNone/>
+            </a:pPr>
+            <a:r>
+              <a:rPr lang="en-US" sz="800" dirty="0">
+                <a:solidFill>
+                  <a:srgbClr val="5F7181"/>
+                </a:solidFill>
+                <a:latin typeface="Aptos" pitchFamily="34" charset="0"/>
+                <a:ea typeface="Aptos" pitchFamily="34" charset="-122"/>
+                <a:cs typeface="Aptos" pitchFamily="34" charset="-120"/>
+              </a:rPr>
+              <a:t>© Paula Soper</a:t>
+            </a:r>
+            <a:endParaRPr lang="en-US" sz="800" dirty="0"/>
+          </a:p>
+        </p:txBody>
+      </p:sp>
+      <p:sp>
+        <p:nvSpPr>
+          <p:cNvPr id="7" name="Text 5"/>
+          <p:cNvSpPr/>
+          <p:nvPr/>
+        </p:nvSpPr>
+        <p:spPr>
+          <a:xfrm>
+            <a:off x="640080" y="658368"/>
+            <a:ext cx="10881360" cy="566928"/>
+          </a:xfrm>
+          <a:prstGeom prst="rect">
+            <a:avLst/>
+          </a:prstGeom>
+          <a:noFill/>
+          <a:ln/>
+        </p:spPr>
+        <p:txBody>
+          <a:bodyPr wrap="square" lIns="0" tIns="0" rIns="0" bIns="0" rtlCol="0" anchor="ctr">
+            <a:normAutofit/>
+          </a:bodyPr>
+          <a:lstStyle/>
+          <a:p>
+            <a:pPr indent="0" marL="0">
+              <a:buNone/>
+            </a:pPr>
+            <a:r>
+              <a:rPr lang="en-US" sz="2700" b="1" dirty="0">
+                <a:solidFill>
+                  <a:srgbClr val="003A63"/>
+                </a:solidFill>
+                <a:latin typeface="Aptos Display" pitchFamily="34" charset="0"/>
+                <a:ea typeface="Aptos Display" pitchFamily="34" charset="-122"/>
+                <a:cs typeface="Aptos Display" pitchFamily="34" charset="-120"/>
+              </a:rPr>
+              <a:t>References and Resources Continued</a:t>
+            </a:r>
+            <a:endParaRPr lang="en-US" sz="2700" dirty="0"/>
+          </a:p>
+        </p:txBody>
+      </p:sp>
+      <p:sp>
+        <p:nvSpPr>
+          <p:cNvPr id="8" name="Text 6"/>
+          <p:cNvSpPr/>
+          <p:nvPr/>
+        </p:nvSpPr>
+        <p:spPr>
+          <a:xfrm>
+            <a:off x="868680" y="1417320"/>
+            <a:ext cx="6675120" cy="4434840"/>
+          </a:xfrm>
+          <a:prstGeom prst="rect">
+            <a:avLst/>
+          </a:prstGeom>
+          <a:noFill/>
+          <a:ln/>
+        </p:spPr>
+        <p:txBody>
+          <a:bodyPr wrap="square" lIns="635" tIns="635" rIns="635" bIns="635" rtlCol="0" anchor="t">
+            <a:normAutofit/>
+          </a:bodyPr>
+          <a:lstStyle/>
+          <a:p>
+            <a:r>
+              <a:rPr lang="en-US" sz="1700" dirty="0">
+                <a:solidFill>
+                  <a:srgbClr val="17364A"/>
+                </a:solidFill>
+                <a:latin typeface="Aptos" pitchFamily="34" charset="0"/>
+                <a:ea typeface="Aptos" pitchFamily="34" charset="-122"/>
+                <a:cs typeface="Aptos" pitchFamily="34" charset="-120"/>
+              </a:rPr>
+              <a:t>OMB Memorandum M-24-10 on federal AI governance, risk management, and innovation, where relevant to public-sector governance.</a:t>
+            </a:r>
+            <a:endParaRPr lang="en-US" sz="1700" dirty="0"/>
+          </a:p>
+          <a:p>
+            <a:r>
+              <a:rPr lang="en-US" sz="1700" dirty="0">
+                <a:solidFill>
+                  <a:srgbClr val="17364A"/>
+                </a:solidFill>
+                <a:latin typeface="Aptos" pitchFamily="34" charset="0"/>
+                <a:ea typeface="Aptos" pitchFamily="34" charset="-122"/>
+                <a:cs typeface="Aptos" pitchFamily="34" charset="-120"/>
+              </a:rPr>
+              <a:t>Agency strategic plans, procurement policies, privacy policies, cybersecurity policies, records policies, and equity plans</a:t>
+            </a:r>
+            <a:endParaRPr lang="en-US" sz="1700" dirty="0"/>
+          </a:p>
+        </p:txBody>
+      </p:sp>
+      <p:sp>
+        <p:nvSpPr>
+          <p:cNvPr id="9" name="Shape 7"/>
+          <p:cNvSpPr/>
+          <p:nvPr/>
+        </p:nvSpPr>
+        <p:spPr>
+          <a:xfrm>
+            <a:off x="7909560" y="1417320"/>
+            <a:ext cx="3154680" cy="1828800"/>
+          </a:xfrm>
+          <a:prstGeom prst="roundRect">
+            <a:avLst>
+              <a:gd name="adj" fmla="val 6000"/>
+            </a:avLst>
+          </a:prstGeom>
+          <a:solidFill>
+            <a:srgbClr val="EEF8ED"/>
+          </a:solidFill>
+          <a:ln w="12700">
+            <a:solidFill>
+              <a:srgbClr val="B9D7E6"/>
+            </a:solidFill>
+            <a:prstDash val="solid"/>
+          </a:ln>
+        </p:spPr>
+      </p:sp>
+      <p:sp>
+        <p:nvSpPr>
+          <p:cNvPr id="10" name="Text 8"/>
+          <p:cNvSpPr/>
+          <p:nvPr/>
+        </p:nvSpPr>
+        <p:spPr>
+          <a:xfrm>
+            <a:off x="8074152" y="1563624"/>
+            <a:ext cx="2825496" cy="201168"/>
+          </a:xfrm>
+          <a:prstGeom prst="rect">
+            <a:avLst/>
+          </a:prstGeom>
+          <a:noFill/>
+          <a:ln/>
+        </p:spPr>
+        <p:txBody>
+          <a:bodyPr wrap="square" lIns="0" tIns="0" rIns="0" bIns="0" rtlCol="0" anchor="ctr"/>
+          <a:lstStyle/>
+          <a:p>
+            <a:pPr indent="0" marL="0">
+              <a:buNone/>
+            </a:pPr>
+            <a:r>
+              <a:rPr lang="en-US" sz="950" b="1" dirty="0">
+                <a:solidFill>
+                  <a:srgbClr val="0068B7"/>
+                </a:solidFill>
+                <a:latin typeface="Aptos" pitchFamily="34" charset="0"/>
+                <a:ea typeface="Aptos" pitchFamily="34" charset="-122"/>
+                <a:cs typeface="Aptos" pitchFamily="34" charset="-120"/>
+              </a:rPr>
+              <a:t>Key idea</a:t>
+            </a:r>
+            <a:endParaRPr lang="en-US" sz="950" dirty="0"/>
+          </a:p>
+        </p:txBody>
+      </p:sp>
+      <p:sp>
+        <p:nvSpPr>
+          <p:cNvPr id="11" name="Text 9"/>
+          <p:cNvSpPr/>
+          <p:nvPr/>
+        </p:nvSpPr>
+        <p:spPr>
+          <a:xfrm>
+            <a:off x="8074152" y="1856232"/>
+            <a:ext cx="2825496" cy="1261872"/>
+          </a:xfrm>
+          <a:prstGeom prst="rect">
+            <a:avLst/>
+          </a:prstGeom>
+          <a:noFill/>
+          <a:ln/>
+        </p:spPr>
+        <p:txBody>
+          <a:bodyPr wrap="square" lIns="0" tIns="0" rIns="0" bIns="0" rtlCol="0" anchor="t">
+            <a:normAutofit/>
+          </a:bodyPr>
+          <a:lstStyle/>
+          <a:p>
+            <a:pPr indent="0" marL="0">
+              <a:buNone/>
+            </a:pPr>
+            <a:r>
+              <a:rPr lang="en-US" sz="1250" dirty="0">
+                <a:solidFill>
+                  <a:srgbClr val="17364A"/>
+                </a:solidFill>
+                <a:latin typeface="Aptos" pitchFamily="34" charset="0"/>
+                <a:ea typeface="Aptos" pitchFamily="34" charset="-122"/>
+                <a:cs typeface="Aptos" pitchFamily="34" charset="-120"/>
+              </a:rPr>
+              <a:t>OMB Memorandum M-24-10 on federal AI governance, risk management, and innovation, where relevant to public-sector governance.</a:t>
+            </a:r>
+            <a:endParaRPr lang="en-US" sz="1250" dirty="0"/>
+          </a:p>
+        </p:txBody>
+      </p:sp>
+      <p:sp>
+        <p:nvSpPr>
+          <p:cNvPr id="12" name="Shape 10"/>
+          <p:cNvSpPr/>
+          <p:nvPr/>
+        </p:nvSpPr>
+        <p:spPr>
+          <a:xfrm>
+            <a:off x="7909560" y="3520440"/>
+            <a:ext cx="3154680" cy="1737360"/>
+          </a:xfrm>
+          <a:prstGeom prst="roundRect">
+            <a:avLst>
+              <a:gd name="adj" fmla="val 6316"/>
+            </a:avLst>
+          </a:prstGeom>
+          <a:solidFill>
+            <a:srgbClr val="EAF6F8"/>
+          </a:solidFill>
+          <a:ln w="12700">
+            <a:solidFill>
+              <a:srgbClr val="B9D7E6"/>
+            </a:solidFill>
+            <a:prstDash val="solid"/>
+          </a:ln>
+        </p:spPr>
+      </p:sp>
+      <p:sp>
+        <p:nvSpPr>
+          <p:cNvPr id="13" name="Text 11"/>
+          <p:cNvSpPr/>
+          <p:nvPr/>
+        </p:nvSpPr>
+        <p:spPr>
+          <a:xfrm>
+            <a:off x="8074152" y="3666744"/>
+            <a:ext cx="2825496" cy="201168"/>
+          </a:xfrm>
+          <a:prstGeom prst="rect">
+            <a:avLst/>
+          </a:prstGeom>
+          <a:noFill/>
+          <a:ln/>
+        </p:spPr>
+        <p:txBody>
+          <a:bodyPr wrap="square" lIns="0" tIns="0" rIns="0" bIns="0" rtlCol="0" anchor="ctr"/>
+          <a:lstStyle/>
+          <a:p>
+            <a:pPr indent="0" marL="0">
+              <a:buNone/>
+            </a:pPr>
+            <a:r>
+              <a:rPr lang="en-US" sz="950" b="1" dirty="0">
+                <a:solidFill>
+                  <a:srgbClr val="0068B7"/>
+                </a:solidFill>
+                <a:latin typeface="Aptos" pitchFamily="34" charset="0"/>
+                <a:ea typeface="Aptos" pitchFamily="34" charset="-122"/>
+                <a:cs typeface="Aptos" pitchFamily="34" charset="-120"/>
+              </a:rPr>
+              <a:t>Use this for</a:t>
+            </a:r>
+            <a:endParaRPr lang="en-US" sz="950" dirty="0"/>
+          </a:p>
+        </p:txBody>
+      </p:sp>
+      <p:sp>
+        <p:nvSpPr>
+          <p:cNvPr id="14" name="Text 12"/>
+          <p:cNvSpPr/>
+          <p:nvPr/>
+        </p:nvSpPr>
+        <p:spPr>
+          <a:xfrm>
+            <a:off x="8074152" y="3959352"/>
+            <a:ext cx="2825496" cy="1170432"/>
+          </a:xfrm>
+          <a:prstGeom prst="rect">
+            <a:avLst/>
+          </a:prstGeom>
+          <a:noFill/>
+          <a:ln/>
+        </p:spPr>
+        <p:txBody>
+          <a:bodyPr wrap="square" lIns="0" tIns="0" rIns="0" bIns="0" rtlCol="0" anchor="t">
+            <a:normAutofit/>
+          </a:bodyPr>
+          <a:lstStyle/>
+          <a:p>
+            <a:pPr indent="0" marL="0">
+              <a:buNone/>
+            </a:pPr>
+            <a:r>
+              <a:rPr lang="en-US" sz="1250" dirty="0">
+                <a:solidFill>
+                  <a:srgbClr val="17364A"/>
+                </a:solidFill>
+                <a:latin typeface="Aptos" pitchFamily="34" charset="0"/>
+                <a:ea typeface="Aptos" pitchFamily="34" charset="-122"/>
+                <a:cs typeface="Aptos" pitchFamily="34" charset="-120"/>
+              </a:rPr>
+              <a:t>Connect the concept to public health decisions, safeguards, documentation, or implementation work.</a:t>
+            </a:r>
+            <a:endParaRPr lang="en-US" sz="1250" dirty="0"/>
           </a:p>
         </p:txBody>
       </p:sp>
@@ -5767,7 +10365,32 @@
       </p:sp>
       <p:sp>
         <p:nvSpPr>
-          <p:cNvPr id="3" name="Text 1"/>
+          <p:cNvPr id="3" name="Shape 1"/>
+          <p:cNvSpPr/>
+          <p:nvPr/>
+        </p:nvSpPr>
+        <p:spPr>
+          <a:xfrm>
+            <a:off x="0" y="164592"/>
+            <a:ext cx="146304" cy="6693408"/>
+          </a:xfrm>
+          <a:prstGeom prst="rect">
+            <a:avLst/>
+          </a:prstGeom>
+          <a:solidFill>
+            <a:srgbClr val="2F8A28"/>
+          </a:solidFill>
+          <a:ln w="12700">
+            <a:solidFill>
+              <a:srgbClr val="2F8A28"/>
+            </a:solidFill>
+            <a:prstDash val="solid"/>
+          </a:ln>
+        </p:spPr>
+      </p:sp>
+      <p:sp>
+        <p:nvSpPr>
+          <p:cNvPr id="4" name="Text 2"/>
           <p:cNvSpPr/>
           <p:nvPr/>
         </p:nvSpPr>
@@ -5806,7 +10429,7 @@
       </p:sp>
       <p:sp>
         <p:nvSpPr>
-          <p:cNvPr id="4" name="Text 2"/>
+          <p:cNvPr id="5" name="Text 3"/>
           <p:cNvSpPr/>
           <p:nvPr/>
         </p:nvSpPr>
@@ -5845,7 +10468,7 @@
       </p:sp>
       <p:sp>
         <p:nvSpPr>
-          <p:cNvPr id="5" name="Text 3"/>
+          <p:cNvPr id="6" name="Text 4"/>
           <p:cNvSpPr/>
           <p:nvPr/>
         </p:nvSpPr>
@@ -5884,7 +10507,7 @@
       </p:sp>
       <p:sp>
         <p:nvSpPr>
-          <p:cNvPr id="6" name="Text 4"/>
+          <p:cNvPr id="7" name="Text 5"/>
           <p:cNvSpPr/>
           <p:nvPr/>
         </p:nvSpPr>
@@ -5917,7 +10540,7 @@
                 <a:ea typeface="Aptos Display" pitchFamily="34" charset="-122"/>
                 <a:cs typeface="Aptos Display" pitchFamily="34" charset="-120"/>
               </a:rPr>
-              <a:t>Learning Objectives</a:t>
+              <a:t>How this module connects to the playbook</a:t>
             </a:r>
             <a:endParaRPr lang="en-US" sz="2700" dirty="0"/>
           </a:p>
@@ -5925,14 +10548,14 @@
       </p:sp>
       <p:sp>
         <p:nvSpPr>
-          <p:cNvPr id="7" name="Text 5"/>
-          <p:cNvSpPr/>
-          <p:nvPr/>
-        </p:nvSpPr>
-        <p:spPr>
-          <a:xfrm>
-            <a:off x="822960" y="1325880"/>
-            <a:ext cx="10378440" cy="4800600"/>
+          <p:cNvPr id="8" name="Text 6"/>
+          <p:cNvSpPr/>
+          <p:nvPr/>
+        </p:nvSpPr>
+        <p:spPr>
+          <a:xfrm>
+            <a:off x="868680" y="1417320"/>
+            <a:ext cx="6903720" cy="4480560"/>
           </a:xfrm>
           <a:prstGeom prst="rect">
             <a:avLst/>
@@ -5947,7 +10570,7 @@
           <a:lstStyle/>
           <a:p>
             <a:r>
-              <a:rPr lang="en-US" sz="1450" dirty="0">
+              <a:rPr lang="en-US" sz="1540" dirty="0">
                 <a:solidFill>
                   <a:srgbClr val="17364A"/>
                 </a:solidFill>
@@ -5955,13 +10578,13 @@
                 <a:ea typeface="Aptos" pitchFamily="34" charset="-122"/>
                 <a:cs typeface="Aptos" pitchFamily="34" charset="-120"/>
               </a:rPr>
-              <a:t>Explain why transparency reporting matters for public health AI.</a:t>
-            </a:r>
-            <a:endParaRPr lang="en-US" sz="1450" dirty="0"/>
-          </a:p>
-          <a:p>
-            <a:r>
-              <a:rPr lang="en-US" sz="1450" dirty="0">
+              <a:t>Play 11: Build and Deploy AI Solutions - This lesson informs Play 11 by helping learners connect the lesson topic to build and deploy.</a:t>
+            </a:r>
+            <a:endParaRPr lang="en-US" sz="1540" dirty="0"/>
+          </a:p>
+          <a:p>
+            <a:r>
+              <a:rPr lang="en-US" sz="1540" dirty="0">
                 <a:solidFill>
                   <a:srgbClr val="17364A"/>
                 </a:solidFill>
@@ -5969,13 +10592,13 @@
                 <a:ea typeface="Aptos" pitchFamily="34" charset="-122"/>
                 <a:cs typeface="Aptos" pitchFamily="34" charset="-120"/>
               </a:rPr>
-              <a:t>Identify which AI uses should be disclosed internally, publicly, or to specific partners.</a:t>
-            </a:r>
-            <a:endParaRPr lang="en-US" sz="1450" dirty="0"/>
-          </a:p>
-          <a:p>
-            <a:r>
-              <a:rPr lang="en-US" sz="1450" dirty="0">
+              <a:t>Play 7: Prioritize Use Cases - This lesson informs Play 7 by helping learners connect the lesson topic to prioritize use cases work.</a:t>
+            </a:r>
+            <a:endParaRPr lang="en-US" sz="1540" dirty="0"/>
+          </a:p>
+          <a:p>
+            <a:r>
+              <a:rPr lang="en-US" sz="1540" dirty="0">
                 <a:solidFill>
                   <a:srgbClr val="17364A"/>
                 </a:solidFill>
@@ -5983,13 +10606,13 @@
                 <a:ea typeface="Aptos" pitchFamily="34" charset="-122"/>
                 <a:cs typeface="Aptos" pitchFamily="34" charset="-120"/>
               </a:rPr>
-              <a:t>Develop contents for an AI transparency notice or AI use registry.</a:t>
-            </a:r>
-            <a:endParaRPr lang="en-US" sz="1450" dirty="0"/>
-          </a:p>
-          <a:p>
-            <a:r>
-              <a:rPr lang="en-US" sz="1450" dirty="0">
+              <a:t>Play 1: Vision &amp; Guardrails - This lesson informs Play 1 by helping learners connect the lesson topic to vision &amp; guardrails work in.</a:t>
+            </a:r>
+            <a:endParaRPr lang="en-US" sz="1540" dirty="0"/>
+          </a:p>
+          <a:p>
+            <a:r>
+              <a:rPr lang="en-US" sz="1540" dirty="0">
                 <a:solidFill>
                   <a:srgbClr val="17364A"/>
                 </a:solidFill>
@@ -5997,13 +10620,106 @@
                 <a:ea typeface="Aptos" pitchFamily="34" charset="-122"/>
                 <a:cs typeface="Aptos" pitchFamily="34" charset="-120"/>
               </a:rPr>
-              <a:t>Balance transparency with privacy, security, confidentiality, and operational sensitivity.</a:t>
-            </a:r>
-            <a:endParaRPr lang="en-US" sz="1450" dirty="0"/>
-          </a:p>
-          <a:p>
-            <a:r>
-              <a:rPr lang="en-US" sz="1450" dirty="0">
+              <a:t>Play 2: Readiness Assessment - This lesson informs Play 2 by helping learners connect the lesson topic to readiness assessment work.</a:t>
+            </a:r>
+            <a:endParaRPr lang="en-US" sz="1540" dirty="0"/>
+          </a:p>
+        </p:txBody>
+      </p:sp>
+      <p:sp>
+        <p:nvSpPr>
+          <p:cNvPr id="9" name="Shape 7"/>
+          <p:cNvSpPr/>
+          <p:nvPr/>
+        </p:nvSpPr>
+        <p:spPr>
+          <a:xfrm>
+            <a:off x="8046720" y="1417320"/>
+            <a:ext cx="3063240" cy="2103120"/>
+          </a:xfrm>
+          <a:prstGeom prst="roundRect">
+            <a:avLst>
+              <a:gd name="adj" fmla="val 5217"/>
+            </a:avLst>
+          </a:prstGeom>
+          <a:solidFill>
+            <a:srgbClr val="EEF8ED"/>
+          </a:solidFill>
+          <a:ln w="12700">
+            <a:solidFill>
+              <a:srgbClr val="B9D7E6"/>
+            </a:solidFill>
+            <a:prstDash val="solid"/>
+          </a:ln>
+        </p:spPr>
+      </p:sp>
+      <p:sp>
+        <p:nvSpPr>
+          <p:cNvPr id="10" name="Text 8"/>
+          <p:cNvSpPr/>
+          <p:nvPr/>
+        </p:nvSpPr>
+        <p:spPr>
+          <a:xfrm>
+            <a:off x="8211312" y="1563624"/>
+            <a:ext cx="2734056" cy="201168"/>
+          </a:xfrm>
+          <a:prstGeom prst="rect">
+            <a:avLst/>
+          </a:prstGeom>
+          <a:noFill/>
+          <a:ln/>
+        </p:spPr>
+        <p:txBody>
+          <a:bodyPr wrap="square" lIns="0" tIns="0" rIns="0" bIns="0" rtlCol="0" anchor="ctr"/>
+          <a:lstStyle/>
+          <a:p>
+            <a:pPr indent="0" marL="0">
+              <a:buNone/>
+            </a:pPr>
+            <a:r>
+              <a:rPr lang="en-US" sz="950" b="1" dirty="0">
+                <a:solidFill>
+                  <a:srgbClr val="0068B7"/>
+                </a:solidFill>
+                <a:latin typeface="Aptos" pitchFamily="34" charset="0"/>
+                <a:ea typeface="Aptos" pitchFamily="34" charset="-122"/>
+                <a:cs typeface="Aptos" pitchFamily="34" charset="-120"/>
+              </a:rPr>
+              <a:t>Apply the lesson</a:t>
+            </a:r>
+            <a:endParaRPr lang="en-US" sz="950" dirty="0"/>
+          </a:p>
+        </p:txBody>
+      </p:sp>
+      <p:sp>
+        <p:nvSpPr>
+          <p:cNvPr id="11" name="Text 9"/>
+          <p:cNvSpPr/>
+          <p:nvPr/>
+        </p:nvSpPr>
+        <p:spPr>
+          <a:xfrm>
+            <a:off x="8211312" y="1856232"/>
+            <a:ext cx="2734056" cy="1536192"/>
+          </a:xfrm>
+          <a:prstGeom prst="rect">
+            <a:avLst/>
+          </a:prstGeom>
+          <a:noFill/>
+          <a:ln/>
+        </p:spPr>
+        <p:txBody>
+          <a:bodyPr wrap="square" lIns="0" tIns="0" rIns="0" bIns="0" rtlCol="0" anchor="t">
+            <a:normAutofit/>
+          </a:bodyPr>
+          <a:lstStyle/>
+          <a:p>
+            <a:pPr indent="0" marL="0">
+              <a:buNone/>
+            </a:pPr>
+            <a:r>
+              <a:rPr lang="en-US" sz="1250" dirty="0">
                 <a:solidFill>
                   <a:srgbClr val="17364A"/>
                 </a:solidFill>
@@ -6011,9 +10727,116 @@
                 <a:ea typeface="Aptos" pitchFamily="34" charset="-122"/>
                 <a:cs typeface="Aptos" pitchFamily="34" charset="-120"/>
               </a:rPr>
-              <a:t>Produce a draft AI transparency reporting template.</a:t>
-            </a:r>
-            <a:endParaRPr lang="en-US" sz="1450" dirty="0"/>
+              <a:t>Use the related plays to identify decisions, participants, timing, approvals, and documentation needed for responsible implementation.</a:t>
+            </a:r>
+            <a:endParaRPr lang="en-US" sz="1250" dirty="0"/>
+          </a:p>
+        </p:txBody>
+      </p:sp>
+      <p:sp>
+        <p:nvSpPr>
+          <p:cNvPr id="12" name="Shape 10"/>
+          <p:cNvSpPr/>
+          <p:nvPr/>
+        </p:nvSpPr>
+        <p:spPr>
+          <a:xfrm>
+            <a:off x="8046720" y="3794760"/>
+            <a:ext cx="3063240" cy="1508760"/>
+          </a:xfrm>
+          <a:prstGeom prst="roundRect">
+            <a:avLst>
+              <a:gd name="adj" fmla="val 7273"/>
+            </a:avLst>
+          </a:prstGeom>
+          <a:solidFill>
+            <a:srgbClr val="FFF4D9"/>
+          </a:solidFill>
+          <a:ln w="12700">
+            <a:solidFill>
+              <a:srgbClr val="B9D7E6"/>
+            </a:solidFill>
+            <a:prstDash val="solid"/>
+          </a:ln>
+        </p:spPr>
+      </p:sp>
+      <p:sp>
+        <p:nvSpPr>
+          <p:cNvPr id="13" name="Text 11"/>
+          <p:cNvSpPr/>
+          <p:nvPr/>
+        </p:nvSpPr>
+        <p:spPr>
+          <a:xfrm>
+            <a:off x="8211312" y="3941064"/>
+            <a:ext cx="2734056" cy="201168"/>
+          </a:xfrm>
+          <a:prstGeom prst="rect">
+            <a:avLst/>
+          </a:prstGeom>
+          <a:noFill/>
+          <a:ln/>
+        </p:spPr>
+        <p:txBody>
+          <a:bodyPr wrap="square" lIns="0" tIns="0" rIns="0" bIns="0" rtlCol="0" anchor="ctr"/>
+          <a:lstStyle/>
+          <a:p>
+            <a:pPr indent="0" marL="0">
+              <a:buNone/>
+            </a:pPr>
+            <a:r>
+              <a:rPr lang="en-US" sz="950" b="1" dirty="0">
+                <a:solidFill>
+                  <a:srgbClr val="0068B7"/>
+                </a:solidFill>
+                <a:latin typeface="Aptos" pitchFamily="34" charset="0"/>
+                <a:ea typeface="Aptos" pitchFamily="34" charset="-122"/>
+                <a:cs typeface="Aptos" pitchFamily="34" charset="-120"/>
+              </a:rPr>
+              <a:t>Keep in mind</a:t>
+            </a:r>
+            <a:endParaRPr lang="en-US" sz="950" dirty="0"/>
+          </a:p>
+        </p:txBody>
+      </p:sp>
+      <p:sp>
+        <p:nvSpPr>
+          <p:cNvPr id="14" name="Text 12"/>
+          <p:cNvSpPr/>
+          <p:nvPr/>
+        </p:nvSpPr>
+        <p:spPr>
+          <a:xfrm>
+            <a:off x="8211312" y="4233672"/>
+            <a:ext cx="2734056" cy="941832"/>
+          </a:xfrm>
+          <a:prstGeom prst="rect">
+            <a:avLst/>
+          </a:prstGeom>
+          <a:noFill/>
+          <a:ln/>
+        </p:spPr>
+        <p:txBody>
+          <a:bodyPr wrap="square" lIns="0" tIns="0" rIns="0" bIns="0" rtlCol="0" anchor="t">
+            <a:normAutofit/>
+          </a:bodyPr>
+          <a:lstStyle/>
+          <a:p>
+            <a:pPr indent="0" marL="0">
+              <a:buNone/>
+            </a:pPr>
+            <a:r>
+              <a:rPr lang="en-US" sz="1250" dirty="0">
+                <a:solidFill>
+                  <a:srgbClr val="17364A"/>
+                </a:solidFill>
+                <a:latin typeface="Aptos" pitchFamily="34" charset="0"/>
+                <a:ea typeface="Aptos" pitchFamily="34" charset="-122"/>
+                <a:cs typeface="Aptos" pitchFamily="34" charset="-120"/>
+              </a:rPr>
+              <a:t>The playbook connection helps turn training into agency work, not just individual knowledge.</a:t>
+            </a:r>
+            <a:endParaRPr lang="en-US" sz="1250" dirty="0"/>
           </a:p>
         </p:txBody>
       </p:sp>
@@ -6076,7 +10899,32 @@
       </p:sp>
       <p:sp>
         <p:nvSpPr>
-          <p:cNvPr id="3" name="Text 1"/>
+          <p:cNvPr id="3" name="Shape 1"/>
+          <p:cNvSpPr/>
+          <p:nvPr/>
+        </p:nvSpPr>
+        <p:spPr>
+          <a:xfrm>
+            <a:off x="0" y="164592"/>
+            <a:ext cx="146304" cy="6693408"/>
+          </a:xfrm>
+          <a:prstGeom prst="rect">
+            <a:avLst/>
+          </a:prstGeom>
+          <a:solidFill>
+            <a:srgbClr val="2F8A28"/>
+          </a:solidFill>
+          <a:ln w="12700">
+            <a:solidFill>
+              <a:srgbClr val="2F8A28"/>
+            </a:solidFill>
+            <a:prstDash val="solid"/>
+          </a:ln>
+        </p:spPr>
+      </p:sp>
+      <p:sp>
+        <p:nvSpPr>
+          <p:cNvPr id="4" name="Text 2"/>
           <p:cNvSpPr/>
           <p:nvPr/>
         </p:nvSpPr>
@@ -6115,7 +10963,7 @@
       </p:sp>
       <p:sp>
         <p:nvSpPr>
-          <p:cNvPr id="4" name="Text 2"/>
+          <p:cNvPr id="5" name="Text 3"/>
           <p:cNvSpPr/>
           <p:nvPr/>
         </p:nvSpPr>
@@ -6154,7 +11002,7 @@
       </p:sp>
       <p:sp>
         <p:nvSpPr>
-          <p:cNvPr id="5" name="Text 3"/>
+          <p:cNvPr id="6" name="Text 4"/>
           <p:cNvSpPr/>
           <p:nvPr/>
         </p:nvSpPr>
@@ -6193,7 +11041,7 @@
       </p:sp>
       <p:sp>
         <p:nvSpPr>
-          <p:cNvPr id="6" name="Text 4"/>
+          <p:cNvPr id="7" name="Text 5"/>
           <p:cNvSpPr/>
           <p:nvPr/>
         </p:nvSpPr>
@@ -6226,7 +11074,7 @@
                 <a:ea typeface="Aptos Display" pitchFamily="34" charset="-122"/>
                 <a:cs typeface="Aptos Display" pitchFamily="34" charset="-120"/>
               </a:rPr>
-              <a:t>Module Overview</a:t>
+              <a:t>Related toolkit resources</a:t>
             </a:r>
             <a:endParaRPr lang="en-US" sz="2700" dirty="0"/>
           </a:p>
@@ -6234,32 +11082,192 @@
       </p:sp>
       <p:sp>
         <p:nvSpPr>
-          <p:cNvPr id="7" name="Text 5"/>
-          <p:cNvSpPr/>
-          <p:nvPr/>
-        </p:nvSpPr>
-        <p:spPr>
-          <a:xfrm>
-            <a:off x="822960" y="1325880"/>
-            <a:ext cx="10378440" cy="4800600"/>
-          </a:xfrm>
-          <a:prstGeom prst="rect">
-            <a:avLst/>
-          </a:prstGeom>
-          <a:noFill/>
-          <a:ln/>
-        </p:spPr>
-        <p:txBody>
-          <a:bodyPr wrap="square" lIns="1016" tIns="1016" rIns="1016" bIns="1016" rtlCol="0" anchor="t">
+          <p:cNvPr id="8" name="Text 6"/>
+          <p:cNvSpPr/>
+          <p:nvPr/>
+        </p:nvSpPr>
+        <p:spPr>
+          <a:xfrm>
+            <a:off x="868680" y="1417320"/>
+            <a:ext cx="6903720" cy="4480560"/>
+          </a:xfrm>
+          <a:prstGeom prst="rect">
+            <a:avLst/>
+          </a:prstGeom>
+          <a:noFill/>
+          <a:ln/>
+        </p:spPr>
+        <p:txBody>
+          <a:bodyPr wrap="square" lIns="635" tIns="635" rIns="635" bIns="635" rtlCol="0" anchor="t">
             <a:normAutofit/>
           </a:bodyPr>
           <a:lstStyle/>
           <a:p>
+            <a:r>
+              <a:rPr lang="en-US" sz="1460" dirty="0">
+                <a:solidFill>
+                  <a:srgbClr val="17364A"/>
+                </a:solidFill>
+                <a:latin typeface="Aptos" pitchFamily="34" charset="0"/>
+                <a:ea typeface="Aptos" pitchFamily="34" charset="-122"/>
+                <a:cs typeface="Aptos" pitchFamily="34" charset="-120"/>
+              </a:rPr>
+              <a:t>Tool 3: Equity Impact Assessment Checklist (Checklist) - Use this tool to complete or strengthen the practical exercise for the.</a:t>
+            </a:r>
+            <a:endParaRPr lang="en-US" sz="1460" dirty="0"/>
+          </a:p>
+          <a:p>
+            <a:r>
+              <a:rPr lang="en-US" sz="1460" dirty="0">
+                <a:solidFill>
+                  <a:srgbClr val="17364A"/>
+                </a:solidFill>
+                <a:latin typeface="Aptos" pitchFamily="34" charset="0"/>
+                <a:ea typeface="Aptos" pitchFamily="34" charset="-122"/>
+                <a:cs typeface="Aptos" pitchFamily="34" charset="-120"/>
+              </a:rPr>
+              <a:t>Tool 4: AI Policy Landscape Scan (Worksheet) - Use AI Policy Landscape Scan to translate this lesson into a documented public health.</a:t>
+            </a:r>
+            <a:endParaRPr lang="en-US" sz="1460" dirty="0"/>
+          </a:p>
+          <a:p>
+            <a:r>
+              <a:rPr lang="en-US" sz="1460" dirty="0">
+                <a:solidFill>
+                  <a:srgbClr val="17364A"/>
+                </a:solidFill>
+                <a:latin typeface="Aptos" pitchFamily="34" charset="0"/>
+                <a:ea typeface="Aptos" pitchFamily="34" charset="-122"/>
+                <a:cs typeface="Aptos" pitchFamily="34" charset="-120"/>
+              </a:rPr>
+              <a:t>Tool 5: AI Environmental and Resource Impact Review (Checklist) - Use AI Environmental and Resource Impact Review to translate this.</a:t>
+            </a:r>
+            <a:endParaRPr lang="en-US" sz="1460" dirty="0"/>
+          </a:p>
+          <a:p>
+            <a:r>
+              <a:rPr lang="en-US" sz="1460" dirty="0">
+                <a:solidFill>
+                  <a:srgbClr val="17364A"/>
+                </a:solidFill>
+                <a:latin typeface="Aptos" pitchFamily="34" charset="0"/>
+                <a:ea typeface="Aptos" pitchFamily="34" charset="-122"/>
+                <a:cs typeface="Aptos" pitchFamily="34" charset="-120"/>
+              </a:rPr>
+              <a:t>Tool 6: Human-Centered AI Decision Rule Checklist (Checklist) - Use this tool to complete or strengthen the practical exercise for.</a:t>
+            </a:r>
+            <a:endParaRPr lang="en-US" sz="1460" dirty="0"/>
+          </a:p>
+          <a:p>
+            <a:r>
+              <a:rPr lang="en-US" sz="1460" dirty="0">
+                <a:solidFill>
+                  <a:srgbClr val="17364A"/>
+                </a:solidFill>
+                <a:latin typeface="Aptos" pitchFamily="34" charset="0"/>
+                <a:ea typeface="Aptos" pitchFamily="34" charset="-122"/>
+                <a:cs typeface="Aptos" pitchFamily="34" charset="-120"/>
+              </a:rPr>
+              <a:t>Tool 8: AI Project Charter (Planning) - Use AI Project Charter to translate this lesson into a documented public health AI planning,.</a:t>
+            </a:r>
+            <a:endParaRPr lang="en-US" sz="1460" dirty="0"/>
+          </a:p>
+        </p:txBody>
+      </p:sp>
+      <p:sp>
+        <p:nvSpPr>
+          <p:cNvPr id="9" name="Shape 7"/>
+          <p:cNvSpPr/>
+          <p:nvPr/>
+        </p:nvSpPr>
+        <p:spPr>
+          <a:xfrm>
+            <a:off x="8046720" y="1417320"/>
+            <a:ext cx="3063240" cy="2103120"/>
+          </a:xfrm>
+          <a:prstGeom prst="roundRect">
+            <a:avLst>
+              <a:gd name="adj" fmla="val 5217"/>
+            </a:avLst>
+          </a:prstGeom>
+          <a:solidFill>
+            <a:srgbClr val="EAF6F8"/>
+          </a:solidFill>
+          <a:ln w="12700">
+            <a:solidFill>
+              <a:srgbClr val="B9D7E6"/>
+            </a:solidFill>
+            <a:prstDash val="solid"/>
+          </a:ln>
+        </p:spPr>
+      </p:sp>
+      <p:sp>
+        <p:nvSpPr>
+          <p:cNvPr id="10" name="Text 8"/>
+          <p:cNvSpPr/>
+          <p:nvPr/>
+        </p:nvSpPr>
+        <p:spPr>
+          <a:xfrm>
+            <a:off x="8211312" y="1563624"/>
+            <a:ext cx="2734056" cy="201168"/>
+          </a:xfrm>
+          <a:prstGeom prst="rect">
+            <a:avLst/>
+          </a:prstGeom>
+          <a:noFill/>
+          <a:ln/>
+        </p:spPr>
+        <p:txBody>
+          <a:bodyPr wrap="square" lIns="0" tIns="0" rIns="0" bIns="0" rtlCol="0" anchor="ctr"/>
+          <a:lstStyle/>
+          <a:p>
             <a:pPr indent="0" marL="0">
               <a:buNone/>
             </a:pPr>
             <a:r>
-              <a:rPr lang="en-US" sz="1420" dirty="0">
+              <a:rPr lang="en-US" sz="950" b="1" dirty="0">
+                <a:solidFill>
+                  <a:srgbClr val="0068B7"/>
+                </a:solidFill>
+                <a:latin typeface="Aptos" pitchFamily="34" charset="0"/>
+                <a:ea typeface="Aptos" pitchFamily="34" charset="-122"/>
+                <a:cs typeface="Aptos" pitchFamily="34" charset="-120"/>
+              </a:rPr>
+              <a:t>Use the tools</a:t>
+            </a:r>
+            <a:endParaRPr lang="en-US" sz="950" dirty="0"/>
+          </a:p>
+        </p:txBody>
+      </p:sp>
+      <p:sp>
+        <p:nvSpPr>
+          <p:cNvPr id="11" name="Text 9"/>
+          <p:cNvSpPr/>
+          <p:nvPr/>
+        </p:nvSpPr>
+        <p:spPr>
+          <a:xfrm>
+            <a:off x="8211312" y="1856232"/>
+            <a:ext cx="2734056" cy="1536192"/>
+          </a:xfrm>
+          <a:prstGeom prst="rect">
+            <a:avLst/>
+          </a:prstGeom>
+          <a:noFill/>
+          <a:ln/>
+        </p:spPr>
+        <p:txBody>
+          <a:bodyPr wrap="square" lIns="0" tIns="0" rIns="0" bIns="0" rtlCol="0" anchor="t">
+            <a:normAutofit/>
+          </a:bodyPr>
+          <a:lstStyle/>
+          <a:p>
+            <a:pPr indent="0" marL="0">
+              <a:buNone/>
+            </a:pPr>
+            <a:r>
+              <a:rPr lang="en-US" sz="1250" dirty="0">
                 <a:solidFill>
                   <a:srgbClr val="17364A"/>
                 </a:solidFill>
@@ -6267,9 +11275,116 @@
                 <a:ea typeface="Aptos" pitchFamily="34" charset="-122"/>
                 <a:cs typeface="Aptos" pitchFamily="34" charset="-120"/>
               </a:rPr>
-              <a:t>Public health agencies have a responsibility to explain how AI is used in ways that affect public services, public communication, surveillance, resource allocation, or community trust. Transparency reporting helps agencies communicate what AI tools are in use, why they are used, what safeguards are in place, and how the public or partners can raise concerns. This module helps leaders design AI transparency practices that are meaningful, not performative. Transparency should be understandable, accessible, and proportionate to risk. It should support public accountability while protecting security, privacy, confidential data, and sensitive operational details.</a:t>
-            </a:r>
-            <a:endParaRPr lang="en-US" sz="1420" dirty="0"/>
+              <a:t>Use linked tools when your department needs a structured worksheet, template, checklist, review process, or documentation artifact.</a:t>
+            </a:r>
+            <a:endParaRPr lang="en-US" sz="1250" dirty="0"/>
+          </a:p>
+        </p:txBody>
+      </p:sp>
+      <p:sp>
+        <p:nvSpPr>
+          <p:cNvPr id="12" name="Shape 10"/>
+          <p:cNvSpPr/>
+          <p:nvPr/>
+        </p:nvSpPr>
+        <p:spPr>
+          <a:xfrm>
+            <a:off x="8046720" y="3794760"/>
+            <a:ext cx="3063240" cy="1508760"/>
+          </a:xfrm>
+          <a:prstGeom prst="roundRect">
+            <a:avLst>
+              <a:gd name="adj" fmla="val 7273"/>
+            </a:avLst>
+          </a:prstGeom>
+          <a:solidFill>
+            <a:srgbClr val="EEF8ED"/>
+          </a:solidFill>
+          <a:ln w="12700">
+            <a:solidFill>
+              <a:srgbClr val="B9D7E6"/>
+            </a:solidFill>
+            <a:prstDash val="solid"/>
+          </a:ln>
+        </p:spPr>
+      </p:sp>
+      <p:sp>
+        <p:nvSpPr>
+          <p:cNvPr id="13" name="Text 11"/>
+          <p:cNvSpPr/>
+          <p:nvPr/>
+        </p:nvSpPr>
+        <p:spPr>
+          <a:xfrm>
+            <a:off x="8211312" y="3941064"/>
+            <a:ext cx="2734056" cy="201168"/>
+          </a:xfrm>
+          <a:prstGeom prst="rect">
+            <a:avLst/>
+          </a:prstGeom>
+          <a:noFill/>
+          <a:ln/>
+        </p:spPr>
+        <p:txBody>
+          <a:bodyPr wrap="square" lIns="0" tIns="0" rIns="0" bIns="0" rtlCol="0" anchor="ctr"/>
+          <a:lstStyle/>
+          <a:p>
+            <a:pPr indent="0" marL="0">
+              <a:buNone/>
+            </a:pPr>
+            <a:r>
+              <a:rPr lang="en-US" sz="950" b="1" dirty="0">
+                <a:solidFill>
+                  <a:srgbClr val="0068B7"/>
+                </a:solidFill>
+                <a:latin typeface="Aptos" pitchFamily="34" charset="0"/>
+                <a:ea typeface="Aptos" pitchFamily="34" charset="-122"/>
+                <a:cs typeface="Aptos" pitchFamily="34" charset="-120"/>
+              </a:rPr>
+              <a:t>Avoid duplication</a:t>
+            </a:r>
+            <a:endParaRPr lang="en-US" sz="950" dirty="0"/>
+          </a:p>
+        </p:txBody>
+      </p:sp>
+      <p:sp>
+        <p:nvSpPr>
+          <p:cNvPr id="14" name="Text 12"/>
+          <p:cNvSpPr/>
+          <p:nvPr/>
+        </p:nvSpPr>
+        <p:spPr>
+          <a:xfrm>
+            <a:off x="8211312" y="4233672"/>
+            <a:ext cx="2734056" cy="941832"/>
+          </a:xfrm>
+          <a:prstGeom prst="rect">
+            <a:avLst/>
+          </a:prstGeom>
+          <a:noFill/>
+          <a:ln/>
+        </p:spPr>
+        <p:txBody>
+          <a:bodyPr wrap="square" lIns="0" tIns="0" rIns="0" bIns="0" rtlCol="0" anchor="t">
+            <a:normAutofit/>
+          </a:bodyPr>
+          <a:lstStyle/>
+          <a:p>
+            <a:pPr indent="0" marL="0">
+              <a:buNone/>
+            </a:pPr>
+            <a:r>
+              <a:rPr lang="en-US" sz="1250" dirty="0">
+                <a:solidFill>
+                  <a:srgbClr val="17364A"/>
+                </a:solidFill>
+                <a:latin typeface="Aptos" pitchFamily="34" charset="0"/>
+                <a:ea typeface="Aptos" pitchFamily="34" charset="-122"/>
+                <a:cs typeface="Aptos" pitchFamily="34" charset="-120"/>
+              </a:rPr>
+              <a:t>If your department already has a strong equivalent tool, adapt or use the existing process instead of recreating it.</a:t>
+            </a:r>
+            <a:endParaRPr lang="en-US" sz="1250" dirty="0"/>
           </a:p>
         </p:txBody>
       </p:sp>
@@ -6332,7 +11447,32 @@
       </p:sp>
       <p:sp>
         <p:nvSpPr>
-          <p:cNvPr id="3" name="Text 1"/>
+          <p:cNvPr id="3" name="Shape 1"/>
+          <p:cNvSpPr/>
+          <p:nvPr/>
+        </p:nvSpPr>
+        <p:spPr>
+          <a:xfrm>
+            <a:off x="0" y="164592"/>
+            <a:ext cx="146304" cy="6693408"/>
+          </a:xfrm>
+          <a:prstGeom prst="rect">
+            <a:avLst/>
+          </a:prstGeom>
+          <a:solidFill>
+            <a:srgbClr val="2F8A28"/>
+          </a:solidFill>
+          <a:ln w="12700">
+            <a:solidFill>
+              <a:srgbClr val="2F8A28"/>
+            </a:solidFill>
+            <a:prstDash val="solid"/>
+          </a:ln>
+        </p:spPr>
+      </p:sp>
+      <p:sp>
+        <p:nvSpPr>
+          <p:cNvPr id="4" name="Text 2"/>
           <p:cNvSpPr/>
           <p:nvPr/>
         </p:nvSpPr>
@@ -6371,7 +11511,7 @@
       </p:sp>
       <p:sp>
         <p:nvSpPr>
-          <p:cNvPr id="4" name="Text 2"/>
+          <p:cNvPr id="5" name="Text 3"/>
           <p:cNvSpPr/>
           <p:nvPr/>
         </p:nvSpPr>
@@ -6410,7 +11550,7 @@
       </p:sp>
       <p:sp>
         <p:nvSpPr>
-          <p:cNvPr id="5" name="Text 3"/>
+          <p:cNvPr id="6" name="Text 4"/>
           <p:cNvSpPr/>
           <p:nvPr/>
         </p:nvSpPr>
@@ -6449,13 +11589,77 @@
       </p:sp>
       <p:sp>
         <p:nvSpPr>
-          <p:cNvPr id="6" name="Text 4"/>
+          <p:cNvPr id="7" name="Shape 5"/>
           <p:cNvSpPr/>
           <p:nvPr/>
         </p:nvSpPr>
         <p:spPr>
           <a:xfrm>
             <a:off x="640080" y="658368"/>
+            <a:ext cx="420624" cy="420624"/>
+          </a:xfrm>
+          <a:prstGeom prst="ellipse">
+            <a:avLst/>
+          </a:prstGeom>
+          <a:solidFill>
+            <a:srgbClr val="0068B7"/>
+          </a:solidFill>
+          <a:ln w="12700">
+            <a:solidFill>
+              <a:srgbClr val="0068B7"/>
+            </a:solidFill>
+            <a:prstDash val="solid"/>
+          </a:ln>
+        </p:spPr>
+      </p:sp>
+      <p:sp>
+        <p:nvSpPr>
+          <p:cNvPr id="8" name="Text 6"/>
+          <p:cNvSpPr/>
+          <p:nvPr/>
+        </p:nvSpPr>
+        <p:spPr>
+          <a:xfrm>
+            <a:off x="640080" y="731520"/>
+            <a:ext cx="420624" cy="164592"/>
+          </a:xfrm>
+          <a:prstGeom prst="rect">
+            <a:avLst/>
+          </a:prstGeom>
+          <a:noFill/>
+          <a:ln/>
+        </p:spPr>
+        <p:txBody>
+          <a:bodyPr wrap="square" lIns="0" tIns="0" rIns="0" bIns="0" rtlCol="0" anchor="ctr"/>
+          <a:lstStyle/>
+          <a:p>
+            <a:pPr algn="ctr" indent="0" marL="0">
+              <a:buNone/>
+            </a:pPr>
+            <a:r>
+              <a:rPr lang="en-US" sz="1100" b="1" dirty="0">
+                <a:solidFill>
+                  <a:srgbClr val="FFFFFF"/>
+                </a:solidFill>
+                <a:latin typeface="Aptos" pitchFamily="34" charset="0"/>
+                <a:ea typeface="Aptos" pitchFamily="34" charset="-122"/>
+                <a:cs typeface="Aptos" pitchFamily="34" charset="-120"/>
+              </a:rPr>
+              <a:t>1</a:t>
+            </a:r>
+            <a:endParaRPr lang="en-US" sz="1100" dirty="0"/>
+          </a:p>
+        </p:txBody>
+      </p:sp>
+      <p:sp>
+        <p:nvSpPr>
+          <p:cNvPr id="9" name="Text 7"/>
+          <p:cNvSpPr/>
+          <p:nvPr/>
+        </p:nvSpPr>
+        <p:spPr>
+          <a:xfrm>
+            <a:off x="640080" y="621792"/>
             <a:ext cx="10881360" cy="566928"/>
           </a:xfrm>
           <a:prstGeom prst="rect">
@@ -6482,7 +11686,7 @@
                 <a:ea typeface="Aptos Display" pitchFamily="34" charset="-122"/>
                 <a:cs typeface="Aptos Display" pitchFamily="34" charset="-120"/>
               </a:rPr>
-              <a:t>Jurisdiction and Agency Policy Note</a:t>
+              <a:t>Learning Objectives</a:t>
             </a:r>
             <a:endParaRPr lang="en-US" sz="2700" dirty="0"/>
           </a:p>
@@ -6490,32 +11694,178 @@
       </p:sp>
       <p:sp>
         <p:nvSpPr>
-          <p:cNvPr id="7" name="Text 5"/>
-          <p:cNvSpPr/>
-          <p:nvPr/>
-        </p:nvSpPr>
-        <p:spPr>
-          <a:xfrm>
-            <a:off x="822960" y="1325880"/>
-            <a:ext cx="10378440" cy="4800600"/>
-          </a:xfrm>
-          <a:prstGeom prst="rect">
-            <a:avLst/>
-          </a:prstGeom>
-          <a:noFill/>
-          <a:ln/>
-        </p:spPr>
-        <p:txBody>
-          <a:bodyPr wrap="square" lIns="1016" tIns="1016" rIns="1016" bIns="1016" rtlCol="0" anchor="t">
+          <p:cNvPr id="10" name="Text 8"/>
+          <p:cNvSpPr/>
+          <p:nvPr/>
+        </p:nvSpPr>
+        <p:spPr>
+          <a:xfrm>
+            <a:off x="868680" y="1417320"/>
+            <a:ext cx="6675120" cy="4434840"/>
+          </a:xfrm>
+          <a:prstGeom prst="rect">
+            <a:avLst/>
+          </a:prstGeom>
+          <a:noFill/>
+          <a:ln/>
+        </p:spPr>
+        <p:txBody>
+          <a:bodyPr wrap="square" lIns="635" tIns="635" rIns="635" bIns="635" rtlCol="0" anchor="t">
             <a:normAutofit/>
           </a:bodyPr>
           <a:lstStyle/>
           <a:p>
+            <a:r>
+              <a:rPr lang="en-US" sz="1700" dirty="0">
+                <a:solidFill>
+                  <a:srgbClr val="17364A"/>
+                </a:solidFill>
+                <a:latin typeface="Aptos" pitchFamily="34" charset="0"/>
+                <a:ea typeface="Aptos" pitchFamily="34" charset="-122"/>
+                <a:cs typeface="Aptos" pitchFamily="34" charset="-120"/>
+              </a:rPr>
+              <a:t>Explain why transparency reporting matters for public health AI.</a:t>
+            </a:r>
+            <a:endParaRPr lang="en-US" sz="1700" dirty="0"/>
+          </a:p>
+          <a:p>
+            <a:r>
+              <a:rPr lang="en-US" sz="1700" dirty="0">
+                <a:solidFill>
+                  <a:srgbClr val="17364A"/>
+                </a:solidFill>
+                <a:latin typeface="Aptos" pitchFamily="34" charset="0"/>
+                <a:ea typeface="Aptos" pitchFamily="34" charset="-122"/>
+                <a:cs typeface="Aptos" pitchFamily="34" charset="-120"/>
+              </a:rPr>
+              <a:t>Identify which AI uses should be disclosed internally, publicly, or to specific partners.</a:t>
+            </a:r>
+            <a:endParaRPr lang="en-US" sz="1700" dirty="0"/>
+          </a:p>
+          <a:p>
+            <a:r>
+              <a:rPr lang="en-US" sz="1700" dirty="0">
+                <a:solidFill>
+                  <a:srgbClr val="17364A"/>
+                </a:solidFill>
+                <a:latin typeface="Aptos" pitchFamily="34" charset="0"/>
+                <a:ea typeface="Aptos" pitchFamily="34" charset="-122"/>
+                <a:cs typeface="Aptos" pitchFamily="34" charset="-120"/>
+              </a:rPr>
+              <a:t>Develop contents for an AI transparency notice or AI use registry.</a:t>
+            </a:r>
+            <a:endParaRPr lang="en-US" sz="1700" dirty="0"/>
+          </a:p>
+          <a:p>
+            <a:r>
+              <a:rPr lang="en-US" sz="1700" dirty="0">
+                <a:solidFill>
+                  <a:srgbClr val="17364A"/>
+                </a:solidFill>
+                <a:latin typeface="Aptos" pitchFamily="34" charset="0"/>
+                <a:ea typeface="Aptos" pitchFamily="34" charset="-122"/>
+                <a:cs typeface="Aptos" pitchFamily="34" charset="-120"/>
+              </a:rPr>
+              <a:t>Balance transparency with privacy, security, confidentiality, and operational sensitivity.</a:t>
+            </a:r>
+            <a:endParaRPr lang="en-US" sz="1700" dirty="0"/>
+          </a:p>
+        </p:txBody>
+      </p:sp>
+      <p:sp>
+        <p:nvSpPr>
+          <p:cNvPr id="11" name="Shape 9"/>
+          <p:cNvSpPr/>
+          <p:nvPr/>
+        </p:nvSpPr>
+        <p:spPr>
+          <a:xfrm>
+            <a:off x="7909560" y="1417320"/>
+            <a:ext cx="3154680" cy="1828800"/>
+          </a:xfrm>
+          <a:prstGeom prst="roundRect">
+            <a:avLst>
+              <a:gd name="adj" fmla="val 6000"/>
+            </a:avLst>
+          </a:prstGeom>
+          <a:solidFill>
+            <a:srgbClr val="EEF8ED"/>
+          </a:solidFill>
+          <a:ln w="12700">
+            <a:solidFill>
+              <a:srgbClr val="B9D7E6"/>
+            </a:solidFill>
+            <a:prstDash val="solid"/>
+          </a:ln>
+        </p:spPr>
+      </p:sp>
+      <p:sp>
+        <p:nvSpPr>
+          <p:cNvPr id="12" name="Text 10"/>
+          <p:cNvSpPr/>
+          <p:nvPr/>
+        </p:nvSpPr>
+        <p:spPr>
+          <a:xfrm>
+            <a:off x="8074152" y="1563624"/>
+            <a:ext cx="2825496" cy="201168"/>
+          </a:xfrm>
+          <a:prstGeom prst="rect">
+            <a:avLst/>
+          </a:prstGeom>
+          <a:noFill/>
+          <a:ln/>
+        </p:spPr>
+        <p:txBody>
+          <a:bodyPr wrap="square" lIns="0" tIns="0" rIns="0" bIns="0" rtlCol="0" anchor="ctr"/>
+          <a:lstStyle/>
+          <a:p>
             <a:pPr indent="0" marL="0">
               <a:buNone/>
             </a:pPr>
             <a:r>
-              <a:rPr lang="en-US" sz="1420" dirty="0">
+              <a:rPr lang="en-US" sz="950" b="1" dirty="0">
+                <a:solidFill>
+                  <a:srgbClr val="0068B7"/>
+                </a:solidFill>
+                <a:latin typeface="Aptos" pitchFamily="34" charset="0"/>
+                <a:ea typeface="Aptos" pitchFamily="34" charset="-122"/>
+                <a:cs typeface="Aptos" pitchFamily="34" charset="-120"/>
+              </a:rPr>
+              <a:t>Key idea</a:t>
+            </a:r>
+            <a:endParaRPr lang="en-US" sz="950" dirty="0"/>
+          </a:p>
+        </p:txBody>
+      </p:sp>
+      <p:sp>
+        <p:nvSpPr>
+          <p:cNvPr id="13" name="Text 11"/>
+          <p:cNvSpPr/>
+          <p:nvPr/>
+        </p:nvSpPr>
+        <p:spPr>
+          <a:xfrm>
+            <a:off x="8074152" y="1856232"/>
+            <a:ext cx="2825496" cy="1261872"/>
+          </a:xfrm>
+          <a:prstGeom prst="rect">
+            <a:avLst/>
+          </a:prstGeom>
+          <a:noFill/>
+          <a:ln/>
+        </p:spPr>
+        <p:txBody>
+          <a:bodyPr wrap="square" lIns="0" tIns="0" rIns="0" bIns="0" rtlCol="0" anchor="t">
+            <a:normAutofit/>
+          </a:bodyPr>
+          <a:lstStyle/>
+          <a:p>
+            <a:pPr indent="0" marL="0">
+              <a:buNone/>
+            </a:pPr>
+            <a:r>
+              <a:rPr lang="en-US" sz="1250" dirty="0">
                 <a:solidFill>
                   <a:srgbClr val="17364A"/>
                 </a:solidFill>
@@ -6523,9 +11873,116 @@
                 <a:ea typeface="Aptos" pitchFamily="34" charset="-122"/>
                 <a:cs typeface="Aptos" pitchFamily="34" charset="-120"/>
               </a:rPr>
-              <a:t>This module provides national-level training guidance for public health agencies and partners. It is not legal advice and does not replace review by agency legal counsel, privacy officers, procurement officials, civil rights staff, records officers, or other authorized decision-makers. Requirements may vary by state, locality, territory, Tribe, agency, funding source, data-sharing agreement, emergency authority, and organizational policy. Learners should use this module to identify the issues that require review and should confirm applicable requirements before approving, procuring, deploying, or publicly communicating about AI-supported work.</a:t>
-            </a:r>
-            <a:endParaRPr lang="en-US" sz="1420" dirty="0"/>
+              <a:t>Explain why transparency reporting matters for public health AI.</a:t>
+            </a:r>
+            <a:endParaRPr lang="en-US" sz="1250" dirty="0"/>
+          </a:p>
+        </p:txBody>
+      </p:sp>
+      <p:sp>
+        <p:nvSpPr>
+          <p:cNvPr id="14" name="Shape 12"/>
+          <p:cNvSpPr/>
+          <p:nvPr/>
+        </p:nvSpPr>
+        <p:spPr>
+          <a:xfrm>
+            <a:off x="7909560" y="3520440"/>
+            <a:ext cx="3154680" cy="1737360"/>
+          </a:xfrm>
+          <a:prstGeom prst="roundRect">
+            <a:avLst>
+              <a:gd name="adj" fmla="val 6316"/>
+            </a:avLst>
+          </a:prstGeom>
+          <a:solidFill>
+            <a:srgbClr val="EAF6F8"/>
+          </a:solidFill>
+          <a:ln w="12700">
+            <a:solidFill>
+              <a:srgbClr val="B9D7E6"/>
+            </a:solidFill>
+            <a:prstDash val="solid"/>
+          </a:ln>
+        </p:spPr>
+      </p:sp>
+      <p:sp>
+        <p:nvSpPr>
+          <p:cNvPr id="15" name="Text 13"/>
+          <p:cNvSpPr/>
+          <p:nvPr/>
+        </p:nvSpPr>
+        <p:spPr>
+          <a:xfrm>
+            <a:off x="8074152" y="3666744"/>
+            <a:ext cx="2825496" cy="201168"/>
+          </a:xfrm>
+          <a:prstGeom prst="rect">
+            <a:avLst/>
+          </a:prstGeom>
+          <a:noFill/>
+          <a:ln/>
+        </p:spPr>
+        <p:txBody>
+          <a:bodyPr wrap="square" lIns="0" tIns="0" rIns="0" bIns="0" rtlCol="0" anchor="ctr"/>
+          <a:lstStyle/>
+          <a:p>
+            <a:pPr indent="0" marL="0">
+              <a:buNone/>
+            </a:pPr>
+            <a:r>
+              <a:rPr lang="en-US" sz="950" b="1" dirty="0">
+                <a:solidFill>
+                  <a:srgbClr val="0068B7"/>
+                </a:solidFill>
+                <a:latin typeface="Aptos" pitchFamily="34" charset="0"/>
+                <a:ea typeface="Aptos" pitchFamily="34" charset="-122"/>
+                <a:cs typeface="Aptos" pitchFamily="34" charset="-120"/>
+              </a:rPr>
+              <a:t>Use this for</a:t>
+            </a:r>
+            <a:endParaRPr lang="en-US" sz="950" dirty="0"/>
+          </a:p>
+        </p:txBody>
+      </p:sp>
+      <p:sp>
+        <p:nvSpPr>
+          <p:cNvPr id="16" name="Text 14"/>
+          <p:cNvSpPr/>
+          <p:nvPr/>
+        </p:nvSpPr>
+        <p:spPr>
+          <a:xfrm>
+            <a:off x="8074152" y="3959352"/>
+            <a:ext cx="2825496" cy="1170432"/>
+          </a:xfrm>
+          <a:prstGeom prst="rect">
+            <a:avLst/>
+          </a:prstGeom>
+          <a:noFill/>
+          <a:ln/>
+        </p:spPr>
+        <p:txBody>
+          <a:bodyPr wrap="square" lIns="0" tIns="0" rIns="0" bIns="0" rtlCol="0" anchor="t">
+            <a:normAutofit/>
+          </a:bodyPr>
+          <a:lstStyle/>
+          <a:p>
+            <a:pPr indent="0" marL="0">
+              <a:buNone/>
+            </a:pPr>
+            <a:r>
+              <a:rPr lang="en-US" sz="1250" dirty="0">
+                <a:solidFill>
+                  <a:srgbClr val="17364A"/>
+                </a:solidFill>
+                <a:latin typeface="Aptos" pitchFamily="34" charset="0"/>
+                <a:ea typeface="Aptos" pitchFamily="34" charset="-122"/>
+                <a:cs typeface="Aptos" pitchFamily="34" charset="-120"/>
+              </a:rPr>
+              <a:t>Connect the concept to public health decisions, safeguards, documentation, or implementation work.</a:t>
+            </a:r>
+            <a:endParaRPr lang="en-US" sz="1250" dirty="0"/>
           </a:p>
         </p:txBody>
       </p:sp>
@@ -6588,7 +12045,32 @@
       </p:sp>
       <p:sp>
         <p:nvSpPr>
-          <p:cNvPr id="3" name="Text 1"/>
+          <p:cNvPr id="3" name="Shape 1"/>
+          <p:cNvSpPr/>
+          <p:nvPr/>
+        </p:nvSpPr>
+        <p:spPr>
+          <a:xfrm>
+            <a:off x="0" y="164592"/>
+            <a:ext cx="146304" cy="6693408"/>
+          </a:xfrm>
+          <a:prstGeom prst="rect">
+            <a:avLst/>
+          </a:prstGeom>
+          <a:solidFill>
+            <a:srgbClr val="2F8A28"/>
+          </a:solidFill>
+          <a:ln w="12700">
+            <a:solidFill>
+              <a:srgbClr val="2F8A28"/>
+            </a:solidFill>
+            <a:prstDash val="solid"/>
+          </a:ln>
+        </p:spPr>
+      </p:sp>
+      <p:sp>
+        <p:nvSpPr>
+          <p:cNvPr id="4" name="Text 2"/>
           <p:cNvSpPr/>
           <p:nvPr/>
         </p:nvSpPr>
@@ -6627,7 +12109,7 @@
       </p:sp>
       <p:sp>
         <p:nvSpPr>
-          <p:cNvPr id="4" name="Text 2"/>
+          <p:cNvPr id="5" name="Text 3"/>
           <p:cNvSpPr/>
           <p:nvPr/>
         </p:nvSpPr>
@@ -6666,7 +12148,7 @@
       </p:sp>
       <p:sp>
         <p:nvSpPr>
-          <p:cNvPr id="5" name="Text 3"/>
+          <p:cNvPr id="6" name="Text 4"/>
           <p:cNvSpPr/>
           <p:nvPr/>
         </p:nvSpPr>
@@ -6705,13 +12187,77 @@
       </p:sp>
       <p:sp>
         <p:nvSpPr>
-          <p:cNvPr id="6" name="Text 4"/>
+          <p:cNvPr id="7" name="Shape 5"/>
           <p:cNvSpPr/>
           <p:nvPr/>
         </p:nvSpPr>
         <p:spPr>
           <a:xfrm>
             <a:off x="640080" y="658368"/>
+            <a:ext cx="420624" cy="420624"/>
+          </a:xfrm>
+          <a:prstGeom prst="ellipse">
+            <a:avLst/>
+          </a:prstGeom>
+          <a:solidFill>
+            <a:srgbClr val="0068B7"/>
+          </a:solidFill>
+          <a:ln w="12700">
+            <a:solidFill>
+              <a:srgbClr val="0068B7"/>
+            </a:solidFill>
+            <a:prstDash val="solid"/>
+          </a:ln>
+        </p:spPr>
+      </p:sp>
+      <p:sp>
+        <p:nvSpPr>
+          <p:cNvPr id="8" name="Text 6"/>
+          <p:cNvSpPr/>
+          <p:nvPr/>
+        </p:nvSpPr>
+        <p:spPr>
+          <a:xfrm>
+            <a:off x="640080" y="731520"/>
+            <a:ext cx="420624" cy="164592"/>
+          </a:xfrm>
+          <a:prstGeom prst="rect">
+            <a:avLst/>
+          </a:prstGeom>
+          <a:noFill/>
+          <a:ln/>
+        </p:spPr>
+        <p:txBody>
+          <a:bodyPr wrap="square" lIns="0" tIns="0" rIns="0" bIns="0" rtlCol="0" anchor="ctr"/>
+          <a:lstStyle/>
+          <a:p>
+            <a:pPr algn="ctr" indent="0" marL="0">
+              <a:buNone/>
+            </a:pPr>
+            <a:r>
+              <a:rPr lang="en-US" sz="1100" b="1" dirty="0">
+                <a:solidFill>
+                  <a:srgbClr val="FFFFFF"/>
+                </a:solidFill>
+                <a:latin typeface="Aptos" pitchFamily="34" charset="0"/>
+                <a:ea typeface="Aptos" pitchFamily="34" charset="-122"/>
+                <a:cs typeface="Aptos" pitchFamily="34" charset="-120"/>
+              </a:rPr>
+              <a:t>2</a:t>
+            </a:r>
+            <a:endParaRPr lang="en-US" sz="1100" dirty="0"/>
+          </a:p>
+        </p:txBody>
+      </p:sp>
+      <p:sp>
+        <p:nvSpPr>
+          <p:cNvPr id="9" name="Text 7"/>
+          <p:cNvSpPr/>
+          <p:nvPr/>
+        </p:nvSpPr>
+        <p:spPr>
+          <a:xfrm>
+            <a:off x="640080" y="621792"/>
             <a:ext cx="10881360" cy="566928"/>
           </a:xfrm>
           <a:prstGeom prst="rect">
@@ -6738,7 +12284,7 @@
                 <a:ea typeface="Aptos Display" pitchFamily="34" charset="-122"/>
                 <a:cs typeface="Aptos Display" pitchFamily="34" charset="-120"/>
               </a:rPr>
-              <a:t>Why This Topic Matters for Public Health AI</a:t>
+              <a:t>Module Overview</a:t>
             </a:r>
             <a:endParaRPr lang="en-US" sz="2700" dirty="0"/>
           </a:p>
@@ -6746,32 +12292,178 @@
       </p:sp>
       <p:sp>
         <p:nvSpPr>
-          <p:cNvPr id="7" name="Text 5"/>
-          <p:cNvSpPr/>
-          <p:nvPr/>
-        </p:nvSpPr>
-        <p:spPr>
-          <a:xfrm>
-            <a:off x="822960" y="1325880"/>
-            <a:ext cx="10378440" cy="4800600"/>
-          </a:xfrm>
-          <a:prstGeom prst="rect">
-            <a:avLst/>
-          </a:prstGeom>
-          <a:noFill/>
-          <a:ln/>
-        </p:spPr>
-        <p:txBody>
-          <a:bodyPr wrap="square" lIns="1016" tIns="1016" rIns="1016" bIns="1016" rtlCol="0" anchor="t">
+          <p:cNvPr id="10" name="Text 8"/>
+          <p:cNvSpPr/>
+          <p:nvPr/>
+        </p:nvSpPr>
+        <p:spPr>
+          <a:xfrm>
+            <a:off x="868680" y="1417320"/>
+            <a:ext cx="6675120" cy="4434840"/>
+          </a:xfrm>
+          <a:prstGeom prst="rect">
+            <a:avLst/>
+          </a:prstGeom>
+          <a:noFill/>
+          <a:ln/>
+        </p:spPr>
+        <p:txBody>
+          <a:bodyPr wrap="square" lIns="635" tIns="635" rIns="635" bIns="635" rtlCol="0" anchor="t">
             <a:normAutofit/>
           </a:bodyPr>
           <a:lstStyle/>
           <a:p>
+            <a:r>
+              <a:rPr lang="en-US" sz="1700" dirty="0">
+                <a:solidFill>
+                  <a:srgbClr val="17364A"/>
+                </a:solidFill>
+                <a:latin typeface="Aptos" pitchFamily="34" charset="0"/>
+                <a:ea typeface="Aptos" pitchFamily="34" charset="-122"/>
+                <a:cs typeface="Aptos" pitchFamily="34" charset="-120"/>
+              </a:rPr>
+              <a:t>Public health agencies have a responsibility to explain how AI is used in ways that affect public services, public.</a:t>
+            </a:r>
+            <a:endParaRPr lang="en-US" sz="1700" dirty="0"/>
+          </a:p>
+          <a:p>
+            <a:r>
+              <a:rPr lang="en-US" sz="1700" dirty="0">
+                <a:solidFill>
+                  <a:srgbClr val="17364A"/>
+                </a:solidFill>
+                <a:latin typeface="Aptos" pitchFamily="34" charset="0"/>
+                <a:ea typeface="Aptos" pitchFamily="34" charset="-122"/>
+                <a:cs typeface="Aptos" pitchFamily="34" charset="-120"/>
+              </a:rPr>
+              <a:t>Transparency reporting helps agencies communicate what AI tools are in use, why they are used, what safeguards are in.</a:t>
+            </a:r>
+            <a:endParaRPr lang="en-US" sz="1700" dirty="0"/>
+          </a:p>
+          <a:p>
+            <a:r>
+              <a:rPr lang="en-US" sz="1700" dirty="0">
+                <a:solidFill>
+                  <a:srgbClr val="17364A"/>
+                </a:solidFill>
+                <a:latin typeface="Aptos" pitchFamily="34" charset="0"/>
+                <a:ea typeface="Aptos" pitchFamily="34" charset="-122"/>
+                <a:cs typeface="Aptos" pitchFamily="34" charset="-120"/>
+              </a:rPr>
+              <a:t>This module helps leaders design AI transparency practices that are meaningful, not performative.</a:t>
+            </a:r>
+            <a:endParaRPr lang="en-US" sz="1700" dirty="0"/>
+          </a:p>
+          <a:p>
+            <a:r>
+              <a:rPr lang="en-US" sz="1700" dirty="0">
+                <a:solidFill>
+                  <a:srgbClr val="17364A"/>
+                </a:solidFill>
+                <a:latin typeface="Aptos" pitchFamily="34" charset="0"/>
+                <a:ea typeface="Aptos" pitchFamily="34" charset="-122"/>
+                <a:cs typeface="Aptos" pitchFamily="34" charset="-120"/>
+              </a:rPr>
+              <a:t>Transparency should be understandable, accessible, and proportionate to risk.</a:t>
+            </a:r>
+            <a:endParaRPr lang="en-US" sz="1700" dirty="0"/>
+          </a:p>
+        </p:txBody>
+      </p:sp>
+      <p:sp>
+        <p:nvSpPr>
+          <p:cNvPr id="11" name="Shape 9"/>
+          <p:cNvSpPr/>
+          <p:nvPr/>
+        </p:nvSpPr>
+        <p:spPr>
+          <a:xfrm>
+            <a:off x="7909560" y="1417320"/>
+            <a:ext cx="3154680" cy="1828800"/>
+          </a:xfrm>
+          <a:prstGeom prst="roundRect">
+            <a:avLst>
+              <a:gd name="adj" fmla="val 6000"/>
+            </a:avLst>
+          </a:prstGeom>
+          <a:solidFill>
+            <a:srgbClr val="EEF8ED"/>
+          </a:solidFill>
+          <a:ln w="12700">
+            <a:solidFill>
+              <a:srgbClr val="B9D7E6"/>
+            </a:solidFill>
+            <a:prstDash val="solid"/>
+          </a:ln>
+        </p:spPr>
+      </p:sp>
+      <p:sp>
+        <p:nvSpPr>
+          <p:cNvPr id="12" name="Text 10"/>
+          <p:cNvSpPr/>
+          <p:nvPr/>
+        </p:nvSpPr>
+        <p:spPr>
+          <a:xfrm>
+            <a:off x="8074152" y="1563624"/>
+            <a:ext cx="2825496" cy="201168"/>
+          </a:xfrm>
+          <a:prstGeom prst="rect">
+            <a:avLst/>
+          </a:prstGeom>
+          <a:noFill/>
+          <a:ln/>
+        </p:spPr>
+        <p:txBody>
+          <a:bodyPr wrap="square" lIns="0" tIns="0" rIns="0" bIns="0" rtlCol="0" anchor="ctr"/>
+          <a:lstStyle/>
+          <a:p>
             <a:pPr indent="0" marL="0">
               <a:buNone/>
             </a:pPr>
             <a:r>
-              <a:rPr lang="en-US" sz="1420" dirty="0">
+              <a:rPr lang="en-US" sz="950" b="1" dirty="0">
+                <a:solidFill>
+                  <a:srgbClr val="0068B7"/>
+                </a:solidFill>
+                <a:latin typeface="Aptos" pitchFamily="34" charset="0"/>
+                <a:ea typeface="Aptos" pitchFamily="34" charset="-122"/>
+                <a:cs typeface="Aptos" pitchFamily="34" charset="-120"/>
+              </a:rPr>
+              <a:t>Key idea</a:t>
+            </a:r>
+            <a:endParaRPr lang="en-US" sz="950" dirty="0"/>
+          </a:p>
+        </p:txBody>
+      </p:sp>
+      <p:sp>
+        <p:nvSpPr>
+          <p:cNvPr id="13" name="Text 11"/>
+          <p:cNvSpPr/>
+          <p:nvPr/>
+        </p:nvSpPr>
+        <p:spPr>
+          <a:xfrm>
+            <a:off x="8074152" y="1856232"/>
+            <a:ext cx="2825496" cy="1261872"/>
+          </a:xfrm>
+          <a:prstGeom prst="rect">
+            <a:avLst/>
+          </a:prstGeom>
+          <a:noFill/>
+          <a:ln/>
+        </p:spPr>
+        <p:txBody>
+          <a:bodyPr wrap="square" lIns="0" tIns="0" rIns="0" bIns="0" rtlCol="0" anchor="t">
+            <a:normAutofit/>
+          </a:bodyPr>
+          <a:lstStyle/>
+          <a:p>
+            <a:pPr indent="0" marL="0">
+              <a:buNone/>
+            </a:pPr>
+            <a:r>
+              <a:rPr lang="en-US" sz="1250" dirty="0">
                 <a:solidFill>
                   <a:srgbClr val="17364A"/>
                 </a:solidFill>
@@ -6779,9 +12471,116 @@
                 <a:ea typeface="Aptos" pitchFamily="34" charset="-122"/>
                 <a:cs typeface="Aptos" pitchFamily="34" charset="-120"/>
               </a:rPr>
-              <a:t>Public health depends on trust. If communities discover that AI is being used in surveillance, communication, service routing, or resource allocation without explanation, they may question whether decisions are fair, accurate, or accountable. Transparency does not require agencies to disclose every technical detail, but it does require clear communication about the purpose and safeguards of consequential AI uses. Transparency also improves internal accountability. A registry of AI use cases helps leaders know what tools are active, who owns them, what data they use, and when they were last reviewed. It reduces the chance that tools continue operating after their purpose, vendor terms, data sources, or risk profile changes.</a:t>
-            </a:r>
-            <a:endParaRPr lang="en-US" sz="1420" dirty="0"/>
+              <a:t>Public health agencies have a responsibility to explain how AI is used in ways that affect public services, public.</a:t>
+            </a:r>
+            <a:endParaRPr lang="en-US" sz="1250" dirty="0"/>
+          </a:p>
+        </p:txBody>
+      </p:sp>
+      <p:sp>
+        <p:nvSpPr>
+          <p:cNvPr id="14" name="Shape 12"/>
+          <p:cNvSpPr/>
+          <p:nvPr/>
+        </p:nvSpPr>
+        <p:spPr>
+          <a:xfrm>
+            <a:off x="7909560" y="3520440"/>
+            <a:ext cx="3154680" cy="1737360"/>
+          </a:xfrm>
+          <a:prstGeom prst="roundRect">
+            <a:avLst>
+              <a:gd name="adj" fmla="val 6316"/>
+            </a:avLst>
+          </a:prstGeom>
+          <a:solidFill>
+            <a:srgbClr val="EAF6F8"/>
+          </a:solidFill>
+          <a:ln w="12700">
+            <a:solidFill>
+              <a:srgbClr val="B9D7E6"/>
+            </a:solidFill>
+            <a:prstDash val="solid"/>
+          </a:ln>
+        </p:spPr>
+      </p:sp>
+      <p:sp>
+        <p:nvSpPr>
+          <p:cNvPr id="15" name="Text 13"/>
+          <p:cNvSpPr/>
+          <p:nvPr/>
+        </p:nvSpPr>
+        <p:spPr>
+          <a:xfrm>
+            <a:off x="8074152" y="3666744"/>
+            <a:ext cx="2825496" cy="201168"/>
+          </a:xfrm>
+          <a:prstGeom prst="rect">
+            <a:avLst/>
+          </a:prstGeom>
+          <a:noFill/>
+          <a:ln/>
+        </p:spPr>
+        <p:txBody>
+          <a:bodyPr wrap="square" lIns="0" tIns="0" rIns="0" bIns="0" rtlCol="0" anchor="ctr"/>
+          <a:lstStyle/>
+          <a:p>
+            <a:pPr indent="0" marL="0">
+              <a:buNone/>
+            </a:pPr>
+            <a:r>
+              <a:rPr lang="en-US" sz="950" b="1" dirty="0">
+                <a:solidFill>
+                  <a:srgbClr val="0068B7"/>
+                </a:solidFill>
+                <a:latin typeface="Aptos" pitchFamily="34" charset="0"/>
+                <a:ea typeface="Aptos" pitchFamily="34" charset="-122"/>
+                <a:cs typeface="Aptos" pitchFamily="34" charset="-120"/>
+              </a:rPr>
+              <a:t>Use this for</a:t>
+            </a:r>
+            <a:endParaRPr lang="en-US" sz="950" dirty="0"/>
+          </a:p>
+        </p:txBody>
+      </p:sp>
+      <p:sp>
+        <p:nvSpPr>
+          <p:cNvPr id="16" name="Text 14"/>
+          <p:cNvSpPr/>
+          <p:nvPr/>
+        </p:nvSpPr>
+        <p:spPr>
+          <a:xfrm>
+            <a:off x="8074152" y="3959352"/>
+            <a:ext cx="2825496" cy="1170432"/>
+          </a:xfrm>
+          <a:prstGeom prst="rect">
+            <a:avLst/>
+          </a:prstGeom>
+          <a:noFill/>
+          <a:ln/>
+        </p:spPr>
+        <p:txBody>
+          <a:bodyPr wrap="square" lIns="0" tIns="0" rIns="0" bIns="0" rtlCol="0" anchor="t">
+            <a:normAutofit/>
+          </a:bodyPr>
+          <a:lstStyle/>
+          <a:p>
+            <a:pPr indent="0" marL="0">
+              <a:buNone/>
+            </a:pPr>
+            <a:r>
+              <a:rPr lang="en-US" sz="1250" dirty="0">
+                <a:solidFill>
+                  <a:srgbClr val="17364A"/>
+                </a:solidFill>
+                <a:latin typeface="Aptos" pitchFamily="34" charset="0"/>
+                <a:ea typeface="Aptos" pitchFamily="34" charset="-122"/>
+                <a:cs typeface="Aptos" pitchFamily="34" charset="-120"/>
+              </a:rPr>
+              <a:t>Connect the concept to public health decisions, safeguards, documentation, or implementation work.</a:t>
+            </a:r>
+            <a:endParaRPr lang="en-US" sz="1250" dirty="0"/>
           </a:p>
         </p:txBody>
       </p:sp>
@@ -6844,7 +12643,32 @@
       </p:sp>
       <p:sp>
         <p:nvSpPr>
-          <p:cNvPr id="3" name="Text 1"/>
+          <p:cNvPr id="3" name="Shape 1"/>
+          <p:cNvSpPr/>
+          <p:nvPr/>
+        </p:nvSpPr>
+        <p:spPr>
+          <a:xfrm>
+            <a:off x="0" y="164592"/>
+            <a:ext cx="146304" cy="6693408"/>
+          </a:xfrm>
+          <a:prstGeom prst="rect">
+            <a:avLst/>
+          </a:prstGeom>
+          <a:solidFill>
+            <a:srgbClr val="2F8A28"/>
+          </a:solidFill>
+          <a:ln w="12700">
+            <a:solidFill>
+              <a:srgbClr val="2F8A28"/>
+            </a:solidFill>
+            <a:prstDash val="solid"/>
+          </a:ln>
+        </p:spPr>
+      </p:sp>
+      <p:sp>
+        <p:nvSpPr>
+          <p:cNvPr id="4" name="Text 2"/>
           <p:cNvSpPr/>
           <p:nvPr/>
         </p:nvSpPr>
@@ -6883,7 +12707,7 @@
       </p:sp>
       <p:sp>
         <p:nvSpPr>
-          <p:cNvPr id="4" name="Text 2"/>
+          <p:cNvPr id="5" name="Text 3"/>
           <p:cNvSpPr/>
           <p:nvPr/>
         </p:nvSpPr>
@@ -6922,7 +12746,7 @@
       </p:sp>
       <p:sp>
         <p:nvSpPr>
-          <p:cNvPr id="5" name="Text 3"/>
+          <p:cNvPr id="6" name="Text 4"/>
           <p:cNvSpPr/>
           <p:nvPr/>
         </p:nvSpPr>
@@ -6961,13 +12785,77 @@
       </p:sp>
       <p:sp>
         <p:nvSpPr>
-          <p:cNvPr id="6" name="Text 4"/>
+          <p:cNvPr id="7" name="Shape 5"/>
           <p:cNvSpPr/>
           <p:nvPr/>
         </p:nvSpPr>
         <p:spPr>
           <a:xfrm>
             <a:off x="640080" y="658368"/>
+            <a:ext cx="420624" cy="420624"/>
+          </a:xfrm>
+          <a:prstGeom prst="ellipse">
+            <a:avLst/>
+          </a:prstGeom>
+          <a:solidFill>
+            <a:srgbClr val="0068B7"/>
+          </a:solidFill>
+          <a:ln w="12700">
+            <a:solidFill>
+              <a:srgbClr val="0068B7"/>
+            </a:solidFill>
+            <a:prstDash val="solid"/>
+          </a:ln>
+        </p:spPr>
+      </p:sp>
+      <p:sp>
+        <p:nvSpPr>
+          <p:cNvPr id="8" name="Text 6"/>
+          <p:cNvSpPr/>
+          <p:nvPr/>
+        </p:nvSpPr>
+        <p:spPr>
+          <a:xfrm>
+            <a:off x="640080" y="731520"/>
+            <a:ext cx="420624" cy="164592"/>
+          </a:xfrm>
+          <a:prstGeom prst="rect">
+            <a:avLst/>
+          </a:prstGeom>
+          <a:noFill/>
+          <a:ln/>
+        </p:spPr>
+        <p:txBody>
+          <a:bodyPr wrap="square" lIns="0" tIns="0" rIns="0" bIns="0" rtlCol="0" anchor="ctr"/>
+          <a:lstStyle/>
+          <a:p>
+            <a:pPr algn="ctr" indent="0" marL="0">
+              <a:buNone/>
+            </a:pPr>
+            <a:r>
+              <a:rPr lang="en-US" sz="1100" b="1" dirty="0">
+                <a:solidFill>
+                  <a:srgbClr val="FFFFFF"/>
+                </a:solidFill>
+                <a:latin typeface="Aptos" pitchFamily="34" charset="0"/>
+                <a:ea typeface="Aptos" pitchFamily="34" charset="-122"/>
+                <a:cs typeface="Aptos" pitchFamily="34" charset="-120"/>
+              </a:rPr>
+              <a:t>3</a:t>
+            </a:r>
+            <a:endParaRPr lang="en-US" sz="1100" dirty="0"/>
+          </a:p>
+        </p:txBody>
+      </p:sp>
+      <p:sp>
+        <p:nvSpPr>
+          <p:cNvPr id="9" name="Text 7"/>
+          <p:cNvSpPr/>
+          <p:nvPr/>
+        </p:nvSpPr>
+        <p:spPr>
+          <a:xfrm>
+            <a:off x="640080" y="621792"/>
             <a:ext cx="10881360" cy="566928"/>
           </a:xfrm>
           <a:prstGeom prst="rect">
@@ -6994,7 +12882,7 @@
                 <a:ea typeface="Aptos Display" pitchFamily="34" charset="-122"/>
                 <a:cs typeface="Aptos Display" pitchFamily="34" charset="-120"/>
               </a:rPr>
-              <a:t>Public Health Example</a:t>
+              <a:t>Jurisdiction and Agency Policy Note</a:t>
             </a:r>
             <a:endParaRPr lang="en-US" sz="2700" dirty="0"/>
           </a:p>
@@ -7002,32 +12890,178 @@
       </p:sp>
       <p:sp>
         <p:nvSpPr>
-          <p:cNvPr id="7" name="Text 5"/>
-          <p:cNvSpPr/>
-          <p:nvPr/>
-        </p:nvSpPr>
-        <p:spPr>
-          <a:xfrm>
-            <a:off x="822960" y="1325880"/>
-            <a:ext cx="10378440" cy="4800600"/>
-          </a:xfrm>
-          <a:prstGeom prst="rect">
-            <a:avLst/>
-          </a:prstGeom>
-          <a:noFill/>
-          <a:ln/>
-        </p:spPr>
-        <p:txBody>
-          <a:bodyPr wrap="square" lIns="1016" tIns="1016" rIns="1016" bIns="1016" rtlCol="0" anchor="t">
+          <p:cNvPr id="10" name="Text 8"/>
+          <p:cNvSpPr/>
+          <p:nvPr/>
+        </p:nvSpPr>
+        <p:spPr>
+          <a:xfrm>
+            <a:off x="868680" y="1417320"/>
+            <a:ext cx="6675120" cy="4434840"/>
+          </a:xfrm>
+          <a:prstGeom prst="rect">
+            <a:avLst/>
+          </a:prstGeom>
+          <a:noFill/>
+          <a:ln/>
+        </p:spPr>
+        <p:txBody>
+          <a:bodyPr wrap="square" lIns="635" tIns="635" rIns="635" bIns="635" rtlCol="0" anchor="t">
             <a:normAutofit/>
           </a:bodyPr>
           <a:lstStyle/>
           <a:p>
+            <a:r>
+              <a:rPr lang="en-US" sz="1700" dirty="0">
+                <a:solidFill>
+                  <a:srgbClr val="17364A"/>
+                </a:solidFill>
+                <a:latin typeface="Aptos" pitchFamily="34" charset="0"/>
+                <a:ea typeface="Aptos" pitchFamily="34" charset="-122"/>
+                <a:cs typeface="Aptos" pitchFamily="34" charset="-120"/>
+              </a:rPr>
+              <a:t>This module provides national-level training guidance for public health agencies and partners.</a:t>
+            </a:r>
+            <a:endParaRPr lang="en-US" sz="1700" dirty="0"/>
+          </a:p>
+          <a:p>
+            <a:r>
+              <a:rPr lang="en-US" sz="1700" dirty="0">
+                <a:solidFill>
+                  <a:srgbClr val="17364A"/>
+                </a:solidFill>
+                <a:latin typeface="Aptos" pitchFamily="34" charset="0"/>
+                <a:ea typeface="Aptos" pitchFamily="34" charset="-122"/>
+                <a:cs typeface="Aptos" pitchFamily="34" charset="-120"/>
+              </a:rPr>
+              <a:t>It is not legal advice and does not replace review by agency legal counsel, privacy officers, procurement officials, civil.</a:t>
+            </a:r>
+            <a:endParaRPr lang="en-US" sz="1700" dirty="0"/>
+          </a:p>
+          <a:p>
+            <a:r>
+              <a:rPr lang="en-US" sz="1700" dirty="0">
+                <a:solidFill>
+                  <a:srgbClr val="17364A"/>
+                </a:solidFill>
+                <a:latin typeface="Aptos" pitchFamily="34" charset="0"/>
+                <a:ea typeface="Aptos" pitchFamily="34" charset="-122"/>
+                <a:cs typeface="Aptos" pitchFamily="34" charset="-120"/>
+              </a:rPr>
+              <a:t>Requirements may vary by state, locality, territory, Tribe, agency, funding source, data-sharing agreement, emergency.</a:t>
+            </a:r>
+            <a:endParaRPr lang="en-US" sz="1700" dirty="0"/>
+          </a:p>
+          <a:p>
+            <a:r>
+              <a:rPr lang="en-US" sz="1700" dirty="0">
+                <a:solidFill>
+                  <a:srgbClr val="17364A"/>
+                </a:solidFill>
+                <a:latin typeface="Aptos" pitchFamily="34" charset="0"/>
+                <a:ea typeface="Aptos" pitchFamily="34" charset="-122"/>
+                <a:cs typeface="Aptos" pitchFamily="34" charset="-120"/>
+              </a:rPr>
+              <a:t>Learners should use this module to identify the issues that require review and should confirm applicable requirements.</a:t>
+            </a:r>
+            <a:endParaRPr lang="en-US" sz="1700" dirty="0"/>
+          </a:p>
+        </p:txBody>
+      </p:sp>
+      <p:sp>
+        <p:nvSpPr>
+          <p:cNvPr id="11" name="Shape 9"/>
+          <p:cNvSpPr/>
+          <p:nvPr/>
+        </p:nvSpPr>
+        <p:spPr>
+          <a:xfrm>
+            <a:off x="7909560" y="1417320"/>
+            <a:ext cx="3154680" cy="1828800"/>
+          </a:xfrm>
+          <a:prstGeom prst="roundRect">
+            <a:avLst>
+              <a:gd name="adj" fmla="val 6000"/>
+            </a:avLst>
+          </a:prstGeom>
+          <a:solidFill>
+            <a:srgbClr val="EEF8ED"/>
+          </a:solidFill>
+          <a:ln w="12700">
+            <a:solidFill>
+              <a:srgbClr val="B9D7E6"/>
+            </a:solidFill>
+            <a:prstDash val="solid"/>
+          </a:ln>
+        </p:spPr>
+      </p:sp>
+      <p:sp>
+        <p:nvSpPr>
+          <p:cNvPr id="12" name="Text 10"/>
+          <p:cNvSpPr/>
+          <p:nvPr/>
+        </p:nvSpPr>
+        <p:spPr>
+          <a:xfrm>
+            <a:off x="8074152" y="1563624"/>
+            <a:ext cx="2825496" cy="201168"/>
+          </a:xfrm>
+          <a:prstGeom prst="rect">
+            <a:avLst/>
+          </a:prstGeom>
+          <a:noFill/>
+          <a:ln/>
+        </p:spPr>
+        <p:txBody>
+          <a:bodyPr wrap="square" lIns="0" tIns="0" rIns="0" bIns="0" rtlCol="0" anchor="ctr"/>
+          <a:lstStyle/>
+          <a:p>
             <a:pPr indent="0" marL="0">
               <a:buNone/>
             </a:pPr>
             <a:r>
-              <a:rPr lang="en-US" sz="1420" dirty="0">
+              <a:rPr lang="en-US" sz="950" b="1" dirty="0">
+                <a:solidFill>
+                  <a:srgbClr val="0068B7"/>
+                </a:solidFill>
+                <a:latin typeface="Aptos" pitchFamily="34" charset="0"/>
+                <a:ea typeface="Aptos" pitchFamily="34" charset="-122"/>
+                <a:cs typeface="Aptos" pitchFamily="34" charset="-120"/>
+              </a:rPr>
+              <a:t>Key idea</a:t>
+            </a:r>
+            <a:endParaRPr lang="en-US" sz="950" dirty="0"/>
+          </a:p>
+        </p:txBody>
+      </p:sp>
+      <p:sp>
+        <p:nvSpPr>
+          <p:cNvPr id="13" name="Text 11"/>
+          <p:cNvSpPr/>
+          <p:nvPr/>
+        </p:nvSpPr>
+        <p:spPr>
+          <a:xfrm>
+            <a:off x="8074152" y="1856232"/>
+            <a:ext cx="2825496" cy="1261872"/>
+          </a:xfrm>
+          <a:prstGeom prst="rect">
+            <a:avLst/>
+          </a:prstGeom>
+          <a:noFill/>
+          <a:ln/>
+        </p:spPr>
+        <p:txBody>
+          <a:bodyPr wrap="square" lIns="0" tIns="0" rIns="0" bIns="0" rtlCol="0" anchor="t">
+            <a:normAutofit/>
+          </a:bodyPr>
+          <a:lstStyle/>
+          <a:p>
+            <a:pPr indent="0" marL="0">
+              <a:buNone/>
+            </a:pPr>
+            <a:r>
+              <a:rPr lang="en-US" sz="1250" dirty="0">
                 <a:solidFill>
                   <a:srgbClr val="17364A"/>
                 </a:solidFill>
@@ -7035,9 +13069,116 @@
                 <a:ea typeface="Aptos" pitchFamily="34" charset="-122"/>
                 <a:cs typeface="Aptos" pitchFamily="34" charset="-120"/>
               </a:rPr>
-              <a:t>A health department uses AI to draft public health messages, summarize internal reports, and prioritize inspection follow-up. Some uses may not require broad public disclosure, while others may affect public services and should be listed in an AI use registry. The registry does not need to reveal sensitive security details, but it should identify the purpose, owner, data categories, review process, and human oversight. For a public-facing tool, the agency may also create a plain-language notice explaining that AI assists with initial responses, that staff review high-risk content, that personal information should not be entered unless requested through approved channels, and that users can contact the agency for help or correction. This type of notice supports trust and sets realistic expectations.</a:t>
-            </a:r>
-            <a:endParaRPr lang="en-US" sz="1420" dirty="0"/>
+              <a:t>This module provides national-level training guidance for public health agencies and partners.</a:t>
+            </a:r>
+            <a:endParaRPr lang="en-US" sz="1250" dirty="0"/>
+          </a:p>
+        </p:txBody>
+      </p:sp>
+      <p:sp>
+        <p:nvSpPr>
+          <p:cNvPr id="14" name="Shape 12"/>
+          <p:cNvSpPr/>
+          <p:nvPr/>
+        </p:nvSpPr>
+        <p:spPr>
+          <a:xfrm>
+            <a:off x="7909560" y="3520440"/>
+            <a:ext cx="3154680" cy="1737360"/>
+          </a:xfrm>
+          <a:prstGeom prst="roundRect">
+            <a:avLst>
+              <a:gd name="adj" fmla="val 6316"/>
+            </a:avLst>
+          </a:prstGeom>
+          <a:solidFill>
+            <a:srgbClr val="EAF6F8"/>
+          </a:solidFill>
+          <a:ln w="12700">
+            <a:solidFill>
+              <a:srgbClr val="B9D7E6"/>
+            </a:solidFill>
+            <a:prstDash val="solid"/>
+          </a:ln>
+        </p:spPr>
+      </p:sp>
+      <p:sp>
+        <p:nvSpPr>
+          <p:cNvPr id="15" name="Text 13"/>
+          <p:cNvSpPr/>
+          <p:nvPr/>
+        </p:nvSpPr>
+        <p:spPr>
+          <a:xfrm>
+            <a:off x="8074152" y="3666744"/>
+            <a:ext cx="2825496" cy="201168"/>
+          </a:xfrm>
+          <a:prstGeom prst="rect">
+            <a:avLst/>
+          </a:prstGeom>
+          <a:noFill/>
+          <a:ln/>
+        </p:spPr>
+        <p:txBody>
+          <a:bodyPr wrap="square" lIns="0" tIns="0" rIns="0" bIns="0" rtlCol="0" anchor="ctr"/>
+          <a:lstStyle/>
+          <a:p>
+            <a:pPr indent="0" marL="0">
+              <a:buNone/>
+            </a:pPr>
+            <a:r>
+              <a:rPr lang="en-US" sz="950" b="1" dirty="0">
+                <a:solidFill>
+                  <a:srgbClr val="0068B7"/>
+                </a:solidFill>
+                <a:latin typeface="Aptos" pitchFamily="34" charset="0"/>
+                <a:ea typeface="Aptos" pitchFamily="34" charset="-122"/>
+                <a:cs typeface="Aptos" pitchFamily="34" charset="-120"/>
+              </a:rPr>
+              <a:t>Use this for</a:t>
+            </a:r>
+            <a:endParaRPr lang="en-US" sz="950" dirty="0"/>
+          </a:p>
+        </p:txBody>
+      </p:sp>
+      <p:sp>
+        <p:nvSpPr>
+          <p:cNvPr id="16" name="Text 14"/>
+          <p:cNvSpPr/>
+          <p:nvPr/>
+        </p:nvSpPr>
+        <p:spPr>
+          <a:xfrm>
+            <a:off x="8074152" y="3959352"/>
+            <a:ext cx="2825496" cy="1170432"/>
+          </a:xfrm>
+          <a:prstGeom prst="rect">
+            <a:avLst/>
+          </a:prstGeom>
+          <a:noFill/>
+          <a:ln/>
+        </p:spPr>
+        <p:txBody>
+          <a:bodyPr wrap="square" lIns="0" tIns="0" rIns="0" bIns="0" rtlCol="0" anchor="t">
+            <a:normAutofit/>
+          </a:bodyPr>
+          <a:lstStyle/>
+          <a:p>
+            <a:pPr indent="0" marL="0">
+              <a:buNone/>
+            </a:pPr>
+            <a:r>
+              <a:rPr lang="en-US" sz="1250" dirty="0">
+                <a:solidFill>
+                  <a:srgbClr val="17364A"/>
+                </a:solidFill>
+                <a:latin typeface="Aptos" pitchFamily="34" charset="0"/>
+                <a:ea typeface="Aptos" pitchFamily="34" charset="-122"/>
+                <a:cs typeface="Aptos" pitchFamily="34" charset="-120"/>
+              </a:rPr>
+              <a:t>Connect the concept to public health decisions, safeguards, documentation, or implementation work.</a:t>
+            </a:r>
+            <a:endParaRPr lang="en-US" sz="1250" dirty="0"/>
           </a:p>
         </p:txBody>
       </p:sp>
@@ -7100,7 +13241,32 @@
       </p:sp>
       <p:sp>
         <p:nvSpPr>
-          <p:cNvPr id="3" name="Text 1"/>
+          <p:cNvPr id="3" name="Shape 1"/>
+          <p:cNvSpPr/>
+          <p:nvPr/>
+        </p:nvSpPr>
+        <p:spPr>
+          <a:xfrm>
+            <a:off x="0" y="164592"/>
+            <a:ext cx="146304" cy="6693408"/>
+          </a:xfrm>
+          <a:prstGeom prst="rect">
+            <a:avLst/>
+          </a:prstGeom>
+          <a:solidFill>
+            <a:srgbClr val="2F8A28"/>
+          </a:solidFill>
+          <a:ln w="12700">
+            <a:solidFill>
+              <a:srgbClr val="2F8A28"/>
+            </a:solidFill>
+            <a:prstDash val="solid"/>
+          </a:ln>
+        </p:spPr>
+      </p:sp>
+      <p:sp>
+        <p:nvSpPr>
+          <p:cNvPr id="4" name="Text 2"/>
           <p:cNvSpPr/>
           <p:nvPr/>
         </p:nvSpPr>
@@ -7139,7 +13305,7 @@
       </p:sp>
       <p:sp>
         <p:nvSpPr>
-          <p:cNvPr id="4" name="Text 2"/>
+          <p:cNvPr id="5" name="Text 3"/>
           <p:cNvSpPr/>
           <p:nvPr/>
         </p:nvSpPr>
@@ -7178,7 +13344,7 @@
       </p:sp>
       <p:sp>
         <p:nvSpPr>
-          <p:cNvPr id="5" name="Text 3"/>
+          <p:cNvPr id="6" name="Text 4"/>
           <p:cNvSpPr/>
           <p:nvPr/>
         </p:nvSpPr>
@@ -7217,13 +13383,77 @@
       </p:sp>
       <p:sp>
         <p:nvSpPr>
-          <p:cNvPr id="6" name="Text 4"/>
+          <p:cNvPr id="7" name="Shape 5"/>
           <p:cNvSpPr/>
           <p:nvPr/>
         </p:nvSpPr>
         <p:spPr>
           <a:xfrm>
             <a:off x="640080" y="658368"/>
+            <a:ext cx="420624" cy="420624"/>
+          </a:xfrm>
+          <a:prstGeom prst="ellipse">
+            <a:avLst/>
+          </a:prstGeom>
+          <a:solidFill>
+            <a:srgbClr val="0068B7"/>
+          </a:solidFill>
+          <a:ln w="12700">
+            <a:solidFill>
+              <a:srgbClr val="0068B7"/>
+            </a:solidFill>
+            <a:prstDash val="solid"/>
+          </a:ln>
+        </p:spPr>
+      </p:sp>
+      <p:sp>
+        <p:nvSpPr>
+          <p:cNvPr id="8" name="Text 6"/>
+          <p:cNvSpPr/>
+          <p:nvPr/>
+        </p:nvSpPr>
+        <p:spPr>
+          <a:xfrm>
+            <a:off x="640080" y="731520"/>
+            <a:ext cx="420624" cy="164592"/>
+          </a:xfrm>
+          <a:prstGeom prst="rect">
+            <a:avLst/>
+          </a:prstGeom>
+          <a:noFill/>
+          <a:ln/>
+        </p:spPr>
+        <p:txBody>
+          <a:bodyPr wrap="square" lIns="0" tIns="0" rIns="0" bIns="0" rtlCol="0" anchor="ctr"/>
+          <a:lstStyle/>
+          <a:p>
+            <a:pPr algn="ctr" indent="0" marL="0">
+              <a:buNone/>
+            </a:pPr>
+            <a:r>
+              <a:rPr lang="en-US" sz="1100" b="1" dirty="0">
+                <a:solidFill>
+                  <a:srgbClr val="FFFFFF"/>
+                </a:solidFill>
+                <a:latin typeface="Aptos" pitchFamily="34" charset="0"/>
+                <a:ea typeface="Aptos" pitchFamily="34" charset="-122"/>
+                <a:cs typeface="Aptos" pitchFamily="34" charset="-120"/>
+              </a:rPr>
+              <a:t>4</a:t>
+            </a:r>
+            <a:endParaRPr lang="en-US" sz="1100" dirty="0"/>
+          </a:p>
+        </p:txBody>
+      </p:sp>
+      <p:sp>
+        <p:nvSpPr>
+          <p:cNvPr id="9" name="Text 7"/>
+          <p:cNvSpPr/>
+          <p:nvPr/>
+        </p:nvSpPr>
+        <p:spPr>
+          <a:xfrm>
+            <a:off x="640080" y="621792"/>
             <a:ext cx="10881360" cy="566928"/>
           </a:xfrm>
           <a:prstGeom prst="rect">
@@ -7250,7 +13480,7 @@
                 <a:ea typeface="Aptos Display" pitchFamily="34" charset="-122"/>
                 <a:cs typeface="Aptos Display" pitchFamily="34" charset="-120"/>
               </a:rPr>
-              <a:t>Technical and Governance Deep Dive</a:t>
+              <a:t>Why This Topic Matters for Public Health AI</a:t>
             </a:r>
             <a:endParaRPr lang="en-US" sz="2700" dirty="0"/>
           </a:p>
@@ -7258,32 +13488,178 @@
       </p:sp>
       <p:sp>
         <p:nvSpPr>
-          <p:cNvPr id="7" name="Text 5"/>
-          <p:cNvSpPr/>
-          <p:nvPr/>
-        </p:nvSpPr>
-        <p:spPr>
-          <a:xfrm>
-            <a:off x="822960" y="1325880"/>
-            <a:ext cx="10378440" cy="4800600"/>
-          </a:xfrm>
-          <a:prstGeom prst="rect">
-            <a:avLst/>
-          </a:prstGeom>
-          <a:noFill/>
-          <a:ln/>
-        </p:spPr>
-        <p:txBody>
-          <a:bodyPr wrap="square" lIns="1016" tIns="1016" rIns="1016" bIns="1016" rtlCol="0" anchor="t">
+          <p:cNvPr id="10" name="Text 8"/>
+          <p:cNvSpPr/>
+          <p:nvPr/>
+        </p:nvSpPr>
+        <p:spPr>
+          <a:xfrm>
+            <a:off x="868680" y="1417320"/>
+            <a:ext cx="6675120" cy="4434840"/>
+          </a:xfrm>
+          <a:prstGeom prst="rect">
+            <a:avLst/>
+          </a:prstGeom>
+          <a:noFill/>
+          <a:ln/>
+        </p:spPr>
+        <p:txBody>
+          <a:bodyPr wrap="square" lIns="635" tIns="635" rIns="635" bIns="635" rtlCol="0" anchor="t">
             <a:normAutofit/>
           </a:bodyPr>
           <a:lstStyle/>
           <a:p>
+            <a:r>
+              <a:rPr lang="en-US" sz="1700" dirty="0">
+                <a:solidFill>
+                  <a:srgbClr val="17364A"/>
+                </a:solidFill>
+                <a:latin typeface="Aptos" pitchFamily="34" charset="0"/>
+                <a:ea typeface="Aptos" pitchFamily="34" charset="-122"/>
+                <a:cs typeface="Aptos" pitchFamily="34" charset="-120"/>
+              </a:rPr>
+              <a:t>Public health depends on trust.</a:t>
+            </a:r>
+            <a:endParaRPr lang="en-US" sz="1700" dirty="0"/>
+          </a:p>
+          <a:p>
+            <a:r>
+              <a:rPr lang="en-US" sz="1700" dirty="0">
+                <a:solidFill>
+                  <a:srgbClr val="17364A"/>
+                </a:solidFill>
+                <a:latin typeface="Aptos" pitchFamily="34" charset="0"/>
+                <a:ea typeface="Aptos" pitchFamily="34" charset="-122"/>
+                <a:cs typeface="Aptos" pitchFamily="34" charset="-120"/>
+              </a:rPr>
+              <a:t>If communities discover that AI is being used in surveillance, communication, service routing, or resource allocation.</a:t>
+            </a:r>
+            <a:endParaRPr lang="en-US" sz="1700" dirty="0"/>
+          </a:p>
+          <a:p>
+            <a:r>
+              <a:rPr lang="en-US" sz="1700" dirty="0">
+                <a:solidFill>
+                  <a:srgbClr val="17364A"/>
+                </a:solidFill>
+                <a:latin typeface="Aptos" pitchFamily="34" charset="0"/>
+                <a:ea typeface="Aptos" pitchFamily="34" charset="-122"/>
+                <a:cs typeface="Aptos" pitchFamily="34" charset="-120"/>
+              </a:rPr>
+              <a:t>Transparency does not require agencies to disclose every technical detail, but it does require clear communication about.</a:t>
+            </a:r>
+            <a:endParaRPr lang="en-US" sz="1700" dirty="0"/>
+          </a:p>
+          <a:p>
+            <a:r>
+              <a:rPr lang="en-US" sz="1700" dirty="0">
+                <a:solidFill>
+                  <a:srgbClr val="17364A"/>
+                </a:solidFill>
+                <a:latin typeface="Aptos" pitchFamily="34" charset="0"/>
+                <a:ea typeface="Aptos" pitchFamily="34" charset="-122"/>
+                <a:cs typeface="Aptos" pitchFamily="34" charset="-120"/>
+              </a:rPr>
+              <a:t>Transparency also improves internal accountability.</a:t>
+            </a:r>
+            <a:endParaRPr lang="en-US" sz="1700" dirty="0"/>
+          </a:p>
+        </p:txBody>
+      </p:sp>
+      <p:sp>
+        <p:nvSpPr>
+          <p:cNvPr id="11" name="Shape 9"/>
+          <p:cNvSpPr/>
+          <p:nvPr/>
+        </p:nvSpPr>
+        <p:spPr>
+          <a:xfrm>
+            <a:off x="7909560" y="1417320"/>
+            <a:ext cx="3154680" cy="1828800"/>
+          </a:xfrm>
+          <a:prstGeom prst="roundRect">
+            <a:avLst>
+              <a:gd name="adj" fmla="val 6000"/>
+            </a:avLst>
+          </a:prstGeom>
+          <a:solidFill>
+            <a:srgbClr val="EEF8ED"/>
+          </a:solidFill>
+          <a:ln w="12700">
+            <a:solidFill>
+              <a:srgbClr val="B9D7E6"/>
+            </a:solidFill>
+            <a:prstDash val="solid"/>
+          </a:ln>
+        </p:spPr>
+      </p:sp>
+      <p:sp>
+        <p:nvSpPr>
+          <p:cNvPr id="12" name="Text 10"/>
+          <p:cNvSpPr/>
+          <p:nvPr/>
+        </p:nvSpPr>
+        <p:spPr>
+          <a:xfrm>
+            <a:off x="8074152" y="1563624"/>
+            <a:ext cx="2825496" cy="201168"/>
+          </a:xfrm>
+          <a:prstGeom prst="rect">
+            <a:avLst/>
+          </a:prstGeom>
+          <a:noFill/>
+          <a:ln/>
+        </p:spPr>
+        <p:txBody>
+          <a:bodyPr wrap="square" lIns="0" tIns="0" rIns="0" bIns="0" rtlCol="0" anchor="ctr"/>
+          <a:lstStyle/>
+          <a:p>
             <a:pPr indent="0" marL="0">
               <a:buNone/>
             </a:pPr>
             <a:r>
-              <a:rPr lang="en-US" sz="1420" dirty="0">
+              <a:rPr lang="en-US" sz="950" b="1" dirty="0">
+                <a:solidFill>
+                  <a:srgbClr val="0068B7"/>
+                </a:solidFill>
+                <a:latin typeface="Aptos" pitchFamily="34" charset="0"/>
+                <a:ea typeface="Aptos" pitchFamily="34" charset="-122"/>
+                <a:cs typeface="Aptos" pitchFamily="34" charset="-120"/>
+              </a:rPr>
+              <a:t>Key idea</a:t>
+            </a:r>
+            <a:endParaRPr lang="en-US" sz="950" dirty="0"/>
+          </a:p>
+        </p:txBody>
+      </p:sp>
+      <p:sp>
+        <p:nvSpPr>
+          <p:cNvPr id="13" name="Text 11"/>
+          <p:cNvSpPr/>
+          <p:nvPr/>
+        </p:nvSpPr>
+        <p:spPr>
+          <a:xfrm>
+            <a:off x="8074152" y="1856232"/>
+            <a:ext cx="2825496" cy="1261872"/>
+          </a:xfrm>
+          <a:prstGeom prst="rect">
+            <a:avLst/>
+          </a:prstGeom>
+          <a:noFill/>
+          <a:ln/>
+        </p:spPr>
+        <p:txBody>
+          <a:bodyPr wrap="square" lIns="0" tIns="0" rIns="0" bIns="0" rtlCol="0" anchor="t">
+            <a:normAutofit/>
+          </a:bodyPr>
+          <a:lstStyle/>
+          <a:p>
+            <a:pPr indent="0" marL="0">
+              <a:buNone/>
+            </a:pPr>
+            <a:r>
+              <a:rPr lang="en-US" sz="1250" dirty="0">
                 <a:solidFill>
                   <a:srgbClr val="17364A"/>
                 </a:solidFill>
@@ -7291,9 +13667,116 @@
                 <a:ea typeface="Aptos" pitchFamily="34" charset="-122"/>
                 <a:cs typeface="Aptos" pitchFamily="34" charset="-120"/>
               </a:rPr>
-              <a:t>Transparency reporting should be risk-based. Low-risk internal tools may be documented in an internal registry. Tools that influence public communication, prioritization, access, enforcement, or public-facing interactions may require public notice. High-impact tools may require more detailed documentation, such as intended use, data sources, validation approach, human review, limitations, contact information, and review schedule. The reporting process should be accessible. Public-facing explanations should use plain language, avoid technical jargon, and be available in appropriate languages and accessible formats. Transparency is not achieved by publishing a dense technical document that affected communities cannot understand. Agencies should consider how communities, partners, and staff will actually interpret the information. Transparency should also include mechanisms for accountability. A notice or registry should identify how concerns can be raised, how corrections can be requested when appropriate, and how the agency reviews incidents or complaints. Public reporting should connect to internal governance processes so that feedback can lead to action.</a:t>
-            </a:r>
-            <a:endParaRPr lang="en-US" sz="1420" dirty="0"/>
+              <a:t>Public health depends on trust.</a:t>
+            </a:r>
+            <a:endParaRPr lang="en-US" sz="1250" dirty="0"/>
+          </a:p>
+        </p:txBody>
+      </p:sp>
+      <p:sp>
+        <p:nvSpPr>
+          <p:cNvPr id="14" name="Shape 12"/>
+          <p:cNvSpPr/>
+          <p:nvPr/>
+        </p:nvSpPr>
+        <p:spPr>
+          <a:xfrm>
+            <a:off x="7909560" y="3520440"/>
+            <a:ext cx="3154680" cy="1737360"/>
+          </a:xfrm>
+          <a:prstGeom prst="roundRect">
+            <a:avLst>
+              <a:gd name="adj" fmla="val 6316"/>
+            </a:avLst>
+          </a:prstGeom>
+          <a:solidFill>
+            <a:srgbClr val="EAF6F8"/>
+          </a:solidFill>
+          <a:ln w="12700">
+            <a:solidFill>
+              <a:srgbClr val="B9D7E6"/>
+            </a:solidFill>
+            <a:prstDash val="solid"/>
+          </a:ln>
+        </p:spPr>
+      </p:sp>
+      <p:sp>
+        <p:nvSpPr>
+          <p:cNvPr id="15" name="Text 13"/>
+          <p:cNvSpPr/>
+          <p:nvPr/>
+        </p:nvSpPr>
+        <p:spPr>
+          <a:xfrm>
+            <a:off x="8074152" y="3666744"/>
+            <a:ext cx="2825496" cy="201168"/>
+          </a:xfrm>
+          <a:prstGeom prst="rect">
+            <a:avLst/>
+          </a:prstGeom>
+          <a:noFill/>
+          <a:ln/>
+        </p:spPr>
+        <p:txBody>
+          <a:bodyPr wrap="square" lIns="0" tIns="0" rIns="0" bIns="0" rtlCol="0" anchor="ctr"/>
+          <a:lstStyle/>
+          <a:p>
+            <a:pPr indent="0" marL="0">
+              <a:buNone/>
+            </a:pPr>
+            <a:r>
+              <a:rPr lang="en-US" sz="950" b="1" dirty="0">
+                <a:solidFill>
+                  <a:srgbClr val="0068B7"/>
+                </a:solidFill>
+                <a:latin typeface="Aptos" pitchFamily="34" charset="0"/>
+                <a:ea typeface="Aptos" pitchFamily="34" charset="-122"/>
+                <a:cs typeface="Aptos" pitchFamily="34" charset="-120"/>
+              </a:rPr>
+              <a:t>Use this for</a:t>
+            </a:r>
+            <a:endParaRPr lang="en-US" sz="950" dirty="0"/>
+          </a:p>
+        </p:txBody>
+      </p:sp>
+      <p:sp>
+        <p:nvSpPr>
+          <p:cNvPr id="16" name="Text 14"/>
+          <p:cNvSpPr/>
+          <p:nvPr/>
+        </p:nvSpPr>
+        <p:spPr>
+          <a:xfrm>
+            <a:off x="8074152" y="3959352"/>
+            <a:ext cx="2825496" cy="1170432"/>
+          </a:xfrm>
+          <a:prstGeom prst="rect">
+            <a:avLst/>
+          </a:prstGeom>
+          <a:noFill/>
+          <a:ln/>
+        </p:spPr>
+        <p:txBody>
+          <a:bodyPr wrap="square" lIns="0" tIns="0" rIns="0" bIns="0" rtlCol="0" anchor="t">
+            <a:normAutofit/>
+          </a:bodyPr>
+          <a:lstStyle/>
+          <a:p>
+            <a:pPr indent="0" marL="0">
+              <a:buNone/>
+            </a:pPr>
+            <a:r>
+              <a:rPr lang="en-US" sz="1250" dirty="0">
+                <a:solidFill>
+                  <a:srgbClr val="17364A"/>
+                </a:solidFill>
+                <a:latin typeface="Aptos" pitchFamily="34" charset="0"/>
+                <a:ea typeface="Aptos" pitchFamily="34" charset="-122"/>
+                <a:cs typeface="Aptos" pitchFamily="34" charset="-120"/>
+              </a:rPr>
+              <a:t>Connect the concept to public health decisions, safeguards, documentation, or implementation work.</a:t>
+            </a:r>
+            <a:endParaRPr lang="en-US" sz="1250" dirty="0"/>
           </a:p>
         </p:txBody>
       </p:sp>
@@ -7356,7 +13839,32 @@
       </p:sp>
       <p:sp>
         <p:nvSpPr>
-          <p:cNvPr id="3" name="Text 1"/>
+          <p:cNvPr id="3" name="Shape 1"/>
+          <p:cNvSpPr/>
+          <p:nvPr/>
+        </p:nvSpPr>
+        <p:spPr>
+          <a:xfrm>
+            <a:off x="0" y="164592"/>
+            <a:ext cx="146304" cy="6693408"/>
+          </a:xfrm>
+          <a:prstGeom prst="rect">
+            <a:avLst/>
+          </a:prstGeom>
+          <a:solidFill>
+            <a:srgbClr val="2F8A28"/>
+          </a:solidFill>
+          <a:ln w="12700">
+            <a:solidFill>
+              <a:srgbClr val="2F8A28"/>
+            </a:solidFill>
+            <a:prstDash val="solid"/>
+          </a:ln>
+        </p:spPr>
+      </p:sp>
+      <p:sp>
+        <p:nvSpPr>
+          <p:cNvPr id="4" name="Text 2"/>
           <p:cNvSpPr/>
           <p:nvPr/>
         </p:nvSpPr>
@@ -7395,7 +13903,7 @@
       </p:sp>
       <p:sp>
         <p:nvSpPr>
-          <p:cNvPr id="4" name="Text 2"/>
+          <p:cNvPr id="5" name="Text 3"/>
           <p:cNvSpPr/>
           <p:nvPr/>
         </p:nvSpPr>
@@ -7434,7 +13942,7 @@
       </p:sp>
       <p:sp>
         <p:nvSpPr>
-          <p:cNvPr id="5" name="Text 3"/>
+          <p:cNvPr id="6" name="Text 4"/>
           <p:cNvSpPr/>
           <p:nvPr/>
         </p:nvSpPr>
@@ -7473,13 +13981,77 @@
       </p:sp>
       <p:sp>
         <p:nvSpPr>
-          <p:cNvPr id="6" name="Text 4"/>
+          <p:cNvPr id="7" name="Shape 5"/>
           <p:cNvSpPr/>
           <p:nvPr/>
         </p:nvSpPr>
         <p:spPr>
           <a:xfrm>
             <a:off x="640080" y="658368"/>
+            <a:ext cx="420624" cy="420624"/>
+          </a:xfrm>
+          <a:prstGeom prst="ellipse">
+            <a:avLst/>
+          </a:prstGeom>
+          <a:solidFill>
+            <a:srgbClr val="0068B7"/>
+          </a:solidFill>
+          <a:ln w="12700">
+            <a:solidFill>
+              <a:srgbClr val="0068B7"/>
+            </a:solidFill>
+            <a:prstDash val="solid"/>
+          </a:ln>
+        </p:spPr>
+      </p:sp>
+      <p:sp>
+        <p:nvSpPr>
+          <p:cNvPr id="8" name="Text 6"/>
+          <p:cNvSpPr/>
+          <p:nvPr/>
+        </p:nvSpPr>
+        <p:spPr>
+          <a:xfrm>
+            <a:off x="640080" y="731520"/>
+            <a:ext cx="420624" cy="164592"/>
+          </a:xfrm>
+          <a:prstGeom prst="rect">
+            <a:avLst/>
+          </a:prstGeom>
+          <a:noFill/>
+          <a:ln/>
+        </p:spPr>
+        <p:txBody>
+          <a:bodyPr wrap="square" lIns="0" tIns="0" rIns="0" bIns="0" rtlCol="0" anchor="ctr"/>
+          <a:lstStyle/>
+          <a:p>
+            <a:pPr algn="ctr" indent="0" marL="0">
+              <a:buNone/>
+            </a:pPr>
+            <a:r>
+              <a:rPr lang="en-US" sz="1100" b="1" dirty="0">
+                <a:solidFill>
+                  <a:srgbClr val="FFFFFF"/>
+                </a:solidFill>
+                <a:latin typeface="Aptos" pitchFamily="34" charset="0"/>
+                <a:ea typeface="Aptos" pitchFamily="34" charset="-122"/>
+                <a:cs typeface="Aptos" pitchFamily="34" charset="-120"/>
+              </a:rPr>
+              <a:t>5</a:t>
+            </a:r>
+            <a:endParaRPr lang="en-US" sz="1100" dirty="0"/>
+          </a:p>
+        </p:txBody>
+      </p:sp>
+      <p:sp>
+        <p:nvSpPr>
+          <p:cNvPr id="9" name="Text 7"/>
+          <p:cNvSpPr/>
+          <p:nvPr/>
+        </p:nvSpPr>
+        <p:spPr>
+          <a:xfrm>
+            <a:off x="640080" y="621792"/>
             <a:ext cx="10881360" cy="566928"/>
           </a:xfrm>
           <a:prstGeom prst="rect">
@@ -7506,7 +14078,7 @@
                 <a:ea typeface="Aptos Display" pitchFamily="34" charset="-122"/>
                 <a:cs typeface="Aptos Display" pitchFamily="34" charset="-120"/>
               </a:rPr>
-              <a:t>Risks, Failure Modes, and Guardrails</a:t>
+              <a:t>Public Health Example</a:t>
             </a:r>
             <a:endParaRPr lang="en-US" sz="2700" dirty="0"/>
           </a:p>
@@ -7514,32 +14086,178 @@
       </p:sp>
       <p:sp>
         <p:nvSpPr>
-          <p:cNvPr id="7" name="Text 5"/>
-          <p:cNvSpPr/>
-          <p:nvPr/>
-        </p:nvSpPr>
-        <p:spPr>
-          <a:xfrm>
-            <a:off x="822960" y="1325880"/>
-            <a:ext cx="10378440" cy="4800600"/>
-          </a:xfrm>
-          <a:prstGeom prst="rect">
-            <a:avLst/>
-          </a:prstGeom>
-          <a:noFill/>
-          <a:ln/>
-        </p:spPr>
-        <p:txBody>
-          <a:bodyPr wrap="square" lIns="1016" tIns="1016" rIns="1016" bIns="1016" rtlCol="0" anchor="t">
+          <p:cNvPr id="10" name="Text 8"/>
+          <p:cNvSpPr/>
+          <p:nvPr/>
+        </p:nvSpPr>
+        <p:spPr>
+          <a:xfrm>
+            <a:off x="868680" y="1417320"/>
+            <a:ext cx="6675120" cy="4434840"/>
+          </a:xfrm>
+          <a:prstGeom prst="rect">
+            <a:avLst/>
+          </a:prstGeom>
+          <a:noFill/>
+          <a:ln/>
+        </p:spPr>
+        <p:txBody>
+          <a:bodyPr wrap="square" lIns="635" tIns="635" rIns="635" bIns="635" rtlCol="0" anchor="t">
             <a:normAutofit/>
           </a:bodyPr>
           <a:lstStyle/>
           <a:p>
+            <a:r>
+              <a:rPr lang="en-US" sz="1700" dirty="0">
+                <a:solidFill>
+                  <a:srgbClr val="17364A"/>
+                </a:solidFill>
+                <a:latin typeface="Aptos" pitchFamily="34" charset="0"/>
+                <a:ea typeface="Aptos" pitchFamily="34" charset="-122"/>
+                <a:cs typeface="Aptos" pitchFamily="34" charset="-120"/>
+              </a:rPr>
+              <a:t>A health department uses AI to draft public health messages, summarize internal reports, and prioritize inspection follow-up.</a:t>
+            </a:r>
+            <a:endParaRPr lang="en-US" sz="1700" dirty="0"/>
+          </a:p>
+          <a:p>
+            <a:r>
+              <a:rPr lang="en-US" sz="1700" dirty="0">
+                <a:solidFill>
+                  <a:srgbClr val="17364A"/>
+                </a:solidFill>
+                <a:latin typeface="Aptos" pitchFamily="34" charset="0"/>
+                <a:ea typeface="Aptos" pitchFamily="34" charset="-122"/>
+                <a:cs typeface="Aptos" pitchFamily="34" charset="-120"/>
+              </a:rPr>
+              <a:t>Some uses may not require broad public disclosure, while others may affect public services and should be listed in an AI.</a:t>
+            </a:r>
+            <a:endParaRPr lang="en-US" sz="1700" dirty="0"/>
+          </a:p>
+          <a:p>
+            <a:r>
+              <a:rPr lang="en-US" sz="1700" dirty="0">
+                <a:solidFill>
+                  <a:srgbClr val="17364A"/>
+                </a:solidFill>
+                <a:latin typeface="Aptos" pitchFamily="34" charset="0"/>
+                <a:ea typeface="Aptos" pitchFamily="34" charset="-122"/>
+                <a:cs typeface="Aptos" pitchFamily="34" charset="-120"/>
+              </a:rPr>
+              <a:t>The registry does not need to reveal sensitive security details, but it should identify the purpose, owner, data.</a:t>
+            </a:r>
+            <a:endParaRPr lang="en-US" sz="1700" dirty="0"/>
+          </a:p>
+          <a:p>
+            <a:r>
+              <a:rPr lang="en-US" sz="1700" dirty="0">
+                <a:solidFill>
+                  <a:srgbClr val="17364A"/>
+                </a:solidFill>
+                <a:latin typeface="Aptos" pitchFamily="34" charset="0"/>
+                <a:ea typeface="Aptos" pitchFamily="34" charset="-122"/>
+                <a:cs typeface="Aptos" pitchFamily="34" charset="-120"/>
+              </a:rPr>
+              <a:t>For a public-facing tool, the agency may also create a plain-language notice explaining that AI assists with initial.</a:t>
+            </a:r>
+            <a:endParaRPr lang="en-US" sz="1700" dirty="0"/>
+          </a:p>
+        </p:txBody>
+      </p:sp>
+      <p:sp>
+        <p:nvSpPr>
+          <p:cNvPr id="11" name="Shape 9"/>
+          <p:cNvSpPr/>
+          <p:nvPr/>
+        </p:nvSpPr>
+        <p:spPr>
+          <a:xfrm>
+            <a:off x="7909560" y="1417320"/>
+            <a:ext cx="3154680" cy="1828800"/>
+          </a:xfrm>
+          <a:prstGeom prst="roundRect">
+            <a:avLst>
+              <a:gd name="adj" fmla="val 6000"/>
+            </a:avLst>
+          </a:prstGeom>
+          <a:solidFill>
+            <a:srgbClr val="EEF8ED"/>
+          </a:solidFill>
+          <a:ln w="12700">
+            <a:solidFill>
+              <a:srgbClr val="B9D7E6"/>
+            </a:solidFill>
+            <a:prstDash val="solid"/>
+          </a:ln>
+        </p:spPr>
+      </p:sp>
+      <p:sp>
+        <p:nvSpPr>
+          <p:cNvPr id="12" name="Text 10"/>
+          <p:cNvSpPr/>
+          <p:nvPr/>
+        </p:nvSpPr>
+        <p:spPr>
+          <a:xfrm>
+            <a:off x="8074152" y="1563624"/>
+            <a:ext cx="2825496" cy="201168"/>
+          </a:xfrm>
+          <a:prstGeom prst="rect">
+            <a:avLst/>
+          </a:prstGeom>
+          <a:noFill/>
+          <a:ln/>
+        </p:spPr>
+        <p:txBody>
+          <a:bodyPr wrap="square" lIns="0" tIns="0" rIns="0" bIns="0" rtlCol="0" anchor="ctr"/>
+          <a:lstStyle/>
+          <a:p>
             <a:pPr indent="0" marL="0">
               <a:buNone/>
             </a:pPr>
             <a:r>
-              <a:rPr lang="en-US" sz="1420" dirty="0">
+              <a:rPr lang="en-US" sz="950" b="1" dirty="0">
+                <a:solidFill>
+                  <a:srgbClr val="0068B7"/>
+                </a:solidFill>
+                <a:latin typeface="Aptos" pitchFamily="34" charset="0"/>
+                <a:ea typeface="Aptos" pitchFamily="34" charset="-122"/>
+                <a:cs typeface="Aptos" pitchFamily="34" charset="-120"/>
+              </a:rPr>
+              <a:t>Key idea</a:t>
+            </a:r>
+            <a:endParaRPr lang="en-US" sz="950" dirty="0"/>
+          </a:p>
+        </p:txBody>
+      </p:sp>
+      <p:sp>
+        <p:nvSpPr>
+          <p:cNvPr id="13" name="Text 11"/>
+          <p:cNvSpPr/>
+          <p:nvPr/>
+        </p:nvSpPr>
+        <p:spPr>
+          <a:xfrm>
+            <a:off x="8074152" y="1856232"/>
+            <a:ext cx="2825496" cy="1261872"/>
+          </a:xfrm>
+          <a:prstGeom prst="rect">
+            <a:avLst/>
+          </a:prstGeom>
+          <a:noFill/>
+          <a:ln/>
+        </p:spPr>
+        <p:txBody>
+          <a:bodyPr wrap="square" lIns="0" tIns="0" rIns="0" bIns="0" rtlCol="0" anchor="t">
+            <a:normAutofit/>
+          </a:bodyPr>
+          <a:lstStyle/>
+          <a:p>
+            <a:pPr indent="0" marL="0">
+              <a:buNone/>
+            </a:pPr>
+            <a:r>
+              <a:rPr lang="en-US" sz="1250" dirty="0">
                 <a:solidFill>
                   <a:srgbClr val="17364A"/>
                 </a:solidFill>
@@ -7547,9 +14265,116 @@
                 <a:ea typeface="Aptos" pitchFamily="34" charset="-122"/>
                 <a:cs typeface="Aptos" pitchFamily="34" charset="-120"/>
               </a:rPr>
-              <a:t>One risk is transparency theater. Agencies may publish broad statements about responsible AI without disclosing actual uses, owners, or safeguards. A guardrail is to maintain an AI use registry with concrete information about approved and operational use cases. Another risk is over-disclosure of sensitive details. Publishing system architecture, vulnerabilities, or confidential data flows could create security or privacy risks. A guardrail is to review transparency materials through privacy, legal, security, and communications before release.</a:t>
-            </a:r>
-            <a:endParaRPr lang="en-US" sz="1420" dirty="0"/>
+              <a:t>A health department uses AI to draft public health messages, summarize internal reports, and prioritize inspection follow-up.</a:t>
+            </a:r>
+            <a:endParaRPr lang="en-US" sz="1250" dirty="0"/>
+          </a:p>
+        </p:txBody>
+      </p:sp>
+      <p:sp>
+        <p:nvSpPr>
+          <p:cNvPr id="14" name="Shape 12"/>
+          <p:cNvSpPr/>
+          <p:nvPr/>
+        </p:nvSpPr>
+        <p:spPr>
+          <a:xfrm>
+            <a:off x="7909560" y="3520440"/>
+            <a:ext cx="3154680" cy="1737360"/>
+          </a:xfrm>
+          <a:prstGeom prst="roundRect">
+            <a:avLst>
+              <a:gd name="adj" fmla="val 6316"/>
+            </a:avLst>
+          </a:prstGeom>
+          <a:solidFill>
+            <a:srgbClr val="EAF6F8"/>
+          </a:solidFill>
+          <a:ln w="12700">
+            <a:solidFill>
+              <a:srgbClr val="B9D7E6"/>
+            </a:solidFill>
+            <a:prstDash val="solid"/>
+          </a:ln>
+        </p:spPr>
+      </p:sp>
+      <p:sp>
+        <p:nvSpPr>
+          <p:cNvPr id="15" name="Text 13"/>
+          <p:cNvSpPr/>
+          <p:nvPr/>
+        </p:nvSpPr>
+        <p:spPr>
+          <a:xfrm>
+            <a:off x="8074152" y="3666744"/>
+            <a:ext cx="2825496" cy="201168"/>
+          </a:xfrm>
+          <a:prstGeom prst="rect">
+            <a:avLst/>
+          </a:prstGeom>
+          <a:noFill/>
+          <a:ln/>
+        </p:spPr>
+        <p:txBody>
+          <a:bodyPr wrap="square" lIns="0" tIns="0" rIns="0" bIns="0" rtlCol="0" anchor="ctr"/>
+          <a:lstStyle/>
+          <a:p>
+            <a:pPr indent="0" marL="0">
+              <a:buNone/>
+            </a:pPr>
+            <a:r>
+              <a:rPr lang="en-US" sz="950" b="1" dirty="0">
+                <a:solidFill>
+                  <a:srgbClr val="0068B7"/>
+                </a:solidFill>
+                <a:latin typeface="Aptos" pitchFamily="34" charset="0"/>
+                <a:ea typeface="Aptos" pitchFamily="34" charset="-122"/>
+                <a:cs typeface="Aptos" pitchFamily="34" charset="-120"/>
+              </a:rPr>
+              <a:t>Use this for</a:t>
+            </a:r>
+            <a:endParaRPr lang="en-US" sz="950" dirty="0"/>
+          </a:p>
+        </p:txBody>
+      </p:sp>
+      <p:sp>
+        <p:nvSpPr>
+          <p:cNvPr id="16" name="Text 14"/>
+          <p:cNvSpPr/>
+          <p:nvPr/>
+        </p:nvSpPr>
+        <p:spPr>
+          <a:xfrm>
+            <a:off x="8074152" y="3959352"/>
+            <a:ext cx="2825496" cy="1170432"/>
+          </a:xfrm>
+          <a:prstGeom prst="rect">
+            <a:avLst/>
+          </a:prstGeom>
+          <a:noFill/>
+          <a:ln/>
+        </p:spPr>
+        <p:txBody>
+          <a:bodyPr wrap="square" lIns="0" tIns="0" rIns="0" bIns="0" rtlCol="0" anchor="t">
+            <a:normAutofit/>
+          </a:bodyPr>
+          <a:lstStyle/>
+          <a:p>
+            <a:pPr indent="0" marL="0">
+              <a:buNone/>
+            </a:pPr>
+            <a:r>
+              <a:rPr lang="en-US" sz="1250" dirty="0">
+                <a:solidFill>
+                  <a:srgbClr val="17364A"/>
+                </a:solidFill>
+                <a:latin typeface="Aptos" pitchFamily="34" charset="0"/>
+                <a:ea typeface="Aptos" pitchFamily="34" charset="-122"/>
+                <a:cs typeface="Aptos" pitchFamily="34" charset="-120"/>
+              </a:rPr>
+              <a:t>Connect the concept to public health decisions, safeguards, documentation, or implementation work.</a:t>
+            </a:r>
+            <a:endParaRPr lang="en-US" sz="1250" dirty="0"/>
           </a:p>
         </p:txBody>
       </p:sp>

--- a/downloads/presentations/modules/lesson-49-public-accountability-and-ai-transparency-reporting.pptx
+++ b/downloads/presentations/modules/lesson-49-public-accountability-and-ai-transparency-reporting.pptx
@@ -2900,6 +2900,45 @@
           </a:p>
         </p:txBody>
       </p:sp>
+      <p:sp>
+        <p:nvSpPr>
+          <p:cNvPr id="8" name="Text 5"/>
+          <p:cNvSpPr/>
+          <p:nvPr/>
+        </p:nvSpPr>
+        <p:spPr>
+          <a:xfrm>
+            <a:off x="11137392" y="6510528"/>
+            <a:ext cx="411480" cy="201168"/>
+          </a:xfrm>
+          <a:prstGeom prst="rect">
+            <a:avLst/>
+          </a:prstGeom>
+          <a:noFill/>
+          <a:ln/>
+        </p:spPr>
+        <p:txBody>
+          <a:bodyPr wrap="square" lIns="0" tIns="0" rIns="0" bIns="0" rtlCol="0" anchor="ctr"/>
+          <a:lstStyle/>
+          <a:p>
+            <a:pPr algn="r" indent="0" marL="0">
+              <a:buNone/>
+            </a:pPr>
+            <a:r>
+              <a:rPr lang="en-US" sz="900" dirty="0">
+                <a:solidFill>
+                  <a:srgbClr val="5F7181"/>
+                </a:solidFill>
+                <a:latin typeface="Aptos" pitchFamily="34" charset="0"/>
+                <a:ea typeface="Aptos" pitchFamily="34" charset="-122"/>
+                <a:cs typeface="Aptos" pitchFamily="34" charset="-120"/>
+              </a:rPr>
+              <a:t>1</a:t>
+            </a:r>
+            <a:endParaRPr lang="en-US" sz="900" dirty="0"/>
+          </a:p>
+        </p:txBody>
+      </p:sp>
     </p:spTree>
   </p:cSld>
   <p:clrMapOvr>
@@ -3093,7 +3132,7 @@
                 <a:ea typeface="Aptos" pitchFamily="34" charset="-122"/>
                 <a:cs typeface="Aptos" pitchFamily="34" charset="-120"/>
               </a:rPr>
-              <a:t>© Paula Soper</a:t>
+              <a:t>Â© Paula Soper</a:t>
             </a:r>
             <a:endParaRPr lang="en-US" sz="800" dirty="0"/>
           </a:p>
@@ -3101,7 +3140,46 @@
       </p:sp>
       <p:sp>
         <p:nvSpPr>
-          <p:cNvPr id="7" name="Shape 5"/>
+          <p:cNvPr id="7" name="Text 5"/>
+          <p:cNvSpPr/>
+          <p:nvPr/>
+        </p:nvSpPr>
+        <p:spPr>
+          <a:xfrm>
+            <a:off x="11137392" y="6510528"/>
+            <a:ext cx="411480" cy="201168"/>
+          </a:xfrm>
+          <a:prstGeom prst="rect">
+            <a:avLst/>
+          </a:prstGeom>
+          <a:noFill/>
+          <a:ln/>
+        </p:spPr>
+        <p:txBody>
+          <a:bodyPr wrap="square" lIns="0" tIns="0" rIns="0" bIns="0" rtlCol="0" anchor="ctr"/>
+          <a:lstStyle/>
+          <a:p>
+            <a:pPr algn="r" indent="0" marL="0">
+              <a:buNone/>
+            </a:pPr>
+            <a:r>
+              <a:rPr lang="en-US" sz="900" dirty="0">
+                <a:solidFill>
+                  <a:srgbClr val="5F7181"/>
+                </a:solidFill>
+                <a:latin typeface="Aptos" pitchFamily="34" charset="0"/>
+                <a:ea typeface="Aptos" pitchFamily="34" charset="-122"/>
+                <a:cs typeface="Aptos" pitchFamily="34" charset="-120"/>
+              </a:rPr>
+              <a:t>10</a:t>
+            </a:r>
+            <a:endParaRPr lang="en-US" sz="900" dirty="0"/>
+          </a:p>
+        </p:txBody>
+      </p:sp>
+      <p:sp>
+        <p:nvSpPr>
+          <p:cNvPr id="8" name="Shape 6"/>
           <p:cNvSpPr/>
           <p:nvPr/>
         </p:nvSpPr>
@@ -3126,7 +3204,7 @@
       </p:sp>
       <p:sp>
         <p:nvSpPr>
-          <p:cNvPr id="8" name="Text 6"/>
+          <p:cNvPr id="9" name="Text 7"/>
           <p:cNvSpPr/>
           <p:nvPr/>
         </p:nvSpPr>
@@ -3165,14 +3243,14 @@
       </p:sp>
       <p:sp>
         <p:nvSpPr>
-          <p:cNvPr id="9" name="Text 7"/>
+          <p:cNvPr id="10" name="Text 8"/>
           <p:cNvSpPr/>
           <p:nvPr/>
         </p:nvSpPr>
         <p:spPr>
           <a:xfrm>
             <a:off x="640080" y="621792"/>
-            <a:ext cx="10881360" cy="566928"/>
+            <a:ext cx="10881360" cy="713232"/>
           </a:xfrm>
           <a:prstGeom prst="rect">
             <a:avLst/>
@@ -3190,7 +3268,7 @@
               <a:buNone/>
             </a:pPr>
             <a:r>
-              <a:rPr lang="en-US" sz="2700" b="1" dirty="0">
+              <a:rPr lang="en-US" sz="3400" b="1" dirty="0">
                 <a:solidFill>
                   <a:srgbClr val="003A63"/>
                 </a:solidFill>
@@ -3200,20 +3278,20 @@
               </a:rPr>
               <a:t>Technical and Governance Deep Dive</a:t>
             </a:r>
-            <a:endParaRPr lang="en-US" sz="2700" dirty="0"/>
-          </a:p>
-        </p:txBody>
-      </p:sp>
-      <p:sp>
-        <p:nvSpPr>
-          <p:cNvPr id="10" name="Text 8"/>
-          <p:cNvSpPr/>
-          <p:nvPr/>
-        </p:nvSpPr>
-        <p:spPr>
-          <a:xfrm>
-            <a:off x="868680" y="1417320"/>
-            <a:ext cx="6675120" cy="4434840"/>
+            <a:endParaRPr lang="en-US" sz="3400" dirty="0"/>
+          </a:p>
+        </p:txBody>
+      </p:sp>
+      <p:sp>
+        <p:nvSpPr>
+          <p:cNvPr id="11" name="Text 9"/>
+          <p:cNvSpPr/>
+          <p:nvPr/>
+        </p:nvSpPr>
+        <p:spPr>
+          <a:xfrm>
+            <a:off x="868680" y="1508760"/>
+            <a:ext cx="6537960" cy="4160520"/>
           </a:xfrm>
           <a:prstGeom prst="rect">
             <a:avLst/>
@@ -3228,7 +3306,7 @@
           <a:lstStyle/>
           <a:p>
             <a:r>
-              <a:rPr lang="en-US" sz="1700" dirty="0">
+              <a:rPr lang="en-US" sz="2100" dirty="0">
                 <a:solidFill>
                   <a:srgbClr val="17364A"/>
                 </a:solidFill>
@@ -3238,11 +3316,11 @@
               </a:rPr>
               <a:t>Transparency reporting should be risk-based.</a:t>
             </a:r>
-            <a:endParaRPr lang="en-US" sz="1700" dirty="0"/>
-          </a:p>
-          <a:p>
-            <a:r>
-              <a:rPr lang="en-US" sz="1700" dirty="0">
+            <a:endParaRPr lang="en-US" sz="2100" dirty="0"/>
+          </a:p>
+          <a:p>
+            <a:r>
+              <a:rPr lang="en-US" sz="2100" dirty="0">
                 <a:solidFill>
                   <a:srgbClr val="17364A"/>
                 </a:solidFill>
@@ -3252,11 +3330,11 @@
               </a:rPr>
               <a:t>Low-risk internal tools may be documented in an internal registry.</a:t>
             </a:r>
-            <a:endParaRPr lang="en-US" sz="1700" dirty="0"/>
-          </a:p>
-          <a:p>
-            <a:r>
-              <a:rPr lang="en-US" sz="1700" dirty="0">
+            <a:endParaRPr lang="en-US" sz="2100" dirty="0"/>
+          </a:p>
+          <a:p>
+            <a:r>
+              <a:rPr lang="en-US" sz="2100" dirty="0">
                 <a:solidFill>
                   <a:srgbClr val="17364A"/>
                 </a:solidFill>
@@ -3264,29 +3342,15 @@
                 <a:ea typeface="Aptos" pitchFamily="34" charset="-122"/>
                 <a:cs typeface="Aptos" pitchFamily="34" charset="-120"/>
               </a:rPr>
-              <a:t>Tools that influence public communication, prioritization, access, enforcement, or public-facing interactions may require.</a:t>
-            </a:r>
-            <a:endParaRPr lang="en-US" sz="1700" dirty="0"/>
-          </a:p>
-          <a:p>
-            <a:r>
-              <a:rPr lang="en-US" sz="1700" dirty="0">
-                <a:solidFill>
-                  <a:srgbClr val="17364A"/>
-                </a:solidFill>
-                <a:latin typeface="Aptos" pitchFamily="34" charset="0"/>
-                <a:ea typeface="Aptos" pitchFamily="34" charset="-122"/>
-                <a:cs typeface="Aptos" pitchFamily="34" charset="-120"/>
-              </a:rPr>
-              <a:t>High-impact tools may require more detailed documentation, such as intended use, data sources, validation approach, human.</a:t>
-            </a:r>
-            <a:endParaRPr lang="en-US" sz="1700" dirty="0"/>
-          </a:p>
-        </p:txBody>
-      </p:sp>
-      <p:sp>
-        <p:nvSpPr>
-          <p:cNvPr id="11" name="Shape 9"/>
+              <a:t>Tools that influence public communication, prioritization, access, enforcement, or public-facing.</a:t>
+            </a:r>
+            <a:endParaRPr lang="en-US" sz="2100" dirty="0"/>
+          </a:p>
+        </p:txBody>
+      </p:sp>
+      <p:sp>
+        <p:nvSpPr>
+          <p:cNvPr id="12" name="Shape 10"/>
           <p:cNvSpPr/>
           <p:nvPr/>
         </p:nvSpPr>
@@ -3313,14 +3377,14 @@
       </p:sp>
       <p:sp>
         <p:nvSpPr>
-          <p:cNvPr id="12" name="Text 10"/>
+          <p:cNvPr id="13" name="Text 11"/>
           <p:cNvSpPr/>
           <p:nvPr/>
         </p:nvSpPr>
         <p:spPr>
           <a:xfrm>
             <a:off x="8074152" y="1563624"/>
-            <a:ext cx="2825496" cy="201168"/>
+            <a:ext cx="2825496" cy="256032"/>
           </a:xfrm>
           <a:prstGeom prst="rect">
             <a:avLst/>
@@ -3336,7 +3400,7 @@
               <a:buNone/>
             </a:pPr>
             <a:r>
-              <a:rPr lang="en-US" sz="950" b="1" dirty="0">
+              <a:rPr lang="en-US" sz="1300" b="1" dirty="0">
                 <a:solidFill>
                   <a:srgbClr val="0068B7"/>
                 </a:solidFill>
@@ -3346,20 +3410,20 @@
               </a:rPr>
               <a:t>Key idea</a:t>
             </a:r>
-            <a:endParaRPr lang="en-US" sz="950" dirty="0"/>
-          </a:p>
-        </p:txBody>
-      </p:sp>
-      <p:sp>
-        <p:nvSpPr>
-          <p:cNvPr id="13" name="Text 11"/>
-          <p:cNvSpPr/>
-          <p:nvPr/>
-        </p:nvSpPr>
-        <p:spPr>
-          <a:xfrm>
-            <a:off x="8074152" y="1856232"/>
-            <a:ext cx="2825496" cy="1261872"/>
+            <a:endParaRPr lang="en-US" sz="1300" dirty="0"/>
+          </a:p>
+        </p:txBody>
+      </p:sp>
+      <p:sp>
+        <p:nvSpPr>
+          <p:cNvPr id="14" name="Text 12"/>
+          <p:cNvSpPr/>
+          <p:nvPr/>
+        </p:nvSpPr>
+        <p:spPr>
+          <a:xfrm>
+            <a:off x="8074152" y="1920240"/>
+            <a:ext cx="2825496" cy="1188720"/>
           </a:xfrm>
           <a:prstGeom prst="rect">
             <a:avLst/>
@@ -3377,7 +3441,7 @@
               <a:buNone/>
             </a:pPr>
             <a:r>
-              <a:rPr lang="en-US" sz="1250" dirty="0">
+              <a:rPr lang="en-US" sz="1550" dirty="0">
                 <a:solidFill>
                   <a:srgbClr val="17364A"/>
                 </a:solidFill>
@@ -3387,13 +3451,13 @@
               </a:rPr>
               <a:t>Transparency reporting should be risk-based.</a:t>
             </a:r>
-            <a:endParaRPr lang="en-US" sz="1250" dirty="0"/>
-          </a:p>
-        </p:txBody>
-      </p:sp>
-      <p:sp>
-        <p:nvSpPr>
-          <p:cNvPr id="14" name="Shape 12"/>
+            <a:endParaRPr lang="en-US" sz="1550" dirty="0"/>
+          </a:p>
+        </p:txBody>
+      </p:sp>
+      <p:sp>
+        <p:nvSpPr>
+          <p:cNvPr id="15" name="Shape 13"/>
           <p:cNvSpPr/>
           <p:nvPr/>
         </p:nvSpPr>
@@ -3420,14 +3484,14 @@
       </p:sp>
       <p:sp>
         <p:nvSpPr>
-          <p:cNvPr id="15" name="Text 13"/>
+          <p:cNvPr id="16" name="Text 14"/>
           <p:cNvSpPr/>
           <p:nvPr/>
         </p:nvSpPr>
         <p:spPr>
           <a:xfrm>
             <a:off x="8074152" y="3666744"/>
-            <a:ext cx="2825496" cy="201168"/>
+            <a:ext cx="2825496" cy="256032"/>
           </a:xfrm>
           <a:prstGeom prst="rect">
             <a:avLst/>
@@ -3443,7 +3507,7 @@
               <a:buNone/>
             </a:pPr>
             <a:r>
-              <a:rPr lang="en-US" sz="950" b="1" dirty="0">
+              <a:rPr lang="en-US" sz="1300" b="1" dirty="0">
                 <a:solidFill>
                   <a:srgbClr val="0068B7"/>
                 </a:solidFill>
@@ -3453,20 +3517,20 @@
               </a:rPr>
               <a:t>Use this for</a:t>
             </a:r>
-            <a:endParaRPr lang="en-US" sz="950" dirty="0"/>
-          </a:p>
-        </p:txBody>
-      </p:sp>
-      <p:sp>
-        <p:nvSpPr>
-          <p:cNvPr id="16" name="Text 14"/>
-          <p:cNvSpPr/>
-          <p:nvPr/>
-        </p:nvSpPr>
-        <p:spPr>
-          <a:xfrm>
-            <a:off x="8074152" y="3959352"/>
-            <a:ext cx="2825496" cy="1170432"/>
+            <a:endParaRPr lang="en-US" sz="1300" dirty="0"/>
+          </a:p>
+        </p:txBody>
+      </p:sp>
+      <p:sp>
+        <p:nvSpPr>
+          <p:cNvPr id="17" name="Text 15"/>
+          <p:cNvSpPr/>
+          <p:nvPr/>
+        </p:nvSpPr>
+        <p:spPr>
+          <a:xfrm>
+            <a:off x="8074152" y="4023360"/>
+            <a:ext cx="2825496" cy="1097280"/>
           </a:xfrm>
           <a:prstGeom prst="rect">
             <a:avLst/>
@@ -3484,7 +3548,7 @@
               <a:buNone/>
             </a:pPr>
             <a:r>
-              <a:rPr lang="en-US" sz="1250" dirty="0">
+              <a:rPr lang="en-US" sz="1550" dirty="0">
                 <a:solidFill>
                   <a:srgbClr val="17364A"/>
                 </a:solidFill>
@@ -3494,7 +3558,7 @@
               </a:rPr>
               <a:t>Connect the concept to public health decisions, safeguards, documentation, or implementation work.</a:t>
             </a:r>
-            <a:endParaRPr lang="en-US" sz="1250" dirty="0"/>
+            <a:endParaRPr lang="en-US" sz="1550" dirty="0"/>
           </a:p>
         </p:txBody>
       </p:sp>
@@ -3691,7 +3755,7 @@
                 <a:ea typeface="Aptos" pitchFamily="34" charset="-122"/>
                 <a:cs typeface="Aptos" pitchFamily="34" charset="-120"/>
               </a:rPr>
-              <a:t>© Paula Soper</a:t>
+              <a:t>Â© Paula Soper</a:t>
             </a:r>
             <a:endParaRPr lang="en-US" sz="800" dirty="0"/>
           </a:p>
@@ -3699,7 +3763,46 @@
       </p:sp>
       <p:sp>
         <p:nvSpPr>
-          <p:cNvPr id="7" name="Shape 5"/>
+          <p:cNvPr id="7" name="Text 5"/>
+          <p:cNvSpPr/>
+          <p:nvPr/>
+        </p:nvSpPr>
+        <p:spPr>
+          <a:xfrm>
+            <a:off x="11137392" y="6510528"/>
+            <a:ext cx="411480" cy="201168"/>
+          </a:xfrm>
+          <a:prstGeom prst="rect">
+            <a:avLst/>
+          </a:prstGeom>
+          <a:noFill/>
+          <a:ln/>
+        </p:spPr>
+        <p:txBody>
+          <a:bodyPr wrap="square" lIns="0" tIns="0" rIns="0" bIns="0" rtlCol="0" anchor="ctr"/>
+          <a:lstStyle/>
+          <a:p>
+            <a:pPr algn="r" indent="0" marL="0">
+              <a:buNone/>
+            </a:pPr>
+            <a:r>
+              <a:rPr lang="en-US" sz="900" dirty="0">
+                <a:solidFill>
+                  <a:srgbClr val="5F7181"/>
+                </a:solidFill>
+                <a:latin typeface="Aptos" pitchFamily="34" charset="0"/>
+                <a:ea typeface="Aptos" pitchFamily="34" charset="-122"/>
+                <a:cs typeface="Aptos" pitchFamily="34" charset="-120"/>
+              </a:rPr>
+              <a:t>11</a:t>
+            </a:r>
+            <a:endParaRPr lang="en-US" sz="900" dirty="0"/>
+          </a:p>
+        </p:txBody>
+      </p:sp>
+      <p:sp>
+        <p:nvSpPr>
+          <p:cNvPr id="8" name="Shape 6"/>
           <p:cNvSpPr/>
           <p:nvPr/>
         </p:nvSpPr>
@@ -3724,7 +3827,7 @@
       </p:sp>
       <p:sp>
         <p:nvSpPr>
-          <p:cNvPr id="8" name="Text 6"/>
+          <p:cNvPr id="9" name="Text 7"/>
           <p:cNvSpPr/>
           <p:nvPr/>
         </p:nvSpPr>
@@ -3763,14 +3866,14 @@
       </p:sp>
       <p:sp>
         <p:nvSpPr>
-          <p:cNvPr id="9" name="Text 7"/>
+          <p:cNvPr id="10" name="Text 8"/>
           <p:cNvSpPr/>
           <p:nvPr/>
         </p:nvSpPr>
         <p:spPr>
           <a:xfrm>
             <a:off x="640080" y="621792"/>
-            <a:ext cx="10881360" cy="566928"/>
+            <a:ext cx="10881360" cy="713232"/>
           </a:xfrm>
           <a:prstGeom prst="rect">
             <a:avLst/>
@@ -3788,7 +3891,7 @@
               <a:buNone/>
             </a:pPr>
             <a:r>
-              <a:rPr lang="en-US" sz="2700" b="1" dirty="0">
+              <a:rPr lang="en-US" sz="3400" b="1" dirty="0">
                 <a:solidFill>
                   <a:srgbClr val="003A63"/>
                 </a:solidFill>
@@ -3798,20 +3901,20 @@
               </a:rPr>
               <a:t>Risks, Failure Modes, and Guardrails</a:t>
             </a:r>
-            <a:endParaRPr lang="en-US" sz="2700" dirty="0"/>
-          </a:p>
-        </p:txBody>
-      </p:sp>
-      <p:sp>
-        <p:nvSpPr>
-          <p:cNvPr id="10" name="Text 8"/>
-          <p:cNvSpPr/>
-          <p:nvPr/>
-        </p:nvSpPr>
-        <p:spPr>
-          <a:xfrm>
-            <a:off x="868680" y="1417320"/>
-            <a:ext cx="6675120" cy="4434840"/>
+            <a:endParaRPr lang="en-US" sz="3400" dirty="0"/>
+          </a:p>
+        </p:txBody>
+      </p:sp>
+      <p:sp>
+        <p:nvSpPr>
+          <p:cNvPr id="11" name="Text 9"/>
+          <p:cNvSpPr/>
+          <p:nvPr/>
+        </p:nvSpPr>
+        <p:spPr>
+          <a:xfrm>
+            <a:off x="868680" y="1508760"/>
+            <a:ext cx="6537960" cy="4160520"/>
           </a:xfrm>
           <a:prstGeom prst="rect">
             <a:avLst/>
@@ -3826,7 +3929,7 @@
           <a:lstStyle/>
           <a:p>
             <a:r>
-              <a:rPr lang="en-US" sz="1700" dirty="0">
+              <a:rPr lang="en-US" sz="2100" dirty="0">
                 <a:solidFill>
                   <a:srgbClr val="17364A"/>
                 </a:solidFill>
@@ -3836,11 +3939,11 @@
               </a:rPr>
               <a:t>One risk is transparency theater.</a:t>
             </a:r>
-            <a:endParaRPr lang="en-US" sz="1700" dirty="0"/>
-          </a:p>
-          <a:p>
-            <a:r>
-              <a:rPr lang="en-US" sz="1700" dirty="0">
+            <a:endParaRPr lang="en-US" sz="2100" dirty="0"/>
+          </a:p>
+          <a:p>
+            <a:r>
+              <a:rPr lang="en-US" sz="2100" dirty="0">
                 <a:solidFill>
                   <a:srgbClr val="17364A"/>
                 </a:solidFill>
@@ -3848,13 +3951,13 @@
                 <a:ea typeface="Aptos" pitchFamily="34" charset="-122"/>
                 <a:cs typeface="Aptos" pitchFamily="34" charset="-120"/>
               </a:rPr>
-              <a:t>Agencies may publish broad statements about responsible AI without disclosing actual uses, owners, or safeguards.</a:t>
-            </a:r>
-            <a:endParaRPr lang="en-US" sz="1700" dirty="0"/>
-          </a:p>
-          <a:p>
-            <a:r>
-              <a:rPr lang="en-US" sz="1700" dirty="0">
+              <a:t>Agencies may publish broad statements about responsible AI without disclosing actual uses, owners, or.</a:t>
+            </a:r>
+            <a:endParaRPr lang="en-US" sz="2100" dirty="0"/>
+          </a:p>
+          <a:p>
+            <a:r>
+              <a:rPr lang="en-US" sz="2100" dirty="0">
                 <a:solidFill>
                   <a:srgbClr val="17364A"/>
                 </a:solidFill>
@@ -3862,29 +3965,15 @@
                 <a:ea typeface="Aptos" pitchFamily="34" charset="-122"/>
                 <a:cs typeface="Aptos" pitchFamily="34" charset="-120"/>
               </a:rPr>
-              <a:t>A guardrail is to maintain an AI use registry with concrete information about approved and operational use cases.</a:t>
-            </a:r>
-            <a:endParaRPr lang="en-US" sz="1700" dirty="0"/>
-          </a:p>
-          <a:p>
-            <a:r>
-              <a:rPr lang="en-US" sz="1700" dirty="0">
-                <a:solidFill>
-                  <a:srgbClr val="17364A"/>
-                </a:solidFill>
-                <a:latin typeface="Aptos" pitchFamily="34" charset="0"/>
-                <a:ea typeface="Aptos" pitchFamily="34" charset="-122"/>
-                <a:cs typeface="Aptos" pitchFamily="34" charset="-120"/>
-              </a:rPr>
-              <a:t>Another risk is over-disclosure of sensitive details.</a:t>
-            </a:r>
-            <a:endParaRPr lang="en-US" sz="1700" dirty="0"/>
-          </a:p>
-        </p:txBody>
-      </p:sp>
-      <p:sp>
-        <p:nvSpPr>
-          <p:cNvPr id="11" name="Shape 9"/>
+              <a:t>A guardrail is to maintain an AI use registry with concrete information about approved and operational.</a:t>
+            </a:r>
+            <a:endParaRPr lang="en-US" sz="2100" dirty="0"/>
+          </a:p>
+        </p:txBody>
+      </p:sp>
+      <p:sp>
+        <p:nvSpPr>
+          <p:cNvPr id="12" name="Shape 10"/>
           <p:cNvSpPr/>
           <p:nvPr/>
         </p:nvSpPr>
@@ -3911,14 +4000,14 @@
       </p:sp>
       <p:sp>
         <p:nvSpPr>
-          <p:cNvPr id="12" name="Text 10"/>
+          <p:cNvPr id="13" name="Text 11"/>
           <p:cNvSpPr/>
           <p:nvPr/>
         </p:nvSpPr>
         <p:spPr>
           <a:xfrm>
             <a:off x="8074152" y="1563624"/>
-            <a:ext cx="2825496" cy="201168"/>
+            <a:ext cx="2825496" cy="256032"/>
           </a:xfrm>
           <a:prstGeom prst="rect">
             <a:avLst/>
@@ -3934,7 +4023,7 @@
               <a:buNone/>
             </a:pPr>
             <a:r>
-              <a:rPr lang="en-US" sz="950" b="1" dirty="0">
+              <a:rPr lang="en-US" sz="1300" b="1" dirty="0">
                 <a:solidFill>
                   <a:srgbClr val="0068B7"/>
                 </a:solidFill>
@@ -3944,20 +4033,20 @@
               </a:rPr>
               <a:t>Key idea</a:t>
             </a:r>
-            <a:endParaRPr lang="en-US" sz="950" dirty="0"/>
-          </a:p>
-        </p:txBody>
-      </p:sp>
-      <p:sp>
-        <p:nvSpPr>
-          <p:cNvPr id="13" name="Text 11"/>
-          <p:cNvSpPr/>
-          <p:nvPr/>
-        </p:nvSpPr>
-        <p:spPr>
-          <a:xfrm>
-            <a:off x="8074152" y="1856232"/>
-            <a:ext cx="2825496" cy="1261872"/>
+            <a:endParaRPr lang="en-US" sz="1300" dirty="0"/>
+          </a:p>
+        </p:txBody>
+      </p:sp>
+      <p:sp>
+        <p:nvSpPr>
+          <p:cNvPr id="14" name="Text 12"/>
+          <p:cNvSpPr/>
+          <p:nvPr/>
+        </p:nvSpPr>
+        <p:spPr>
+          <a:xfrm>
+            <a:off x="8074152" y="1920240"/>
+            <a:ext cx="2825496" cy="1188720"/>
           </a:xfrm>
           <a:prstGeom prst="rect">
             <a:avLst/>
@@ -3975,7 +4064,7 @@
               <a:buNone/>
             </a:pPr>
             <a:r>
-              <a:rPr lang="en-US" sz="1250" dirty="0">
+              <a:rPr lang="en-US" sz="1550" dirty="0">
                 <a:solidFill>
                   <a:srgbClr val="17364A"/>
                 </a:solidFill>
@@ -3985,13 +4074,13 @@
               </a:rPr>
               <a:t>One risk is transparency theater.</a:t>
             </a:r>
-            <a:endParaRPr lang="en-US" sz="1250" dirty="0"/>
-          </a:p>
-        </p:txBody>
-      </p:sp>
-      <p:sp>
-        <p:nvSpPr>
-          <p:cNvPr id="14" name="Shape 12"/>
+            <a:endParaRPr lang="en-US" sz="1550" dirty="0"/>
+          </a:p>
+        </p:txBody>
+      </p:sp>
+      <p:sp>
+        <p:nvSpPr>
+          <p:cNvPr id="15" name="Shape 13"/>
           <p:cNvSpPr/>
           <p:nvPr/>
         </p:nvSpPr>
@@ -4018,14 +4107,14 @@
       </p:sp>
       <p:sp>
         <p:nvSpPr>
-          <p:cNvPr id="15" name="Text 13"/>
+          <p:cNvPr id="16" name="Text 14"/>
           <p:cNvSpPr/>
           <p:nvPr/>
         </p:nvSpPr>
         <p:spPr>
           <a:xfrm>
             <a:off x="8074152" y="3666744"/>
-            <a:ext cx="2825496" cy="201168"/>
+            <a:ext cx="2825496" cy="256032"/>
           </a:xfrm>
           <a:prstGeom prst="rect">
             <a:avLst/>
@@ -4041,7 +4130,7 @@
               <a:buNone/>
             </a:pPr>
             <a:r>
-              <a:rPr lang="en-US" sz="950" b="1" dirty="0">
+              <a:rPr lang="en-US" sz="1300" b="1" dirty="0">
                 <a:solidFill>
                   <a:srgbClr val="0068B7"/>
                 </a:solidFill>
@@ -4051,20 +4140,20 @@
               </a:rPr>
               <a:t>Use this for</a:t>
             </a:r>
-            <a:endParaRPr lang="en-US" sz="950" dirty="0"/>
-          </a:p>
-        </p:txBody>
-      </p:sp>
-      <p:sp>
-        <p:nvSpPr>
-          <p:cNvPr id="16" name="Text 14"/>
-          <p:cNvSpPr/>
-          <p:nvPr/>
-        </p:nvSpPr>
-        <p:spPr>
-          <a:xfrm>
-            <a:off x="8074152" y="3959352"/>
-            <a:ext cx="2825496" cy="1170432"/>
+            <a:endParaRPr lang="en-US" sz="1300" dirty="0"/>
+          </a:p>
+        </p:txBody>
+      </p:sp>
+      <p:sp>
+        <p:nvSpPr>
+          <p:cNvPr id="17" name="Text 15"/>
+          <p:cNvSpPr/>
+          <p:nvPr/>
+        </p:nvSpPr>
+        <p:spPr>
+          <a:xfrm>
+            <a:off x="8074152" y="4023360"/>
+            <a:ext cx="2825496" cy="1097280"/>
           </a:xfrm>
           <a:prstGeom prst="rect">
             <a:avLst/>
@@ -4082,7 +4171,7 @@
               <a:buNone/>
             </a:pPr>
             <a:r>
-              <a:rPr lang="en-US" sz="1250" dirty="0">
+              <a:rPr lang="en-US" sz="1550" dirty="0">
                 <a:solidFill>
                   <a:srgbClr val="17364A"/>
                 </a:solidFill>
@@ -4092,7 +4181,7 @@
               </a:rPr>
               <a:t>Connect the concept to public health decisions, safeguards, documentation, or implementation work.</a:t>
             </a:r>
-            <a:endParaRPr lang="en-US" sz="1250" dirty="0"/>
+            <a:endParaRPr lang="en-US" sz="1550" dirty="0"/>
           </a:p>
         </p:txBody>
       </p:sp>
@@ -4289,7 +4378,7 @@
                 <a:ea typeface="Aptos" pitchFamily="34" charset="-122"/>
                 <a:cs typeface="Aptos" pitchFamily="34" charset="-120"/>
               </a:rPr>
-              <a:t>© Paula Soper</a:t>
+              <a:t>Â© Paula Soper</a:t>
             </a:r>
             <a:endParaRPr lang="en-US" sz="800" dirty="0"/>
           </a:p>
@@ -4297,7 +4386,46 @@
       </p:sp>
       <p:sp>
         <p:nvSpPr>
-          <p:cNvPr id="7" name="Shape 5"/>
+          <p:cNvPr id="7" name="Text 5"/>
+          <p:cNvSpPr/>
+          <p:nvPr/>
+        </p:nvSpPr>
+        <p:spPr>
+          <a:xfrm>
+            <a:off x="11137392" y="6510528"/>
+            <a:ext cx="411480" cy="201168"/>
+          </a:xfrm>
+          <a:prstGeom prst="rect">
+            <a:avLst/>
+          </a:prstGeom>
+          <a:noFill/>
+          <a:ln/>
+        </p:spPr>
+        <p:txBody>
+          <a:bodyPr wrap="square" lIns="0" tIns="0" rIns="0" bIns="0" rtlCol="0" anchor="ctr"/>
+          <a:lstStyle/>
+          <a:p>
+            <a:pPr algn="r" indent="0" marL="0">
+              <a:buNone/>
+            </a:pPr>
+            <a:r>
+              <a:rPr lang="en-US" sz="900" dirty="0">
+                <a:solidFill>
+                  <a:srgbClr val="5F7181"/>
+                </a:solidFill>
+                <a:latin typeface="Aptos" pitchFamily="34" charset="0"/>
+                <a:ea typeface="Aptos" pitchFamily="34" charset="-122"/>
+                <a:cs typeface="Aptos" pitchFamily="34" charset="-120"/>
+              </a:rPr>
+              <a:t>12</a:t>
+            </a:r>
+            <a:endParaRPr lang="en-US" sz="900" dirty="0"/>
+          </a:p>
+        </p:txBody>
+      </p:sp>
+      <p:sp>
+        <p:nvSpPr>
+          <p:cNvPr id="8" name="Shape 6"/>
           <p:cNvSpPr/>
           <p:nvPr/>
         </p:nvSpPr>
@@ -4322,7 +4450,7 @@
       </p:sp>
       <p:sp>
         <p:nvSpPr>
-          <p:cNvPr id="8" name="Text 6"/>
+          <p:cNvPr id="9" name="Text 7"/>
           <p:cNvSpPr/>
           <p:nvPr/>
         </p:nvSpPr>
@@ -4361,14 +4489,14 @@
       </p:sp>
       <p:sp>
         <p:nvSpPr>
-          <p:cNvPr id="9" name="Text 7"/>
+          <p:cNvPr id="10" name="Text 8"/>
           <p:cNvSpPr/>
           <p:nvPr/>
         </p:nvSpPr>
         <p:spPr>
           <a:xfrm>
             <a:off x="640080" y="621792"/>
-            <a:ext cx="10881360" cy="566928"/>
+            <a:ext cx="10881360" cy="713232"/>
           </a:xfrm>
           <a:prstGeom prst="rect">
             <a:avLst/>
@@ -4386,7 +4514,7 @@
               <a:buNone/>
             </a:pPr>
             <a:r>
-              <a:rPr lang="en-US" sz="2700" b="1" dirty="0">
+              <a:rPr lang="en-US" sz="3400" b="1" dirty="0">
                 <a:solidFill>
                   <a:srgbClr val="003A63"/>
                 </a:solidFill>
@@ -4396,20 +4524,20 @@
               </a:rPr>
               <a:t>Application to AI-Supported Workflows</a:t>
             </a:r>
-            <a:endParaRPr lang="en-US" sz="2700" dirty="0"/>
-          </a:p>
-        </p:txBody>
-      </p:sp>
-      <p:sp>
-        <p:nvSpPr>
-          <p:cNvPr id="10" name="Text 8"/>
-          <p:cNvSpPr/>
-          <p:nvPr/>
-        </p:nvSpPr>
-        <p:spPr>
-          <a:xfrm>
-            <a:off x="868680" y="1417320"/>
-            <a:ext cx="6675120" cy="4434840"/>
+            <a:endParaRPr lang="en-US" sz="3400" dirty="0"/>
+          </a:p>
+        </p:txBody>
+      </p:sp>
+      <p:sp>
+        <p:nvSpPr>
+          <p:cNvPr id="11" name="Text 9"/>
+          <p:cNvSpPr/>
+          <p:nvPr/>
+        </p:nvSpPr>
+        <p:spPr>
+          <a:xfrm>
+            <a:off x="868680" y="1508760"/>
+            <a:ext cx="6537960" cy="4160520"/>
           </a:xfrm>
           <a:prstGeom prst="rect">
             <a:avLst/>
@@ -4424,7 +4552,7 @@
           <a:lstStyle/>
           <a:p>
             <a:r>
-              <a:rPr lang="en-US" sz="1700" dirty="0">
+              <a:rPr lang="en-US" sz="2100" dirty="0">
                 <a:solidFill>
                   <a:srgbClr val="17364A"/>
                 </a:solidFill>
@@ -4434,11 +4562,11 @@
               </a:rPr>
               <a:t>Generative AI transparency may explain when AI assists drafting and how human review occurs.</a:t>
             </a:r>
-            <a:endParaRPr lang="en-US" sz="1700" dirty="0"/>
-          </a:p>
-          <a:p>
-            <a:r>
-              <a:rPr lang="en-US" sz="1700" dirty="0">
+            <a:endParaRPr lang="en-US" sz="2100" dirty="0"/>
+          </a:p>
+          <a:p>
+            <a:r>
+              <a:rPr lang="en-US" sz="2100" dirty="0">
                 <a:solidFill>
                   <a:srgbClr val="17364A"/>
                 </a:solidFill>
@@ -4446,13 +4574,13 @@
                 <a:ea typeface="Aptos" pitchFamily="34" charset="-122"/>
                 <a:cs typeface="Aptos" pitchFamily="34" charset="-120"/>
               </a:rPr>
-              <a:t>Predictive analytics transparency may explain what the model supports, what decisions remain human, and how fairness is.</a:t>
-            </a:r>
-            <a:endParaRPr lang="en-US" sz="1700" dirty="0"/>
-          </a:p>
-          <a:p>
-            <a:r>
-              <a:rPr lang="en-US" sz="1700" dirty="0">
+              <a:t>Predictive analytics transparency may explain what the model supports, what decisions remain human, and.</a:t>
+            </a:r>
+            <a:endParaRPr lang="en-US" sz="2100" dirty="0"/>
+          </a:p>
+          <a:p>
+            <a:r>
+              <a:rPr lang="en-US" sz="2100" dirty="0">
                 <a:solidFill>
                   <a:srgbClr val="17364A"/>
                 </a:solidFill>
@@ -4460,15 +4588,15 @@
                 <a:ea typeface="Aptos" pitchFamily="34" charset="-122"/>
                 <a:cs typeface="Aptos" pitchFamily="34" charset="-120"/>
               </a:rPr>
-              <a:t>Agentic AI transparency may explain what actions are automated, what approvals are required, and how errors can be reported.</a:t>
-            </a:r>
-            <a:endParaRPr lang="en-US" sz="1700" dirty="0"/>
-          </a:p>
-        </p:txBody>
-      </p:sp>
-      <p:sp>
-        <p:nvSpPr>
-          <p:cNvPr id="11" name="Shape 9"/>
+              <a:t>Agentic AI transparency may explain what actions are automated, what approvals are required, and how.</a:t>
+            </a:r>
+            <a:endParaRPr lang="en-US" sz="2100" dirty="0"/>
+          </a:p>
+        </p:txBody>
+      </p:sp>
+      <p:sp>
+        <p:nvSpPr>
+          <p:cNvPr id="12" name="Shape 10"/>
           <p:cNvSpPr/>
           <p:nvPr/>
         </p:nvSpPr>
@@ -4495,14 +4623,14 @@
       </p:sp>
       <p:sp>
         <p:nvSpPr>
-          <p:cNvPr id="12" name="Text 10"/>
+          <p:cNvPr id="13" name="Text 11"/>
           <p:cNvSpPr/>
           <p:nvPr/>
         </p:nvSpPr>
         <p:spPr>
           <a:xfrm>
             <a:off x="8074152" y="1563624"/>
-            <a:ext cx="2825496" cy="201168"/>
+            <a:ext cx="2825496" cy="256032"/>
           </a:xfrm>
           <a:prstGeom prst="rect">
             <a:avLst/>
@@ -4518,7 +4646,7 @@
               <a:buNone/>
             </a:pPr>
             <a:r>
-              <a:rPr lang="en-US" sz="950" b="1" dirty="0">
+              <a:rPr lang="en-US" sz="1300" b="1" dirty="0">
                 <a:solidFill>
                   <a:srgbClr val="0068B7"/>
                 </a:solidFill>
@@ -4528,20 +4656,20 @@
               </a:rPr>
               <a:t>Key idea</a:t>
             </a:r>
-            <a:endParaRPr lang="en-US" sz="950" dirty="0"/>
-          </a:p>
-        </p:txBody>
-      </p:sp>
-      <p:sp>
-        <p:nvSpPr>
-          <p:cNvPr id="13" name="Text 11"/>
-          <p:cNvSpPr/>
-          <p:nvPr/>
-        </p:nvSpPr>
-        <p:spPr>
-          <a:xfrm>
-            <a:off x="8074152" y="1856232"/>
-            <a:ext cx="2825496" cy="1261872"/>
+            <a:endParaRPr lang="en-US" sz="1300" dirty="0"/>
+          </a:p>
+        </p:txBody>
+      </p:sp>
+      <p:sp>
+        <p:nvSpPr>
+          <p:cNvPr id="14" name="Text 12"/>
+          <p:cNvSpPr/>
+          <p:nvPr/>
+        </p:nvSpPr>
+        <p:spPr>
+          <a:xfrm>
+            <a:off x="8074152" y="1920240"/>
+            <a:ext cx="2825496" cy="1188720"/>
           </a:xfrm>
           <a:prstGeom prst="rect">
             <a:avLst/>
@@ -4559,7 +4687,7 @@
               <a:buNone/>
             </a:pPr>
             <a:r>
-              <a:rPr lang="en-US" sz="1250" dirty="0">
+              <a:rPr lang="en-US" sz="1550" dirty="0">
                 <a:solidFill>
                   <a:srgbClr val="17364A"/>
                 </a:solidFill>
@@ -4569,13 +4697,13 @@
               </a:rPr>
               <a:t>Generative AI transparency may explain when AI assists drafting and how human review occurs.</a:t>
             </a:r>
-            <a:endParaRPr lang="en-US" sz="1250" dirty="0"/>
-          </a:p>
-        </p:txBody>
-      </p:sp>
-      <p:sp>
-        <p:nvSpPr>
-          <p:cNvPr id="14" name="Shape 12"/>
+            <a:endParaRPr lang="en-US" sz="1550" dirty="0"/>
+          </a:p>
+        </p:txBody>
+      </p:sp>
+      <p:sp>
+        <p:nvSpPr>
+          <p:cNvPr id="15" name="Shape 13"/>
           <p:cNvSpPr/>
           <p:nvPr/>
         </p:nvSpPr>
@@ -4602,14 +4730,14 @@
       </p:sp>
       <p:sp>
         <p:nvSpPr>
-          <p:cNvPr id="15" name="Text 13"/>
+          <p:cNvPr id="16" name="Text 14"/>
           <p:cNvSpPr/>
           <p:nvPr/>
         </p:nvSpPr>
         <p:spPr>
           <a:xfrm>
             <a:off x="8074152" y="3666744"/>
-            <a:ext cx="2825496" cy="201168"/>
+            <a:ext cx="2825496" cy="256032"/>
           </a:xfrm>
           <a:prstGeom prst="rect">
             <a:avLst/>
@@ -4625,7 +4753,7 @@
               <a:buNone/>
             </a:pPr>
             <a:r>
-              <a:rPr lang="en-US" sz="950" b="1" dirty="0">
+              <a:rPr lang="en-US" sz="1300" b="1" dirty="0">
                 <a:solidFill>
                   <a:srgbClr val="0068B7"/>
                 </a:solidFill>
@@ -4635,20 +4763,20 @@
               </a:rPr>
               <a:t>Use this for</a:t>
             </a:r>
-            <a:endParaRPr lang="en-US" sz="950" dirty="0"/>
-          </a:p>
-        </p:txBody>
-      </p:sp>
-      <p:sp>
-        <p:nvSpPr>
-          <p:cNvPr id="16" name="Text 14"/>
-          <p:cNvSpPr/>
-          <p:nvPr/>
-        </p:nvSpPr>
-        <p:spPr>
-          <a:xfrm>
-            <a:off x="8074152" y="3959352"/>
-            <a:ext cx="2825496" cy="1170432"/>
+            <a:endParaRPr lang="en-US" sz="1300" dirty="0"/>
+          </a:p>
+        </p:txBody>
+      </p:sp>
+      <p:sp>
+        <p:nvSpPr>
+          <p:cNvPr id="17" name="Text 15"/>
+          <p:cNvSpPr/>
+          <p:nvPr/>
+        </p:nvSpPr>
+        <p:spPr>
+          <a:xfrm>
+            <a:off x="8074152" y="4023360"/>
+            <a:ext cx="2825496" cy="1097280"/>
           </a:xfrm>
           <a:prstGeom prst="rect">
             <a:avLst/>
@@ -4666,7 +4794,7 @@
               <a:buNone/>
             </a:pPr>
             <a:r>
-              <a:rPr lang="en-US" sz="1250" dirty="0">
+              <a:rPr lang="en-US" sz="1550" dirty="0">
                 <a:solidFill>
                   <a:srgbClr val="17364A"/>
                 </a:solidFill>
@@ -4676,7 +4804,7 @@
               </a:rPr>
               <a:t>Connect the concept to public health decisions, safeguards, documentation, or implementation work.</a:t>
             </a:r>
-            <a:endParaRPr lang="en-US" sz="1250" dirty="0"/>
+            <a:endParaRPr lang="en-US" sz="1550" dirty="0"/>
           </a:p>
         </p:txBody>
       </p:sp>
@@ -4873,7 +5001,7 @@
                 <a:ea typeface="Aptos" pitchFamily="34" charset="-122"/>
                 <a:cs typeface="Aptos" pitchFamily="34" charset="-120"/>
               </a:rPr>
-              <a:t>© Paula Soper</a:t>
+              <a:t>Â© Paula Soper</a:t>
             </a:r>
             <a:endParaRPr lang="en-US" sz="800" dirty="0"/>
           </a:p>
@@ -4881,7 +5009,46 @@
       </p:sp>
       <p:sp>
         <p:nvSpPr>
-          <p:cNvPr id="7" name="Shape 5"/>
+          <p:cNvPr id="7" name="Text 5"/>
+          <p:cNvSpPr/>
+          <p:nvPr/>
+        </p:nvSpPr>
+        <p:spPr>
+          <a:xfrm>
+            <a:off x="11137392" y="6510528"/>
+            <a:ext cx="411480" cy="201168"/>
+          </a:xfrm>
+          <a:prstGeom prst="rect">
+            <a:avLst/>
+          </a:prstGeom>
+          <a:noFill/>
+          <a:ln/>
+        </p:spPr>
+        <p:txBody>
+          <a:bodyPr wrap="square" lIns="0" tIns="0" rIns="0" bIns="0" rtlCol="0" anchor="ctr"/>
+          <a:lstStyle/>
+          <a:p>
+            <a:pPr algn="r" indent="0" marL="0">
+              <a:buNone/>
+            </a:pPr>
+            <a:r>
+              <a:rPr lang="en-US" sz="900" dirty="0">
+                <a:solidFill>
+                  <a:srgbClr val="5F7181"/>
+                </a:solidFill>
+                <a:latin typeface="Aptos" pitchFamily="34" charset="0"/>
+                <a:ea typeface="Aptos" pitchFamily="34" charset="-122"/>
+                <a:cs typeface="Aptos" pitchFamily="34" charset="-120"/>
+              </a:rPr>
+              <a:t>13</a:t>
+            </a:r>
+            <a:endParaRPr lang="en-US" sz="900" dirty="0"/>
+          </a:p>
+        </p:txBody>
+      </p:sp>
+      <p:sp>
+        <p:nvSpPr>
+          <p:cNvPr id="8" name="Shape 6"/>
           <p:cNvSpPr/>
           <p:nvPr/>
         </p:nvSpPr>
@@ -4906,7 +5073,7 @@
       </p:sp>
       <p:sp>
         <p:nvSpPr>
-          <p:cNvPr id="8" name="Text 6"/>
+          <p:cNvPr id="9" name="Text 7"/>
           <p:cNvSpPr/>
           <p:nvPr/>
         </p:nvSpPr>
@@ -4945,14 +5112,14 @@
       </p:sp>
       <p:sp>
         <p:nvSpPr>
-          <p:cNvPr id="9" name="Text 7"/>
+          <p:cNvPr id="10" name="Text 8"/>
           <p:cNvSpPr/>
           <p:nvPr/>
         </p:nvSpPr>
         <p:spPr>
           <a:xfrm>
             <a:off x="640080" y="621792"/>
-            <a:ext cx="10881360" cy="566928"/>
+            <a:ext cx="10881360" cy="713232"/>
           </a:xfrm>
           <a:prstGeom prst="rect">
             <a:avLst/>
@@ -4970,7 +5137,7 @@
               <a:buNone/>
             </a:pPr>
             <a:r>
-              <a:rPr lang="en-US" sz="2700" b="1" dirty="0">
+              <a:rPr lang="en-US" sz="3400" b="1" dirty="0">
                 <a:solidFill>
                   <a:srgbClr val="003A63"/>
                 </a:solidFill>
@@ -4980,20 +5147,20 @@
               </a:rPr>
               <a:t>Reflection Questions</a:t>
             </a:r>
-            <a:endParaRPr lang="en-US" sz="2700" dirty="0"/>
-          </a:p>
-        </p:txBody>
-      </p:sp>
-      <p:sp>
-        <p:nvSpPr>
-          <p:cNvPr id="10" name="Text 8"/>
-          <p:cNvSpPr/>
-          <p:nvPr/>
-        </p:nvSpPr>
-        <p:spPr>
-          <a:xfrm>
-            <a:off x="868680" y="1417320"/>
-            <a:ext cx="6675120" cy="4434840"/>
+            <a:endParaRPr lang="en-US" sz="3400" dirty="0"/>
+          </a:p>
+        </p:txBody>
+      </p:sp>
+      <p:sp>
+        <p:nvSpPr>
+          <p:cNvPr id="11" name="Text 9"/>
+          <p:cNvSpPr/>
+          <p:nvPr/>
+        </p:nvSpPr>
+        <p:spPr>
+          <a:xfrm>
+            <a:off x="868680" y="1508760"/>
+            <a:ext cx="6537960" cy="4160520"/>
           </a:xfrm>
           <a:prstGeom prst="rect">
             <a:avLst/>
@@ -5008,7 +5175,7 @@
           <a:lstStyle/>
           <a:p>
             <a:r>
-              <a:rPr lang="en-US" sz="1700" dirty="0">
+              <a:rPr lang="en-US" sz="2100" dirty="0">
                 <a:solidFill>
                   <a:srgbClr val="17364A"/>
                 </a:solidFill>
@@ -5016,13 +5183,13 @@
                 <a:ea typeface="Aptos" pitchFamily="34" charset="-122"/>
                 <a:cs typeface="Aptos" pitchFamily="34" charset="-120"/>
               </a:rPr>
-              <a:t>Which current or proposed AI use case in your agency raises this leadership or governance issue most clearly?</a:t>
-            </a:r>
-            <a:endParaRPr lang="en-US" sz="1700" dirty="0"/>
-          </a:p>
-          <a:p>
-            <a:r>
-              <a:rPr lang="en-US" sz="1700" dirty="0">
+              <a:t>Which current or proposed AI use case in your agency raises this leadership or governance issue most.</a:t>
+            </a:r>
+            <a:endParaRPr lang="en-US" sz="2100" dirty="0"/>
+          </a:p>
+          <a:p>
+            <a:r>
+              <a:rPr lang="en-US" sz="2100" dirty="0">
                 <a:solidFill>
                   <a:srgbClr val="17364A"/>
                 </a:solidFill>
@@ -5032,11 +5199,11 @@
               </a:rPr>
               <a:t>Who currently has authority to make decisions about this issue, and is that authority documented?</a:t>
             </a:r>
-            <a:endParaRPr lang="en-US" sz="1700" dirty="0"/>
-          </a:p>
-          <a:p>
-            <a:r>
-              <a:rPr lang="en-US" sz="1700" dirty="0">
+            <a:endParaRPr lang="en-US" sz="2100" dirty="0"/>
+          </a:p>
+          <a:p>
+            <a:r>
+              <a:rPr lang="en-US" sz="2100" dirty="0">
                 <a:solidFill>
                   <a:srgbClr val="17364A"/>
                 </a:solidFill>
@@ -5046,13 +5213,13 @@
               </a:rPr>
               <a:t>What evidence would governance or leadership need before approving the use case?</a:t>
             </a:r>
-            <a:endParaRPr lang="en-US" sz="1700" dirty="0"/>
-          </a:p>
-        </p:txBody>
-      </p:sp>
-      <p:sp>
-        <p:nvSpPr>
-          <p:cNvPr id="11" name="Shape 9"/>
+            <a:endParaRPr lang="en-US" sz="2100" dirty="0"/>
+          </a:p>
+        </p:txBody>
+      </p:sp>
+      <p:sp>
+        <p:nvSpPr>
+          <p:cNvPr id="12" name="Shape 10"/>
           <p:cNvSpPr/>
           <p:nvPr/>
         </p:nvSpPr>
@@ -5079,14 +5246,14 @@
       </p:sp>
       <p:sp>
         <p:nvSpPr>
-          <p:cNvPr id="12" name="Text 10"/>
+          <p:cNvPr id="13" name="Text 11"/>
           <p:cNvSpPr/>
           <p:nvPr/>
         </p:nvSpPr>
         <p:spPr>
           <a:xfrm>
             <a:off x="8074152" y="1563624"/>
-            <a:ext cx="2825496" cy="201168"/>
+            <a:ext cx="2825496" cy="256032"/>
           </a:xfrm>
           <a:prstGeom prst="rect">
             <a:avLst/>
@@ -5102,7 +5269,7 @@
               <a:buNone/>
             </a:pPr>
             <a:r>
-              <a:rPr lang="en-US" sz="950" b="1" dirty="0">
+              <a:rPr lang="en-US" sz="1300" b="1" dirty="0">
                 <a:solidFill>
                   <a:srgbClr val="0068B7"/>
                 </a:solidFill>
@@ -5112,20 +5279,20 @@
               </a:rPr>
               <a:t>Key idea</a:t>
             </a:r>
-            <a:endParaRPr lang="en-US" sz="950" dirty="0"/>
-          </a:p>
-        </p:txBody>
-      </p:sp>
-      <p:sp>
-        <p:nvSpPr>
-          <p:cNvPr id="13" name="Text 11"/>
-          <p:cNvSpPr/>
-          <p:nvPr/>
-        </p:nvSpPr>
-        <p:spPr>
-          <a:xfrm>
-            <a:off x="8074152" y="1856232"/>
-            <a:ext cx="2825496" cy="1261872"/>
+            <a:endParaRPr lang="en-US" sz="1300" dirty="0"/>
+          </a:p>
+        </p:txBody>
+      </p:sp>
+      <p:sp>
+        <p:nvSpPr>
+          <p:cNvPr id="14" name="Text 12"/>
+          <p:cNvSpPr/>
+          <p:nvPr/>
+        </p:nvSpPr>
+        <p:spPr>
+          <a:xfrm>
+            <a:off x="8074152" y="1920240"/>
+            <a:ext cx="2825496" cy="1188720"/>
           </a:xfrm>
           <a:prstGeom prst="rect">
             <a:avLst/>
@@ -5143,7 +5310,7 @@
               <a:buNone/>
             </a:pPr>
             <a:r>
-              <a:rPr lang="en-US" sz="1250" dirty="0">
+              <a:rPr lang="en-US" sz="1550" dirty="0">
                 <a:solidFill>
                   <a:srgbClr val="17364A"/>
                 </a:solidFill>
@@ -5151,15 +5318,15 @@
                 <a:ea typeface="Aptos" pitchFamily="34" charset="-122"/>
                 <a:cs typeface="Aptos" pitchFamily="34" charset="-120"/>
               </a:rPr>
-              <a:t>Which current or proposed AI use case in your agency raises this leadership or governance issue most clearly?</a:t>
-            </a:r>
-            <a:endParaRPr lang="en-US" sz="1250" dirty="0"/>
-          </a:p>
-        </p:txBody>
-      </p:sp>
-      <p:sp>
-        <p:nvSpPr>
-          <p:cNvPr id="14" name="Shape 12"/>
+              <a:t>Which current or proposed AI use case in your agency raises this leadership or governance issue most.</a:t>
+            </a:r>
+            <a:endParaRPr lang="en-US" sz="1550" dirty="0"/>
+          </a:p>
+        </p:txBody>
+      </p:sp>
+      <p:sp>
+        <p:nvSpPr>
+          <p:cNvPr id="15" name="Shape 13"/>
           <p:cNvSpPr/>
           <p:nvPr/>
         </p:nvSpPr>
@@ -5186,14 +5353,14 @@
       </p:sp>
       <p:sp>
         <p:nvSpPr>
-          <p:cNvPr id="15" name="Text 13"/>
+          <p:cNvPr id="16" name="Text 14"/>
           <p:cNvSpPr/>
           <p:nvPr/>
         </p:nvSpPr>
         <p:spPr>
           <a:xfrm>
             <a:off x="8074152" y="3666744"/>
-            <a:ext cx="2825496" cy="201168"/>
+            <a:ext cx="2825496" cy="256032"/>
           </a:xfrm>
           <a:prstGeom prst="rect">
             <a:avLst/>
@@ -5209,7 +5376,7 @@
               <a:buNone/>
             </a:pPr>
             <a:r>
-              <a:rPr lang="en-US" sz="950" b="1" dirty="0">
+              <a:rPr lang="en-US" sz="1300" b="1" dirty="0">
                 <a:solidFill>
                   <a:srgbClr val="0068B7"/>
                 </a:solidFill>
@@ -5219,20 +5386,20 @@
               </a:rPr>
               <a:t>Use this for</a:t>
             </a:r>
-            <a:endParaRPr lang="en-US" sz="950" dirty="0"/>
-          </a:p>
-        </p:txBody>
-      </p:sp>
-      <p:sp>
-        <p:nvSpPr>
-          <p:cNvPr id="16" name="Text 14"/>
-          <p:cNvSpPr/>
-          <p:nvPr/>
-        </p:nvSpPr>
-        <p:spPr>
-          <a:xfrm>
-            <a:off x="8074152" y="3959352"/>
-            <a:ext cx="2825496" cy="1170432"/>
+            <a:endParaRPr lang="en-US" sz="1300" dirty="0"/>
+          </a:p>
+        </p:txBody>
+      </p:sp>
+      <p:sp>
+        <p:nvSpPr>
+          <p:cNvPr id="17" name="Text 15"/>
+          <p:cNvSpPr/>
+          <p:nvPr/>
+        </p:nvSpPr>
+        <p:spPr>
+          <a:xfrm>
+            <a:off x="8074152" y="4023360"/>
+            <a:ext cx="2825496" cy="1097280"/>
           </a:xfrm>
           <a:prstGeom prst="rect">
             <a:avLst/>
@@ -5250,7 +5417,7 @@
               <a:buNone/>
             </a:pPr>
             <a:r>
-              <a:rPr lang="en-US" sz="1250" dirty="0">
+              <a:rPr lang="en-US" sz="1550" dirty="0">
                 <a:solidFill>
                   <a:srgbClr val="17364A"/>
                 </a:solidFill>
@@ -5260,7 +5427,7 @@
               </a:rPr>
               <a:t>Connect the concept to public health decisions, safeguards, documentation, or implementation work.</a:t>
             </a:r>
-            <a:endParaRPr lang="en-US" sz="1250" dirty="0"/>
+            <a:endParaRPr lang="en-US" sz="1550" dirty="0"/>
           </a:p>
         </p:txBody>
       </p:sp>
@@ -5457,7 +5624,7 @@
                 <a:ea typeface="Aptos" pitchFamily="34" charset="-122"/>
                 <a:cs typeface="Aptos" pitchFamily="34" charset="-120"/>
               </a:rPr>
-              <a:t>© Paula Soper</a:t>
+              <a:t>Â© Paula Soper</a:t>
             </a:r>
             <a:endParaRPr lang="en-US" sz="800" dirty="0"/>
           </a:p>
@@ -5471,8 +5638,47 @@
         </p:nvSpPr>
         <p:spPr>
           <a:xfrm>
+            <a:off x="11137392" y="6510528"/>
+            <a:ext cx="411480" cy="201168"/>
+          </a:xfrm>
+          <a:prstGeom prst="rect">
+            <a:avLst/>
+          </a:prstGeom>
+          <a:noFill/>
+          <a:ln/>
+        </p:spPr>
+        <p:txBody>
+          <a:bodyPr wrap="square" lIns="0" tIns="0" rIns="0" bIns="0" rtlCol="0" anchor="ctr"/>
+          <a:lstStyle/>
+          <a:p>
+            <a:pPr algn="r" indent="0" marL="0">
+              <a:buNone/>
+            </a:pPr>
+            <a:r>
+              <a:rPr lang="en-US" sz="900" dirty="0">
+                <a:solidFill>
+                  <a:srgbClr val="5F7181"/>
+                </a:solidFill>
+                <a:latin typeface="Aptos" pitchFamily="34" charset="0"/>
+                <a:ea typeface="Aptos" pitchFamily="34" charset="-122"/>
+                <a:cs typeface="Aptos" pitchFamily="34" charset="-120"/>
+              </a:rPr>
+              <a:t>14</a:t>
+            </a:r>
+            <a:endParaRPr lang="en-US" sz="900" dirty="0"/>
+          </a:p>
+        </p:txBody>
+      </p:sp>
+      <p:sp>
+        <p:nvSpPr>
+          <p:cNvPr id="8" name="Text 6"/>
+          <p:cNvSpPr/>
+          <p:nvPr/>
+        </p:nvSpPr>
+        <p:spPr>
+          <a:xfrm>
             <a:off x="640080" y="658368"/>
-            <a:ext cx="10881360" cy="566928"/>
+            <a:ext cx="10881360" cy="713232"/>
           </a:xfrm>
           <a:prstGeom prst="rect">
             <a:avLst/>
@@ -5490,7 +5696,7 @@
               <a:buNone/>
             </a:pPr>
             <a:r>
-              <a:rPr lang="en-US" sz="2700" b="1" dirty="0">
+              <a:rPr lang="en-US" sz="3400" b="1" dirty="0">
                 <a:solidFill>
                   <a:srgbClr val="003A63"/>
                 </a:solidFill>
@@ -5500,20 +5706,20 @@
               </a:rPr>
               <a:t>Reflection Questions Continued</a:t>
             </a:r>
-            <a:endParaRPr lang="en-US" sz="2700" dirty="0"/>
-          </a:p>
-        </p:txBody>
-      </p:sp>
-      <p:sp>
-        <p:nvSpPr>
-          <p:cNvPr id="8" name="Text 6"/>
-          <p:cNvSpPr/>
-          <p:nvPr/>
-        </p:nvSpPr>
-        <p:spPr>
-          <a:xfrm>
-            <a:off x="868680" y="1417320"/>
-            <a:ext cx="6675120" cy="4434840"/>
+            <a:endParaRPr lang="en-US" sz="3400" dirty="0"/>
+          </a:p>
+        </p:txBody>
+      </p:sp>
+      <p:sp>
+        <p:nvSpPr>
+          <p:cNvPr id="9" name="Text 7"/>
+          <p:cNvSpPr/>
+          <p:nvPr/>
+        </p:nvSpPr>
+        <p:spPr>
+          <a:xfrm>
+            <a:off x="868680" y="1508760"/>
+            <a:ext cx="6537960" cy="4160520"/>
           </a:xfrm>
           <a:prstGeom prst="rect">
             <a:avLst/>
@@ -5528,7 +5734,7 @@
           <a:lstStyle/>
           <a:p>
             <a:r>
-              <a:rPr lang="en-US" sz="1700" dirty="0">
+              <a:rPr lang="en-US" sz="2100" dirty="0">
                 <a:solidFill>
                   <a:srgbClr val="17364A"/>
                 </a:solidFill>
@@ -5538,11 +5744,11 @@
               </a:rPr>
               <a:t>Which staff, partners, or communities would be affected if this issue were handled poorly?</a:t>
             </a:r>
-            <a:endParaRPr lang="en-US" sz="1700" dirty="0"/>
-          </a:p>
-          <a:p>
-            <a:r>
-              <a:rPr lang="en-US" sz="1700" dirty="0">
+            <a:endParaRPr lang="en-US" sz="2100" dirty="0"/>
+          </a:p>
+          <a:p>
+            <a:r>
+              <a:rPr lang="en-US" sz="2100" dirty="0">
                 <a:solidFill>
                   <a:srgbClr val="17364A"/>
                 </a:solidFill>
@@ -5552,13 +5758,13 @@
               </a:rPr>
               <a:t>What policy, process, or artifact should be created or updated after this module?</a:t>
             </a:r>
-            <a:endParaRPr lang="en-US" sz="1700" dirty="0"/>
-          </a:p>
-        </p:txBody>
-      </p:sp>
-      <p:sp>
-        <p:nvSpPr>
-          <p:cNvPr id="9" name="Shape 7"/>
+            <a:endParaRPr lang="en-US" sz="2100" dirty="0"/>
+          </a:p>
+        </p:txBody>
+      </p:sp>
+      <p:sp>
+        <p:nvSpPr>
+          <p:cNvPr id="10" name="Shape 8"/>
           <p:cNvSpPr/>
           <p:nvPr/>
         </p:nvSpPr>
@@ -5585,14 +5791,14 @@
       </p:sp>
       <p:sp>
         <p:nvSpPr>
-          <p:cNvPr id="10" name="Text 8"/>
+          <p:cNvPr id="11" name="Text 9"/>
           <p:cNvSpPr/>
           <p:nvPr/>
         </p:nvSpPr>
         <p:spPr>
           <a:xfrm>
             <a:off x="8074152" y="1563624"/>
-            <a:ext cx="2825496" cy="201168"/>
+            <a:ext cx="2825496" cy="256032"/>
           </a:xfrm>
           <a:prstGeom prst="rect">
             <a:avLst/>
@@ -5608,7 +5814,7 @@
               <a:buNone/>
             </a:pPr>
             <a:r>
-              <a:rPr lang="en-US" sz="950" b="1" dirty="0">
+              <a:rPr lang="en-US" sz="1300" b="1" dirty="0">
                 <a:solidFill>
                   <a:srgbClr val="0068B7"/>
                 </a:solidFill>
@@ -5618,20 +5824,20 @@
               </a:rPr>
               <a:t>Key idea</a:t>
             </a:r>
-            <a:endParaRPr lang="en-US" sz="950" dirty="0"/>
-          </a:p>
-        </p:txBody>
-      </p:sp>
-      <p:sp>
-        <p:nvSpPr>
-          <p:cNvPr id="11" name="Text 9"/>
-          <p:cNvSpPr/>
-          <p:nvPr/>
-        </p:nvSpPr>
-        <p:spPr>
-          <a:xfrm>
-            <a:off x="8074152" y="1856232"/>
-            <a:ext cx="2825496" cy="1261872"/>
+            <a:endParaRPr lang="en-US" sz="1300" dirty="0"/>
+          </a:p>
+        </p:txBody>
+      </p:sp>
+      <p:sp>
+        <p:nvSpPr>
+          <p:cNvPr id="12" name="Text 10"/>
+          <p:cNvSpPr/>
+          <p:nvPr/>
+        </p:nvSpPr>
+        <p:spPr>
+          <a:xfrm>
+            <a:off x="8074152" y="1920240"/>
+            <a:ext cx="2825496" cy="1188720"/>
           </a:xfrm>
           <a:prstGeom prst="rect">
             <a:avLst/>
@@ -5649,7 +5855,7 @@
               <a:buNone/>
             </a:pPr>
             <a:r>
-              <a:rPr lang="en-US" sz="1250" dirty="0">
+              <a:rPr lang="en-US" sz="1550" dirty="0">
                 <a:solidFill>
                   <a:srgbClr val="17364A"/>
                 </a:solidFill>
@@ -5659,13 +5865,13 @@
               </a:rPr>
               <a:t>Which staff, partners, or communities would be affected if this issue were handled poorly?</a:t>
             </a:r>
-            <a:endParaRPr lang="en-US" sz="1250" dirty="0"/>
-          </a:p>
-        </p:txBody>
-      </p:sp>
-      <p:sp>
-        <p:nvSpPr>
-          <p:cNvPr id="12" name="Shape 10"/>
+            <a:endParaRPr lang="en-US" sz="1550" dirty="0"/>
+          </a:p>
+        </p:txBody>
+      </p:sp>
+      <p:sp>
+        <p:nvSpPr>
+          <p:cNvPr id="13" name="Shape 11"/>
           <p:cNvSpPr/>
           <p:nvPr/>
         </p:nvSpPr>
@@ -5692,14 +5898,14 @@
       </p:sp>
       <p:sp>
         <p:nvSpPr>
-          <p:cNvPr id="13" name="Text 11"/>
+          <p:cNvPr id="14" name="Text 12"/>
           <p:cNvSpPr/>
           <p:nvPr/>
         </p:nvSpPr>
         <p:spPr>
           <a:xfrm>
             <a:off x="8074152" y="3666744"/>
-            <a:ext cx="2825496" cy="201168"/>
+            <a:ext cx="2825496" cy="256032"/>
           </a:xfrm>
           <a:prstGeom prst="rect">
             <a:avLst/>
@@ -5715,7 +5921,7 @@
               <a:buNone/>
             </a:pPr>
             <a:r>
-              <a:rPr lang="en-US" sz="950" b="1" dirty="0">
+              <a:rPr lang="en-US" sz="1300" b="1" dirty="0">
                 <a:solidFill>
                   <a:srgbClr val="0068B7"/>
                 </a:solidFill>
@@ -5725,20 +5931,20 @@
               </a:rPr>
               <a:t>Use this for</a:t>
             </a:r>
-            <a:endParaRPr lang="en-US" sz="950" dirty="0"/>
-          </a:p>
-        </p:txBody>
-      </p:sp>
-      <p:sp>
-        <p:nvSpPr>
-          <p:cNvPr id="14" name="Text 12"/>
-          <p:cNvSpPr/>
-          <p:nvPr/>
-        </p:nvSpPr>
-        <p:spPr>
-          <a:xfrm>
-            <a:off x="8074152" y="3959352"/>
-            <a:ext cx="2825496" cy="1170432"/>
+            <a:endParaRPr lang="en-US" sz="1300" dirty="0"/>
+          </a:p>
+        </p:txBody>
+      </p:sp>
+      <p:sp>
+        <p:nvSpPr>
+          <p:cNvPr id="15" name="Text 13"/>
+          <p:cNvSpPr/>
+          <p:nvPr/>
+        </p:nvSpPr>
+        <p:spPr>
+          <a:xfrm>
+            <a:off x="8074152" y="4023360"/>
+            <a:ext cx="2825496" cy="1097280"/>
           </a:xfrm>
           <a:prstGeom prst="rect">
             <a:avLst/>
@@ -5756,7 +5962,7 @@
               <a:buNone/>
             </a:pPr>
             <a:r>
-              <a:rPr lang="en-US" sz="1250" dirty="0">
+              <a:rPr lang="en-US" sz="1550" dirty="0">
                 <a:solidFill>
                   <a:srgbClr val="17364A"/>
                 </a:solidFill>
@@ -5766,7 +5972,7 @@
               </a:rPr>
               <a:t>Connect the concept to public health decisions, safeguards, documentation, or implementation work.</a:t>
             </a:r>
-            <a:endParaRPr lang="en-US" sz="1250" dirty="0"/>
+            <a:endParaRPr lang="en-US" sz="1550" dirty="0"/>
           </a:p>
         </p:txBody>
       </p:sp>
@@ -5963,7 +6169,7 @@
                 <a:ea typeface="Aptos" pitchFamily="34" charset="-122"/>
                 <a:cs typeface="Aptos" pitchFamily="34" charset="-120"/>
               </a:rPr>
-              <a:t>© Paula Soper</a:t>
+              <a:t>Â© Paula Soper</a:t>
             </a:r>
             <a:endParaRPr lang="en-US" sz="800" dirty="0"/>
           </a:p>
@@ -5971,7 +6177,46 @@
       </p:sp>
       <p:sp>
         <p:nvSpPr>
-          <p:cNvPr id="7" name="Shape 5"/>
+          <p:cNvPr id="7" name="Text 5"/>
+          <p:cNvSpPr/>
+          <p:nvPr/>
+        </p:nvSpPr>
+        <p:spPr>
+          <a:xfrm>
+            <a:off x="11137392" y="6510528"/>
+            <a:ext cx="411480" cy="201168"/>
+          </a:xfrm>
+          <a:prstGeom prst="rect">
+            <a:avLst/>
+          </a:prstGeom>
+          <a:noFill/>
+          <a:ln/>
+        </p:spPr>
+        <p:txBody>
+          <a:bodyPr wrap="square" lIns="0" tIns="0" rIns="0" bIns="0" rtlCol="0" anchor="ctr"/>
+          <a:lstStyle/>
+          <a:p>
+            <a:pPr algn="r" indent="0" marL="0">
+              <a:buNone/>
+            </a:pPr>
+            <a:r>
+              <a:rPr lang="en-US" sz="900" dirty="0">
+                <a:solidFill>
+                  <a:srgbClr val="5F7181"/>
+                </a:solidFill>
+                <a:latin typeface="Aptos" pitchFamily="34" charset="0"/>
+                <a:ea typeface="Aptos" pitchFamily="34" charset="-122"/>
+                <a:cs typeface="Aptos" pitchFamily="34" charset="-120"/>
+              </a:rPr>
+              <a:t>15</a:t>
+            </a:r>
+            <a:endParaRPr lang="en-US" sz="900" dirty="0"/>
+          </a:p>
+        </p:txBody>
+      </p:sp>
+      <p:sp>
+        <p:nvSpPr>
+          <p:cNvPr id="8" name="Shape 6"/>
           <p:cNvSpPr/>
           <p:nvPr/>
         </p:nvSpPr>
@@ -5996,7 +6241,7 @@
       </p:sp>
       <p:sp>
         <p:nvSpPr>
-          <p:cNvPr id="8" name="Text 6"/>
+          <p:cNvPr id="9" name="Text 7"/>
           <p:cNvSpPr/>
           <p:nvPr/>
         </p:nvSpPr>
@@ -6035,14 +6280,14 @@
       </p:sp>
       <p:sp>
         <p:nvSpPr>
-          <p:cNvPr id="9" name="Text 7"/>
+          <p:cNvPr id="10" name="Text 8"/>
           <p:cNvSpPr/>
           <p:nvPr/>
         </p:nvSpPr>
         <p:spPr>
           <a:xfrm>
             <a:off x="640080" y="621792"/>
-            <a:ext cx="10881360" cy="566928"/>
+            <a:ext cx="10881360" cy="713232"/>
           </a:xfrm>
           <a:prstGeom prst="rect">
             <a:avLst/>
@@ -6060,7 +6305,7 @@
               <a:buNone/>
             </a:pPr>
             <a:r>
-              <a:rPr lang="en-US" sz="2700" b="1" dirty="0">
+              <a:rPr lang="en-US" sz="3400" b="1" dirty="0">
                 <a:solidFill>
                   <a:srgbClr val="003A63"/>
                 </a:solidFill>
@@ -6070,20 +6315,20 @@
               </a:rPr>
               <a:t>Practical Exercise</a:t>
             </a:r>
-            <a:endParaRPr lang="en-US" sz="2700" dirty="0"/>
-          </a:p>
-        </p:txBody>
-      </p:sp>
-      <p:sp>
-        <p:nvSpPr>
-          <p:cNvPr id="10" name="Text 8"/>
-          <p:cNvSpPr/>
-          <p:nvPr/>
-        </p:nvSpPr>
-        <p:spPr>
-          <a:xfrm>
-            <a:off x="868680" y="1417320"/>
-            <a:ext cx="6675120" cy="4434840"/>
+            <a:endParaRPr lang="en-US" sz="3400" dirty="0"/>
+          </a:p>
+        </p:txBody>
+      </p:sp>
+      <p:sp>
+        <p:nvSpPr>
+          <p:cNvPr id="11" name="Text 9"/>
+          <p:cNvSpPr/>
+          <p:nvPr/>
+        </p:nvSpPr>
+        <p:spPr>
+          <a:xfrm>
+            <a:off x="868680" y="1508760"/>
+            <a:ext cx="6537960" cy="4160520"/>
           </a:xfrm>
           <a:prstGeom prst="rect">
             <a:avLst/>
@@ -6098,7 +6343,7 @@
           <a:lstStyle/>
           <a:p>
             <a:r>
-              <a:rPr lang="en-US" sz="1700" dirty="0">
+              <a:rPr lang="en-US" sz="2100" dirty="0">
                 <a:solidFill>
                   <a:srgbClr val="17364A"/>
                 </a:solidFill>
@@ -6108,11 +6353,11 @@
               </a:rPr>
               <a:t>Create a transparency reporting template and apply it to one AI use case.</a:t>
             </a:r>
-            <a:endParaRPr lang="en-US" sz="1700" dirty="0"/>
-          </a:p>
-          <a:p>
-            <a:r>
-              <a:rPr lang="en-US" sz="1700" dirty="0">
+            <a:endParaRPr lang="en-US" sz="2100" dirty="0"/>
+          </a:p>
+          <a:p>
+            <a:r>
+              <a:rPr lang="en-US" sz="2100" dirty="0">
                 <a:solidFill>
                   <a:srgbClr val="17364A"/>
                 </a:solidFill>
@@ -6120,15 +6365,15 @@
                 <a:ea typeface="Aptos" pitchFamily="34" charset="-122"/>
                 <a:cs typeface="Aptos" pitchFamily="34" charset="-120"/>
               </a:rPr>
-              <a:t>Include purpose, owner, users, data categories, risk level, safeguards, human review, limitations, review date, and contact.</a:t>
-            </a:r>
-            <a:endParaRPr lang="en-US" sz="1700" dirty="0"/>
-          </a:p>
-        </p:txBody>
-      </p:sp>
-      <p:sp>
-        <p:nvSpPr>
-          <p:cNvPr id="11" name="Shape 9"/>
+              <a:t>Include purpose, owner, users, data categories, risk level, safeguards, human review, limitations,.</a:t>
+            </a:r>
+            <a:endParaRPr lang="en-US" sz="2100" dirty="0"/>
+          </a:p>
+        </p:txBody>
+      </p:sp>
+      <p:sp>
+        <p:nvSpPr>
+          <p:cNvPr id="12" name="Shape 10"/>
           <p:cNvSpPr/>
           <p:nvPr/>
         </p:nvSpPr>
@@ -6155,14 +6400,14 @@
       </p:sp>
       <p:sp>
         <p:nvSpPr>
-          <p:cNvPr id="12" name="Text 10"/>
+          <p:cNvPr id="13" name="Text 11"/>
           <p:cNvSpPr/>
           <p:nvPr/>
         </p:nvSpPr>
         <p:spPr>
           <a:xfrm>
             <a:off x="8074152" y="1563624"/>
-            <a:ext cx="2825496" cy="201168"/>
+            <a:ext cx="2825496" cy="256032"/>
           </a:xfrm>
           <a:prstGeom prst="rect">
             <a:avLst/>
@@ -6178,7 +6423,7 @@
               <a:buNone/>
             </a:pPr>
             <a:r>
-              <a:rPr lang="en-US" sz="950" b="1" dirty="0">
+              <a:rPr lang="en-US" sz="1300" b="1" dirty="0">
                 <a:solidFill>
                   <a:srgbClr val="0068B7"/>
                 </a:solidFill>
@@ -6188,20 +6433,20 @@
               </a:rPr>
               <a:t>Key idea</a:t>
             </a:r>
-            <a:endParaRPr lang="en-US" sz="950" dirty="0"/>
-          </a:p>
-        </p:txBody>
-      </p:sp>
-      <p:sp>
-        <p:nvSpPr>
-          <p:cNvPr id="13" name="Text 11"/>
-          <p:cNvSpPr/>
-          <p:nvPr/>
-        </p:nvSpPr>
-        <p:spPr>
-          <a:xfrm>
-            <a:off x="8074152" y="1856232"/>
-            <a:ext cx="2825496" cy="1261872"/>
+            <a:endParaRPr lang="en-US" sz="1300" dirty="0"/>
+          </a:p>
+        </p:txBody>
+      </p:sp>
+      <p:sp>
+        <p:nvSpPr>
+          <p:cNvPr id="14" name="Text 12"/>
+          <p:cNvSpPr/>
+          <p:nvPr/>
+        </p:nvSpPr>
+        <p:spPr>
+          <a:xfrm>
+            <a:off x="8074152" y="1920240"/>
+            <a:ext cx="2825496" cy="1188720"/>
           </a:xfrm>
           <a:prstGeom prst="rect">
             <a:avLst/>
@@ -6219,7 +6464,7 @@
               <a:buNone/>
             </a:pPr>
             <a:r>
-              <a:rPr lang="en-US" sz="1250" dirty="0">
+              <a:rPr lang="en-US" sz="1550" dirty="0">
                 <a:solidFill>
                   <a:srgbClr val="17364A"/>
                 </a:solidFill>
@@ -6229,13 +6474,13 @@
               </a:rPr>
               <a:t>Create a transparency reporting template and apply it to one AI use case.</a:t>
             </a:r>
-            <a:endParaRPr lang="en-US" sz="1250" dirty="0"/>
-          </a:p>
-        </p:txBody>
-      </p:sp>
-      <p:sp>
-        <p:nvSpPr>
-          <p:cNvPr id="14" name="Shape 12"/>
+            <a:endParaRPr lang="en-US" sz="1550" dirty="0"/>
+          </a:p>
+        </p:txBody>
+      </p:sp>
+      <p:sp>
+        <p:nvSpPr>
+          <p:cNvPr id="15" name="Shape 13"/>
           <p:cNvSpPr/>
           <p:nvPr/>
         </p:nvSpPr>
@@ -6262,14 +6507,14 @@
       </p:sp>
       <p:sp>
         <p:nvSpPr>
-          <p:cNvPr id="15" name="Text 13"/>
+          <p:cNvPr id="16" name="Text 14"/>
           <p:cNvSpPr/>
           <p:nvPr/>
         </p:nvSpPr>
         <p:spPr>
           <a:xfrm>
             <a:off x="8074152" y="3666744"/>
-            <a:ext cx="2825496" cy="201168"/>
+            <a:ext cx="2825496" cy="256032"/>
           </a:xfrm>
           <a:prstGeom prst="rect">
             <a:avLst/>
@@ -6285,7 +6530,7 @@
               <a:buNone/>
             </a:pPr>
             <a:r>
-              <a:rPr lang="en-US" sz="950" b="1" dirty="0">
+              <a:rPr lang="en-US" sz="1300" b="1" dirty="0">
                 <a:solidFill>
                   <a:srgbClr val="0068B7"/>
                 </a:solidFill>
@@ -6295,20 +6540,20 @@
               </a:rPr>
               <a:t>Use this for</a:t>
             </a:r>
-            <a:endParaRPr lang="en-US" sz="950" dirty="0"/>
-          </a:p>
-        </p:txBody>
-      </p:sp>
-      <p:sp>
-        <p:nvSpPr>
-          <p:cNvPr id="16" name="Text 14"/>
-          <p:cNvSpPr/>
-          <p:nvPr/>
-        </p:nvSpPr>
-        <p:spPr>
-          <a:xfrm>
-            <a:off x="8074152" y="3959352"/>
-            <a:ext cx="2825496" cy="1170432"/>
+            <a:endParaRPr lang="en-US" sz="1300" dirty="0"/>
+          </a:p>
+        </p:txBody>
+      </p:sp>
+      <p:sp>
+        <p:nvSpPr>
+          <p:cNvPr id="17" name="Text 15"/>
+          <p:cNvSpPr/>
+          <p:nvPr/>
+        </p:nvSpPr>
+        <p:spPr>
+          <a:xfrm>
+            <a:off x="8074152" y="4023360"/>
+            <a:ext cx="2825496" cy="1097280"/>
           </a:xfrm>
           <a:prstGeom prst="rect">
             <a:avLst/>
@@ -6326,7 +6571,7 @@
               <a:buNone/>
             </a:pPr>
             <a:r>
-              <a:rPr lang="en-US" sz="1250" dirty="0">
+              <a:rPr lang="en-US" sz="1550" dirty="0">
                 <a:solidFill>
                   <a:srgbClr val="17364A"/>
                 </a:solidFill>
@@ -6336,7 +6581,7 @@
               </a:rPr>
               <a:t>Connect the concept to public health decisions, safeguards, documentation, or implementation work.</a:t>
             </a:r>
-            <a:endParaRPr lang="en-US" sz="1250" dirty="0"/>
+            <a:endParaRPr lang="en-US" sz="1550" dirty="0"/>
           </a:p>
         </p:txBody>
       </p:sp>
@@ -6533,7 +6778,7 @@
                 <a:ea typeface="Aptos" pitchFamily="34" charset="-122"/>
                 <a:cs typeface="Aptos" pitchFamily="34" charset="-120"/>
               </a:rPr>
-              <a:t>© Paula Soper</a:t>
+              <a:t>Â© Paula Soper</a:t>
             </a:r>
             <a:endParaRPr lang="en-US" sz="800" dirty="0"/>
           </a:p>
@@ -6541,7 +6786,46 @@
       </p:sp>
       <p:sp>
         <p:nvSpPr>
-          <p:cNvPr id="7" name="Shape 5"/>
+          <p:cNvPr id="7" name="Text 5"/>
+          <p:cNvSpPr/>
+          <p:nvPr/>
+        </p:nvSpPr>
+        <p:spPr>
+          <a:xfrm>
+            <a:off x="11137392" y="6510528"/>
+            <a:ext cx="411480" cy="201168"/>
+          </a:xfrm>
+          <a:prstGeom prst="rect">
+            <a:avLst/>
+          </a:prstGeom>
+          <a:noFill/>
+          <a:ln/>
+        </p:spPr>
+        <p:txBody>
+          <a:bodyPr wrap="square" lIns="0" tIns="0" rIns="0" bIns="0" rtlCol="0" anchor="ctr"/>
+          <a:lstStyle/>
+          <a:p>
+            <a:pPr algn="r" indent="0" marL="0">
+              <a:buNone/>
+            </a:pPr>
+            <a:r>
+              <a:rPr lang="en-US" sz="900" dirty="0">
+                <a:solidFill>
+                  <a:srgbClr val="5F7181"/>
+                </a:solidFill>
+                <a:latin typeface="Aptos" pitchFamily="34" charset="0"/>
+                <a:ea typeface="Aptos" pitchFamily="34" charset="-122"/>
+                <a:cs typeface="Aptos" pitchFamily="34" charset="-120"/>
+              </a:rPr>
+              <a:t>16</a:t>
+            </a:r>
+            <a:endParaRPr lang="en-US" sz="900" dirty="0"/>
+          </a:p>
+        </p:txBody>
+      </p:sp>
+      <p:sp>
+        <p:nvSpPr>
+          <p:cNvPr id="8" name="Shape 6"/>
           <p:cNvSpPr/>
           <p:nvPr/>
         </p:nvSpPr>
@@ -6566,7 +6850,7 @@
       </p:sp>
       <p:sp>
         <p:nvSpPr>
-          <p:cNvPr id="8" name="Text 6"/>
+          <p:cNvPr id="9" name="Text 7"/>
           <p:cNvSpPr/>
           <p:nvPr/>
         </p:nvSpPr>
@@ -6605,14 +6889,14 @@
       </p:sp>
       <p:sp>
         <p:nvSpPr>
-          <p:cNvPr id="9" name="Text 7"/>
+          <p:cNvPr id="10" name="Text 8"/>
           <p:cNvSpPr/>
           <p:nvPr/>
         </p:nvSpPr>
         <p:spPr>
           <a:xfrm>
             <a:off x="640080" y="621792"/>
-            <a:ext cx="10881360" cy="566928"/>
+            <a:ext cx="10881360" cy="713232"/>
           </a:xfrm>
           <a:prstGeom prst="rect">
             <a:avLst/>
@@ -6630,7 +6914,7 @@
               <a:buNone/>
             </a:pPr>
             <a:r>
-              <a:rPr lang="en-US" sz="2700" b="1" dirty="0">
+              <a:rPr lang="en-US" sz="3400" b="1" dirty="0">
                 <a:solidFill>
                   <a:srgbClr val="003A63"/>
                 </a:solidFill>
@@ -6640,20 +6924,20 @@
               </a:rPr>
               <a:t>Before You Begin</a:t>
             </a:r>
-            <a:endParaRPr lang="en-US" sz="2700" dirty="0"/>
-          </a:p>
-        </p:txBody>
-      </p:sp>
-      <p:sp>
-        <p:nvSpPr>
-          <p:cNvPr id="10" name="Text 8"/>
-          <p:cNvSpPr/>
-          <p:nvPr/>
-        </p:nvSpPr>
-        <p:spPr>
-          <a:xfrm>
-            <a:off x="868680" y="1417320"/>
-            <a:ext cx="6675120" cy="4434840"/>
+            <a:endParaRPr lang="en-US" sz="3400" dirty="0"/>
+          </a:p>
+        </p:txBody>
+      </p:sp>
+      <p:sp>
+        <p:nvSpPr>
+          <p:cNvPr id="11" name="Text 9"/>
+          <p:cNvSpPr/>
+          <p:nvPr/>
+        </p:nvSpPr>
+        <p:spPr>
+          <a:xfrm>
+            <a:off x="868680" y="1508760"/>
+            <a:ext cx="6537960" cy="4160520"/>
           </a:xfrm>
           <a:prstGeom prst="rect">
             <a:avLst/>
@@ -6668,7 +6952,7 @@
           <a:lstStyle/>
           <a:p>
             <a:r>
-              <a:rPr lang="en-US" sz="1700" dirty="0">
+              <a:rPr lang="en-US" sz="2100" dirty="0">
                 <a:solidFill>
                   <a:srgbClr val="17364A"/>
                 </a:solidFill>
@@ -6678,11 +6962,11 @@
               </a:rPr>
               <a:t>Choose a real or realistic public health AI use case.</a:t>
             </a:r>
-            <a:endParaRPr lang="en-US" sz="1700" dirty="0"/>
-          </a:p>
-          <a:p>
-            <a:r>
-              <a:rPr lang="en-US" sz="1700" dirty="0">
+            <a:endParaRPr lang="en-US" sz="2100" dirty="0"/>
+          </a:p>
+          <a:p>
+            <a:r>
+              <a:rPr lang="en-US" sz="2100" dirty="0">
                 <a:solidFill>
                   <a:srgbClr val="17364A"/>
                 </a:solidFill>
@@ -6690,13 +6974,13 @@
                 <a:ea typeface="Aptos" pitchFamily="34" charset="-122"/>
                 <a:cs typeface="Aptos" pitchFamily="34" charset="-120"/>
               </a:rPr>
-              <a:t>Document assumptions, unresolved questions, and which agency roles would need to review the artifact before it is adopted.</a:t>
-            </a:r>
-            <a:endParaRPr lang="en-US" sz="1700" dirty="0"/>
-          </a:p>
-          <a:p>
-            <a:r>
-              <a:rPr lang="en-US" sz="1700" dirty="0">
+              <a:t>Document assumptions, unresolved questions, and which agency roles would need to review the artifact.</a:t>
+            </a:r>
+            <a:endParaRPr lang="en-US" sz="2100" dirty="0"/>
+          </a:p>
+          <a:p>
+            <a:r>
+              <a:rPr lang="en-US" sz="2100" dirty="0">
                 <a:solidFill>
                   <a:srgbClr val="17364A"/>
                 </a:solidFill>
@@ -6704,15 +6988,15 @@
                 <a:ea typeface="Aptos" pitchFamily="34" charset="-122"/>
                 <a:cs typeface="Aptos" pitchFamily="34" charset="-120"/>
               </a:rPr>
-              <a:t>The exercise should produce a work product that could support governance review, leadership discussion, implementation.</a:t>
-            </a:r>
-            <a:endParaRPr lang="en-US" sz="1700" dirty="0"/>
-          </a:p>
-        </p:txBody>
-      </p:sp>
-      <p:sp>
-        <p:nvSpPr>
-          <p:cNvPr id="11" name="Shape 9"/>
+              <a:t>The exercise should produce a work product that could support governance review, leadership discussion,.</a:t>
+            </a:r>
+            <a:endParaRPr lang="en-US" sz="2100" dirty="0"/>
+          </a:p>
+        </p:txBody>
+      </p:sp>
+      <p:sp>
+        <p:nvSpPr>
+          <p:cNvPr id="12" name="Shape 10"/>
           <p:cNvSpPr/>
           <p:nvPr/>
         </p:nvSpPr>
@@ -6739,14 +7023,14 @@
       </p:sp>
       <p:sp>
         <p:nvSpPr>
-          <p:cNvPr id="12" name="Text 10"/>
+          <p:cNvPr id="13" name="Text 11"/>
           <p:cNvSpPr/>
           <p:nvPr/>
         </p:nvSpPr>
         <p:spPr>
           <a:xfrm>
             <a:off x="8074152" y="1563624"/>
-            <a:ext cx="2825496" cy="201168"/>
+            <a:ext cx="2825496" cy="256032"/>
           </a:xfrm>
           <a:prstGeom prst="rect">
             <a:avLst/>
@@ -6762,7 +7046,7 @@
               <a:buNone/>
             </a:pPr>
             <a:r>
-              <a:rPr lang="en-US" sz="950" b="1" dirty="0">
+              <a:rPr lang="en-US" sz="1300" b="1" dirty="0">
                 <a:solidFill>
                   <a:srgbClr val="0068B7"/>
                 </a:solidFill>
@@ -6772,20 +7056,20 @@
               </a:rPr>
               <a:t>Key idea</a:t>
             </a:r>
-            <a:endParaRPr lang="en-US" sz="950" dirty="0"/>
-          </a:p>
-        </p:txBody>
-      </p:sp>
-      <p:sp>
-        <p:nvSpPr>
-          <p:cNvPr id="13" name="Text 11"/>
-          <p:cNvSpPr/>
-          <p:nvPr/>
-        </p:nvSpPr>
-        <p:spPr>
-          <a:xfrm>
-            <a:off x="8074152" y="1856232"/>
-            <a:ext cx="2825496" cy="1261872"/>
+            <a:endParaRPr lang="en-US" sz="1300" dirty="0"/>
+          </a:p>
+        </p:txBody>
+      </p:sp>
+      <p:sp>
+        <p:nvSpPr>
+          <p:cNvPr id="14" name="Text 12"/>
+          <p:cNvSpPr/>
+          <p:nvPr/>
+        </p:nvSpPr>
+        <p:spPr>
+          <a:xfrm>
+            <a:off x="8074152" y="1920240"/>
+            <a:ext cx="2825496" cy="1188720"/>
           </a:xfrm>
           <a:prstGeom prst="rect">
             <a:avLst/>
@@ -6803,7 +7087,7 @@
               <a:buNone/>
             </a:pPr>
             <a:r>
-              <a:rPr lang="en-US" sz="1250" dirty="0">
+              <a:rPr lang="en-US" sz="1550" dirty="0">
                 <a:solidFill>
                   <a:srgbClr val="17364A"/>
                 </a:solidFill>
@@ -6813,13 +7097,13 @@
               </a:rPr>
               <a:t>Choose a real or realistic public health AI use case.</a:t>
             </a:r>
-            <a:endParaRPr lang="en-US" sz="1250" dirty="0"/>
-          </a:p>
-        </p:txBody>
-      </p:sp>
-      <p:sp>
-        <p:nvSpPr>
-          <p:cNvPr id="14" name="Shape 12"/>
+            <a:endParaRPr lang="en-US" sz="1550" dirty="0"/>
+          </a:p>
+        </p:txBody>
+      </p:sp>
+      <p:sp>
+        <p:nvSpPr>
+          <p:cNvPr id="15" name="Shape 13"/>
           <p:cNvSpPr/>
           <p:nvPr/>
         </p:nvSpPr>
@@ -6846,14 +7130,14 @@
       </p:sp>
       <p:sp>
         <p:nvSpPr>
-          <p:cNvPr id="15" name="Text 13"/>
+          <p:cNvPr id="16" name="Text 14"/>
           <p:cNvSpPr/>
           <p:nvPr/>
         </p:nvSpPr>
         <p:spPr>
           <a:xfrm>
             <a:off x="8074152" y="3666744"/>
-            <a:ext cx="2825496" cy="201168"/>
+            <a:ext cx="2825496" cy="256032"/>
           </a:xfrm>
           <a:prstGeom prst="rect">
             <a:avLst/>
@@ -6869,7 +7153,7 @@
               <a:buNone/>
             </a:pPr>
             <a:r>
-              <a:rPr lang="en-US" sz="950" b="1" dirty="0">
+              <a:rPr lang="en-US" sz="1300" b="1" dirty="0">
                 <a:solidFill>
                   <a:srgbClr val="0068B7"/>
                 </a:solidFill>
@@ -6879,20 +7163,20 @@
               </a:rPr>
               <a:t>Use this for</a:t>
             </a:r>
-            <a:endParaRPr lang="en-US" sz="950" dirty="0"/>
-          </a:p>
-        </p:txBody>
-      </p:sp>
-      <p:sp>
-        <p:nvSpPr>
-          <p:cNvPr id="16" name="Text 14"/>
-          <p:cNvSpPr/>
-          <p:nvPr/>
-        </p:nvSpPr>
-        <p:spPr>
-          <a:xfrm>
-            <a:off x="8074152" y="3959352"/>
-            <a:ext cx="2825496" cy="1170432"/>
+            <a:endParaRPr lang="en-US" sz="1300" dirty="0"/>
+          </a:p>
+        </p:txBody>
+      </p:sp>
+      <p:sp>
+        <p:nvSpPr>
+          <p:cNvPr id="17" name="Text 15"/>
+          <p:cNvSpPr/>
+          <p:nvPr/>
+        </p:nvSpPr>
+        <p:spPr>
+          <a:xfrm>
+            <a:off x="8074152" y="4023360"/>
+            <a:ext cx="2825496" cy="1097280"/>
           </a:xfrm>
           <a:prstGeom prst="rect">
             <a:avLst/>
@@ -6910,7 +7194,7 @@
               <a:buNone/>
             </a:pPr>
             <a:r>
-              <a:rPr lang="en-US" sz="1250" dirty="0">
+              <a:rPr lang="en-US" sz="1550" dirty="0">
                 <a:solidFill>
                   <a:srgbClr val="17364A"/>
                 </a:solidFill>
@@ -6920,7 +7204,7 @@
               </a:rPr>
               <a:t>Connect the concept to public health decisions, safeguards, documentation, or implementation work.</a:t>
             </a:r>
-            <a:endParaRPr lang="en-US" sz="1250" dirty="0"/>
+            <a:endParaRPr lang="en-US" sz="1550" dirty="0"/>
           </a:p>
         </p:txBody>
       </p:sp>
@@ -7117,7 +7401,7 @@
                 <a:ea typeface="Aptos" pitchFamily="34" charset="-122"/>
                 <a:cs typeface="Aptos" pitchFamily="34" charset="-120"/>
               </a:rPr>
-              <a:t>© Paula Soper</a:t>
+              <a:t>Â© Paula Soper</a:t>
             </a:r>
             <a:endParaRPr lang="en-US" sz="800" dirty="0"/>
           </a:p>
@@ -7125,7 +7409,46 @@
       </p:sp>
       <p:sp>
         <p:nvSpPr>
-          <p:cNvPr id="7" name="Shape 5"/>
+          <p:cNvPr id="7" name="Text 5"/>
+          <p:cNvSpPr/>
+          <p:nvPr/>
+        </p:nvSpPr>
+        <p:spPr>
+          <a:xfrm>
+            <a:off x="11137392" y="6510528"/>
+            <a:ext cx="411480" cy="201168"/>
+          </a:xfrm>
+          <a:prstGeom prst="rect">
+            <a:avLst/>
+          </a:prstGeom>
+          <a:noFill/>
+          <a:ln/>
+        </p:spPr>
+        <p:txBody>
+          <a:bodyPr wrap="square" lIns="0" tIns="0" rIns="0" bIns="0" rtlCol="0" anchor="ctr"/>
+          <a:lstStyle/>
+          <a:p>
+            <a:pPr algn="r" indent="0" marL="0">
+              <a:buNone/>
+            </a:pPr>
+            <a:r>
+              <a:rPr lang="en-US" sz="900" dirty="0">
+                <a:solidFill>
+                  <a:srgbClr val="5F7181"/>
+                </a:solidFill>
+                <a:latin typeface="Aptos" pitchFamily="34" charset="0"/>
+                <a:ea typeface="Aptos" pitchFamily="34" charset="-122"/>
+                <a:cs typeface="Aptos" pitchFamily="34" charset="-120"/>
+              </a:rPr>
+              <a:t>17</a:t>
+            </a:r>
+            <a:endParaRPr lang="en-US" sz="900" dirty="0"/>
+          </a:p>
+        </p:txBody>
+      </p:sp>
+      <p:sp>
+        <p:nvSpPr>
+          <p:cNvPr id="8" name="Shape 6"/>
           <p:cNvSpPr/>
           <p:nvPr/>
         </p:nvSpPr>
@@ -7150,7 +7473,7 @@
       </p:sp>
       <p:sp>
         <p:nvSpPr>
-          <p:cNvPr id="8" name="Text 6"/>
+          <p:cNvPr id="9" name="Text 7"/>
           <p:cNvSpPr/>
           <p:nvPr/>
         </p:nvSpPr>
@@ -7189,14 +7512,14 @@
       </p:sp>
       <p:sp>
         <p:nvSpPr>
-          <p:cNvPr id="9" name="Text 7"/>
+          <p:cNvPr id="10" name="Text 8"/>
           <p:cNvSpPr/>
           <p:nvPr/>
         </p:nvSpPr>
         <p:spPr>
           <a:xfrm>
             <a:off x="640080" y="621792"/>
-            <a:ext cx="10881360" cy="566928"/>
+            <a:ext cx="10881360" cy="713232"/>
           </a:xfrm>
           <a:prstGeom prst="rect">
             <a:avLst/>
@@ -7214,7 +7537,7 @@
               <a:buNone/>
             </a:pPr>
             <a:r>
-              <a:rPr lang="en-US" sz="2700" b="1" dirty="0">
+              <a:rPr lang="en-US" sz="3400" b="1" dirty="0">
                 <a:solidFill>
                   <a:srgbClr val="003A63"/>
                 </a:solidFill>
@@ -7224,20 +7547,20 @@
               </a:rPr>
               <a:t>Expected Artifact or Evidence</a:t>
             </a:r>
-            <a:endParaRPr lang="en-US" sz="2700" dirty="0"/>
-          </a:p>
-        </p:txBody>
-      </p:sp>
-      <p:sp>
-        <p:nvSpPr>
-          <p:cNvPr id="10" name="Text 8"/>
-          <p:cNvSpPr/>
-          <p:nvPr/>
-        </p:nvSpPr>
-        <p:spPr>
-          <a:xfrm>
-            <a:off x="868680" y="1417320"/>
-            <a:ext cx="6675120" cy="4434840"/>
+            <a:endParaRPr lang="en-US" sz="3400" dirty="0"/>
+          </a:p>
+        </p:txBody>
+      </p:sp>
+      <p:sp>
+        <p:nvSpPr>
+          <p:cNvPr id="11" name="Text 9"/>
+          <p:cNvSpPr/>
+          <p:nvPr/>
+        </p:nvSpPr>
+        <p:spPr>
+          <a:xfrm>
+            <a:off x="868680" y="1508760"/>
+            <a:ext cx="6537960" cy="4160520"/>
           </a:xfrm>
           <a:prstGeom prst="rect">
             <a:avLst/>
@@ -7252,7 +7575,7 @@
           <a:lstStyle/>
           <a:p>
             <a:r>
-              <a:rPr lang="en-US" sz="1700" dirty="0">
+              <a:rPr lang="en-US" sz="2100" dirty="0">
                 <a:solidFill>
                   <a:srgbClr val="17364A"/>
                 </a:solidFill>
@@ -7262,13 +7585,13 @@
               </a:rPr>
               <a:t>AI transparency template; sample AI use registry entry; public notice draft; internal review checklist.</a:t>
             </a:r>
-            <a:endParaRPr lang="en-US" sz="1700" dirty="0"/>
-          </a:p>
-        </p:txBody>
-      </p:sp>
-      <p:sp>
-        <p:nvSpPr>
-          <p:cNvPr id="11" name="Shape 9"/>
+            <a:endParaRPr lang="en-US" sz="2100" dirty="0"/>
+          </a:p>
+        </p:txBody>
+      </p:sp>
+      <p:sp>
+        <p:nvSpPr>
+          <p:cNvPr id="12" name="Shape 10"/>
           <p:cNvSpPr/>
           <p:nvPr/>
         </p:nvSpPr>
@@ -7295,14 +7618,14 @@
       </p:sp>
       <p:sp>
         <p:nvSpPr>
-          <p:cNvPr id="12" name="Text 10"/>
+          <p:cNvPr id="13" name="Text 11"/>
           <p:cNvSpPr/>
           <p:nvPr/>
         </p:nvSpPr>
         <p:spPr>
           <a:xfrm>
             <a:off x="8074152" y="1563624"/>
-            <a:ext cx="2825496" cy="201168"/>
+            <a:ext cx="2825496" cy="256032"/>
           </a:xfrm>
           <a:prstGeom prst="rect">
             <a:avLst/>
@@ -7318,7 +7641,7 @@
               <a:buNone/>
             </a:pPr>
             <a:r>
-              <a:rPr lang="en-US" sz="950" b="1" dirty="0">
+              <a:rPr lang="en-US" sz="1300" b="1" dirty="0">
                 <a:solidFill>
                   <a:srgbClr val="0068B7"/>
                 </a:solidFill>
@@ -7328,20 +7651,20 @@
               </a:rPr>
               <a:t>Key idea</a:t>
             </a:r>
-            <a:endParaRPr lang="en-US" sz="950" dirty="0"/>
-          </a:p>
-        </p:txBody>
-      </p:sp>
-      <p:sp>
-        <p:nvSpPr>
-          <p:cNvPr id="13" name="Text 11"/>
-          <p:cNvSpPr/>
-          <p:nvPr/>
-        </p:nvSpPr>
-        <p:spPr>
-          <a:xfrm>
-            <a:off x="8074152" y="1856232"/>
-            <a:ext cx="2825496" cy="1261872"/>
+            <a:endParaRPr lang="en-US" sz="1300" dirty="0"/>
+          </a:p>
+        </p:txBody>
+      </p:sp>
+      <p:sp>
+        <p:nvSpPr>
+          <p:cNvPr id="14" name="Text 12"/>
+          <p:cNvSpPr/>
+          <p:nvPr/>
+        </p:nvSpPr>
+        <p:spPr>
+          <a:xfrm>
+            <a:off x="8074152" y="1920240"/>
+            <a:ext cx="2825496" cy="1188720"/>
           </a:xfrm>
           <a:prstGeom prst="rect">
             <a:avLst/>
@@ -7359,7 +7682,7 @@
               <a:buNone/>
             </a:pPr>
             <a:r>
-              <a:rPr lang="en-US" sz="1250" dirty="0">
+              <a:rPr lang="en-US" sz="1550" dirty="0">
                 <a:solidFill>
                   <a:srgbClr val="17364A"/>
                 </a:solidFill>
@@ -7369,13 +7692,13 @@
               </a:rPr>
               <a:t>AI transparency template; sample AI use registry entry; public notice draft; internal review checklist.</a:t>
             </a:r>
-            <a:endParaRPr lang="en-US" sz="1250" dirty="0"/>
-          </a:p>
-        </p:txBody>
-      </p:sp>
-      <p:sp>
-        <p:nvSpPr>
-          <p:cNvPr id="14" name="Shape 12"/>
+            <a:endParaRPr lang="en-US" sz="1550" dirty="0"/>
+          </a:p>
+        </p:txBody>
+      </p:sp>
+      <p:sp>
+        <p:nvSpPr>
+          <p:cNvPr id="15" name="Shape 13"/>
           <p:cNvSpPr/>
           <p:nvPr/>
         </p:nvSpPr>
@@ -7402,14 +7725,14 @@
       </p:sp>
       <p:sp>
         <p:nvSpPr>
-          <p:cNvPr id="15" name="Text 13"/>
+          <p:cNvPr id="16" name="Text 14"/>
           <p:cNvSpPr/>
           <p:nvPr/>
         </p:nvSpPr>
         <p:spPr>
           <a:xfrm>
             <a:off x="8074152" y="3666744"/>
-            <a:ext cx="2825496" cy="201168"/>
+            <a:ext cx="2825496" cy="256032"/>
           </a:xfrm>
           <a:prstGeom prst="rect">
             <a:avLst/>
@@ -7425,7 +7748,7 @@
               <a:buNone/>
             </a:pPr>
             <a:r>
-              <a:rPr lang="en-US" sz="950" b="1" dirty="0">
+              <a:rPr lang="en-US" sz="1300" b="1" dirty="0">
                 <a:solidFill>
                   <a:srgbClr val="0068B7"/>
                 </a:solidFill>
@@ -7435,20 +7758,20 @@
               </a:rPr>
               <a:t>Use this for</a:t>
             </a:r>
-            <a:endParaRPr lang="en-US" sz="950" dirty="0"/>
-          </a:p>
-        </p:txBody>
-      </p:sp>
-      <p:sp>
-        <p:nvSpPr>
-          <p:cNvPr id="16" name="Text 14"/>
-          <p:cNvSpPr/>
-          <p:nvPr/>
-        </p:nvSpPr>
-        <p:spPr>
-          <a:xfrm>
-            <a:off x="8074152" y="3959352"/>
-            <a:ext cx="2825496" cy="1170432"/>
+            <a:endParaRPr lang="en-US" sz="1300" dirty="0"/>
+          </a:p>
+        </p:txBody>
+      </p:sp>
+      <p:sp>
+        <p:nvSpPr>
+          <p:cNvPr id="17" name="Text 15"/>
+          <p:cNvSpPr/>
+          <p:nvPr/>
+        </p:nvSpPr>
+        <p:spPr>
+          <a:xfrm>
+            <a:off x="8074152" y="4023360"/>
+            <a:ext cx="2825496" cy="1097280"/>
           </a:xfrm>
           <a:prstGeom prst="rect">
             <a:avLst/>
@@ -7466,7 +7789,7 @@
               <a:buNone/>
             </a:pPr>
             <a:r>
-              <a:rPr lang="en-US" sz="1250" dirty="0">
+              <a:rPr lang="en-US" sz="1550" dirty="0">
                 <a:solidFill>
                   <a:srgbClr val="17364A"/>
                 </a:solidFill>
@@ -7476,7 +7799,7 @@
               </a:rPr>
               <a:t>Connect the concept to public health decisions, safeguards, documentation, or implementation work.</a:t>
             </a:r>
-            <a:endParaRPr lang="en-US" sz="1250" dirty="0"/>
+            <a:endParaRPr lang="en-US" sz="1550" dirty="0"/>
           </a:p>
         </p:txBody>
       </p:sp>
@@ -7673,7 +7996,7 @@
                 <a:ea typeface="Aptos" pitchFamily="34" charset="-122"/>
                 <a:cs typeface="Aptos" pitchFamily="34" charset="-120"/>
               </a:rPr>
-              <a:t>© Paula Soper</a:t>
+              <a:t>Â© Paula Soper</a:t>
             </a:r>
             <a:endParaRPr lang="en-US" sz="800" dirty="0"/>
           </a:p>
@@ -7681,7 +8004,46 @@
       </p:sp>
       <p:sp>
         <p:nvSpPr>
-          <p:cNvPr id="7" name="Shape 5"/>
+          <p:cNvPr id="7" name="Text 5"/>
+          <p:cNvSpPr/>
+          <p:nvPr/>
+        </p:nvSpPr>
+        <p:spPr>
+          <a:xfrm>
+            <a:off x="11137392" y="6510528"/>
+            <a:ext cx="411480" cy="201168"/>
+          </a:xfrm>
+          <a:prstGeom prst="rect">
+            <a:avLst/>
+          </a:prstGeom>
+          <a:noFill/>
+          <a:ln/>
+        </p:spPr>
+        <p:txBody>
+          <a:bodyPr wrap="square" lIns="0" tIns="0" rIns="0" bIns="0" rtlCol="0" anchor="ctr"/>
+          <a:lstStyle/>
+          <a:p>
+            <a:pPr algn="r" indent="0" marL="0">
+              <a:buNone/>
+            </a:pPr>
+            <a:r>
+              <a:rPr lang="en-US" sz="900" dirty="0">
+                <a:solidFill>
+                  <a:srgbClr val="5F7181"/>
+                </a:solidFill>
+                <a:latin typeface="Aptos" pitchFamily="34" charset="0"/>
+                <a:ea typeface="Aptos" pitchFamily="34" charset="-122"/>
+                <a:cs typeface="Aptos" pitchFamily="34" charset="-120"/>
+              </a:rPr>
+              <a:t>18</a:t>
+            </a:r>
+            <a:endParaRPr lang="en-US" sz="900" dirty="0"/>
+          </a:p>
+        </p:txBody>
+      </p:sp>
+      <p:sp>
+        <p:nvSpPr>
+          <p:cNvPr id="8" name="Shape 6"/>
           <p:cNvSpPr/>
           <p:nvPr/>
         </p:nvSpPr>
@@ -7706,7 +8068,7 @@
       </p:sp>
       <p:sp>
         <p:nvSpPr>
-          <p:cNvPr id="8" name="Text 6"/>
+          <p:cNvPr id="9" name="Text 7"/>
           <p:cNvSpPr/>
           <p:nvPr/>
         </p:nvSpPr>
@@ -7745,14 +8107,14 @@
       </p:sp>
       <p:sp>
         <p:nvSpPr>
-          <p:cNvPr id="9" name="Text 7"/>
+          <p:cNvPr id="10" name="Text 8"/>
           <p:cNvSpPr/>
           <p:nvPr/>
         </p:nvSpPr>
         <p:spPr>
           <a:xfrm>
             <a:off x="640080" y="621792"/>
-            <a:ext cx="10881360" cy="566928"/>
+            <a:ext cx="10881360" cy="713232"/>
           </a:xfrm>
           <a:prstGeom prst="rect">
             <a:avLst/>
@@ -7770,7 +8132,7 @@
               <a:buNone/>
             </a:pPr>
             <a:r>
-              <a:rPr lang="en-US" sz="2700" b="1" dirty="0">
+              <a:rPr lang="en-US" sz="3400" b="1" dirty="0">
                 <a:solidFill>
                   <a:srgbClr val="003A63"/>
                 </a:solidFill>
@@ -7780,20 +8142,20 @@
               </a:rPr>
               <a:t>Expected Assignment</a:t>
             </a:r>
-            <a:endParaRPr lang="en-US" sz="2700" dirty="0"/>
-          </a:p>
-        </p:txBody>
-      </p:sp>
-      <p:sp>
-        <p:nvSpPr>
-          <p:cNvPr id="10" name="Text 8"/>
-          <p:cNvSpPr/>
-          <p:nvPr/>
-        </p:nvSpPr>
-        <p:spPr>
-          <a:xfrm>
-            <a:off x="868680" y="1417320"/>
-            <a:ext cx="6675120" cy="4434840"/>
+            <a:endParaRPr lang="en-US" sz="3400" dirty="0"/>
+          </a:p>
+        </p:txBody>
+      </p:sp>
+      <p:sp>
+        <p:nvSpPr>
+          <p:cNvPr id="11" name="Text 9"/>
+          <p:cNvSpPr/>
+          <p:nvPr/>
+        </p:nvSpPr>
+        <p:spPr>
+          <a:xfrm>
+            <a:off x="868680" y="1508760"/>
+            <a:ext cx="6537960" cy="4160520"/>
           </a:xfrm>
           <a:prstGeom prst="rect">
             <a:avLst/>
@@ -7808,7 +8170,7 @@
           <a:lstStyle/>
           <a:p>
             <a:r>
-              <a:rPr lang="en-US" sz="1700" dirty="0">
+              <a:rPr lang="en-US" sz="2100" dirty="0">
                 <a:solidFill>
                   <a:srgbClr val="17364A"/>
                 </a:solidFill>
@@ -7818,13 +8180,13 @@
               </a:rPr>
               <a:t>AI transparency template; sample AI use registry entry; public notice draft; internal review checklist.</a:t>
             </a:r>
-            <a:endParaRPr lang="en-US" sz="1700" dirty="0"/>
-          </a:p>
-        </p:txBody>
-      </p:sp>
-      <p:sp>
-        <p:nvSpPr>
-          <p:cNvPr id="11" name="Shape 9"/>
+            <a:endParaRPr lang="en-US" sz="2100" dirty="0"/>
+          </a:p>
+        </p:txBody>
+      </p:sp>
+      <p:sp>
+        <p:nvSpPr>
+          <p:cNvPr id="12" name="Shape 10"/>
           <p:cNvSpPr/>
           <p:nvPr/>
         </p:nvSpPr>
@@ -7851,14 +8213,14 @@
       </p:sp>
       <p:sp>
         <p:nvSpPr>
-          <p:cNvPr id="12" name="Text 10"/>
+          <p:cNvPr id="13" name="Text 11"/>
           <p:cNvSpPr/>
           <p:nvPr/>
         </p:nvSpPr>
         <p:spPr>
           <a:xfrm>
             <a:off x="8074152" y="1563624"/>
-            <a:ext cx="2825496" cy="201168"/>
+            <a:ext cx="2825496" cy="256032"/>
           </a:xfrm>
           <a:prstGeom prst="rect">
             <a:avLst/>
@@ -7874,7 +8236,7 @@
               <a:buNone/>
             </a:pPr>
             <a:r>
-              <a:rPr lang="en-US" sz="950" b="1" dirty="0">
+              <a:rPr lang="en-US" sz="1300" b="1" dirty="0">
                 <a:solidFill>
                   <a:srgbClr val="0068B7"/>
                 </a:solidFill>
@@ -7884,20 +8246,20 @@
               </a:rPr>
               <a:t>Key idea</a:t>
             </a:r>
-            <a:endParaRPr lang="en-US" sz="950" dirty="0"/>
-          </a:p>
-        </p:txBody>
-      </p:sp>
-      <p:sp>
-        <p:nvSpPr>
-          <p:cNvPr id="13" name="Text 11"/>
-          <p:cNvSpPr/>
-          <p:nvPr/>
-        </p:nvSpPr>
-        <p:spPr>
-          <a:xfrm>
-            <a:off x="8074152" y="1856232"/>
-            <a:ext cx="2825496" cy="1261872"/>
+            <a:endParaRPr lang="en-US" sz="1300" dirty="0"/>
+          </a:p>
+        </p:txBody>
+      </p:sp>
+      <p:sp>
+        <p:nvSpPr>
+          <p:cNvPr id="14" name="Text 12"/>
+          <p:cNvSpPr/>
+          <p:nvPr/>
+        </p:nvSpPr>
+        <p:spPr>
+          <a:xfrm>
+            <a:off x="8074152" y="1920240"/>
+            <a:ext cx="2825496" cy="1188720"/>
           </a:xfrm>
           <a:prstGeom prst="rect">
             <a:avLst/>
@@ -7915,7 +8277,7 @@
               <a:buNone/>
             </a:pPr>
             <a:r>
-              <a:rPr lang="en-US" sz="1250" dirty="0">
+              <a:rPr lang="en-US" sz="1550" dirty="0">
                 <a:solidFill>
                   <a:srgbClr val="17364A"/>
                 </a:solidFill>
@@ -7925,13 +8287,13 @@
               </a:rPr>
               <a:t>AI transparency template; sample AI use registry entry; public notice draft; internal review checklist.</a:t>
             </a:r>
-            <a:endParaRPr lang="en-US" sz="1250" dirty="0"/>
-          </a:p>
-        </p:txBody>
-      </p:sp>
-      <p:sp>
-        <p:nvSpPr>
-          <p:cNvPr id="14" name="Shape 12"/>
+            <a:endParaRPr lang="en-US" sz="1550" dirty="0"/>
+          </a:p>
+        </p:txBody>
+      </p:sp>
+      <p:sp>
+        <p:nvSpPr>
+          <p:cNvPr id="15" name="Shape 13"/>
           <p:cNvSpPr/>
           <p:nvPr/>
         </p:nvSpPr>
@@ -7958,14 +8320,14 @@
       </p:sp>
       <p:sp>
         <p:nvSpPr>
-          <p:cNvPr id="15" name="Text 13"/>
+          <p:cNvPr id="16" name="Text 14"/>
           <p:cNvSpPr/>
           <p:nvPr/>
         </p:nvSpPr>
         <p:spPr>
           <a:xfrm>
             <a:off x="8074152" y="3666744"/>
-            <a:ext cx="2825496" cy="201168"/>
+            <a:ext cx="2825496" cy="256032"/>
           </a:xfrm>
           <a:prstGeom prst="rect">
             <a:avLst/>
@@ -7981,7 +8343,7 @@
               <a:buNone/>
             </a:pPr>
             <a:r>
-              <a:rPr lang="en-US" sz="950" b="1" dirty="0">
+              <a:rPr lang="en-US" sz="1300" b="1" dirty="0">
                 <a:solidFill>
                   <a:srgbClr val="0068B7"/>
                 </a:solidFill>
@@ -7991,20 +8353,20 @@
               </a:rPr>
               <a:t>Use this for</a:t>
             </a:r>
-            <a:endParaRPr lang="en-US" sz="950" dirty="0"/>
-          </a:p>
-        </p:txBody>
-      </p:sp>
-      <p:sp>
-        <p:nvSpPr>
-          <p:cNvPr id="16" name="Text 14"/>
-          <p:cNvSpPr/>
-          <p:nvPr/>
-        </p:nvSpPr>
-        <p:spPr>
-          <a:xfrm>
-            <a:off x="8074152" y="3959352"/>
-            <a:ext cx="2825496" cy="1170432"/>
+            <a:endParaRPr lang="en-US" sz="1300" dirty="0"/>
+          </a:p>
+        </p:txBody>
+      </p:sp>
+      <p:sp>
+        <p:nvSpPr>
+          <p:cNvPr id="17" name="Text 15"/>
+          <p:cNvSpPr/>
+          <p:nvPr/>
+        </p:nvSpPr>
+        <p:spPr>
+          <a:xfrm>
+            <a:off x="8074152" y="4023360"/>
+            <a:ext cx="2825496" cy="1097280"/>
           </a:xfrm>
           <a:prstGeom prst="rect">
             <a:avLst/>
@@ -8022,7 +8384,7 @@
               <a:buNone/>
             </a:pPr>
             <a:r>
-              <a:rPr lang="en-US" sz="1250" dirty="0">
+              <a:rPr lang="en-US" sz="1550" dirty="0">
                 <a:solidFill>
                   <a:srgbClr val="17364A"/>
                 </a:solidFill>
@@ -8032,7 +8394,7 @@
               </a:rPr>
               <a:t>Connect the concept to public health decisions, safeguards, documentation, or implementation work.</a:t>
             </a:r>
-            <a:endParaRPr lang="en-US" sz="1250" dirty="0"/>
+            <a:endParaRPr lang="en-US" sz="1550" dirty="0"/>
           </a:p>
         </p:txBody>
       </p:sp>
@@ -8229,7 +8591,7 @@
                 <a:ea typeface="Aptos" pitchFamily="34" charset="-122"/>
                 <a:cs typeface="Aptos" pitchFamily="34" charset="-120"/>
               </a:rPr>
-              <a:t>© Paula Soper</a:t>
+              <a:t>Â© Paula Soper</a:t>
             </a:r>
             <a:endParaRPr lang="en-US" sz="800" dirty="0"/>
           </a:p>
@@ -8237,7 +8599,46 @@
       </p:sp>
       <p:sp>
         <p:nvSpPr>
-          <p:cNvPr id="7" name="Shape 5"/>
+          <p:cNvPr id="7" name="Text 5"/>
+          <p:cNvSpPr/>
+          <p:nvPr/>
+        </p:nvSpPr>
+        <p:spPr>
+          <a:xfrm>
+            <a:off x="11137392" y="6510528"/>
+            <a:ext cx="411480" cy="201168"/>
+          </a:xfrm>
+          <a:prstGeom prst="rect">
+            <a:avLst/>
+          </a:prstGeom>
+          <a:noFill/>
+          <a:ln/>
+        </p:spPr>
+        <p:txBody>
+          <a:bodyPr wrap="square" lIns="0" tIns="0" rIns="0" bIns="0" rtlCol="0" anchor="ctr"/>
+          <a:lstStyle/>
+          <a:p>
+            <a:pPr algn="r" indent="0" marL="0">
+              <a:buNone/>
+            </a:pPr>
+            <a:r>
+              <a:rPr lang="en-US" sz="900" dirty="0">
+                <a:solidFill>
+                  <a:srgbClr val="5F7181"/>
+                </a:solidFill>
+                <a:latin typeface="Aptos" pitchFamily="34" charset="0"/>
+                <a:ea typeface="Aptos" pitchFamily="34" charset="-122"/>
+                <a:cs typeface="Aptos" pitchFamily="34" charset="-120"/>
+              </a:rPr>
+              <a:t>19</a:t>
+            </a:r>
+            <a:endParaRPr lang="en-US" sz="900" dirty="0"/>
+          </a:p>
+        </p:txBody>
+      </p:sp>
+      <p:sp>
+        <p:nvSpPr>
+          <p:cNvPr id="8" name="Shape 6"/>
           <p:cNvSpPr/>
           <p:nvPr/>
         </p:nvSpPr>
@@ -8262,7 +8663,7 @@
       </p:sp>
       <p:sp>
         <p:nvSpPr>
-          <p:cNvPr id="8" name="Text 6"/>
+          <p:cNvPr id="9" name="Text 7"/>
           <p:cNvSpPr/>
           <p:nvPr/>
         </p:nvSpPr>
@@ -8301,14 +8702,14 @@
       </p:sp>
       <p:sp>
         <p:nvSpPr>
-          <p:cNvPr id="9" name="Text 7"/>
+          <p:cNvPr id="10" name="Text 8"/>
           <p:cNvSpPr/>
           <p:nvPr/>
         </p:nvSpPr>
         <p:spPr>
           <a:xfrm>
             <a:off x="640080" y="621792"/>
-            <a:ext cx="10881360" cy="566928"/>
+            <a:ext cx="10881360" cy="713232"/>
           </a:xfrm>
           <a:prstGeom prst="rect">
             <a:avLst/>
@@ -8326,7 +8727,7 @@
               <a:buNone/>
             </a:pPr>
             <a:r>
-              <a:rPr lang="en-US" sz="2700" b="1" dirty="0">
+              <a:rPr lang="en-US" sz="3400" b="1" dirty="0">
                 <a:solidFill>
                   <a:srgbClr val="003A63"/>
                 </a:solidFill>
@@ -8336,20 +8737,20 @@
               </a:rPr>
               <a:t>Knowledge Check</a:t>
             </a:r>
-            <a:endParaRPr lang="en-US" sz="2700" dirty="0"/>
-          </a:p>
-        </p:txBody>
-      </p:sp>
-      <p:sp>
-        <p:nvSpPr>
-          <p:cNvPr id="10" name="Text 8"/>
-          <p:cNvSpPr/>
-          <p:nvPr/>
-        </p:nvSpPr>
-        <p:spPr>
-          <a:xfrm>
-            <a:off x="868680" y="1417320"/>
-            <a:ext cx="6675120" cy="4434840"/>
+            <a:endParaRPr lang="en-US" sz="3400" dirty="0"/>
+          </a:p>
+        </p:txBody>
+      </p:sp>
+      <p:sp>
+        <p:nvSpPr>
+          <p:cNvPr id="11" name="Text 9"/>
+          <p:cNvSpPr/>
+          <p:nvPr/>
+        </p:nvSpPr>
+        <p:spPr>
+          <a:xfrm>
+            <a:off x="868680" y="1508760"/>
+            <a:ext cx="6537960" cy="4160520"/>
           </a:xfrm>
           <a:prstGeom prst="rect">
             <a:avLst/>
@@ -8364,7 +8765,7 @@
           <a:lstStyle/>
           <a:p>
             <a:r>
-              <a:rPr lang="en-US" sz="1700" dirty="0">
+              <a:rPr lang="en-US" sz="2100" dirty="0">
                 <a:solidFill>
                   <a:srgbClr val="17364A"/>
                 </a:solidFill>
@@ -8374,11 +8775,11 @@
               </a:rPr>
               <a:t>1. What is the strongest reason this module topic belongs in AI leadership and governance training?</a:t>
             </a:r>
-            <a:endParaRPr lang="en-US" sz="1700" dirty="0"/>
-          </a:p>
-          <a:p>
-            <a:r>
-              <a:rPr lang="en-US" sz="1700" dirty="0">
+            <a:endParaRPr lang="en-US" sz="2100" dirty="0"/>
+          </a:p>
+          <a:p>
+            <a:r>
+              <a:rPr lang="en-US" sz="2100" dirty="0">
                 <a:solidFill>
                   <a:srgbClr val="17364A"/>
                 </a:solidFill>
@@ -8388,11 +8789,11 @@
               </a:rPr>
               <a:t>2. Which practice best supports accountable public health AI governance?</a:t>
             </a:r>
-            <a:endParaRPr lang="en-US" sz="1700" dirty="0"/>
-          </a:p>
-          <a:p>
-            <a:r>
-              <a:rPr lang="en-US" sz="1700" dirty="0">
+            <a:endParaRPr lang="en-US" sz="2100" dirty="0"/>
+          </a:p>
+          <a:p>
+            <a:r>
+              <a:rPr lang="en-US" sz="2100" dirty="0">
                 <a:solidFill>
                   <a:srgbClr val="17364A"/>
                 </a:solidFill>
@@ -8402,27 +8803,13 @@
               </a:rPr>
               <a:t>3. When should an AI use case be escalated for leadership or governance review?</a:t>
             </a:r>
-            <a:endParaRPr lang="en-US" sz="1700" dirty="0"/>
-          </a:p>
-          <a:p>
-            <a:r>
-              <a:rPr lang="en-US" sz="1700" dirty="0">
-                <a:solidFill>
-                  <a:srgbClr val="17364A"/>
-                </a:solidFill>
-                <a:latin typeface="Aptos" pitchFamily="34" charset="0"/>
-                <a:ea typeface="Aptos" pitchFamily="34" charset="-122"/>
-                <a:cs typeface="Aptos" pitchFamily="34" charset="-120"/>
-              </a:rPr>
-              <a:t>4. What is weak evidence of completion for a leadership and governance module?</a:t>
-            </a:r>
-            <a:endParaRPr lang="en-US" sz="1700" dirty="0"/>
-          </a:p>
-        </p:txBody>
-      </p:sp>
-      <p:sp>
-        <p:nvSpPr>
-          <p:cNvPr id="11" name="Shape 9"/>
+            <a:endParaRPr lang="en-US" sz="2100" dirty="0"/>
+          </a:p>
+        </p:txBody>
+      </p:sp>
+      <p:sp>
+        <p:nvSpPr>
+          <p:cNvPr id="12" name="Shape 10"/>
           <p:cNvSpPr/>
           <p:nvPr/>
         </p:nvSpPr>
@@ -8449,14 +8836,14 @@
       </p:sp>
       <p:sp>
         <p:nvSpPr>
-          <p:cNvPr id="12" name="Text 10"/>
+          <p:cNvPr id="13" name="Text 11"/>
           <p:cNvSpPr/>
           <p:nvPr/>
         </p:nvSpPr>
         <p:spPr>
           <a:xfrm>
             <a:off x="8074152" y="1563624"/>
-            <a:ext cx="2825496" cy="201168"/>
+            <a:ext cx="2825496" cy="256032"/>
           </a:xfrm>
           <a:prstGeom prst="rect">
             <a:avLst/>
@@ -8472,7 +8859,7 @@
               <a:buNone/>
             </a:pPr>
             <a:r>
-              <a:rPr lang="en-US" sz="950" b="1" dirty="0">
+              <a:rPr lang="en-US" sz="1300" b="1" dirty="0">
                 <a:solidFill>
                   <a:srgbClr val="0068B7"/>
                 </a:solidFill>
@@ -8482,20 +8869,20 @@
               </a:rPr>
               <a:t>Key idea</a:t>
             </a:r>
-            <a:endParaRPr lang="en-US" sz="950" dirty="0"/>
-          </a:p>
-        </p:txBody>
-      </p:sp>
-      <p:sp>
-        <p:nvSpPr>
-          <p:cNvPr id="13" name="Text 11"/>
-          <p:cNvSpPr/>
-          <p:nvPr/>
-        </p:nvSpPr>
-        <p:spPr>
-          <a:xfrm>
-            <a:off x="8074152" y="1856232"/>
-            <a:ext cx="2825496" cy="1261872"/>
+            <a:endParaRPr lang="en-US" sz="1300" dirty="0"/>
+          </a:p>
+        </p:txBody>
+      </p:sp>
+      <p:sp>
+        <p:nvSpPr>
+          <p:cNvPr id="14" name="Text 12"/>
+          <p:cNvSpPr/>
+          <p:nvPr/>
+        </p:nvSpPr>
+        <p:spPr>
+          <a:xfrm>
+            <a:off x="8074152" y="1920240"/>
+            <a:ext cx="2825496" cy="1188720"/>
           </a:xfrm>
           <a:prstGeom prst="rect">
             <a:avLst/>
@@ -8513,7 +8900,7 @@
               <a:buNone/>
             </a:pPr>
             <a:r>
-              <a:rPr lang="en-US" sz="1250" dirty="0">
+              <a:rPr lang="en-US" sz="1550" dirty="0">
                 <a:solidFill>
                   <a:srgbClr val="17364A"/>
                 </a:solidFill>
@@ -8523,13 +8910,13 @@
               </a:rPr>
               <a:t>1. What is the strongest reason this module topic belongs in AI leadership and governance training?</a:t>
             </a:r>
-            <a:endParaRPr lang="en-US" sz="1250" dirty="0"/>
-          </a:p>
-        </p:txBody>
-      </p:sp>
-      <p:sp>
-        <p:nvSpPr>
-          <p:cNvPr id="14" name="Shape 12"/>
+            <a:endParaRPr lang="en-US" sz="1550" dirty="0"/>
+          </a:p>
+        </p:txBody>
+      </p:sp>
+      <p:sp>
+        <p:nvSpPr>
+          <p:cNvPr id="15" name="Shape 13"/>
           <p:cNvSpPr/>
           <p:nvPr/>
         </p:nvSpPr>
@@ -8556,14 +8943,14 @@
       </p:sp>
       <p:sp>
         <p:nvSpPr>
-          <p:cNvPr id="15" name="Text 13"/>
+          <p:cNvPr id="16" name="Text 14"/>
           <p:cNvSpPr/>
           <p:nvPr/>
         </p:nvSpPr>
         <p:spPr>
           <a:xfrm>
             <a:off x="8074152" y="3666744"/>
-            <a:ext cx="2825496" cy="201168"/>
+            <a:ext cx="2825496" cy="256032"/>
           </a:xfrm>
           <a:prstGeom prst="rect">
             <a:avLst/>
@@ -8579,7 +8966,7 @@
               <a:buNone/>
             </a:pPr>
             <a:r>
-              <a:rPr lang="en-US" sz="950" b="1" dirty="0">
+              <a:rPr lang="en-US" sz="1300" b="1" dirty="0">
                 <a:solidFill>
                   <a:srgbClr val="0068B7"/>
                 </a:solidFill>
@@ -8589,20 +8976,20 @@
               </a:rPr>
               <a:t>Use this for</a:t>
             </a:r>
-            <a:endParaRPr lang="en-US" sz="950" dirty="0"/>
-          </a:p>
-        </p:txBody>
-      </p:sp>
-      <p:sp>
-        <p:nvSpPr>
-          <p:cNvPr id="16" name="Text 14"/>
-          <p:cNvSpPr/>
-          <p:nvPr/>
-        </p:nvSpPr>
-        <p:spPr>
-          <a:xfrm>
-            <a:off x="8074152" y="3959352"/>
-            <a:ext cx="2825496" cy="1170432"/>
+            <a:endParaRPr lang="en-US" sz="1300" dirty="0"/>
+          </a:p>
+        </p:txBody>
+      </p:sp>
+      <p:sp>
+        <p:nvSpPr>
+          <p:cNvPr id="17" name="Text 15"/>
+          <p:cNvSpPr/>
+          <p:nvPr/>
+        </p:nvSpPr>
+        <p:spPr>
+          <a:xfrm>
+            <a:off x="8074152" y="4023360"/>
+            <a:ext cx="2825496" cy="1097280"/>
           </a:xfrm>
           <a:prstGeom prst="rect">
             <a:avLst/>
@@ -8620,7 +9007,7 @@
               <a:buNone/>
             </a:pPr>
             <a:r>
-              <a:rPr lang="en-US" sz="1250" dirty="0">
+              <a:rPr lang="en-US" sz="1550" dirty="0">
                 <a:solidFill>
                   <a:srgbClr val="17364A"/>
                 </a:solidFill>
@@ -8630,7 +9017,7 @@
               </a:rPr>
               <a:t>Connect the concept to public health decisions, safeguards, documentation, or implementation work.</a:t>
             </a:r>
-            <a:endParaRPr lang="en-US" sz="1250" dirty="0"/>
+            <a:endParaRPr lang="en-US" sz="1550" dirty="0"/>
           </a:p>
         </p:txBody>
       </p:sp>
@@ -8827,7 +9214,7 @@
                 <a:ea typeface="Aptos" pitchFamily="34" charset="-122"/>
                 <a:cs typeface="Aptos" pitchFamily="34" charset="-120"/>
               </a:rPr>
-              <a:t>© Paula Soper</a:t>
+              <a:t>Â© Paula Soper</a:t>
             </a:r>
             <a:endParaRPr lang="en-US" sz="800" dirty="0"/>
           </a:p>
@@ -8841,8 +9228,47 @@
         </p:nvSpPr>
         <p:spPr>
           <a:xfrm>
+            <a:off x="11137392" y="6510528"/>
+            <a:ext cx="411480" cy="201168"/>
+          </a:xfrm>
+          <a:prstGeom prst="rect">
+            <a:avLst/>
+          </a:prstGeom>
+          <a:noFill/>
+          <a:ln/>
+        </p:spPr>
+        <p:txBody>
+          <a:bodyPr wrap="square" lIns="0" tIns="0" rIns="0" bIns="0" rtlCol="0" anchor="ctr"/>
+          <a:lstStyle/>
+          <a:p>
+            <a:pPr algn="r" indent="0" marL="0">
+              <a:buNone/>
+            </a:pPr>
+            <a:r>
+              <a:rPr lang="en-US" sz="900" dirty="0">
+                <a:solidFill>
+                  <a:srgbClr val="5F7181"/>
+                </a:solidFill>
+                <a:latin typeface="Aptos" pitchFamily="34" charset="0"/>
+                <a:ea typeface="Aptos" pitchFamily="34" charset="-122"/>
+                <a:cs typeface="Aptos" pitchFamily="34" charset="-120"/>
+              </a:rPr>
+              <a:t>2</a:t>
+            </a:r>
+            <a:endParaRPr lang="en-US" sz="900" dirty="0"/>
+          </a:p>
+        </p:txBody>
+      </p:sp>
+      <p:sp>
+        <p:nvSpPr>
+          <p:cNvPr id="8" name="Text 6"/>
+          <p:cNvSpPr/>
+          <p:nvPr/>
+        </p:nvSpPr>
+        <p:spPr>
+          <a:xfrm>
             <a:off x="640080" y="658368"/>
-            <a:ext cx="10881360" cy="566928"/>
+            <a:ext cx="10881360" cy="713232"/>
           </a:xfrm>
           <a:prstGeom prst="rect">
             <a:avLst/>
@@ -8860,7 +9286,7 @@
               <a:buNone/>
             </a:pPr>
             <a:r>
-              <a:rPr lang="en-US" sz="2700" b="1" dirty="0">
+              <a:rPr lang="en-US" sz="3400" b="1" dirty="0">
                 <a:solidFill>
                   <a:srgbClr val="003A63"/>
                 </a:solidFill>
@@ -8870,20 +9296,20 @@
               </a:rPr>
               <a:t>What this module helps you do</a:t>
             </a:r>
-            <a:endParaRPr lang="en-US" sz="2700" dirty="0"/>
-          </a:p>
-        </p:txBody>
-      </p:sp>
-      <p:sp>
-        <p:nvSpPr>
-          <p:cNvPr id="8" name="Text 6"/>
-          <p:cNvSpPr/>
-          <p:nvPr/>
-        </p:nvSpPr>
-        <p:spPr>
-          <a:xfrm>
-            <a:off x="868680" y="1417320"/>
-            <a:ext cx="6675120" cy="3291840"/>
+            <a:endParaRPr lang="en-US" sz="3400" dirty="0"/>
+          </a:p>
+        </p:txBody>
+      </p:sp>
+      <p:sp>
+        <p:nvSpPr>
+          <p:cNvPr id="9" name="Text 7"/>
+          <p:cNvSpPr/>
+          <p:nvPr/>
+        </p:nvSpPr>
+        <p:spPr>
+          <a:xfrm>
+            <a:off x="868680" y="1508760"/>
+            <a:ext cx="6446520" cy="2926080"/>
           </a:xfrm>
           <a:prstGeom prst="rect">
             <a:avLst/>
@@ -8898,7 +9324,7 @@
           <a:lstStyle/>
           <a:p>
             <a:r>
-              <a:rPr lang="en-US" sz="1700" dirty="0">
+              <a:rPr lang="en-US" sz="2100" dirty="0">
                 <a:solidFill>
                   <a:srgbClr val="17364A"/>
                 </a:solidFill>
@@ -8906,13 +9332,13 @@
                 <a:ea typeface="Aptos" pitchFamily="34" charset="-122"/>
                 <a:cs typeface="Aptos" pitchFamily="34" charset="-120"/>
               </a:rPr>
-              <a:t>Public health agencies have a responsibility to explain how AI is used in ways that affect public services, public communication, surveillance,.</a:t>
-            </a:r>
-            <a:endParaRPr lang="en-US" sz="1700" dirty="0"/>
-          </a:p>
-          <a:p>
-            <a:r>
-              <a:rPr lang="en-US" sz="1700" dirty="0">
+              <a:t>Public health agencies have a responsibility to explain how AI is used in ways that affect public services,.</a:t>
+            </a:r>
+            <a:endParaRPr lang="en-US" sz="2100" dirty="0"/>
+          </a:p>
+          <a:p>
+            <a:r>
+              <a:rPr lang="en-US" sz="2100" dirty="0">
                 <a:solidFill>
                   <a:srgbClr val="17364A"/>
                 </a:solidFill>
@@ -8920,13 +9346,13 @@
                 <a:ea typeface="Aptos" pitchFamily="34" charset="-122"/>
                 <a:cs typeface="Aptos" pitchFamily="34" charset="-120"/>
               </a:rPr>
-              <a:t>Transparency reporting helps agencies communicate what AI tools are in use, why they are used, what safeguards are in place, and how the public or.</a:t>
-            </a:r>
-            <a:endParaRPr lang="en-US" sz="1700" dirty="0"/>
-          </a:p>
-          <a:p>
-            <a:r>
-              <a:rPr lang="en-US" sz="1700" dirty="0">
+              <a:t>Transparency reporting helps agencies communicate what AI tools are in use, why they are used, what safeguards.</a:t>
+            </a:r>
+            <a:endParaRPr lang="en-US" sz="2100" dirty="0"/>
+          </a:p>
+          <a:p>
+            <a:r>
+              <a:rPr lang="en-US" sz="2100" dirty="0">
                 <a:solidFill>
                   <a:srgbClr val="17364A"/>
                 </a:solidFill>
@@ -8936,27 +9362,13 @@
               </a:rPr>
               <a:t>This module helps leaders design AI transparency practices that are meaningful, not performative.</a:t>
             </a:r>
-            <a:endParaRPr lang="en-US" sz="1700" dirty="0"/>
-          </a:p>
-          <a:p>
-            <a:r>
-              <a:rPr lang="en-US" sz="1700" dirty="0">
-                <a:solidFill>
-                  <a:srgbClr val="17364A"/>
-                </a:solidFill>
-                <a:latin typeface="Aptos" pitchFamily="34" charset="0"/>
-                <a:ea typeface="Aptos" pitchFamily="34" charset="-122"/>
-                <a:cs typeface="Aptos" pitchFamily="34" charset="-120"/>
-              </a:rPr>
-              <a:t>Transparency should be understandable, accessible, and proportionate to risk.</a:t>
-            </a:r>
-            <a:endParaRPr lang="en-US" sz="1700" dirty="0"/>
-          </a:p>
-        </p:txBody>
-      </p:sp>
-      <p:sp>
-        <p:nvSpPr>
-          <p:cNvPr id="9" name="Shape 7"/>
+            <a:endParaRPr lang="en-US" sz="2100" dirty="0"/>
+          </a:p>
+        </p:txBody>
+      </p:sp>
+      <p:sp>
+        <p:nvSpPr>
+          <p:cNvPr id="10" name="Shape 8"/>
           <p:cNvSpPr/>
           <p:nvPr/>
         </p:nvSpPr>
@@ -8983,14 +9395,14 @@
       </p:sp>
       <p:sp>
         <p:nvSpPr>
-          <p:cNvPr id="10" name="Text 8"/>
+          <p:cNvPr id="11" name="Text 9"/>
           <p:cNvSpPr/>
           <p:nvPr/>
         </p:nvSpPr>
         <p:spPr>
           <a:xfrm>
             <a:off x="8074152" y="1563624"/>
-            <a:ext cx="2825496" cy="201168"/>
+            <a:ext cx="2825496" cy="256032"/>
           </a:xfrm>
           <a:prstGeom prst="rect">
             <a:avLst/>
@@ -9006,7 +9418,7 @@
               <a:buNone/>
             </a:pPr>
             <a:r>
-              <a:rPr lang="en-US" sz="950" b="1" dirty="0">
+              <a:rPr lang="en-US" sz="1300" b="1" dirty="0">
                 <a:solidFill>
                   <a:srgbClr val="0068B7"/>
                 </a:solidFill>
@@ -9016,20 +9428,20 @@
               </a:rPr>
               <a:t>Module details</a:t>
             </a:r>
-            <a:endParaRPr lang="en-US" sz="950" dirty="0"/>
-          </a:p>
-        </p:txBody>
-      </p:sp>
-      <p:sp>
-        <p:nvSpPr>
-          <p:cNvPr id="11" name="Text 9"/>
-          <p:cNvSpPr/>
-          <p:nvPr/>
-        </p:nvSpPr>
-        <p:spPr>
-          <a:xfrm>
-            <a:off x="8074152" y="1856232"/>
-            <a:ext cx="2825496" cy="1353312"/>
+            <a:endParaRPr lang="en-US" sz="1300" dirty="0"/>
+          </a:p>
+        </p:txBody>
+      </p:sp>
+      <p:sp>
+        <p:nvSpPr>
+          <p:cNvPr id="12" name="Text 10"/>
+          <p:cNvSpPr/>
+          <p:nvPr/>
+        </p:nvSpPr>
+        <p:spPr>
+          <a:xfrm>
+            <a:off x="8074152" y="1920240"/>
+            <a:ext cx="2825496" cy="1280160"/>
           </a:xfrm>
           <a:prstGeom prst="rect">
             <a:avLst/>
@@ -9047,7 +9459,7 @@
               <a:buNone/>
             </a:pPr>
             <a:r>
-              <a:rPr lang="en-US" sz="1250" dirty="0">
+              <a:rPr lang="en-US" sz="1550" dirty="0">
                 <a:solidFill>
                   <a:srgbClr val="17364A"/>
                 </a:solidFill>
@@ -9057,14 +9469,14 @@
               </a:rPr>
               <a:t>Level: advanced/leadership</a:t>
             </a:r>
-            <a:endParaRPr lang="en-US" sz="1250" dirty="0"/>
+            <a:endParaRPr lang="en-US" sz="1550" dirty="0"/>
           </a:p>
           <a:p>
             <a:pPr indent="0" marL="0">
               <a:buNone/>
             </a:pPr>
             <a:r>
-              <a:rPr lang="en-US" sz="1250" dirty="0">
+              <a:rPr lang="en-US" sz="1550" dirty="0">
                 <a:solidFill>
                   <a:srgbClr val="17364A"/>
                 </a:solidFill>
@@ -9074,14 +9486,14 @@
               </a:rPr>
               <a:t>Primary track: Governance and Security Track</a:t>
             </a:r>
-            <a:endParaRPr lang="en-US" sz="1250" dirty="0"/>
+            <a:endParaRPr lang="en-US" sz="1550" dirty="0"/>
           </a:p>
           <a:p>
             <a:pPr indent="0" marL="0">
               <a:buNone/>
             </a:pPr>
             <a:r>
-              <a:rPr lang="en-US" sz="1250" dirty="0">
+              <a:rPr lang="en-US" sz="1550" dirty="0">
                 <a:solidFill>
                   <a:srgbClr val="17364A"/>
                 </a:solidFill>
@@ -9091,32 +9503,32 @@
               </a:rPr>
               <a:t>Appears in tracks: governance-security</a:t>
             </a:r>
-            <a:endParaRPr lang="en-US" sz="1250" dirty="0"/>
-          </a:p>
-        </p:txBody>
-      </p:sp>
-      <p:sp>
-        <p:nvSpPr>
-          <p:cNvPr id="12" name="Shape 10"/>
-          <p:cNvSpPr/>
-          <p:nvPr/>
-        </p:nvSpPr>
-        <p:spPr>
-          <a:xfrm>
-            <a:off x="7909560" y="3611880"/>
-            <a:ext cx="3154680" cy="1783080"/>
+            <a:endParaRPr lang="en-US" sz="1550" dirty="0"/>
+          </a:p>
+        </p:txBody>
+      </p:sp>
+      <p:sp>
+        <p:nvSpPr>
+          <p:cNvPr id="13" name="Shape 11"/>
+          <p:cNvSpPr/>
+          <p:nvPr/>
+        </p:nvSpPr>
+        <p:spPr>
+          <a:xfrm>
+            <a:off x="7635240" y="3730752"/>
+            <a:ext cx="1033272" cy="749808"/>
           </a:xfrm>
           <a:prstGeom prst="roundRect">
             <a:avLst>
-              <a:gd name="adj" fmla="val 6154"/>
+              <a:gd name="adj" fmla="val 14634"/>
             </a:avLst>
           </a:prstGeom>
           <a:solidFill>
-            <a:srgbClr val="EEF8ED"/>
+            <a:srgbClr val="0068B7"/>
           </a:solidFill>
           <a:ln w="12700">
             <a:solidFill>
-              <a:srgbClr val="B9D7E6"/>
+              <a:srgbClr val="0068B7"/>
             </a:solidFill>
             <a:prstDash val="solid"/>
           </a:ln>
@@ -9124,81 +9536,256 @@
       </p:sp>
       <p:sp>
         <p:nvSpPr>
-          <p:cNvPr id="13" name="Text 11"/>
-          <p:cNvSpPr/>
-          <p:nvPr/>
-        </p:nvSpPr>
-        <p:spPr>
-          <a:xfrm>
-            <a:off x="8074152" y="3758184"/>
-            <a:ext cx="2825496" cy="201168"/>
-          </a:xfrm>
-          <a:prstGeom prst="rect">
-            <a:avLst/>
-          </a:prstGeom>
-          <a:noFill/>
-          <a:ln/>
-        </p:spPr>
-        <p:txBody>
-          <a:bodyPr wrap="square" lIns="0" tIns="0" rIns="0" bIns="0" rtlCol="0" anchor="ctr"/>
-          <a:lstStyle/>
-          <a:p>
-            <a:pPr indent="0" marL="0">
-              <a:buNone/>
-            </a:pPr>
-            <a:r>
-              <a:rPr lang="en-US" sz="950" b="1" dirty="0">
-                <a:solidFill>
-                  <a:srgbClr val="0068B7"/>
-                </a:solidFill>
-                <a:latin typeface="Aptos" pitchFamily="34" charset="0"/>
-                <a:ea typeface="Aptos" pitchFamily="34" charset="-122"/>
-                <a:cs typeface="Aptos" pitchFamily="34" charset="-120"/>
-              </a:rPr>
-              <a:t>Learning approach</a:t>
-            </a:r>
-            <a:endParaRPr lang="en-US" sz="950" dirty="0"/>
-          </a:p>
-        </p:txBody>
-      </p:sp>
-      <p:sp>
-        <p:nvSpPr>
           <p:cNvPr id="14" name="Text 12"/>
           <p:cNvSpPr/>
           <p:nvPr/>
         </p:nvSpPr>
         <p:spPr>
           <a:xfrm>
-            <a:off x="8074152" y="4050792"/>
-            <a:ext cx="2825496" cy="1216152"/>
-          </a:xfrm>
-          <a:prstGeom prst="rect">
-            <a:avLst/>
-          </a:prstGeom>
-          <a:noFill/>
-          <a:ln/>
-        </p:spPr>
-        <p:txBody>
-          <a:bodyPr wrap="square" lIns="0" tIns="0" rIns="0" bIns="0" rtlCol="0" anchor="t">
+            <a:off x="7708392" y="3922776"/>
+            <a:ext cx="886968" cy="310896"/>
+          </a:xfrm>
+          <a:prstGeom prst="rect">
+            <a:avLst/>
+          </a:prstGeom>
+          <a:noFill/>
+          <a:ln/>
+        </p:spPr>
+        <p:txBody>
+          <a:bodyPr wrap="square" lIns="0" tIns="0" rIns="0" bIns="0" rtlCol="0" anchor="ctr">
             <a:normAutofit/>
           </a:bodyPr>
           <a:lstStyle/>
           <a:p>
-            <a:pPr indent="0" marL="0">
-              <a:buNone/>
-            </a:pPr>
-            <a:r>
-              <a:rPr lang="en-US" sz="1250" dirty="0">
-                <a:solidFill>
-                  <a:srgbClr val="17364A"/>
-                </a:solidFill>
-                <a:latin typeface="Aptos" pitchFamily="34" charset="0"/>
-                <a:ea typeface="Aptos" pitchFamily="34" charset="-122"/>
-                <a:cs typeface="Aptos" pitchFamily="34" charset="-120"/>
-              </a:rPr>
-              <a:t>Review the core ideas, complete the practical exercise, check your understanding, and use the related plays and tools to apply the lesson.</a:t>
-            </a:r>
-            <a:endParaRPr lang="en-US" sz="1250" dirty="0"/>
+            <a:pPr algn="ctr" indent="0" marL="0">
+              <a:buNone/>
+            </a:pPr>
+            <a:r>
+              <a:rPr lang="en-US" sz="1500" b="1" dirty="0">
+                <a:solidFill>
+                  <a:srgbClr val="FFFFFF"/>
+                </a:solidFill>
+                <a:latin typeface="Aptos" pitchFamily="34" charset="0"/>
+                <a:ea typeface="Aptos" pitchFamily="34" charset="-122"/>
+                <a:cs typeface="Aptos" pitchFamily="34" charset="-120"/>
+              </a:rPr>
+              <a:t>Learn</a:t>
+            </a:r>
+            <a:endParaRPr lang="en-US" sz="1500" dirty="0"/>
+          </a:p>
+        </p:txBody>
+      </p:sp>
+      <p:sp>
+        <p:nvSpPr>
+          <p:cNvPr id="15" name="Text 13"/>
+          <p:cNvSpPr/>
+          <p:nvPr/>
+        </p:nvSpPr>
+        <p:spPr>
+          <a:xfrm>
+            <a:off x="8695944" y="3941064"/>
+            <a:ext cx="201168" cy="256032"/>
+          </a:xfrm>
+          <a:prstGeom prst="rect">
+            <a:avLst/>
+          </a:prstGeom>
+          <a:noFill/>
+          <a:ln/>
+        </p:spPr>
+        <p:txBody>
+          <a:bodyPr wrap="square" lIns="0" tIns="0" rIns="0" bIns="0" rtlCol="0" anchor="ctr"/>
+          <a:lstStyle/>
+          <a:p>
+            <a:pPr algn="ctr" indent="0" marL="0">
+              <a:buNone/>
+            </a:pPr>
+            <a:r>
+              <a:rPr lang="en-US" sz="1800" b="1" dirty="0">
+                <a:solidFill>
+                  <a:srgbClr val="0068B7"/>
+                </a:solidFill>
+                <a:latin typeface="Aptos" pitchFamily="34" charset="0"/>
+                <a:ea typeface="Aptos" pitchFamily="34" charset="-122"/>
+                <a:cs typeface="Aptos" pitchFamily="34" charset="-120"/>
+              </a:rPr>
+              <a:t>â†’</a:t>
+            </a:r>
+            <a:endParaRPr lang="en-US" sz="1800" dirty="0"/>
+          </a:p>
+        </p:txBody>
+      </p:sp>
+      <p:sp>
+        <p:nvSpPr>
+          <p:cNvPr id="16" name="Shape 14"/>
+          <p:cNvSpPr/>
+          <p:nvPr/>
+        </p:nvSpPr>
+        <p:spPr>
+          <a:xfrm>
+            <a:off x="8924544" y="3730752"/>
+            <a:ext cx="1033272" cy="749808"/>
+          </a:xfrm>
+          <a:prstGeom prst="roundRect">
+            <a:avLst>
+              <a:gd name="adj" fmla="val 14634"/>
+            </a:avLst>
+          </a:prstGeom>
+          <a:solidFill>
+            <a:srgbClr val="2F8A28"/>
+          </a:solidFill>
+          <a:ln w="12700">
+            <a:solidFill>
+              <a:srgbClr val="2F8A28"/>
+            </a:solidFill>
+            <a:prstDash val="solid"/>
+          </a:ln>
+        </p:spPr>
+      </p:sp>
+      <p:sp>
+        <p:nvSpPr>
+          <p:cNvPr id="17" name="Text 15"/>
+          <p:cNvSpPr/>
+          <p:nvPr/>
+        </p:nvSpPr>
+        <p:spPr>
+          <a:xfrm>
+            <a:off x="8997696" y="3922776"/>
+            <a:ext cx="886968" cy="310896"/>
+          </a:xfrm>
+          <a:prstGeom prst="rect">
+            <a:avLst/>
+          </a:prstGeom>
+          <a:noFill/>
+          <a:ln/>
+        </p:spPr>
+        <p:txBody>
+          <a:bodyPr wrap="square" lIns="0" tIns="0" rIns="0" bIns="0" rtlCol="0" anchor="ctr">
+            <a:normAutofit/>
+          </a:bodyPr>
+          <a:lstStyle/>
+          <a:p>
+            <a:pPr algn="ctr" indent="0" marL="0">
+              <a:buNone/>
+            </a:pPr>
+            <a:r>
+              <a:rPr lang="en-US" sz="1500" b="1" dirty="0">
+                <a:solidFill>
+                  <a:srgbClr val="FFFFFF"/>
+                </a:solidFill>
+                <a:latin typeface="Aptos" pitchFamily="34" charset="0"/>
+                <a:ea typeface="Aptos" pitchFamily="34" charset="-122"/>
+                <a:cs typeface="Aptos" pitchFamily="34" charset="-120"/>
+              </a:rPr>
+              <a:t>Apply</a:t>
+            </a:r>
+            <a:endParaRPr lang="en-US" sz="1500" dirty="0"/>
+          </a:p>
+        </p:txBody>
+      </p:sp>
+      <p:sp>
+        <p:nvSpPr>
+          <p:cNvPr id="18" name="Text 16"/>
+          <p:cNvSpPr/>
+          <p:nvPr/>
+        </p:nvSpPr>
+        <p:spPr>
+          <a:xfrm>
+            <a:off x="9985248" y="3941064"/>
+            <a:ext cx="201168" cy="256032"/>
+          </a:xfrm>
+          <a:prstGeom prst="rect">
+            <a:avLst/>
+          </a:prstGeom>
+          <a:noFill/>
+          <a:ln/>
+        </p:spPr>
+        <p:txBody>
+          <a:bodyPr wrap="square" lIns="0" tIns="0" rIns="0" bIns="0" rtlCol="0" anchor="ctr"/>
+          <a:lstStyle/>
+          <a:p>
+            <a:pPr algn="ctr" indent="0" marL="0">
+              <a:buNone/>
+            </a:pPr>
+            <a:r>
+              <a:rPr lang="en-US" sz="1800" b="1" dirty="0">
+                <a:solidFill>
+                  <a:srgbClr val="0068B7"/>
+                </a:solidFill>
+                <a:latin typeface="Aptos" pitchFamily="34" charset="0"/>
+                <a:ea typeface="Aptos" pitchFamily="34" charset="-122"/>
+                <a:cs typeface="Aptos" pitchFamily="34" charset="-120"/>
+              </a:rPr>
+              <a:t>â†’</a:t>
+            </a:r>
+            <a:endParaRPr lang="en-US" sz="1800" dirty="0"/>
+          </a:p>
+        </p:txBody>
+      </p:sp>
+      <p:sp>
+        <p:nvSpPr>
+          <p:cNvPr id="19" name="Shape 17"/>
+          <p:cNvSpPr/>
+          <p:nvPr/>
+        </p:nvSpPr>
+        <p:spPr>
+          <a:xfrm>
+            <a:off x="10213848" y="3730752"/>
+            <a:ext cx="1033272" cy="749808"/>
+          </a:xfrm>
+          <a:prstGeom prst="roundRect">
+            <a:avLst>
+              <a:gd name="adj" fmla="val 14634"/>
+            </a:avLst>
+          </a:prstGeom>
+          <a:solidFill>
+            <a:srgbClr val="6A4CA3"/>
+          </a:solidFill>
+          <a:ln w="12700">
+            <a:solidFill>
+              <a:srgbClr val="6A4CA3"/>
+            </a:solidFill>
+            <a:prstDash val="solid"/>
+          </a:ln>
+        </p:spPr>
+      </p:sp>
+      <p:sp>
+        <p:nvSpPr>
+          <p:cNvPr id="20" name="Text 18"/>
+          <p:cNvSpPr/>
+          <p:nvPr/>
+        </p:nvSpPr>
+        <p:spPr>
+          <a:xfrm>
+            <a:off x="10287000" y="3922776"/>
+            <a:ext cx="886968" cy="310896"/>
+          </a:xfrm>
+          <a:prstGeom prst="rect">
+            <a:avLst/>
+          </a:prstGeom>
+          <a:noFill/>
+          <a:ln/>
+        </p:spPr>
+        <p:txBody>
+          <a:bodyPr wrap="square" lIns="0" tIns="0" rIns="0" bIns="0" rtlCol="0" anchor="ctr">
+            <a:normAutofit/>
+          </a:bodyPr>
+          <a:lstStyle/>
+          <a:p>
+            <a:pPr algn="ctr" indent="0" marL="0">
+              <a:buNone/>
+            </a:pPr>
+            <a:r>
+              <a:rPr lang="en-US" sz="1500" b="1" dirty="0">
+                <a:solidFill>
+                  <a:srgbClr val="FFFFFF"/>
+                </a:solidFill>
+                <a:latin typeface="Aptos" pitchFamily="34" charset="0"/>
+                <a:ea typeface="Aptos" pitchFamily="34" charset="-122"/>
+                <a:cs typeface="Aptos" pitchFamily="34" charset="-120"/>
+              </a:rPr>
+              <a:t>Document</a:t>
+            </a:r>
+            <a:endParaRPr lang="en-US" sz="1500" dirty="0"/>
           </a:p>
         </p:txBody>
       </p:sp>
@@ -9395,7 +9982,7 @@
                 <a:ea typeface="Aptos" pitchFamily="34" charset="-122"/>
                 <a:cs typeface="Aptos" pitchFamily="34" charset="-120"/>
               </a:rPr>
-              <a:t>© Paula Soper</a:t>
+              <a:t>Â© Paula Soper</a:t>
             </a:r>
             <a:endParaRPr lang="en-US" sz="800" dirty="0"/>
           </a:p>
@@ -9403,7 +9990,46 @@
       </p:sp>
       <p:sp>
         <p:nvSpPr>
-          <p:cNvPr id="7" name="Shape 5"/>
+          <p:cNvPr id="7" name="Text 5"/>
+          <p:cNvSpPr/>
+          <p:nvPr/>
+        </p:nvSpPr>
+        <p:spPr>
+          <a:xfrm>
+            <a:off x="11137392" y="6510528"/>
+            <a:ext cx="411480" cy="201168"/>
+          </a:xfrm>
+          <a:prstGeom prst="rect">
+            <a:avLst/>
+          </a:prstGeom>
+          <a:noFill/>
+          <a:ln/>
+        </p:spPr>
+        <p:txBody>
+          <a:bodyPr wrap="square" lIns="0" tIns="0" rIns="0" bIns="0" rtlCol="0" anchor="ctr"/>
+          <a:lstStyle/>
+          <a:p>
+            <a:pPr algn="r" indent="0" marL="0">
+              <a:buNone/>
+            </a:pPr>
+            <a:r>
+              <a:rPr lang="en-US" sz="900" dirty="0">
+                <a:solidFill>
+                  <a:srgbClr val="5F7181"/>
+                </a:solidFill>
+                <a:latin typeface="Aptos" pitchFamily="34" charset="0"/>
+                <a:ea typeface="Aptos" pitchFamily="34" charset="-122"/>
+                <a:cs typeface="Aptos" pitchFamily="34" charset="-120"/>
+              </a:rPr>
+              <a:t>20</a:t>
+            </a:r>
+            <a:endParaRPr lang="en-US" sz="900" dirty="0"/>
+          </a:p>
+        </p:txBody>
+      </p:sp>
+      <p:sp>
+        <p:nvSpPr>
+          <p:cNvPr id="8" name="Shape 6"/>
           <p:cNvSpPr/>
           <p:nvPr/>
         </p:nvSpPr>
@@ -9428,7 +10054,7 @@
       </p:sp>
       <p:sp>
         <p:nvSpPr>
-          <p:cNvPr id="8" name="Text 6"/>
+          <p:cNvPr id="9" name="Text 7"/>
           <p:cNvSpPr/>
           <p:nvPr/>
         </p:nvSpPr>
@@ -9467,14 +10093,14 @@
       </p:sp>
       <p:sp>
         <p:nvSpPr>
-          <p:cNvPr id="9" name="Text 7"/>
+          <p:cNvPr id="10" name="Text 8"/>
           <p:cNvSpPr/>
           <p:nvPr/>
         </p:nvSpPr>
         <p:spPr>
           <a:xfrm>
             <a:off x="640080" y="621792"/>
-            <a:ext cx="10881360" cy="566928"/>
+            <a:ext cx="10881360" cy="713232"/>
           </a:xfrm>
           <a:prstGeom prst="rect">
             <a:avLst/>
@@ -9492,7 +10118,7 @@
               <a:buNone/>
             </a:pPr>
             <a:r>
-              <a:rPr lang="en-US" sz="2700" b="1" dirty="0">
+              <a:rPr lang="en-US" sz="3400" b="1" dirty="0">
                 <a:solidFill>
                   <a:srgbClr val="003A63"/>
                 </a:solidFill>
@@ -9502,20 +10128,20 @@
               </a:rPr>
               <a:t>References and Resources</a:t>
             </a:r>
-            <a:endParaRPr lang="en-US" sz="2700" dirty="0"/>
-          </a:p>
-        </p:txBody>
-      </p:sp>
-      <p:sp>
-        <p:nvSpPr>
-          <p:cNvPr id="10" name="Text 8"/>
-          <p:cNvSpPr/>
-          <p:nvPr/>
-        </p:nvSpPr>
-        <p:spPr>
-          <a:xfrm>
-            <a:off x="868680" y="1417320"/>
-            <a:ext cx="6675120" cy="4434840"/>
+            <a:endParaRPr lang="en-US" sz="3400" dirty="0"/>
+          </a:p>
+        </p:txBody>
+      </p:sp>
+      <p:sp>
+        <p:nvSpPr>
+          <p:cNvPr id="11" name="Text 9"/>
+          <p:cNvSpPr/>
+          <p:nvPr/>
+        </p:nvSpPr>
+        <p:spPr>
+          <a:xfrm>
+            <a:off x="868680" y="1508760"/>
+            <a:ext cx="6537960" cy="4160520"/>
           </a:xfrm>
           <a:prstGeom prst="rect">
             <a:avLst/>
@@ -9530,7 +10156,7 @@
           <a:lstStyle/>
           <a:p>
             <a:r>
-              <a:rPr lang="en-US" sz="1700" dirty="0">
+              <a:rPr lang="en-US" sz="2100" dirty="0">
                 <a:solidFill>
                   <a:srgbClr val="17364A"/>
                 </a:solidFill>
@@ -9538,13 +10164,13 @@
                 <a:ea typeface="Aptos" pitchFamily="34" charset="-122"/>
                 <a:cs typeface="Aptos" pitchFamily="34" charset="-120"/>
               </a:rPr>
-              <a:t>NIST Artificial Intelligence Risk Management Framework (AI RMF 1.0): https://www.nist.gov/itl/ai-risk-management-framework</a:t>
-            </a:r>
-            <a:endParaRPr lang="en-US" sz="1700" dirty="0"/>
-          </a:p>
-          <a:p>
-            <a:r>
-              <a:rPr lang="en-US" sz="1700" dirty="0">
+              <a:t>NIST Artificial Intelligence Risk Management Framework (AI RMF 1.0):.</a:t>
+            </a:r>
+            <a:endParaRPr lang="en-US" sz="2100" dirty="0"/>
+          </a:p>
+          <a:p>
+            <a:r>
+              <a:rPr lang="en-US" sz="2100" dirty="0">
                 <a:solidFill>
                   <a:srgbClr val="17364A"/>
                 </a:solidFill>
@@ -9554,11 +10180,11 @@
               </a:rPr>
               <a:t>NIST Generative AI Profile:.</a:t>
             </a:r>
-            <a:endParaRPr lang="en-US" sz="1700" dirty="0"/>
-          </a:p>
-          <a:p>
-            <a:r>
-              <a:rPr lang="en-US" sz="1700" dirty="0">
+            <a:endParaRPr lang="en-US" sz="2100" dirty="0"/>
+          </a:p>
+          <a:p>
+            <a:r>
+              <a:rPr lang="en-US" sz="2100" dirty="0">
                 <a:solidFill>
                   <a:srgbClr val="17364A"/>
                 </a:solidFill>
@@ -9568,27 +10194,13 @@
               </a:rPr>
               <a:t>NIST Privacy Framework</a:t>
             </a:r>
-            <a:endParaRPr lang="en-US" sz="1700" dirty="0"/>
-          </a:p>
-          <a:p>
-            <a:r>
-              <a:rPr lang="en-US" sz="1700" dirty="0">
-                <a:solidFill>
-                  <a:srgbClr val="17364A"/>
-                </a:solidFill>
-                <a:latin typeface="Aptos" pitchFamily="34" charset="0"/>
-                <a:ea typeface="Aptos" pitchFamily="34" charset="-122"/>
-                <a:cs typeface="Aptos" pitchFamily="34" charset="-120"/>
-              </a:rPr>
-              <a:t>CDC Public Health Data Strategy and Data Modernization resources:.</a:t>
-            </a:r>
-            <a:endParaRPr lang="en-US" sz="1700" dirty="0"/>
-          </a:p>
-        </p:txBody>
-      </p:sp>
-      <p:sp>
-        <p:nvSpPr>
-          <p:cNvPr id="11" name="Shape 9"/>
+            <a:endParaRPr lang="en-US" sz="2100" dirty="0"/>
+          </a:p>
+        </p:txBody>
+      </p:sp>
+      <p:sp>
+        <p:nvSpPr>
+          <p:cNvPr id="12" name="Shape 10"/>
           <p:cNvSpPr/>
           <p:nvPr/>
         </p:nvSpPr>
@@ -9615,14 +10227,14 @@
       </p:sp>
       <p:sp>
         <p:nvSpPr>
-          <p:cNvPr id="12" name="Text 10"/>
+          <p:cNvPr id="13" name="Text 11"/>
           <p:cNvSpPr/>
           <p:nvPr/>
         </p:nvSpPr>
         <p:spPr>
           <a:xfrm>
             <a:off x="8074152" y="1563624"/>
-            <a:ext cx="2825496" cy="201168"/>
+            <a:ext cx="2825496" cy="256032"/>
           </a:xfrm>
           <a:prstGeom prst="rect">
             <a:avLst/>
@@ -9638,7 +10250,7 @@
               <a:buNone/>
             </a:pPr>
             <a:r>
-              <a:rPr lang="en-US" sz="950" b="1" dirty="0">
+              <a:rPr lang="en-US" sz="1300" b="1" dirty="0">
                 <a:solidFill>
                   <a:srgbClr val="0068B7"/>
                 </a:solidFill>
@@ -9648,20 +10260,20 @@
               </a:rPr>
               <a:t>Key idea</a:t>
             </a:r>
-            <a:endParaRPr lang="en-US" sz="950" dirty="0"/>
-          </a:p>
-        </p:txBody>
-      </p:sp>
-      <p:sp>
-        <p:nvSpPr>
-          <p:cNvPr id="13" name="Text 11"/>
-          <p:cNvSpPr/>
-          <p:nvPr/>
-        </p:nvSpPr>
-        <p:spPr>
-          <a:xfrm>
-            <a:off x="8074152" y="1856232"/>
-            <a:ext cx="2825496" cy="1261872"/>
+            <a:endParaRPr lang="en-US" sz="1300" dirty="0"/>
+          </a:p>
+        </p:txBody>
+      </p:sp>
+      <p:sp>
+        <p:nvSpPr>
+          <p:cNvPr id="14" name="Text 12"/>
+          <p:cNvSpPr/>
+          <p:nvPr/>
+        </p:nvSpPr>
+        <p:spPr>
+          <a:xfrm>
+            <a:off x="8074152" y="1920240"/>
+            <a:ext cx="2825496" cy="1188720"/>
           </a:xfrm>
           <a:prstGeom prst="rect">
             <a:avLst/>
@@ -9679,7 +10291,7 @@
               <a:buNone/>
             </a:pPr>
             <a:r>
-              <a:rPr lang="en-US" sz="1250" dirty="0">
+              <a:rPr lang="en-US" sz="1550" dirty="0">
                 <a:solidFill>
                   <a:srgbClr val="17364A"/>
                 </a:solidFill>
@@ -9687,15 +10299,15 @@
                 <a:ea typeface="Aptos" pitchFamily="34" charset="-122"/>
                 <a:cs typeface="Aptos" pitchFamily="34" charset="-120"/>
               </a:rPr>
-              <a:t>NIST Artificial Intelligence Risk Management Framework (AI RMF 1.0): https://www.nist.gov/itl/ai-risk-management-framework</a:t>
-            </a:r>
-            <a:endParaRPr lang="en-US" sz="1250" dirty="0"/>
-          </a:p>
-        </p:txBody>
-      </p:sp>
-      <p:sp>
-        <p:nvSpPr>
-          <p:cNvPr id="14" name="Shape 12"/>
+              <a:t>NIST Artificial Intelligence Risk Management Framework (AI RMF 1.0):.</a:t>
+            </a:r>
+            <a:endParaRPr lang="en-US" sz="1550" dirty="0"/>
+          </a:p>
+        </p:txBody>
+      </p:sp>
+      <p:sp>
+        <p:nvSpPr>
+          <p:cNvPr id="15" name="Shape 13"/>
           <p:cNvSpPr/>
           <p:nvPr/>
         </p:nvSpPr>
@@ -9722,14 +10334,14 @@
       </p:sp>
       <p:sp>
         <p:nvSpPr>
-          <p:cNvPr id="15" name="Text 13"/>
+          <p:cNvPr id="16" name="Text 14"/>
           <p:cNvSpPr/>
           <p:nvPr/>
         </p:nvSpPr>
         <p:spPr>
           <a:xfrm>
             <a:off x="8074152" y="3666744"/>
-            <a:ext cx="2825496" cy="201168"/>
+            <a:ext cx="2825496" cy="256032"/>
           </a:xfrm>
           <a:prstGeom prst="rect">
             <a:avLst/>
@@ -9745,7 +10357,7 @@
               <a:buNone/>
             </a:pPr>
             <a:r>
-              <a:rPr lang="en-US" sz="950" b="1" dirty="0">
+              <a:rPr lang="en-US" sz="1300" b="1" dirty="0">
                 <a:solidFill>
                   <a:srgbClr val="0068B7"/>
                 </a:solidFill>
@@ -9755,20 +10367,20 @@
               </a:rPr>
               <a:t>Use this for</a:t>
             </a:r>
-            <a:endParaRPr lang="en-US" sz="950" dirty="0"/>
-          </a:p>
-        </p:txBody>
-      </p:sp>
-      <p:sp>
-        <p:nvSpPr>
-          <p:cNvPr id="16" name="Text 14"/>
-          <p:cNvSpPr/>
-          <p:nvPr/>
-        </p:nvSpPr>
-        <p:spPr>
-          <a:xfrm>
-            <a:off x="8074152" y="3959352"/>
-            <a:ext cx="2825496" cy="1170432"/>
+            <a:endParaRPr lang="en-US" sz="1300" dirty="0"/>
+          </a:p>
+        </p:txBody>
+      </p:sp>
+      <p:sp>
+        <p:nvSpPr>
+          <p:cNvPr id="17" name="Text 15"/>
+          <p:cNvSpPr/>
+          <p:nvPr/>
+        </p:nvSpPr>
+        <p:spPr>
+          <a:xfrm>
+            <a:off x="8074152" y="4023360"/>
+            <a:ext cx="2825496" cy="1097280"/>
           </a:xfrm>
           <a:prstGeom prst="rect">
             <a:avLst/>
@@ -9786,7 +10398,7 @@
               <a:buNone/>
             </a:pPr>
             <a:r>
-              <a:rPr lang="en-US" sz="1250" dirty="0">
+              <a:rPr lang="en-US" sz="1550" dirty="0">
                 <a:solidFill>
                   <a:srgbClr val="17364A"/>
                 </a:solidFill>
@@ -9796,7 +10408,7 @@
               </a:rPr>
               <a:t>Connect the concept to public health decisions, safeguards, documentation, or implementation work.</a:t>
             </a:r>
-            <a:endParaRPr lang="en-US" sz="1250" dirty="0"/>
+            <a:endParaRPr lang="en-US" sz="1550" dirty="0"/>
           </a:p>
         </p:txBody>
       </p:sp>
@@ -9993,7 +10605,7 @@
                 <a:ea typeface="Aptos" pitchFamily="34" charset="-122"/>
                 <a:cs typeface="Aptos" pitchFamily="34" charset="-120"/>
               </a:rPr>
-              <a:t>© Paula Soper</a:t>
+              <a:t>Â© Paula Soper</a:t>
             </a:r>
             <a:endParaRPr lang="en-US" sz="800" dirty="0"/>
           </a:p>
@@ -10007,8 +10619,47 @@
         </p:nvSpPr>
         <p:spPr>
           <a:xfrm>
+            <a:off x="11137392" y="6510528"/>
+            <a:ext cx="411480" cy="201168"/>
+          </a:xfrm>
+          <a:prstGeom prst="rect">
+            <a:avLst/>
+          </a:prstGeom>
+          <a:noFill/>
+          <a:ln/>
+        </p:spPr>
+        <p:txBody>
+          <a:bodyPr wrap="square" lIns="0" tIns="0" rIns="0" bIns="0" rtlCol="0" anchor="ctr"/>
+          <a:lstStyle/>
+          <a:p>
+            <a:pPr algn="r" indent="0" marL="0">
+              <a:buNone/>
+            </a:pPr>
+            <a:r>
+              <a:rPr lang="en-US" sz="900" dirty="0">
+                <a:solidFill>
+                  <a:srgbClr val="5F7181"/>
+                </a:solidFill>
+                <a:latin typeface="Aptos" pitchFamily="34" charset="0"/>
+                <a:ea typeface="Aptos" pitchFamily="34" charset="-122"/>
+                <a:cs typeface="Aptos" pitchFamily="34" charset="-120"/>
+              </a:rPr>
+              <a:t>21</a:t>
+            </a:r>
+            <a:endParaRPr lang="en-US" sz="900" dirty="0"/>
+          </a:p>
+        </p:txBody>
+      </p:sp>
+      <p:sp>
+        <p:nvSpPr>
+          <p:cNvPr id="8" name="Text 6"/>
+          <p:cNvSpPr/>
+          <p:nvPr/>
+        </p:nvSpPr>
+        <p:spPr>
+          <a:xfrm>
             <a:off x="640080" y="658368"/>
-            <a:ext cx="10881360" cy="566928"/>
+            <a:ext cx="10881360" cy="713232"/>
           </a:xfrm>
           <a:prstGeom prst="rect">
             <a:avLst/>
@@ -10026,7 +10677,7 @@
               <a:buNone/>
             </a:pPr>
             <a:r>
-              <a:rPr lang="en-US" sz="2700" b="1" dirty="0">
+              <a:rPr lang="en-US" sz="3400" b="1" dirty="0">
                 <a:solidFill>
                   <a:srgbClr val="003A63"/>
                 </a:solidFill>
@@ -10036,20 +10687,20 @@
               </a:rPr>
               <a:t>References and Resources Continued</a:t>
             </a:r>
-            <a:endParaRPr lang="en-US" sz="2700" dirty="0"/>
-          </a:p>
-        </p:txBody>
-      </p:sp>
-      <p:sp>
-        <p:nvSpPr>
-          <p:cNvPr id="8" name="Text 6"/>
-          <p:cNvSpPr/>
-          <p:nvPr/>
-        </p:nvSpPr>
-        <p:spPr>
-          <a:xfrm>
-            <a:off x="868680" y="1417320"/>
-            <a:ext cx="6675120" cy="4434840"/>
+            <a:endParaRPr lang="en-US" sz="3400" dirty="0"/>
+          </a:p>
+        </p:txBody>
+      </p:sp>
+      <p:sp>
+        <p:nvSpPr>
+          <p:cNvPr id="9" name="Text 7"/>
+          <p:cNvSpPr/>
+          <p:nvPr/>
+        </p:nvSpPr>
+        <p:spPr>
+          <a:xfrm>
+            <a:off x="868680" y="1508760"/>
+            <a:ext cx="6537960" cy="4160520"/>
           </a:xfrm>
           <a:prstGeom prst="rect">
             <a:avLst/>
@@ -10064,7 +10715,7 @@
           <a:lstStyle/>
           <a:p>
             <a:r>
-              <a:rPr lang="en-US" sz="1700" dirty="0">
+              <a:rPr lang="en-US" sz="2100" dirty="0">
                 <a:solidFill>
                   <a:srgbClr val="17364A"/>
                 </a:solidFill>
@@ -10072,13 +10723,13 @@
                 <a:ea typeface="Aptos" pitchFamily="34" charset="-122"/>
                 <a:cs typeface="Aptos" pitchFamily="34" charset="-120"/>
               </a:rPr>
-              <a:t>OMB Memorandum M-24-10 on federal AI governance, risk management, and innovation, where relevant to public-sector governance.</a:t>
-            </a:r>
-            <a:endParaRPr lang="en-US" sz="1700" dirty="0"/>
-          </a:p>
-          <a:p>
-            <a:r>
-              <a:rPr lang="en-US" sz="1700" dirty="0">
+              <a:t>OMB Memorandum M-24-10 on federal AI governance, risk management, and innovation, where relevant to.</a:t>
+            </a:r>
+            <a:endParaRPr lang="en-US" sz="2100" dirty="0"/>
+          </a:p>
+          <a:p>
+            <a:r>
+              <a:rPr lang="en-US" sz="2100" dirty="0">
                 <a:solidFill>
                   <a:srgbClr val="17364A"/>
                 </a:solidFill>
@@ -10086,15 +10737,15 @@
                 <a:ea typeface="Aptos" pitchFamily="34" charset="-122"/>
                 <a:cs typeface="Aptos" pitchFamily="34" charset="-120"/>
               </a:rPr>
-              <a:t>Agency strategic plans, procurement policies, privacy policies, cybersecurity policies, records policies, and equity plans</a:t>
-            </a:r>
-            <a:endParaRPr lang="en-US" sz="1700" dirty="0"/>
-          </a:p>
-        </p:txBody>
-      </p:sp>
-      <p:sp>
-        <p:nvSpPr>
-          <p:cNvPr id="9" name="Shape 7"/>
+              <a:t>Agency strategic plans, procurement policies, privacy policies, cybersecurity policies, records.</a:t>
+            </a:r>
+            <a:endParaRPr lang="en-US" sz="2100" dirty="0"/>
+          </a:p>
+        </p:txBody>
+      </p:sp>
+      <p:sp>
+        <p:nvSpPr>
+          <p:cNvPr id="10" name="Shape 8"/>
           <p:cNvSpPr/>
           <p:nvPr/>
         </p:nvSpPr>
@@ -10121,14 +10772,14 @@
       </p:sp>
       <p:sp>
         <p:nvSpPr>
-          <p:cNvPr id="10" name="Text 8"/>
+          <p:cNvPr id="11" name="Text 9"/>
           <p:cNvSpPr/>
           <p:nvPr/>
         </p:nvSpPr>
         <p:spPr>
           <a:xfrm>
             <a:off x="8074152" y="1563624"/>
-            <a:ext cx="2825496" cy="201168"/>
+            <a:ext cx="2825496" cy="256032"/>
           </a:xfrm>
           <a:prstGeom prst="rect">
             <a:avLst/>
@@ -10144,7 +10795,7 @@
               <a:buNone/>
             </a:pPr>
             <a:r>
-              <a:rPr lang="en-US" sz="950" b="1" dirty="0">
+              <a:rPr lang="en-US" sz="1300" b="1" dirty="0">
                 <a:solidFill>
                   <a:srgbClr val="0068B7"/>
                 </a:solidFill>
@@ -10154,20 +10805,20 @@
               </a:rPr>
               <a:t>Key idea</a:t>
             </a:r>
-            <a:endParaRPr lang="en-US" sz="950" dirty="0"/>
-          </a:p>
-        </p:txBody>
-      </p:sp>
-      <p:sp>
-        <p:nvSpPr>
-          <p:cNvPr id="11" name="Text 9"/>
-          <p:cNvSpPr/>
-          <p:nvPr/>
-        </p:nvSpPr>
-        <p:spPr>
-          <a:xfrm>
-            <a:off x="8074152" y="1856232"/>
-            <a:ext cx="2825496" cy="1261872"/>
+            <a:endParaRPr lang="en-US" sz="1300" dirty="0"/>
+          </a:p>
+        </p:txBody>
+      </p:sp>
+      <p:sp>
+        <p:nvSpPr>
+          <p:cNvPr id="12" name="Text 10"/>
+          <p:cNvSpPr/>
+          <p:nvPr/>
+        </p:nvSpPr>
+        <p:spPr>
+          <a:xfrm>
+            <a:off x="8074152" y="1920240"/>
+            <a:ext cx="2825496" cy="1188720"/>
           </a:xfrm>
           <a:prstGeom prst="rect">
             <a:avLst/>
@@ -10185,7 +10836,7 @@
               <a:buNone/>
             </a:pPr>
             <a:r>
-              <a:rPr lang="en-US" sz="1250" dirty="0">
+              <a:rPr lang="en-US" sz="1550" dirty="0">
                 <a:solidFill>
                   <a:srgbClr val="17364A"/>
                 </a:solidFill>
@@ -10193,15 +10844,15 @@
                 <a:ea typeface="Aptos" pitchFamily="34" charset="-122"/>
                 <a:cs typeface="Aptos" pitchFamily="34" charset="-120"/>
               </a:rPr>
-              <a:t>OMB Memorandum M-24-10 on federal AI governance, risk management, and innovation, where relevant to public-sector governance.</a:t>
-            </a:r>
-            <a:endParaRPr lang="en-US" sz="1250" dirty="0"/>
-          </a:p>
-        </p:txBody>
-      </p:sp>
-      <p:sp>
-        <p:nvSpPr>
-          <p:cNvPr id="12" name="Shape 10"/>
+              <a:t>OMB Memorandum M-24-10 on federal AI governance, risk management, and innovation, where relevant to.</a:t>
+            </a:r>
+            <a:endParaRPr lang="en-US" sz="1550" dirty="0"/>
+          </a:p>
+        </p:txBody>
+      </p:sp>
+      <p:sp>
+        <p:nvSpPr>
+          <p:cNvPr id="13" name="Shape 11"/>
           <p:cNvSpPr/>
           <p:nvPr/>
         </p:nvSpPr>
@@ -10228,14 +10879,14 @@
       </p:sp>
       <p:sp>
         <p:nvSpPr>
-          <p:cNvPr id="13" name="Text 11"/>
+          <p:cNvPr id="14" name="Text 12"/>
           <p:cNvSpPr/>
           <p:nvPr/>
         </p:nvSpPr>
         <p:spPr>
           <a:xfrm>
             <a:off x="8074152" y="3666744"/>
-            <a:ext cx="2825496" cy="201168"/>
+            <a:ext cx="2825496" cy="256032"/>
           </a:xfrm>
           <a:prstGeom prst="rect">
             <a:avLst/>
@@ -10251,7 +10902,7 @@
               <a:buNone/>
             </a:pPr>
             <a:r>
-              <a:rPr lang="en-US" sz="950" b="1" dirty="0">
+              <a:rPr lang="en-US" sz="1300" b="1" dirty="0">
                 <a:solidFill>
                   <a:srgbClr val="0068B7"/>
                 </a:solidFill>
@@ -10261,20 +10912,20 @@
               </a:rPr>
               <a:t>Use this for</a:t>
             </a:r>
-            <a:endParaRPr lang="en-US" sz="950" dirty="0"/>
-          </a:p>
-        </p:txBody>
-      </p:sp>
-      <p:sp>
-        <p:nvSpPr>
-          <p:cNvPr id="14" name="Text 12"/>
-          <p:cNvSpPr/>
-          <p:nvPr/>
-        </p:nvSpPr>
-        <p:spPr>
-          <a:xfrm>
-            <a:off x="8074152" y="3959352"/>
-            <a:ext cx="2825496" cy="1170432"/>
+            <a:endParaRPr lang="en-US" sz="1300" dirty="0"/>
+          </a:p>
+        </p:txBody>
+      </p:sp>
+      <p:sp>
+        <p:nvSpPr>
+          <p:cNvPr id="15" name="Text 13"/>
+          <p:cNvSpPr/>
+          <p:nvPr/>
+        </p:nvSpPr>
+        <p:spPr>
+          <a:xfrm>
+            <a:off x="8074152" y="4023360"/>
+            <a:ext cx="2825496" cy="1097280"/>
           </a:xfrm>
           <a:prstGeom prst="rect">
             <a:avLst/>
@@ -10292,7 +10943,7 @@
               <a:buNone/>
             </a:pPr>
             <a:r>
-              <a:rPr lang="en-US" sz="1250" dirty="0">
+              <a:rPr lang="en-US" sz="1550" dirty="0">
                 <a:solidFill>
                   <a:srgbClr val="17364A"/>
                 </a:solidFill>
@@ -10302,7 +10953,7 @@
               </a:rPr>
               <a:t>Connect the concept to public health decisions, safeguards, documentation, or implementation work.</a:t>
             </a:r>
-            <a:endParaRPr lang="en-US" sz="1250" dirty="0"/>
+            <a:endParaRPr lang="en-US" sz="1550" dirty="0"/>
           </a:p>
         </p:txBody>
       </p:sp>
@@ -10499,7 +11150,7 @@
                 <a:ea typeface="Aptos" pitchFamily="34" charset="-122"/>
                 <a:cs typeface="Aptos" pitchFamily="34" charset="-120"/>
               </a:rPr>
-              <a:t>© Paula Soper</a:t>
+              <a:t>Â© Paula Soper</a:t>
             </a:r>
             <a:endParaRPr lang="en-US" sz="800" dirty="0"/>
           </a:p>
@@ -10513,8 +11164,47 @@
         </p:nvSpPr>
         <p:spPr>
           <a:xfrm>
+            <a:off x="11137392" y="6510528"/>
+            <a:ext cx="411480" cy="201168"/>
+          </a:xfrm>
+          <a:prstGeom prst="rect">
+            <a:avLst/>
+          </a:prstGeom>
+          <a:noFill/>
+          <a:ln/>
+        </p:spPr>
+        <p:txBody>
+          <a:bodyPr wrap="square" lIns="0" tIns="0" rIns="0" bIns="0" rtlCol="0" anchor="ctr"/>
+          <a:lstStyle/>
+          <a:p>
+            <a:pPr algn="r" indent="0" marL="0">
+              <a:buNone/>
+            </a:pPr>
+            <a:r>
+              <a:rPr lang="en-US" sz="900" dirty="0">
+                <a:solidFill>
+                  <a:srgbClr val="5F7181"/>
+                </a:solidFill>
+                <a:latin typeface="Aptos" pitchFamily="34" charset="0"/>
+                <a:ea typeface="Aptos" pitchFamily="34" charset="-122"/>
+                <a:cs typeface="Aptos" pitchFamily="34" charset="-120"/>
+              </a:rPr>
+              <a:t>3</a:t>
+            </a:r>
+            <a:endParaRPr lang="en-US" sz="900" dirty="0"/>
+          </a:p>
+        </p:txBody>
+      </p:sp>
+      <p:sp>
+        <p:nvSpPr>
+          <p:cNvPr id="8" name="Text 6"/>
+          <p:cNvSpPr/>
+          <p:nvPr/>
+        </p:nvSpPr>
+        <p:spPr>
+          <a:xfrm>
             <a:off x="640080" y="658368"/>
-            <a:ext cx="10881360" cy="566928"/>
+            <a:ext cx="10881360" cy="713232"/>
           </a:xfrm>
           <a:prstGeom prst="rect">
             <a:avLst/>
@@ -10532,7 +11222,7 @@
               <a:buNone/>
             </a:pPr>
             <a:r>
-              <a:rPr lang="en-US" sz="2700" b="1" dirty="0">
+              <a:rPr lang="en-US" sz="3400" b="1" dirty="0">
                 <a:solidFill>
                   <a:srgbClr val="003A63"/>
                 </a:solidFill>
@@ -10542,20 +11232,20 @@
               </a:rPr>
               <a:t>How this module connects to the playbook</a:t>
             </a:r>
-            <a:endParaRPr lang="en-US" sz="2700" dirty="0"/>
-          </a:p>
-        </p:txBody>
-      </p:sp>
-      <p:sp>
-        <p:nvSpPr>
-          <p:cNvPr id="8" name="Text 6"/>
-          <p:cNvSpPr/>
-          <p:nvPr/>
-        </p:nvSpPr>
-        <p:spPr>
-          <a:xfrm>
-            <a:off x="868680" y="1417320"/>
-            <a:ext cx="6903720" cy="4480560"/>
+            <a:endParaRPr lang="en-US" sz="3400" dirty="0"/>
+          </a:p>
+        </p:txBody>
+      </p:sp>
+      <p:sp>
+        <p:nvSpPr>
+          <p:cNvPr id="9" name="Text 7"/>
+          <p:cNvSpPr/>
+          <p:nvPr/>
+        </p:nvSpPr>
+        <p:spPr>
+          <a:xfrm>
+            <a:off x="868680" y="1508760"/>
+            <a:ext cx="6812280" cy="3977640"/>
           </a:xfrm>
           <a:prstGeom prst="rect">
             <a:avLst/>
@@ -10570,7 +11260,7 @@
           <a:lstStyle/>
           <a:p>
             <a:r>
-              <a:rPr lang="en-US" sz="1540" dirty="0">
+              <a:rPr lang="en-US" sz="1900" dirty="0">
                 <a:solidFill>
                   <a:srgbClr val="17364A"/>
                 </a:solidFill>
@@ -10578,13 +11268,13 @@
                 <a:ea typeface="Aptos" pitchFamily="34" charset="-122"/>
                 <a:cs typeface="Aptos" pitchFamily="34" charset="-120"/>
               </a:rPr>
-              <a:t>Play 11: Build and Deploy AI Solutions - This lesson informs Play 11 by helping learners connect the lesson topic to build and deploy.</a:t>
-            </a:r>
-            <a:endParaRPr lang="en-US" sz="1540" dirty="0"/>
-          </a:p>
-          <a:p>
-            <a:r>
-              <a:rPr lang="en-US" sz="1540" dirty="0">
+              <a:t>Play 11: Build and Deploy AI Solutions - This lesson informs Play 11 by helping learners connect the lesson.</a:t>
+            </a:r>
+            <a:endParaRPr lang="en-US" sz="1900" dirty="0"/>
+          </a:p>
+          <a:p>
+            <a:r>
+              <a:rPr lang="en-US" sz="1900" dirty="0">
                 <a:solidFill>
                   <a:srgbClr val="17364A"/>
                 </a:solidFill>
@@ -10592,13 +11282,13 @@
                 <a:ea typeface="Aptos" pitchFamily="34" charset="-122"/>
                 <a:cs typeface="Aptos" pitchFamily="34" charset="-120"/>
               </a:rPr>
-              <a:t>Play 7: Prioritize Use Cases - This lesson informs Play 7 by helping learners connect the lesson topic to prioritize use cases work.</a:t>
-            </a:r>
-            <a:endParaRPr lang="en-US" sz="1540" dirty="0"/>
-          </a:p>
-          <a:p>
-            <a:r>
-              <a:rPr lang="en-US" sz="1540" dirty="0">
+              <a:t>Play 7: Prioritize Use Cases - This lesson informs Play 7 by helping learners connect the lesson topic to.</a:t>
+            </a:r>
+            <a:endParaRPr lang="en-US" sz="1900" dirty="0"/>
+          </a:p>
+          <a:p>
+            <a:r>
+              <a:rPr lang="en-US" sz="1900" dirty="0">
                 <a:solidFill>
                   <a:srgbClr val="17364A"/>
                 </a:solidFill>
@@ -10606,13 +11296,13 @@
                 <a:ea typeface="Aptos" pitchFamily="34" charset="-122"/>
                 <a:cs typeface="Aptos" pitchFamily="34" charset="-120"/>
               </a:rPr>
-              <a:t>Play 1: Vision &amp; Guardrails - This lesson informs Play 1 by helping learners connect the lesson topic to vision &amp; guardrails work in.</a:t>
-            </a:r>
-            <a:endParaRPr lang="en-US" sz="1540" dirty="0"/>
-          </a:p>
-          <a:p>
-            <a:r>
-              <a:rPr lang="en-US" sz="1540" dirty="0">
+              <a:t>Play 1: Vision &amp; Guardrails - This lesson informs Play 1 by helping learners connect the lesson topic to.</a:t>
+            </a:r>
+            <a:endParaRPr lang="en-US" sz="1900" dirty="0"/>
+          </a:p>
+          <a:p>
+            <a:r>
+              <a:rPr lang="en-US" sz="1900" dirty="0">
                 <a:solidFill>
                   <a:srgbClr val="17364A"/>
                 </a:solidFill>
@@ -10620,15 +11310,15 @@
                 <a:ea typeface="Aptos" pitchFamily="34" charset="-122"/>
                 <a:cs typeface="Aptos" pitchFamily="34" charset="-120"/>
               </a:rPr>
-              <a:t>Play 2: Readiness Assessment - This lesson informs Play 2 by helping learners connect the lesson topic to readiness assessment work.</a:t>
-            </a:r>
-            <a:endParaRPr lang="en-US" sz="1540" dirty="0"/>
-          </a:p>
-        </p:txBody>
-      </p:sp>
-      <p:sp>
-        <p:nvSpPr>
-          <p:cNvPr id="9" name="Shape 7"/>
+              <a:t>Play 2: Readiness Assessment - This lesson informs Play 2 by helping learners connect the lesson topic to.</a:t>
+            </a:r>
+            <a:endParaRPr lang="en-US" sz="1900" dirty="0"/>
+          </a:p>
+        </p:txBody>
+      </p:sp>
+      <p:sp>
+        <p:nvSpPr>
+          <p:cNvPr id="10" name="Shape 8"/>
           <p:cNvSpPr/>
           <p:nvPr/>
         </p:nvSpPr>
@@ -10655,14 +11345,14 @@
       </p:sp>
       <p:sp>
         <p:nvSpPr>
-          <p:cNvPr id="10" name="Text 8"/>
+          <p:cNvPr id="11" name="Text 9"/>
           <p:cNvSpPr/>
           <p:nvPr/>
         </p:nvSpPr>
         <p:spPr>
           <a:xfrm>
             <a:off x="8211312" y="1563624"/>
-            <a:ext cx="2734056" cy="201168"/>
+            <a:ext cx="2734056" cy="256032"/>
           </a:xfrm>
           <a:prstGeom prst="rect">
             <a:avLst/>
@@ -10678,7 +11368,7 @@
               <a:buNone/>
             </a:pPr>
             <a:r>
-              <a:rPr lang="en-US" sz="950" b="1" dirty="0">
+              <a:rPr lang="en-US" sz="1300" b="1" dirty="0">
                 <a:solidFill>
                   <a:srgbClr val="0068B7"/>
                 </a:solidFill>
@@ -10688,20 +11378,20 @@
               </a:rPr>
               <a:t>Apply the lesson</a:t>
             </a:r>
-            <a:endParaRPr lang="en-US" sz="950" dirty="0"/>
-          </a:p>
-        </p:txBody>
-      </p:sp>
-      <p:sp>
-        <p:nvSpPr>
-          <p:cNvPr id="11" name="Text 9"/>
-          <p:cNvSpPr/>
-          <p:nvPr/>
-        </p:nvSpPr>
-        <p:spPr>
-          <a:xfrm>
-            <a:off x="8211312" y="1856232"/>
-            <a:ext cx="2734056" cy="1536192"/>
+            <a:endParaRPr lang="en-US" sz="1300" dirty="0"/>
+          </a:p>
+        </p:txBody>
+      </p:sp>
+      <p:sp>
+        <p:nvSpPr>
+          <p:cNvPr id="12" name="Text 10"/>
+          <p:cNvSpPr/>
+          <p:nvPr/>
+        </p:nvSpPr>
+        <p:spPr>
+          <a:xfrm>
+            <a:off x="8211312" y="1920240"/>
+            <a:ext cx="2734056" cy="1463040"/>
           </a:xfrm>
           <a:prstGeom prst="rect">
             <a:avLst/>
@@ -10719,7 +11409,7 @@
               <a:buNone/>
             </a:pPr>
             <a:r>
-              <a:rPr lang="en-US" sz="1250" dirty="0">
+              <a:rPr lang="en-US" sz="1550" dirty="0">
                 <a:solidFill>
                   <a:srgbClr val="17364A"/>
                 </a:solidFill>
@@ -10729,32 +11419,32 @@
               </a:rPr>
               <a:t>Use the related plays to identify decisions, participants, timing, approvals, and documentation needed for responsible implementation.</a:t>
             </a:r>
-            <a:endParaRPr lang="en-US" sz="1250" dirty="0"/>
-          </a:p>
-        </p:txBody>
-      </p:sp>
-      <p:sp>
-        <p:nvSpPr>
-          <p:cNvPr id="12" name="Shape 10"/>
-          <p:cNvSpPr/>
-          <p:nvPr/>
-        </p:nvSpPr>
-        <p:spPr>
-          <a:xfrm>
-            <a:off x="8046720" y="3794760"/>
-            <a:ext cx="3063240" cy="1508760"/>
+            <a:endParaRPr lang="en-US" sz="1550" dirty="0"/>
+          </a:p>
+        </p:txBody>
+      </p:sp>
+      <p:sp>
+        <p:nvSpPr>
+          <p:cNvPr id="13" name="Shape 11"/>
+          <p:cNvSpPr/>
+          <p:nvPr/>
+        </p:nvSpPr>
+        <p:spPr>
+          <a:xfrm>
+            <a:off x="7818120" y="3977640"/>
+            <a:ext cx="972312" cy="749808"/>
           </a:xfrm>
           <a:prstGeom prst="roundRect">
             <a:avLst>
-              <a:gd name="adj" fmla="val 7273"/>
+              <a:gd name="adj" fmla="val 14634"/>
             </a:avLst>
           </a:prstGeom>
           <a:solidFill>
-            <a:srgbClr val="FFF4D9"/>
+            <a:srgbClr val="0068B7"/>
           </a:solidFill>
           <a:ln w="12700">
             <a:solidFill>
-              <a:srgbClr val="B9D7E6"/>
+              <a:srgbClr val="0068B7"/>
             </a:solidFill>
             <a:prstDash val="solid"/>
           </a:ln>
@@ -10762,81 +11452,256 @@
       </p:sp>
       <p:sp>
         <p:nvSpPr>
-          <p:cNvPr id="13" name="Text 11"/>
-          <p:cNvSpPr/>
-          <p:nvPr/>
-        </p:nvSpPr>
-        <p:spPr>
-          <a:xfrm>
-            <a:off x="8211312" y="3941064"/>
-            <a:ext cx="2734056" cy="201168"/>
-          </a:xfrm>
-          <a:prstGeom prst="rect">
-            <a:avLst/>
-          </a:prstGeom>
-          <a:noFill/>
-          <a:ln/>
-        </p:spPr>
-        <p:txBody>
-          <a:bodyPr wrap="square" lIns="0" tIns="0" rIns="0" bIns="0" rtlCol="0" anchor="ctr"/>
-          <a:lstStyle/>
-          <a:p>
-            <a:pPr indent="0" marL="0">
-              <a:buNone/>
-            </a:pPr>
-            <a:r>
-              <a:rPr lang="en-US" sz="950" b="1" dirty="0">
-                <a:solidFill>
-                  <a:srgbClr val="0068B7"/>
-                </a:solidFill>
-                <a:latin typeface="Aptos" pitchFamily="34" charset="0"/>
-                <a:ea typeface="Aptos" pitchFamily="34" charset="-122"/>
-                <a:cs typeface="Aptos" pitchFamily="34" charset="-120"/>
-              </a:rPr>
-              <a:t>Keep in mind</a:t>
-            </a:r>
-            <a:endParaRPr lang="en-US" sz="950" dirty="0"/>
-          </a:p>
-        </p:txBody>
-      </p:sp>
-      <p:sp>
-        <p:nvSpPr>
           <p:cNvPr id="14" name="Text 12"/>
           <p:cNvSpPr/>
           <p:nvPr/>
         </p:nvSpPr>
         <p:spPr>
           <a:xfrm>
-            <a:off x="8211312" y="4233672"/>
-            <a:ext cx="2734056" cy="941832"/>
-          </a:xfrm>
-          <a:prstGeom prst="rect">
-            <a:avLst/>
-          </a:prstGeom>
-          <a:noFill/>
-          <a:ln/>
-        </p:spPr>
-        <p:txBody>
-          <a:bodyPr wrap="square" lIns="0" tIns="0" rIns="0" bIns="0" rtlCol="0" anchor="t">
+            <a:off x="7891272" y="4169664"/>
+            <a:ext cx="826008" cy="310896"/>
+          </a:xfrm>
+          <a:prstGeom prst="rect">
+            <a:avLst/>
+          </a:prstGeom>
+          <a:noFill/>
+          <a:ln/>
+        </p:spPr>
+        <p:txBody>
+          <a:bodyPr wrap="square" lIns="0" tIns="0" rIns="0" bIns="0" rtlCol="0" anchor="ctr">
             <a:normAutofit/>
           </a:bodyPr>
           <a:lstStyle/>
           <a:p>
-            <a:pPr indent="0" marL="0">
-              <a:buNone/>
-            </a:pPr>
-            <a:r>
-              <a:rPr lang="en-US" sz="1250" dirty="0">
-                <a:solidFill>
-                  <a:srgbClr val="17364A"/>
-                </a:solidFill>
-                <a:latin typeface="Aptos" pitchFamily="34" charset="0"/>
-                <a:ea typeface="Aptos" pitchFamily="34" charset="-122"/>
-                <a:cs typeface="Aptos" pitchFamily="34" charset="-120"/>
-              </a:rPr>
-              <a:t>The playbook connection helps turn training into agency work, not just individual knowledge.</a:t>
-            </a:r>
-            <a:endParaRPr lang="en-US" sz="1250" dirty="0"/>
+            <a:pPr algn="ctr" indent="0" marL="0">
+              <a:buNone/>
+            </a:pPr>
+            <a:r>
+              <a:rPr lang="en-US" sz="1500" b="1" dirty="0">
+                <a:solidFill>
+                  <a:srgbClr val="FFFFFF"/>
+                </a:solidFill>
+                <a:latin typeface="Aptos" pitchFamily="34" charset="0"/>
+                <a:ea typeface="Aptos" pitchFamily="34" charset="-122"/>
+                <a:cs typeface="Aptos" pitchFamily="34" charset="-120"/>
+              </a:rPr>
+              <a:t>Lesson</a:t>
+            </a:r>
+            <a:endParaRPr lang="en-US" sz="1500" dirty="0"/>
+          </a:p>
+        </p:txBody>
+      </p:sp>
+      <p:sp>
+        <p:nvSpPr>
+          <p:cNvPr id="15" name="Text 13"/>
+          <p:cNvSpPr/>
+          <p:nvPr/>
+        </p:nvSpPr>
+        <p:spPr>
+          <a:xfrm>
+            <a:off x="8817864" y="4187952"/>
+            <a:ext cx="201168" cy="256032"/>
+          </a:xfrm>
+          <a:prstGeom prst="rect">
+            <a:avLst/>
+          </a:prstGeom>
+          <a:noFill/>
+          <a:ln/>
+        </p:spPr>
+        <p:txBody>
+          <a:bodyPr wrap="square" lIns="0" tIns="0" rIns="0" bIns="0" rtlCol="0" anchor="ctr"/>
+          <a:lstStyle/>
+          <a:p>
+            <a:pPr algn="ctr" indent="0" marL="0">
+              <a:buNone/>
+            </a:pPr>
+            <a:r>
+              <a:rPr lang="en-US" sz="1800" b="1" dirty="0">
+                <a:solidFill>
+                  <a:srgbClr val="0068B7"/>
+                </a:solidFill>
+                <a:latin typeface="Aptos" pitchFamily="34" charset="0"/>
+                <a:ea typeface="Aptos" pitchFamily="34" charset="-122"/>
+                <a:cs typeface="Aptos" pitchFamily="34" charset="-120"/>
+              </a:rPr>
+              <a:t>â†’</a:t>
+            </a:r>
+            <a:endParaRPr lang="en-US" sz="1800" dirty="0"/>
+          </a:p>
+        </p:txBody>
+      </p:sp>
+      <p:sp>
+        <p:nvSpPr>
+          <p:cNvPr id="16" name="Shape 14"/>
+          <p:cNvSpPr/>
+          <p:nvPr/>
+        </p:nvSpPr>
+        <p:spPr>
+          <a:xfrm>
+            <a:off x="9046464" y="3977640"/>
+            <a:ext cx="972312" cy="749808"/>
+          </a:xfrm>
+          <a:prstGeom prst="roundRect">
+            <a:avLst>
+              <a:gd name="adj" fmla="val 14634"/>
+            </a:avLst>
+          </a:prstGeom>
+          <a:solidFill>
+            <a:srgbClr val="2F8A28"/>
+          </a:solidFill>
+          <a:ln w="12700">
+            <a:solidFill>
+              <a:srgbClr val="2F8A28"/>
+            </a:solidFill>
+            <a:prstDash val="solid"/>
+          </a:ln>
+        </p:spPr>
+      </p:sp>
+      <p:sp>
+        <p:nvSpPr>
+          <p:cNvPr id="17" name="Text 15"/>
+          <p:cNvSpPr/>
+          <p:nvPr/>
+        </p:nvSpPr>
+        <p:spPr>
+          <a:xfrm>
+            <a:off x="9119616" y="4169664"/>
+            <a:ext cx="826008" cy="310896"/>
+          </a:xfrm>
+          <a:prstGeom prst="rect">
+            <a:avLst/>
+          </a:prstGeom>
+          <a:noFill/>
+          <a:ln/>
+        </p:spPr>
+        <p:txBody>
+          <a:bodyPr wrap="square" lIns="0" tIns="0" rIns="0" bIns="0" rtlCol="0" anchor="ctr">
+            <a:normAutofit/>
+          </a:bodyPr>
+          <a:lstStyle/>
+          <a:p>
+            <a:pPr algn="ctr" indent="0" marL="0">
+              <a:buNone/>
+            </a:pPr>
+            <a:r>
+              <a:rPr lang="en-US" sz="1500" b="1" dirty="0">
+                <a:solidFill>
+                  <a:srgbClr val="FFFFFF"/>
+                </a:solidFill>
+                <a:latin typeface="Aptos" pitchFamily="34" charset="0"/>
+                <a:ea typeface="Aptos" pitchFamily="34" charset="-122"/>
+                <a:cs typeface="Aptos" pitchFamily="34" charset="-120"/>
+              </a:rPr>
+              <a:t>Plays</a:t>
+            </a:r>
+            <a:endParaRPr lang="en-US" sz="1500" dirty="0"/>
+          </a:p>
+        </p:txBody>
+      </p:sp>
+      <p:sp>
+        <p:nvSpPr>
+          <p:cNvPr id="18" name="Text 16"/>
+          <p:cNvSpPr/>
+          <p:nvPr/>
+        </p:nvSpPr>
+        <p:spPr>
+          <a:xfrm>
+            <a:off x="10046208" y="4187952"/>
+            <a:ext cx="201168" cy="256032"/>
+          </a:xfrm>
+          <a:prstGeom prst="rect">
+            <a:avLst/>
+          </a:prstGeom>
+          <a:noFill/>
+          <a:ln/>
+        </p:spPr>
+        <p:txBody>
+          <a:bodyPr wrap="square" lIns="0" tIns="0" rIns="0" bIns="0" rtlCol="0" anchor="ctr"/>
+          <a:lstStyle/>
+          <a:p>
+            <a:pPr algn="ctr" indent="0" marL="0">
+              <a:buNone/>
+            </a:pPr>
+            <a:r>
+              <a:rPr lang="en-US" sz="1800" b="1" dirty="0">
+                <a:solidFill>
+                  <a:srgbClr val="0068B7"/>
+                </a:solidFill>
+                <a:latin typeface="Aptos" pitchFamily="34" charset="0"/>
+                <a:ea typeface="Aptos" pitchFamily="34" charset="-122"/>
+                <a:cs typeface="Aptos" pitchFamily="34" charset="-120"/>
+              </a:rPr>
+              <a:t>â†’</a:t>
+            </a:r>
+            <a:endParaRPr lang="en-US" sz="1800" dirty="0"/>
+          </a:p>
+        </p:txBody>
+      </p:sp>
+      <p:sp>
+        <p:nvSpPr>
+          <p:cNvPr id="19" name="Shape 17"/>
+          <p:cNvSpPr/>
+          <p:nvPr/>
+        </p:nvSpPr>
+        <p:spPr>
+          <a:xfrm>
+            <a:off x="10274808" y="3977640"/>
+            <a:ext cx="972312" cy="749808"/>
+          </a:xfrm>
+          <a:prstGeom prst="roundRect">
+            <a:avLst>
+              <a:gd name="adj" fmla="val 14634"/>
+            </a:avLst>
+          </a:prstGeom>
+          <a:solidFill>
+            <a:srgbClr val="6A4CA3"/>
+          </a:solidFill>
+          <a:ln w="12700">
+            <a:solidFill>
+              <a:srgbClr val="6A4CA3"/>
+            </a:solidFill>
+            <a:prstDash val="solid"/>
+          </a:ln>
+        </p:spPr>
+      </p:sp>
+      <p:sp>
+        <p:nvSpPr>
+          <p:cNvPr id="20" name="Text 18"/>
+          <p:cNvSpPr/>
+          <p:nvPr/>
+        </p:nvSpPr>
+        <p:spPr>
+          <a:xfrm>
+            <a:off x="10347960" y="4169664"/>
+            <a:ext cx="826008" cy="310896"/>
+          </a:xfrm>
+          <a:prstGeom prst="rect">
+            <a:avLst/>
+          </a:prstGeom>
+          <a:noFill/>
+          <a:ln/>
+        </p:spPr>
+        <p:txBody>
+          <a:bodyPr wrap="square" lIns="0" tIns="0" rIns="0" bIns="0" rtlCol="0" anchor="ctr">
+            <a:normAutofit/>
+          </a:bodyPr>
+          <a:lstStyle/>
+          <a:p>
+            <a:pPr algn="ctr" indent="0" marL="0">
+              <a:buNone/>
+            </a:pPr>
+            <a:r>
+              <a:rPr lang="en-US" sz="1500" b="1" dirty="0">
+                <a:solidFill>
+                  <a:srgbClr val="FFFFFF"/>
+                </a:solidFill>
+                <a:latin typeface="Aptos" pitchFamily="34" charset="0"/>
+                <a:ea typeface="Aptos" pitchFamily="34" charset="-122"/>
+                <a:cs typeface="Aptos" pitchFamily="34" charset="-120"/>
+              </a:rPr>
+              <a:t>Action</a:t>
+            </a:r>
+            <a:endParaRPr lang="en-US" sz="1500" dirty="0"/>
           </a:p>
         </p:txBody>
       </p:sp>
@@ -11033,7 +11898,7 @@
                 <a:ea typeface="Aptos" pitchFamily="34" charset="-122"/>
                 <a:cs typeface="Aptos" pitchFamily="34" charset="-120"/>
               </a:rPr>
-              <a:t>© Paula Soper</a:t>
+              <a:t>Â© Paula Soper</a:t>
             </a:r>
             <a:endParaRPr lang="en-US" sz="800" dirty="0"/>
           </a:p>
@@ -11047,8 +11912,47 @@
         </p:nvSpPr>
         <p:spPr>
           <a:xfrm>
+            <a:off x="11137392" y="6510528"/>
+            <a:ext cx="411480" cy="201168"/>
+          </a:xfrm>
+          <a:prstGeom prst="rect">
+            <a:avLst/>
+          </a:prstGeom>
+          <a:noFill/>
+          <a:ln/>
+        </p:spPr>
+        <p:txBody>
+          <a:bodyPr wrap="square" lIns="0" tIns="0" rIns="0" bIns="0" rtlCol="0" anchor="ctr"/>
+          <a:lstStyle/>
+          <a:p>
+            <a:pPr algn="r" indent="0" marL="0">
+              <a:buNone/>
+            </a:pPr>
+            <a:r>
+              <a:rPr lang="en-US" sz="900" dirty="0">
+                <a:solidFill>
+                  <a:srgbClr val="5F7181"/>
+                </a:solidFill>
+                <a:latin typeface="Aptos" pitchFamily="34" charset="0"/>
+                <a:ea typeface="Aptos" pitchFamily="34" charset="-122"/>
+                <a:cs typeface="Aptos" pitchFamily="34" charset="-120"/>
+              </a:rPr>
+              <a:t>4</a:t>
+            </a:r>
+            <a:endParaRPr lang="en-US" sz="900" dirty="0"/>
+          </a:p>
+        </p:txBody>
+      </p:sp>
+      <p:sp>
+        <p:nvSpPr>
+          <p:cNvPr id="8" name="Text 6"/>
+          <p:cNvSpPr/>
+          <p:nvPr/>
+        </p:nvSpPr>
+        <p:spPr>
+          <a:xfrm>
             <a:off x="640080" y="658368"/>
-            <a:ext cx="10881360" cy="566928"/>
+            <a:ext cx="10881360" cy="713232"/>
           </a:xfrm>
           <a:prstGeom prst="rect">
             <a:avLst/>
@@ -11066,7 +11970,7 @@
               <a:buNone/>
             </a:pPr>
             <a:r>
-              <a:rPr lang="en-US" sz="2700" b="1" dirty="0">
+              <a:rPr lang="en-US" sz="3400" b="1" dirty="0">
                 <a:solidFill>
                   <a:srgbClr val="003A63"/>
                 </a:solidFill>
@@ -11076,20 +11980,20 @@
               </a:rPr>
               <a:t>Related toolkit resources</a:t>
             </a:r>
-            <a:endParaRPr lang="en-US" sz="2700" dirty="0"/>
-          </a:p>
-        </p:txBody>
-      </p:sp>
-      <p:sp>
-        <p:nvSpPr>
-          <p:cNvPr id="8" name="Text 6"/>
-          <p:cNvSpPr/>
-          <p:nvPr/>
-        </p:nvSpPr>
-        <p:spPr>
-          <a:xfrm>
-            <a:off x="868680" y="1417320"/>
-            <a:ext cx="6903720" cy="4480560"/>
+            <a:endParaRPr lang="en-US" sz="3400" dirty="0"/>
+          </a:p>
+        </p:txBody>
+      </p:sp>
+      <p:sp>
+        <p:nvSpPr>
+          <p:cNvPr id="9" name="Text 7"/>
+          <p:cNvSpPr/>
+          <p:nvPr/>
+        </p:nvSpPr>
+        <p:spPr>
+          <a:xfrm>
+            <a:off x="868680" y="1508760"/>
+            <a:ext cx="6812280" cy="3977640"/>
           </a:xfrm>
           <a:prstGeom prst="rect">
             <a:avLst/>
@@ -11104,7 +12008,7 @@
           <a:lstStyle/>
           <a:p>
             <a:r>
-              <a:rPr lang="en-US" sz="1460" dirty="0">
+              <a:rPr lang="en-US" sz="1850" dirty="0">
                 <a:solidFill>
                   <a:srgbClr val="17364A"/>
                 </a:solidFill>
@@ -11112,13 +12016,13 @@
                 <a:ea typeface="Aptos" pitchFamily="34" charset="-122"/>
                 <a:cs typeface="Aptos" pitchFamily="34" charset="-120"/>
               </a:rPr>
-              <a:t>Tool 3: Equity Impact Assessment Checklist (Checklist) - Use this tool to complete or strengthen the practical exercise for the.</a:t>
-            </a:r>
-            <a:endParaRPr lang="en-US" sz="1460" dirty="0"/>
-          </a:p>
-          <a:p>
-            <a:r>
-              <a:rPr lang="en-US" sz="1460" dirty="0">
+              <a:t>Tool 3: Equity Impact Assessment Checklist (Checklist) - Use this tool to complete or strengthen the.</a:t>
+            </a:r>
+            <a:endParaRPr lang="en-US" sz="1850" dirty="0"/>
+          </a:p>
+          <a:p>
+            <a:r>
+              <a:rPr lang="en-US" sz="1850" dirty="0">
                 <a:solidFill>
                   <a:srgbClr val="17364A"/>
                 </a:solidFill>
@@ -11126,13 +12030,13 @@
                 <a:ea typeface="Aptos" pitchFamily="34" charset="-122"/>
                 <a:cs typeface="Aptos" pitchFamily="34" charset="-120"/>
               </a:rPr>
-              <a:t>Tool 4: AI Policy Landscape Scan (Worksheet) - Use AI Policy Landscape Scan to translate this lesson into a documented public health.</a:t>
-            </a:r>
-            <a:endParaRPr lang="en-US" sz="1460" dirty="0"/>
-          </a:p>
-          <a:p>
-            <a:r>
-              <a:rPr lang="en-US" sz="1460" dirty="0">
+              <a:t>Tool 4: AI Policy Landscape Scan (Worksheet) - Use AI Policy Landscape Scan to translate this lesson into a.</a:t>
+            </a:r>
+            <a:endParaRPr lang="en-US" sz="1850" dirty="0"/>
+          </a:p>
+          <a:p>
+            <a:r>
+              <a:rPr lang="en-US" sz="1850" dirty="0">
                 <a:solidFill>
                   <a:srgbClr val="17364A"/>
                 </a:solidFill>
@@ -11140,13 +12044,13 @@
                 <a:ea typeface="Aptos" pitchFamily="34" charset="-122"/>
                 <a:cs typeface="Aptos" pitchFamily="34" charset="-120"/>
               </a:rPr>
-              <a:t>Tool 5: AI Environmental and Resource Impact Review (Checklist) - Use AI Environmental and Resource Impact Review to translate this.</a:t>
-            </a:r>
-            <a:endParaRPr lang="en-US" sz="1460" dirty="0"/>
-          </a:p>
-          <a:p>
-            <a:r>
-              <a:rPr lang="en-US" sz="1460" dirty="0">
+              <a:t>Tool 5: AI Environmental and Resource Impact Review (Checklist) - Use AI Environmental and Resource Impact.</a:t>
+            </a:r>
+            <a:endParaRPr lang="en-US" sz="1850" dirty="0"/>
+          </a:p>
+          <a:p>
+            <a:r>
+              <a:rPr lang="en-US" sz="1850" dirty="0">
                 <a:solidFill>
                   <a:srgbClr val="17364A"/>
                 </a:solidFill>
@@ -11154,29 +12058,15 @@
                 <a:ea typeface="Aptos" pitchFamily="34" charset="-122"/>
                 <a:cs typeface="Aptos" pitchFamily="34" charset="-120"/>
               </a:rPr>
-              <a:t>Tool 6: Human-Centered AI Decision Rule Checklist (Checklist) - Use this tool to complete or strengthen the practical exercise for.</a:t>
-            </a:r>
-            <a:endParaRPr lang="en-US" sz="1460" dirty="0"/>
-          </a:p>
-          <a:p>
-            <a:r>
-              <a:rPr lang="en-US" sz="1460" dirty="0">
-                <a:solidFill>
-                  <a:srgbClr val="17364A"/>
-                </a:solidFill>
-                <a:latin typeface="Aptos" pitchFamily="34" charset="0"/>
-                <a:ea typeface="Aptos" pitchFamily="34" charset="-122"/>
-                <a:cs typeface="Aptos" pitchFamily="34" charset="-120"/>
-              </a:rPr>
-              <a:t>Tool 8: AI Project Charter (Planning) - Use AI Project Charter to translate this lesson into a documented public health AI planning,.</a:t>
-            </a:r>
-            <a:endParaRPr lang="en-US" sz="1460" dirty="0"/>
-          </a:p>
-        </p:txBody>
-      </p:sp>
-      <p:sp>
-        <p:nvSpPr>
-          <p:cNvPr id="9" name="Shape 7"/>
+              <a:t>Tool 6: Human-Centered AI Decision Rule Checklist (Checklist) - Use this tool to complete or strengthen the.</a:t>
+            </a:r>
+            <a:endParaRPr lang="en-US" sz="1850" dirty="0"/>
+          </a:p>
+        </p:txBody>
+      </p:sp>
+      <p:sp>
+        <p:nvSpPr>
+          <p:cNvPr id="10" name="Shape 8"/>
           <p:cNvSpPr/>
           <p:nvPr/>
         </p:nvSpPr>
@@ -11203,14 +12093,14 @@
       </p:sp>
       <p:sp>
         <p:nvSpPr>
-          <p:cNvPr id="10" name="Text 8"/>
+          <p:cNvPr id="11" name="Text 9"/>
           <p:cNvSpPr/>
           <p:nvPr/>
         </p:nvSpPr>
         <p:spPr>
           <a:xfrm>
             <a:off x="8211312" y="1563624"/>
-            <a:ext cx="2734056" cy="201168"/>
+            <a:ext cx="2734056" cy="256032"/>
           </a:xfrm>
           <a:prstGeom prst="rect">
             <a:avLst/>
@@ -11226,7 +12116,7 @@
               <a:buNone/>
             </a:pPr>
             <a:r>
-              <a:rPr lang="en-US" sz="950" b="1" dirty="0">
+              <a:rPr lang="en-US" sz="1300" b="1" dirty="0">
                 <a:solidFill>
                   <a:srgbClr val="0068B7"/>
                 </a:solidFill>
@@ -11236,20 +12126,20 @@
               </a:rPr>
               <a:t>Use the tools</a:t>
             </a:r>
-            <a:endParaRPr lang="en-US" sz="950" dirty="0"/>
-          </a:p>
-        </p:txBody>
-      </p:sp>
-      <p:sp>
-        <p:nvSpPr>
-          <p:cNvPr id="11" name="Text 9"/>
-          <p:cNvSpPr/>
-          <p:nvPr/>
-        </p:nvSpPr>
-        <p:spPr>
-          <a:xfrm>
-            <a:off x="8211312" y="1856232"/>
-            <a:ext cx="2734056" cy="1536192"/>
+            <a:endParaRPr lang="en-US" sz="1300" dirty="0"/>
+          </a:p>
+        </p:txBody>
+      </p:sp>
+      <p:sp>
+        <p:nvSpPr>
+          <p:cNvPr id="12" name="Text 10"/>
+          <p:cNvSpPr/>
+          <p:nvPr/>
+        </p:nvSpPr>
+        <p:spPr>
+          <a:xfrm>
+            <a:off x="8211312" y="1920240"/>
+            <a:ext cx="2734056" cy="1463040"/>
           </a:xfrm>
           <a:prstGeom prst="rect">
             <a:avLst/>
@@ -11267,7 +12157,7 @@
               <a:buNone/>
             </a:pPr>
             <a:r>
-              <a:rPr lang="en-US" sz="1250" dirty="0">
+              <a:rPr lang="en-US" sz="1550" dirty="0">
                 <a:solidFill>
                   <a:srgbClr val="17364A"/>
                 </a:solidFill>
@@ -11277,32 +12167,32 @@
               </a:rPr>
               <a:t>Use linked tools when your department needs a structured worksheet, template, checklist, review process, or documentation artifact.</a:t>
             </a:r>
-            <a:endParaRPr lang="en-US" sz="1250" dirty="0"/>
-          </a:p>
-        </p:txBody>
-      </p:sp>
-      <p:sp>
-        <p:nvSpPr>
-          <p:cNvPr id="12" name="Shape 10"/>
-          <p:cNvSpPr/>
-          <p:nvPr/>
-        </p:nvSpPr>
-        <p:spPr>
-          <a:xfrm>
-            <a:off x="8046720" y="3794760"/>
-            <a:ext cx="3063240" cy="1508760"/>
+            <a:endParaRPr lang="en-US" sz="1550" dirty="0"/>
+          </a:p>
+        </p:txBody>
+      </p:sp>
+      <p:sp>
+        <p:nvSpPr>
+          <p:cNvPr id="13" name="Shape 11"/>
+          <p:cNvSpPr/>
+          <p:nvPr/>
+        </p:nvSpPr>
+        <p:spPr>
+          <a:xfrm>
+            <a:off x="7818120" y="3977640"/>
+            <a:ext cx="972312" cy="749808"/>
           </a:xfrm>
           <a:prstGeom prst="roundRect">
             <a:avLst>
-              <a:gd name="adj" fmla="val 7273"/>
+              <a:gd name="adj" fmla="val 14634"/>
             </a:avLst>
           </a:prstGeom>
           <a:solidFill>
-            <a:srgbClr val="EEF8ED"/>
+            <a:srgbClr val="0068B7"/>
           </a:solidFill>
           <a:ln w="12700">
             <a:solidFill>
-              <a:srgbClr val="B9D7E6"/>
+              <a:srgbClr val="0068B7"/>
             </a:solidFill>
             <a:prstDash val="solid"/>
           </a:ln>
@@ -11310,81 +12200,256 @@
       </p:sp>
       <p:sp>
         <p:nvSpPr>
-          <p:cNvPr id="13" name="Text 11"/>
-          <p:cNvSpPr/>
-          <p:nvPr/>
-        </p:nvSpPr>
-        <p:spPr>
-          <a:xfrm>
-            <a:off x="8211312" y="3941064"/>
-            <a:ext cx="2734056" cy="201168"/>
-          </a:xfrm>
-          <a:prstGeom prst="rect">
-            <a:avLst/>
-          </a:prstGeom>
-          <a:noFill/>
-          <a:ln/>
-        </p:spPr>
-        <p:txBody>
-          <a:bodyPr wrap="square" lIns="0" tIns="0" rIns="0" bIns="0" rtlCol="0" anchor="ctr"/>
-          <a:lstStyle/>
-          <a:p>
-            <a:pPr indent="0" marL="0">
-              <a:buNone/>
-            </a:pPr>
-            <a:r>
-              <a:rPr lang="en-US" sz="950" b="1" dirty="0">
-                <a:solidFill>
-                  <a:srgbClr val="0068B7"/>
-                </a:solidFill>
-                <a:latin typeface="Aptos" pitchFamily="34" charset="0"/>
-                <a:ea typeface="Aptos" pitchFamily="34" charset="-122"/>
-                <a:cs typeface="Aptos" pitchFamily="34" charset="-120"/>
-              </a:rPr>
-              <a:t>Avoid duplication</a:t>
-            </a:r>
-            <a:endParaRPr lang="en-US" sz="950" dirty="0"/>
-          </a:p>
-        </p:txBody>
-      </p:sp>
-      <p:sp>
-        <p:nvSpPr>
           <p:cNvPr id="14" name="Text 12"/>
           <p:cNvSpPr/>
           <p:nvPr/>
         </p:nvSpPr>
         <p:spPr>
           <a:xfrm>
-            <a:off x="8211312" y="4233672"/>
-            <a:ext cx="2734056" cy="941832"/>
-          </a:xfrm>
-          <a:prstGeom prst="rect">
-            <a:avLst/>
-          </a:prstGeom>
-          <a:noFill/>
-          <a:ln/>
-        </p:spPr>
-        <p:txBody>
-          <a:bodyPr wrap="square" lIns="0" tIns="0" rIns="0" bIns="0" rtlCol="0" anchor="t">
+            <a:off x="7891272" y="4169664"/>
+            <a:ext cx="826008" cy="310896"/>
+          </a:xfrm>
+          <a:prstGeom prst="rect">
+            <a:avLst/>
+          </a:prstGeom>
+          <a:noFill/>
+          <a:ln/>
+        </p:spPr>
+        <p:txBody>
+          <a:bodyPr wrap="square" lIns="0" tIns="0" rIns="0" bIns="0" rtlCol="0" anchor="ctr">
             <a:normAutofit/>
           </a:bodyPr>
           <a:lstStyle/>
           <a:p>
-            <a:pPr indent="0" marL="0">
-              <a:buNone/>
-            </a:pPr>
-            <a:r>
-              <a:rPr lang="en-US" sz="1250" dirty="0">
-                <a:solidFill>
-                  <a:srgbClr val="17364A"/>
-                </a:solidFill>
-                <a:latin typeface="Aptos" pitchFamily="34" charset="0"/>
-                <a:ea typeface="Aptos" pitchFamily="34" charset="-122"/>
-                <a:cs typeface="Aptos" pitchFamily="34" charset="-120"/>
-              </a:rPr>
-              <a:t>If your department already has a strong equivalent tool, adapt or use the existing process instead of recreating it.</a:t>
-            </a:r>
-            <a:endParaRPr lang="en-US" sz="1250" dirty="0"/>
+            <a:pPr algn="ctr" indent="0" marL="0">
+              <a:buNone/>
+            </a:pPr>
+            <a:r>
+              <a:rPr lang="en-US" sz="1500" b="1" dirty="0">
+                <a:solidFill>
+                  <a:srgbClr val="FFFFFF"/>
+                </a:solidFill>
+                <a:latin typeface="Aptos" pitchFamily="34" charset="0"/>
+                <a:ea typeface="Aptos" pitchFamily="34" charset="-122"/>
+                <a:cs typeface="Aptos" pitchFamily="34" charset="-120"/>
+              </a:rPr>
+              <a:t>Concept</a:t>
+            </a:r>
+            <a:endParaRPr lang="en-US" sz="1500" dirty="0"/>
+          </a:p>
+        </p:txBody>
+      </p:sp>
+      <p:sp>
+        <p:nvSpPr>
+          <p:cNvPr id="15" name="Text 13"/>
+          <p:cNvSpPr/>
+          <p:nvPr/>
+        </p:nvSpPr>
+        <p:spPr>
+          <a:xfrm>
+            <a:off x="8817864" y="4187952"/>
+            <a:ext cx="201168" cy="256032"/>
+          </a:xfrm>
+          <a:prstGeom prst="rect">
+            <a:avLst/>
+          </a:prstGeom>
+          <a:noFill/>
+          <a:ln/>
+        </p:spPr>
+        <p:txBody>
+          <a:bodyPr wrap="square" lIns="0" tIns="0" rIns="0" bIns="0" rtlCol="0" anchor="ctr"/>
+          <a:lstStyle/>
+          <a:p>
+            <a:pPr algn="ctr" indent="0" marL="0">
+              <a:buNone/>
+            </a:pPr>
+            <a:r>
+              <a:rPr lang="en-US" sz="1800" b="1" dirty="0">
+                <a:solidFill>
+                  <a:srgbClr val="0068B7"/>
+                </a:solidFill>
+                <a:latin typeface="Aptos" pitchFamily="34" charset="0"/>
+                <a:ea typeface="Aptos" pitchFamily="34" charset="-122"/>
+                <a:cs typeface="Aptos" pitchFamily="34" charset="-120"/>
+              </a:rPr>
+              <a:t>â†’</a:t>
+            </a:r>
+            <a:endParaRPr lang="en-US" sz="1800" dirty="0"/>
+          </a:p>
+        </p:txBody>
+      </p:sp>
+      <p:sp>
+        <p:nvSpPr>
+          <p:cNvPr id="16" name="Shape 14"/>
+          <p:cNvSpPr/>
+          <p:nvPr/>
+        </p:nvSpPr>
+        <p:spPr>
+          <a:xfrm>
+            <a:off x="9046464" y="3977640"/>
+            <a:ext cx="972312" cy="749808"/>
+          </a:xfrm>
+          <a:prstGeom prst="roundRect">
+            <a:avLst>
+              <a:gd name="adj" fmla="val 14634"/>
+            </a:avLst>
+          </a:prstGeom>
+          <a:solidFill>
+            <a:srgbClr val="2F8A28"/>
+          </a:solidFill>
+          <a:ln w="12700">
+            <a:solidFill>
+              <a:srgbClr val="2F8A28"/>
+            </a:solidFill>
+            <a:prstDash val="solid"/>
+          </a:ln>
+        </p:spPr>
+      </p:sp>
+      <p:sp>
+        <p:nvSpPr>
+          <p:cNvPr id="17" name="Text 15"/>
+          <p:cNvSpPr/>
+          <p:nvPr/>
+        </p:nvSpPr>
+        <p:spPr>
+          <a:xfrm>
+            <a:off x="9119616" y="4169664"/>
+            <a:ext cx="826008" cy="310896"/>
+          </a:xfrm>
+          <a:prstGeom prst="rect">
+            <a:avLst/>
+          </a:prstGeom>
+          <a:noFill/>
+          <a:ln/>
+        </p:spPr>
+        <p:txBody>
+          <a:bodyPr wrap="square" lIns="0" tIns="0" rIns="0" bIns="0" rtlCol="0" anchor="ctr">
+            <a:normAutofit/>
+          </a:bodyPr>
+          <a:lstStyle/>
+          <a:p>
+            <a:pPr algn="ctr" indent="0" marL="0">
+              <a:buNone/>
+            </a:pPr>
+            <a:r>
+              <a:rPr lang="en-US" sz="1500" b="1" dirty="0">
+                <a:solidFill>
+                  <a:srgbClr val="FFFFFF"/>
+                </a:solidFill>
+                <a:latin typeface="Aptos" pitchFamily="34" charset="0"/>
+                <a:ea typeface="Aptos" pitchFamily="34" charset="-122"/>
+                <a:cs typeface="Aptos" pitchFamily="34" charset="-120"/>
+              </a:rPr>
+              <a:t>Tool</a:t>
+            </a:r>
+            <a:endParaRPr lang="en-US" sz="1500" dirty="0"/>
+          </a:p>
+        </p:txBody>
+      </p:sp>
+      <p:sp>
+        <p:nvSpPr>
+          <p:cNvPr id="18" name="Text 16"/>
+          <p:cNvSpPr/>
+          <p:nvPr/>
+        </p:nvSpPr>
+        <p:spPr>
+          <a:xfrm>
+            <a:off x="10046208" y="4187952"/>
+            <a:ext cx="201168" cy="256032"/>
+          </a:xfrm>
+          <a:prstGeom prst="rect">
+            <a:avLst/>
+          </a:prstGeom>
+          <a:noFill/>
+          <a:ln/>
+        </p:spPr>
+        <p:txBody>
+          <a:bodyPr wrap="square" lIns="0" tIns="0" rIns="0" bIns="0" rtlCol="0" anchor="ctr"/>
+          <a:lstStyle/>
+          <a:p>
+            <a:pPr algn="ctr" indent="0" marL="0">
+              <a:buNone/>
+            </a:pPr>
+            <a:r>
+              <a:rPr lang="en-US" sz="1800" b="1" dirty="0">
+                <a:solidFill>
+                  <a:srgbClr val="0068B7"/>
+                </a:solidFill>
+                <a:latin typeface="Aptos" pitchFamily="34" charset="0"/>
+                <a:ea typeface="Aptos" pitchFamily="34" charset="-122"/>
+                <a:cs typeface="Aptos" pitchFamily="34" charset="-120"/>
+              </a:rPr>
+              <a:t>â†’</a:t>
+            </a:r>
+            <a:endParaRPr lang="en-US" sz="1800" dirty="0"/>
+          </a:p>
+        </p:txBody>
+      </p:sp>
+      <p:sp>
+        <p:nvSpPr>
+          <p:cNvPr id="19" name="Shape 17"/>
+          <p:cNvSpPr/>
+          <p:nvPr/>
+        </p:nvSpPr>
+        <p:spPr>
+          <a:xfrm>
+            <a:off x="10274808" y="3977640"/>
+            <a:ext cx="972312" cy="749808"/>
+          </a:xfrm>
+          <a:prstGeom prst="roundRect">
+            <a:avLst>
+              <a:gd name="adj" fmla="val 14634"/>
+            </a:avLst>
+          </a:prstGeom>
+          <a:solidFill>
+            <a:srgbClr val="D69A2D"/>
+          </a:solidFill>
+          <a:ln w="12700">
+            <a:solidFill>
+              <a:srgbClr val="D69A2D"/>
+            </a:solidFill>
+            <a:prstDash val="solid"/>
+          </a:ln>
+        </p:spPr>
+      </p:sp>
+      <p:sp>
+        <p:nvSpPr>
+          <p:cNvPr id="20" name="Text 18"/>
+          <p:cNvSpPr/>
+          <p:nvPr/>
+        </p:nvSpPr>
+        <p:spPr>
+          <a:xfrm>
+            <a:off x="10347960" y="4169664"/>
+            <a:ext cx="826008" cy="310896"/>
+          </a:xfrm>
+          <a:prstGeom prst="rect">
+            <a:avLst/>
+          </a:prstGeom>
+          <a:noFill/>
+          <a:ln/>
+        </p:spPr>
+        <p:txBody>
+          <a:bodyPr wrap="square" lIns="0" tIns="0" rIns="0" bIns="0" rtlCol="0" anchor="ctr">
+            <a:normAutofit/>
+          </a:bodyPr>
+          <a:lstStyle/>
+          <a:p>
+            <a:pPr algn="ctr" indent="0" marL="0">
+              <a:buNone/>
+            </a:pPr>
+            <a:r>
+              <a:rPr lang="en-US" sz="1500" b="1" dirty="0">
+                <a:solidFill>
+                  <a:srgbClr val="FFFFFF"/>
+                </a:solidFill>
+                <a:latin typeface="Aptos" pitchFamily="34" charset="0"/>
+                <a:ea typeface="Aptos" pitchFamily="34" charset="-122"/>
+                <a:cs typeface="Aptos" pitchFamily="34" charset="-120"/>
+              </a:rPr>
+              <a:t>Artifact</a:t>
+            </a:r>
+            <a:endParaRPr lang="en-US" sz="1500" dirty="0"/>
           </a:p>
         </p:txBody>
       </p:sp>
@@ -11581,7 +12646,7 @@
                 <a:ea typeface="Aptos" pitchFamily="34" charset="-122"/>
                 <a:cs typeface="Aptos" pitchFamily="34" charset="-120"/>
               </a:rPr>
-              <a:t>© Paula Soper</a:t>
+              <a:t>Â© Paula Soper</a:t>
             </a:r>
             <a:endParaRPr lang="en-US" sz="800" dirty="0"/>
           </a:p>
@@ -11589,7 +12654,46 @@
       </p:sp>
       <p:sp>
         <p:nvSpPr>
-          <p:cNvPr id="7" name="Shape 5"/>
+          <p:cNvPr id="7" name="Text 5"/>
+          <p:cNvSpPr/>
+          <p:nvPr/>
+        </p:nvSpPr>
+        <p:spPr>
+          <a:xfrm>
+            <a:off x="11137392" y="6510528"/>
+            <a:ext cx="411480" cy="201168"/>
+          </a:xfrm>
+          <a:prstGeom prst="rect">
+            <a:avLst/>
+          </a:prstGeom>
+          <a:noFill/>
+          <a:ln/>
+        </p:spPr>
+        <p:txBody>
+          <a:bodyPr wrap="square" lIns="0" tIns="0" rIns="0" bIns="0" rtlCol="0" anchor="ctr"/>
+          <a:lstStyle/>
+          <a:p>
+            <a:pPr algn="r" indent="0" marL="0">
+              <a:buNone/>
+            </a:pPr>
+            <a:r>
+              <a:rPr lang="en-US" sz="900" dirty="0">
+                <a:solidFill>
+                  <a:srgbClr val="5F7181"/>
+                </a:solidFill>
+                <a:latin typeface="Aptos" pitchFamily="34" charset="0"/>
+                <a:ea typeface="Aptos" pitchFamily="34" charset="-122"/>
+                <a:cs typeface="Aptos" pitchFamily="34" charset="-120"/>
+              </a:rPr>
+              <a:t>5</a:t>
+            </a:r>
+            <a:endParaRPr lang="en-US" sz="900" dirty="0"/>
+          </a:p>
+        </p:txBody>
+      </p:sp>
+      <p:sp>
+        <p:nvSpPr>
+          <p:cNvPr id="8" name="Shape 6"/>
           <p:cNvSpPr/>
           <p:nvPr/>
         </p:nvSpPr>
@@ -11614,7 +12718,7 @@
       </p:sp>
       <p:sp>
         <p:nvSpPr>
-          <p:cNvPr id="8" name="Text 6"/>
+          <p:cNvPr id="9" name="Text 7"/>
           <p:cNvSpPr/>
           <p:nvPr/>
         </p:nvSpPr>
@@ -11653,14 +12757,14 @@
       </p:sp>
       <p:sp>
         <p:nvSpPr>
-          <p:cNvPr id="9" name="Text 7"/>
+          <p:cNvPr id="10" name="Text 8"/>
           <p:cNvSpPr/>
           <p:nvPr/>
         </p:nvSpPr>
         <p:spPr>
           <a:xfrm>
             <a:off x="640080" y="621792"/>
-            <a:ext cx="10881360" cy="566928"/>
+            <a:ext cx="10881360" cy="713232"/>
           </a:xfrm>
           <a:prstGeom prst="rect">
             <a:avLst/>
@@ -11678,7 +12782,7 @@
               <a:buNone/>
             </a:pPr>
             <a:r>
-              <a:rPr lang="en-US" sz="2700" b="1" dirty="0">
+              <a:rPr lang="en-US" sz="3400" b="1" dirty="0">
                 <a:solidFill>
                   <a:srgbClr val="003A63"/>
                 </a:solidFill>
@@ -11688,20 +12792,20 @@
               </a:rPr>
               <a:t>Learning Objectives</a:t>
             </a:r>
-            <a:endParaRPr lang="en-US" sz="2700" dirty="0"/>
-          </a:p>
-        </p:txBody>
-      </p:sp>
-      <p:sp>
-        <p:nvSpPr>
-          <p:cNvPr id="10" name="Text 8"/>
-          <p:cNvSpPr/>
-          <p:nvPr/>
-        </p:nvSpPr>
-        <p:spPr>
-          <a:xfrm>
-            <a:off x="868680" y="1417320"/>
-            <a:ext cx="6675120" cy="4434840"/>
+            <a:endParaRPr lang="en-US" sz="3400" dirty="0"/>
+          </a:p>
+        </p:txBody>
+      </p:sp>
+      <p:sp>
+        <p:nvSpPr>
+          <p:cNvPr id="11" name="Text 9"/>
+          <p:cNvSpPr/>
+          <p:nvPr/>
+        </p:nvSpPr>
+        <p:spPr>
+          <a:xfrm>
+            <a:off x="868680" y="1508760"/>
+            <a:ext cx="6537960" cy="4160520"/>
           </a:xfrm>
           <a:prstGeom prst="rect">
             <a:avLst/>
@@ -11716,7 +12820,7 @@
           <a:lstStyle/>
           <a:p>
             <a:r>
-              <a:rPr lang="en-US" sz="1700" dirty="0">
+              <a:rPr lang="en-US" sz="2100" dirty="0">
                 <a:solidFill>
                   <a:srgbClr val="17364A"/>
                 </a:solidFill>
@@ -11726,11 +12830,11 @@
               </a:rPr>
               <a:t>Explain why transparency reporting matters for public health AI.</a:t>
             </a:r>
-            <a:endParaRPr lang="en-US" sz="1700" dirty="0"/>
-          </a:p>
-          <a:p>
-            <a:r>
-              <a:rPr lang="en-US" sz="1700" dirty="0">
+            <a:endParaRPr lang="en-US" sz="2100" dirty="0"/>
+          </a:p>
+          <a:p>
+            <a:r>
+              <a:rPr lang="en-US" sz="2100" dirty="0">
                 <a:solidFill>
                   <a:srgbClr val="17364A"/>
                 </a:solidFill>
@@ -11740,11 +12844,11 @@
               </a:rPr>
               <a:t>Identify which AI uses should be disclosed internally, publicly, or to specific partners.</a:t>
             </a:r>
-            <a:endParaRPr lang="en-US" sz="1700" dirty="0"/>
-          </a:p>
-          <a:p>
-            <a:r>
-              <a:rPr lang="en-US" sz="1700" dirty="0">
+            <a:endParaRPr lang="en-US" sz="2100" dirty="0"/>
+          </a:p>
+          <a:p>
+            <a:r>
+              <a:rPr lang="en-US" sz="2100" dirty="0">
                 <a:solidFill>
                   <a:srgbClr val="17364A"/>
                 </a:solidFill>
@@ -11754,27 +12858,13 @@
               </a:rPr>
               <a:t>Develop contents for an AI transparency notice or AI use registry.</a:t>
             </a:r>
-            <a:endParaRPr lang="en-US" sz="1700" dirty="0"/>
-          </a:p>
-          <a:p>
-            <a:r>
-              <a:rPr lang="en-US" sz="1700" dirty="0">
-                <a:solidFill>
-                  <a:srgbClr val="17364A"/>
-                </a:solidFill>
-                <a:latin typeface="Aptos" pitchFamily="34" charset="0"/>
-                <a:ea typeface="Aptos" pitchFamily="34" charset="-122"/>
-                <a:cs typeface="Aptos" pitchFamily="34" charset="-120"/>
-              </a:rPr>
-              <a:t>Balance transparency with privacy, security, confidentiality, and operational sensitivity.</a:t>
-            </a:r>
-            <a:endParaRPr lang="en-US" sz="1700" dirty="0"/>
-          </a:p>
-        </p:txBody>
-      </p:sp>
-      <p:sp>
-        <p:nvSpPr>
-          <p:cNvPr id="11" name="Shape 9"/>
+            <a:endParaRPr lang="en-US" sz="2100" dirty="0"/>
+          </a:p>
+        </p:txBody>
+      </p:sp>
+      <p:sp>
+        <p:nvSpPr>
+          <p:cNvPr id="12" name="Shape 10"/>
           <p:cNvSpPr/>
           <p:nvPr/>
         </p:nvSpPr>
@@ -11801,14 +12891,14 @@
       </p:sp>
       <p:sp>
         <p:nvSpPr>
-          <p:cNvPr id="12" name="Text 10"/>
+          <p:cNvPr id="13" name="Text 11"/>
           <p:cNvSpPr/>
           <p:nvPr/>
         </p:nvSpPr>
         <p:spPr>
           <a:xfrm>
             <a:off x="8074152" y="1563624"/>
-            <a:ext cx="2825496" cy="201168"/>
+            <a:ext cx="2825496" cy="256032"/>
           </a:xfrm>
           <a:prstGeom prst="rect">
             <a:avLst/>
@@ -11824,7 +12914,7 @@
               <a:buNone/>
             </a:pPr>
             <a:r>
-              <a:rPr lang="en-US" sz="950" b="1" dirty="0">
+              <a:rPr lang="en-US" sz="1300" b="1" dirty="0">
                 <a:solidFill>
                   <a:srgbClr val="0068B7"/>
                 </a:solidFill>
@@ -11834,20 +12924,20 @@
               </a:rPr>
               <a:t>Key idea</a:t>
             </a:r>
-            <a:endParaRPr lang="en-US" sz="950" dirty="0"/>
-          </a:p>
-        </p:txBody>
-      </p:sp>
-      <p:sp>
-        <p:nvSpPr>
-          <p:cNvPr id="13" name="Text 11"/>
-          <p:cNvSpPr/>
-          <p:nvPr/>
-        </p:nvSpPr>
-        <p:spPr>
-          <a:xfrm>
-            <a:off x="8074152" y="1856232"/>
-            <a:ext cx="2825496" cy="1261872"/>
+            <a:endParaRPr lang="en-US" sz="1300" dirty="0"/>
+          </a:p>
+        </p:txBody>
+      </p:sp>
+      <p:sp>
+        <p:nvSpPr>
+          <p:cNvPr id="14" name="Text 12"/>
+          <p:cNvSpPr/>
+          <p:nvPr/>
+        </p:nvSpPr>
+        <p:spPr>
+          <a:xfrm>
+            <a:off x="8074152" y="1920240"/>
+            <a:ext cx="2825496" cy="1188720"/>
           </a:xfrm>
           <a:prstGeom prst="rect">
             <a:avLst/>
@@ -11865,7 +12955,7 @@
               <a:buNone/>
             </a:pPr>
             <a:r>
-              <a:rPr lang="en-US" sz="1250" dirty="0">
+              <a:rPr lang="en-US" sz="1550" dirty="0">
                 <a:solidFill>
                   <a:srgbClr val="17364A"/>
                 </a:solidFill>
@@ -11875,13 +12965,13 @@
               </a:rPr>
               <a:t>Explain why transparency reporting matters for public health AI.</a:t>
             </a:r>
-            <a:endParaRPr lang="en-US" sz="1250" dirty="0"/>
-          </a:p>
-        </p:txBody>
-      </p:sp>
-      <p:sp>
-        <p:nvSpPr>
-          <p:cNvPr id="14" name="Shape 12"/>
+            <a:endParaRPr lang="en-US" sz="1550" dirty="0"/>
+          </a:p>
+        </p:txBody>
+      </p:sp>
+      <p:sp>
+        <p:nvSpPr>
+          <p:cNvPr id="15" name="Shape 13"/>
           <p:cNvSpPr/>
           <p:nvPr/>
         </p:nvSpPr>
@@ -11908,14 +12998,14 @@
       </p:sp>
       <p:sp>
         <p:nvSpPr>
-          <p:cNvPr id="15" name="Text 13"/>
+          <p:cNvPr id="16" name="Text 14"/>
           <p:cNvSpPr/>
           <p:nvPr/>
         </p:nvSpPr>
         <p:spPr>
           <a:xfrm>
             <a:off x="8074152" y="3666744"/>
-            <a:ext cx="2825496" cy="201168"/>
+            <a:ext cx="2825496" cy="256032"/>
           </a:xfrm>
           <a:prstGeom prst="rect">
             <a:avLst/>
@@ -11931,7 +13021,7 @@
               <a:buNone/>
             </a:pPr>
             <a:r>
-              <a:rPr lang="en-US" sz="950" b="1" dirty="0">
+              <a:rPr lang="en-US" sz="1300" b="1" dirty="0">
                 <a:solidFill>
                   <a:srgbClr val="0068B7"/>
                 </a:solidFill>
@@ -11941,20 +13031,20 @@
               </a:rPr>
               <a:t>Use this for</a:t>
             </a:r>
-            <a:endParaRPr lang="en-US" sz="950" dirty="0"/>
-          </a:p>
-        </p:txBody>
-      </p:sp>
-      <p:sp>
-        <p:nvSpPr>
-          <p:cNvPr id="16" name="Text 14"/>
-          <p:cNvSpPr/>
-          <p:nvPr/>
-        </p:nvSpPr>
-        <p:spPr>
-          <a:xfrm>
-            <a:off x="8074152" y="3959352"/>
-            <a:ext cx="2825496" cy="1170432"/>
+            <a:endParaRPr lang="en-US" sz="1300" dirty="0"/>
+          </a:p>
+        </p:txBody>
+      </p:sp>
+      <p:sp>
+        <p:nvSpPr>
+          <p:cNvPr id="17" name="Text 15"/>
+          <p:cNvSpPr/>
+          <p:nvPr/>
+        </p:nvSpPr>
+        <p:spPr>
+          <a:xfrm>
+            <a:off x="8074152" y="4023360"/>
+            <a:ext cx="2825496" cy="1097280"/>
           </a:xfrm>
           <a:prstGeom prst="rect">
             <a:avLst/>
@@ -11972,7 +13062,7 @@
               <a:buNone/>
             </a:pPr>
             <a:r>
-              <a:rPr lang="en-US" sz="1250" dirty="0">
+              <a:rPr lang="en-US" sz="1550" dirty="0">
                 <a:solidFill>
                   <a:srgbClr val="17364A"/>
                 </a:solidFill>
@@ -11982,7 +13072,7 @@
               </a:rPr>
               <a:t>Connect the concept to public health decisions, safeguards, documentation, or implementation work.</a:t>
             </a:r>
-            <a:endParaRPr lang="en-US" sz="1250" dirty="0"/>
+            <a:endParaRPr lang="en-US" sz="1550" dirty="0"/>
           </a:p>
         </p:txBody>
       </p:sp>
@@ -12179,7 +13269,7 @@
                 <a:ea typeface="Aptos" pitchFamily="34" charset="-122"/>
                 <a:cs typeface="Aptos" pitchFamily="34" charset="-120"/>
               </a:rPr>
-              <a:t>© Paula Soper</a:t>
+              <a:t>Â© Paula Soper</a:t>
             </a:r>
             <a:endParaRPr lang="en-US" sz="800" dirty="0"/>
           </a:p>
@@ -12187,7 +13277,46 @@
       </p:sp>
       <p:sp>
         <p:nvSpPr>
-          <p:cNvPr id="7" name="Shape 5"/>
+          <p:cNvPr id="7" name="Text 5"/>
+          <p:cNvSpPr/>
+          <p:nvPr/>
+        </p:nvSpPr>
+        <p:spPr>
+          <a:xfrm>
+            <a:off x="11137392" y="6510528"/>
+            <a:ext cx="411480" cy="201168"/>
+          </a:xfrm>
+          <a:prstGeom prst="rect">
+            <a:avLst/>
+          </a:prstGeom>
+          <a:noFill/>
+          <a:ln/>
+        </p:spPr>
+        <p:txBody>
+          <a:bodyPr wrap="square" lIns="0" tIns="0" rIns="0" bIns="0" rtlCol="0" anchor="ctr"/>
+          <a:lstStyle/>
+          <a:p>
+            <a:pPr algn="r" indent="0" marL="0">
+              <a:buNone/>
+            </a:pPr>
+            <a:r>
+              <a:rPr lang="en-US" sz="900" dirty="0">
+                <a:solidFill>
+                  <a:srgbClr val="5F7181"/>
+                </a:solidFill>
+                <a:latin typeface="Aptos" pitchFamily="34" charset="0"/>
+                <a:ea typeface="Aptos" pitchFamily="34" charset="-122"/>
+                <a:cs typeface="Aptos" pitchFamily="34" charset="-120"/>
+              </a:rPr>
+              <a:t>6</a:t>
+            </a:r>
+            <a:endParaRPr lang="en-US" sz="900" dirty="0"/>
+          </a:p>
+        </p:txBody>
+      </p:sp>
+      <p:sp>
+        <p:nvSpPr>
+          <p:cNvPr id="8" name="Shape 6"/>
           <p:cNvSpPr/>
           <p:nvPr/>
         </p:nvSpPr>
@@ -12212,7 +13341,7 @@
       </p:sp>
       <p:sp>
         <p:nvSpPr>
-          <p:cNvPr id="8" name="Text 6"/>
+          <p:cNvPr id="9" name="Text 7"/>
           <p:cNvSpPr/>
           <p:nvPr/>
         </p:nvSpPr>
@@ -12251,14 +13380,14 @@
       </p:sp>
       <p:sp>
         <p:nvSpPr>
-          <p:cNvPr id="9" name="Text 7"/>
+          <p:cNvPr id="10" name="Text 8"/>
           <p:cNvSpPr/>
           <p:nvPr/>
         </p:nvSpPr>
         <p:spPr>
           <a:xfrm>
             <a:off x="640080" y="621792"/>
-            <a:ext cx="10881360" cy="566928"/>
+            <a:ext cx="10881360" cy="713232"/>
           </a:xfrm>
           <a:prstGeom prst="rect">
             <a:avLst/>
@@ -12276,7 +13405,7 @@
               <a:buNone/>
             </a:pPr>
             <a:r>
-              <a:rPr lang="en-US" sz="2700" b="1" dirty="0">
+              <a:rPr lang="en-US" sz="3400" b="1" dirty="0">
                 <a:solidFill>
                   <a:srgbClr val="003A63"/>
                 </a:solidFill>
@@ -12286,20 +13415,20 @@
               </a:rPr>
               <a:t>Module Overview</a:t>
             </a:r>
-            <a:endParaRPr lang="en-US" sz="2700" dirty="0"/>
-          </a:p>
-        </p:txBody>
-      </p:sp>
-      <p:sp>
-        <p:nvSpPr>
-          <p:cNvPr id="10" name="Text 8"/>
-          <p:cNvSpPr/>
-          <p:nvPr/>
-        </p:nvSpPr>
-        <p:spPr>
-          <a:xfrm>
-            <a:off x="868680" y="1417320"/>
-            <a:ext cx="6675120" cy="4434840"/>
+            <a:endParaRPr lang="en-US" sz="3400" dirty="0"/>
+          </a:p>
+        </p:txBody>
+      </p:sp>
+      <p:sp>
+        <p:nvSpPr>
+          <p:cNvPr id="11" name="Text 9"/>
+          <p:cNvSpPr/>
+          <p:nvPr/>
+        </p:nvSpPr>
+        <p:spPr>
+          <a:xfrm>
+            <a:off x="868680" y="1508760"/>
+            <a:ext cx="6537960" cy="4160520"/>
           </a:xfrm>
           <a:prstGeom prst="rect">
             <a:avLst/>
@@ -12314,7 +13443,7 @@
           <a:lstStyle/>
           <a:p>
             <a:r>
-              <a:rPr lang="en-US" sz="1700" dirty="0">
+              <a:rPr lang="en-US" sz="2100" dirty="0">
                 <a:solidFill>
                   <a:srgbClr val="17364A"/>
                 </a:solidFill>
@@ -12322,13 +13451,13 @@
                 <a:ea typeface="Aptos" pitchFamily="34" charset="-122"/>
                 <a:cs typeface="Aptos" pitchFamily="34" charset="-120"/>
               </a:rPr>
-              <a:t>Public health agencies have a responsibility to explain how AI is used in ways that affect public services, public.</a:t>
-            </a:r>
-            <a:endParaRPr lang="en-US" sz="1700" dirty="0"/>
-          </a:p>
-          <a:p>
-            <a:r>
-              <a:rPr lang="en-US" sz="1700" dirty="0">
+              <a:t>Public health agencies have a responsibility to explain how AI is used in ways that affect public.</a:t>
+            </a:r>
+            <a:endParaRPr lang="en-US" sz="2100" dirty="0"/>
+          </a:p>
+          <a:p>
+            <a:r>
+              <a:rPr lang="en-US" sz="2100" dirty="0">
                 <a:solidFill>
                   <a:srgbClr val="17364A"/>
                 </a:solidFill>
@@ -12336,13 +13465,13 @@
                 <a:ea typeface="Aptos" pitchFamily="34" charset="-122"/>
                 <a:cs typeface="Aptos" pitchFamily="34" charset="-120"/>
               </a:rPr>
-              <a:t>Transparency reporting helps agencies communicate what AI tools are in use, why they are used, what safeguards are in.</a:t>
-            </a:r>
-            <a:endParaRPr lang="en-US" sz="1700" dirty="0"/>
-          </a:p>
-          <a:p>
-            <a:r>
-              <a:rPr lang="en-US" sz="1700" dirty="0">
+              <a:t>Transparency reporting helps agencies communicate what AI tools are in use, why they are used, what.</a:t>
+            </a:r>
+            <a:endParaRPr lang="en-US" sz="2100" dirty="0"/>
+          </a:p>
+          <a:p>
+            <a:r>
+              <a:rPr lang="en-US" sz="2100" dirty="0">
                 <a:solidFill>
                   <a:srgbClr val="17364A"/>
                 </a:solidFill>
@@ -12352,27 +13481,13 @@
               </a:rPr>
               <a:t>This module helps leaders design AI transparency practices that are meaningful, not performative.</a:t>
             </a:r>
-            <a:endParaRPr lang="en-US" sz="1700" dirty="0"/>
-          </a:p>
-          <a:p>
-            <a:r>
-              <a:rPr lang="en-US" sz="1700" dirty="0">
-                <a:solidFill>
-                  <a:srgbClr val="17364A"/>
-                </a:solidFill>
-                <a:latin typeface="Aptos" pitchFamily="34" charset="0"/>
-                <a:ea typeface="Aptos" pitchFamily="34" charset="-122"/>
-                <a:cs typeface="Aptos" pitchFamily="34" charset="-120"/>
-              </a:rPr>
-              <a:t>Transparency should be understandable, accessible, and proportionate to risk.</a:t>
-            </a:r>
-            <a:endParaRPr lang="en-US" sz="1700" dirty="0"/>
-          </a:p>
-        </p:txBody>
-      </p:sp>
-      <p:sp>
-        <p:nvSpPr>
-          <p:cNvPr id="11" name="Shape 9"/>
+            <a:endParaRPr lang="en-US" sz="2100" dirty="0"/>
+          </a:p>
+        </p:txBody>
+      </p:sp>
+      <p:sp>
+        <p:nvSpPr>
+          <p:cNvPr id="12" name="Shape 10"/>
           <p:cNvSpPr/>
           <p:nvPr/>
         </p:nvSpPr>
@@ -12399,14 +13514,14 @@
       </p:sp>
       <p:sp>
         <p:nvSpPr>
-          <p:cNvPr id="12" name="Text 10"/>
+          <p:cNvPr id="13" name="Text 11"/>
           <p:cNvSpPr/>
           <p:nvPr/>
         </p:nvSpPr>
         <p:spPr>
           <a:xfrm>
             <a:off x="8074152" y="1563624"/>
-            <a:ext cx="2825496" cy="201168"/>
+            <a:ext cx="2825496" cy="256032"/>
           </a:xfrm>
           <a:prstGeom prst="rect">
             <a:avLst/>
@@ -12422,7 +13537,7 @@
               <a:buNone/>
             </a:pPr>
             <a:r>
-              <a:rPr lang="en-US" sz="950" b="1" dirty="0">
+              <a:rPr lang="en-US" sz="1300" b="1" dirty="0">
                 <a:solidFill>
                   <a:srgbClr val="0068B7"/>
                 </a:solidFill>
@@ -12432,20 +13547,20 @@
               </a:rPr>
               <a:t>Key idea</a:t>
             </a:r>
-            <a:endParaRPr lang="en-US" sz="950" dirty="0"/>
-          </a:p>
-        </p:txBody>
-      </p:sp>
-      <p:sp>
-        <p:nvSpPr>
-          <p:cNvPr id="13" name="Text 11"/>
-          <p:cNvSpPr/>
-          <p:nvPr/>
-        </p:nvSpPr>
-        <p:spPr>
-          <a:xfrm>
-            <a:off x="8074152" y="1856232"/>
-            <a:ext cx="2825496" cy="1261872"/>
+            <a:endParaRPr lang="en-US" sz="1300" dirty="0"/>
+          </a:p>
+        </p:txBody>
+      </p:sp>
+      <p:sp>
+        <p:nvSpPr>
+          <p:cNvPr id="14" name="Text 12"/>
+          <p:cNvSpPr/>
+          <p:nvPr/>
+        </p:nvSpPr>
+        <p:spPr>
+          <a:xfrm>
+            <a:off x="8074152" y="1920240"/>
+            <a:ext cx="2825496" cy="1188720"/>
           </a:xfrm>
           <a:prstGeom prst="rect">
             <a:avLst/>
@@ -12463,7 +13578,7 @@
               <a:buNone/>
             </a:pPr>
             <a:r>
-              <a:rPr lang="en-US" sz="1250" dirty="0">
+              <a:rPr lang="en-US" sz="1550" dirty="0">
                 <a:solidFill>
                   <a:srgbClr val="17364A"/>
                 </a:solidFill>
@@ -12471,15 +13586,15 @@
                 <a:ea typeface="Aptos" pitchFamily="34" charset="-122"/>
                 <a:cs typeface="Aptos" pitchFamily="34" charset="-120"/>
               </a:rPr>
-              <a:t>Public health agencies have a responsibility to explain how AI is used in ways that affect public services, public.</a:t>
-            </a:r>
-            <a:endParaRPr lang="en-US" sz="1250" dirty="0"/>
-          </a:p>
-        </p:txBody>
-      </p:sp>
-      <p:sp>
-        <p:nvSpPr>
-          <p:cNvPr id="14" name="Shape 12"/>
+              <a:t>Public health agencies have a responsibility to explain how AI is used in ways that affect public.</a:t>
+            </a:r>
+            <a:endParaRPr lang="en-US" sz="1550" dirty="0"/>
+          </a:p>
+        </p:txBody>
+      </p:sp>
+      <p:sp>
+        <p:nvSpPr>
+          <p:cNvPr id="15" name="Shape 13"/>
           <p:cNvSpPr/>
           <p:nvPr/>
         </p:nvSpPr>
@@ -12506,14 +13621,14 @@
       </p:sp>
       <p:sp>
         <p:nvSpPr>
-          <p:cNvPr id="15" name="Text 13"/>
+          <p:cNvPr id="16" name="Text 14"/>
           <p:cNvSpPr/>
           <p:nvPr/>
         </p:nvSpPr>
         <p:spPr>
           <a:xfrm>
             <a:off x="8074152" y="3666744"/>
-            <a:ext cx="2825496" cy="201168"/>
+            <a:ext cx="2825496" cy="256032"/>
           </a:xfrm>
           <a:prstGeom prst="rect">
             <a:avLst/>
@@ -12529,7 +13644,7 @@
               <a:buNone/>
             </a:pPr>
             <a:r>
-              <a:rPr lang="en-US" sz="950" b="1" dirty="0">
+              <a:rPr lang="en-US" sz="1300" b="1" dirty="0">
                 <a:solidFill>
                   <a:srgbClr val="0068B7"/>
                 </a:solidFill>
@@ -12539,20 +13654,20 @@
               </a:rPr>
               <a:t>Use this for</a:t>
             </a:r>
-            <a:endParaRPr lang="en-US" sz="950" dirty="0"/>
-          </a:p>
-        </p:txBody>
-      </p:sp>
-      <p:sp>
-        <p:nvSpPr>
-          <p:cNvPr id="16" name="Text 14"/>
-          <p:cNvSpPr/>
-          <p:nvPr/>
-        </p:nvSpPr>
-        <p:spPr>
-          <a:xfrm>
-            <a:off x="8074152" y="3959352"/>
-            <a:ext cx="2825496" cy="1170432"/>
+            <a:endParaRPr lang="en-US" sz="1300" dirty="0"/>
+          </a:p>
+        </p:txBody>
+      </p:sp>
+      <p:sp>
+        <p:nvSpPr>
+          <p:cNvPr id="17" name="Text 15"/>
+          <p:cNvSpPr/>
+          <p:nvPr/>
+        </p:nvSpPr>
+        <p:spPr>
+          <a:xfrm>
+            <a:off x="8074152" y="4023360"/>
+            <a:ext cx="2825496" cy="1097280"/>
           </a:xfrm>
           <a:prstGeom prst="rect">
             <a:avLst/>
@@ -12570,7 +13685,7 @@
               <a:buNone/>
             </a:pPr>
             <a:r>
-              <a:rPr lang="en-US" sz="1250" dirty="0">
+              <a:rPr lang="en-US" sz="1550" dirty="0">
                 <a:solidFill>
                   <a:srgbClr val="17364A"/>
                 </a:solidFill>
@@ -12580,7 +13695,7 @@
               </a:rPr>
               <a:t>Connect the concept to public health decisions, safeguards, documentation, or implementation work.</a:t>
             </a:r>
-            <a:endParaRPr lang="en-US" sz="1250" dirty="0"/>
+            <a:endParaRPr lang="en-US" sz="1550" dirty="0"/>
           </a:p>
         </p:txBody>
       </p:sp>
@@ -12777,7 +13892,7 @@
                 <a:ea typeface="Aptos" pitchFamily="34" charset="-122"/>
                 <a:cs typeface="Aptos" pitchFamily="34" charset="-120"/>
               </a:rPr>
-              <a:t>© Paula Soper</a:t>
+              <a:t>Â© Paula Soper</a:t>
             </a:r>
             <a:endParaRPr lang="en-US" sz="800" dirty="0"/>
           </a:p>
@@ -12785,7 +13900,46 @@
       </p:sp>
       <p:sp>
         <p:nvSpPr>
-          <p:cNvPr id="7" name="Shape 5"/>
+          <p:cNvPr id="7" name="Text 5"/>
+          <p:cNvSpPr/>
+          <p:nvPr/>
+        </p:nvSpPr>
+        <p:spPr>
+          <a:xfrm>
+            <a:off x="11137392" y="6510528"/>
+            <a:ext cx="411480" cy="201168"/>
+          </a:xfrm>
+          <a:prstGeom prst="rect">
+            <a:avLst/>
+          </a:prstGeom>
+          <a:noFill/>
+          <a:ln/>
+        </p:spPr>
+        <p:txBody>
+          <a:bodyPr wrap="square" lIns="0" tIns="0" rIns="0" bIns="0" rtlCol="0" anchor="ctr"/>
+          <a:lstStyle/>
+          <a:p>
+            <a:pPr algn="r" indent="0" marL="0">
+              <a:buNone/>
+            </a:pPr>
+            <a:r>
+              <a:rPr lang="en-US" sz="900" dirty="0">
+                <a:solidFill>
+                  <a:srgbClr val="5F7181"/>
+                </a:solidFill>
+                <a:latin typeface="Aptos" pitchFamily="34" charset="0"/>
+                <a:ea typeface="Aptos" pitchFamily="34" charset="-122"/>
+                <a:cs typeface="Aptos" pitchFamily="34" charset="-120"/>
+              </a:rPr>
+              <a:t>7</a:t>
+            </a:r>
+            <a:endParaRPr lang="en-US" sz="900" dirty="0"/>
+          </a:p>
+        </p:txBody>
+      </p:sp>
+      <p:sp>
+        <p:nvSpPr>
+          <p:cNvPr id="8" name="Shape 6"/>
           <p:cNvSpPr/>
           <p:nvPr/>
         </p:nvSpPr>
@@ -12810,7 +13964,7 @@
       </p:sp>
       <p:sp>
         <p:nvSpPr>
-          <p:cNvPr id="8" name="Text 6"/>
+          <p:cNvPr id="9" name="Text 7"/>
           <p:cNvSpPr/>
           <p:nvPr/>
         </p:nvSpPr>
@@ -12849,14 +14003,14 @@
       </p:sp>
       <p:sp>
         <p:nvSpPr>
-          <p:cNvPr id="9" name="Text 7"/>
+          <p:cNvPr id="10" name="Text 8"/>
           <p:cNvSpPr/>
           <p:nvPr/>
         </p:nvSpPr>
         <p:spPr>
           <a:xfrm>
             <a:off x="640080" y="621792"/>
-            <a:ext cx="10881360" cy="566928"/>
+            <a:ext cx="10881360" cy="713232"/>
           </a:xfrm>
           <a:prstGeom prst="rect">
             <a:avLst/>
@@ -12874,7 +14028,7 @@
               <a:buNone/>
             </a:pPr>
             <a:r>
-              <a:rPr lang="en-US" sz="2700" b="1" dirty="0">
+              <a:rPr lang="en-US" sz="3400" b="1" dirty="0">
                 <a:solidFill>
                   <a:srgbClr val="003A63"/>
                 </a:solidFill>
@@ -12884,20 +14038,20 @@
               </a:rPr>
               <a:t>Jurisdiction and Agency Policy Note</a:t>
             </a:r>
-            <a:endParaRPr lang="en-US" sz="2700" dirty="0"/>
-          </a:p>
-        </p:txBody>
-      </p:sp>
-      <p:sp>
-        <p:nvSpPr>
-          <p:cNvPr id="10" name="Text 8"/>
-          <p:cNvSpPr/>
-          <p:nvPr/>
-        </p:nvSpPr>
-        <p:spPr>
-          <a:xfrm>
-            <a:off x="868680" y="1417320"/>
-            <a:ext cx="6675120" cy="4434840"/>
+            <a:endParaRPr lang="en-US" sz="3400" dirty="0"/>
+          </a:p>
+        </p:txBody>
+      </p:sp>
+      <p:sp>
+        <p:nvSpPr>
+          <p:cNvPr id="11" name="Text 9"/>
+          <p:cNvSpPr/>
+          <p:nvPr/>
+        </p:nvSpPr>
+        <p:spPr>
+          <a:xfrm>
+            <a:off x="868680" y="1508760"/>
+            <a:ext cx="6537960" cy="4160520"/>
           </a:xfrm>
           <a:prstGeom prst="rect">
             <a:avLst/>
@@ -12912,7 +14066,7 @@
           <a:lstStyle/>
           <a:p>
             <a:r>
-              <a:rPr lang="en-US" sz="1700" dirty="0">
+              <a:rPr lang="en-US" sz="2100" dirty="0">
                 <a:solidFill>
                   <a:srgbClr val="17364A"/>
                 </a:solidFill>
@@ -12922,11 +14076,11 @@
               </a:rPr>
               <a:t>This module provides national-level training guidance for public health agencies and partners.</a:t>
             </a:r>
-            <a:endParaRPr lang="en-US" sz="1700" dirty="0"/>
-          </a:p>
-          <a:p>
-            <a:r>
-              <a:rPr lang="en-US" sz="1700" dirty="0">
+            <a:endParaRPr lang="en-US" sz="2100" dirty="0"/>
+          </a:p>
+          <a:p>
+            <a:r>
+              <a:rPr lang="en-US" sz="2100" dirty="0">
                 <a:solidFill>
                   <a:srgbClr val="17364A"/>
                 </a:solidFill>
@@ -12934,13 +14088,13 @@
                 <a:ea typeface="Aptos" pitchFamily="34" charset="-122"/>
                 <a:cs typeface="Aptos" pitchFamily="34" charset="-120"/>
               </a:rPr>
-              <a:t>It is not legal advice and does not replace review by agency legal counsel, privacy officers, procurement officials, civil.</a:t>
-            </a:r>
-            <a:endParaRPr lang="en-US" sz="1700" dirty="0"/>
-          </a:p>
-          <a:p>
-            <a:r>
-              <a:rPr lang="en-US" sz="1700" dirty="0">
+              <a:t>It is not legal advice and does not replace review by agency legal counsel, privacy officers,.</a:t>
+            </a:r>
+            <a:endParaRPr lang="en-US" sz="2100" dirty="0"/>
+          </a:p>
+          <a:p>
+            <a:r>
+              <a:rPr lang="en-US" sz="2100" dirty="0">
                 <a:solidFill>
                   <a:srgbClr val="17364A"/>
                 </a:solidFill>
@@ -12948,29 +14102,15 @@
                 <a:ea typeface="Aptos" pitchFamily="34" charset="-122"/>
                 <a:cs typeface="Aptos" pitchFamily="34" charset="-120"/>
               </a:rPr>
-              <a:t>Requirements may vary by state, locality, territory, Tribe, agency, funding source, data-sharing agreement, emergency.</a:t>
-            </a:r>
-            <a:endParaRPr lang="en-US" sz="1700" dirty="0"/>
-          </a:p>
-          <a:p>
-            <a:r>
-              <a:rPr lang="en-US" sz="1700" dirty="0">
-                <a:solidFill>
-                  <a:srgbClr val="17364A"/>
-                </a:solidFill>
-                <a:latin typeface="Aptos" pitchFamily="34" charset="0"/>
-                <a:ea typeface="Aptos" pitchFamily="34" charset="-122"/>
-                <a:cs typeface="Aptos" pitchFamily="34" charset="-120"/>
-              </a:rPr>
-              <a:t>Learners should use this module to identify the issues that require review and should confirm applicable requirements.</a:t>
-            </a:r>
-            <a:endParaRPr lang="en-US" sz="1700" dirty="0"/>
-          </a:p>
-        </p:txBody>
-      </p:sp>
-      <p:sp>
-        <p:nvSpPr>
-          <p:cNvPr id="11" name="Shape 9"/>
+              <a:t>Requirements may vary by state, locality, territory, Tribe, agency, funding source, data-sharing.</a:t>
+            </a:r>
+            <a:endParaRPr lang="en-US" sz="2100" dirty="0"/>
+          </a:p>
+        </p:txBody>
+      </p:sp>
+      <p:sp>
+        <p:nvSpPr>
+          <p:cNvPr id="12" name="Shape 10"/>
           <p:cNvSpPr/>
           <p:nvPr/>
         </p:nvSpPr>
@@ -12997,14 +14137,14 @@
       </p:sp>
       <p:sp>
         <p:nvSpPr>
-          <p:cNvPr id="12" name="Text 10"/>
+          <p:cNvPr id="13" name="Text 11"/>
           <p:cNvSpPr/>
           <p:nvPr/>
         </p:nvSpPr>
         <p:spPr>
           <a:xfrm>
             <a:off x="8074152" y="1563624"/>
-            <a:ext cx="2825496" cy="201168"/>
+            <a:ext cx="2825496" cy="256032"/>
           </a:xfrm>
           <a:prstGeom prst="rect">
             <a:avLst/>
@@ -13020,7 +14160,7 @@
               <a:buNone/>
             </a:pPr>
             <a:r>
-              <a:rPr lang="en-US" sz="950" b="1" dirty="0">
+              <a:rPr lang="en-US" sz="1300" b="1" dirty="0">
                 <a:solidFill>
                   <a:srgbClr val="0068B7"/>
                 </a:solidFill>
@@ -13030,20 +14170,20 @@
               </a:rPr>
               <a:t>Key idea</a:t>
             </a:r>
-            <a:endParaRPr lang="en-US" sz="950" dirty="0"/>
-          </a:p>
-        </p:txBody>
-      </p:sp>
-      <p:sp>
-        <p:nvSpPr>
-          <p:cNvPr id="13" name="Text 11"/>
-          <p:cNvSpPr/>
-          <p:nvPr/>
-        </p:nvSpPr>
-        <p:spPr>
-          <a:xfrm>
-            <a:off x="8074152" y="1856232"/>
-            <a:ext cx="2825496" cy="1261872"/>
+            <a:endParaRPr lang="en-US" sz="1300" dirty="0"/>
+          </a:p>
+        </p:txBody>
+      </p:sp>
+      <p:sp>
+        <p:nvSpPr>
+          <p:cNvPr id="14" name="Text 12"/>
+          <p:cNvSpPr/>
+          <p:nvPr/>
+        </p:nvSpPr>
+        <p:spPr>
+          <a:xfrm>
+            <a:off x="8074152" y="1920240"/>
+            <a:ext cx="2825496" cy="1188720"/>
           </a:xfrm>
           <a:prstGeom prst="rect">
             <a:avLst/>
@@ -13061,7 +14201,7 @@
               <a:buNone/>
             </a:pPr>
             <a:r>
-              <a:rPr lang="en-US" sz="1250" dirty="0">
+              <a:rPr lang="en-US" sz="1550" dirty="0">
                 <a:solidFill>
                   <a:srgbClr val="17364A"/>
                 </a:solidFill>
@@ -13071,13 +14211,13 @@
               </a:rPr>
               <a:t>This module provides national-level training guidance for public health agencies and partners.</a:t>
             </a:r>
-            <a:endParaRPr lang="en-US" sz="1250" dirty="0"/>
-          </a:p>
-        </p:txBody>
-      </p:sp>
-      <p:sp>
-        <p:nvSpPr>
-          <p:cNvPr id="14" name="Shape 12"/>
+            <a:endParaRPr lang="en-US" sz="1550" dirty="0"/>
+          </a:p>
+        </p:txBody>
+      </p:sp>
+      <p:sp>
+        <p:nvSpPr>
+          <p:cNvPr id="15" name="Shape 13"/>
           <p:cNvSpPr/>
           <p:nvPr/>
         </p:nvSpPr>
@@ -13104,14 +14244,14 @@
       </p:sp>
       <p:sp>
         <p:nvSpPr>
-          <p:cNvPr id="15" name="Text 13"/>
+          <p:cNvPr id="16" name="Text 14"/>
           <p:cNvSpPr/>
           <p:nvPr/>
         </p:nvSpPr>
         <p:spPr>
           <a:xfrm>
             <a:off x="8074152" y="3666744"/>
-            <a:ext cx="2825496" cy="201168"/>
+            <a:ext cx="2825496" cy="256032"/>
           </a:xfrm>
           <a:prstGeom prst="rect">
             <a:avLst/>
@@ -13127,7 +14267,7 @@
               <a:buNone/>
             </a:pPr>
             <a:r>
-              <a:rPr lang="en-US" sz="950" b="1" dirty="0">
+              <a:rPr lang="en-US" sz="1300" b="1" dirty="0">
                 <a:solidFill>
                   <a:srgbClr val="0068B7"/>
                 </a:solidFill>
@@ -13137,20 +14277,20 @@
               </a:rPr>
               <a:t>Use this for</a:t>
             </a:r>
-            <a:endParaRPr lang="en-US" sz="950" dirty="0"/>
-          </a:p>
-        </p:txBody>
-      </p:sp>
-      <p:sp>
-        <p:nvSpPr>
-          <p:cNvPr id="16" name="Text 14"/>
-          <p:cNvSpPr/>
-          <p:nvPr/>
-        </p:nvSpPr>
-        <p:spPr>
-          <a:xfrm>
-            <a:off x="8074152" y="3959352"/>
-            <a:ext cx="2825496" cy="1170432"/>
+            <a:endParaRPr lang="en-US" sz="1300" dirty="0"/>
+          </a:p>
+        </p:txBody>
+      </p:sp>
+      <p:sp>
+        <p:nvSpPr>
+          <p:cNvPr id="17" name="Text 15"/>
+          <p:cNvSpPr/>
+          <p:nvPr/>
+        </p:nvSpPr>
+        <p:spPr>
+          <a:xfrm>
+            <a:off x="8074152" y="4023360"/>
+            <a:ext cx="2825496" cy="1097280"/>
           </a:xfrm>
           <a:prstGeom prst="rect">
             <a:avLst/>
@@ -13168,7 +14308,7 @@
               <a:buNone/>
             </a:pPr>
             <a:r>
-              <a:rPr lang="en-US" sz="1250" dirty="0">
+              <a:rPr lang="en-US" sz="1550" dirty="0">
                 <a:solidFill>
                   <a:srgbClr val="17364A"/>
                 </a:solidFill>
@@ -13178,7 +14318,7 @@
               </a:rPr>
               <a:t>Connect the concept to public health decisions, safeguards, documentation, or implementation work.</a:t>
             </a:r>
-            <a:endParaRPr lang="en-US" sz="1250" dirty="0"/>
+            <a:endParaRPr lang="en-US" sz="1550" dirty="0"/>
           </a:p>
         </p:txBody>
       </p:sp>
@@ -13375,7 +14515,7 @@
                 <a:ea typeface="Aptos" pitchFamily="34" charset="-122"/>
                 <a:cs typeface="Aptos" pitchFamily="34" charset="-120"/>
               </a:rPr>
-              <a:t>© Paula Soper</a:t>
+              <a:t>Â© Paula Soper</a:t>
             </a:r>
             <a:endParaRPr lang="en-US" sz="800" dirty="0"/>
           </a:p>
@@ -13383,7 +14523,46 @@
       </p:sp>
       <p:sp>
         <p:nvSpPr>
-          <p:cNvPr id="7" name="Shape 5"/>
+          <p:cNvPr id="7" name="Text 5"/>
+          <p:cNvSpPr/>
+          <p:nvPr/>
+        </p:nvSpPr>
+        <p:spPr>
+          <a:xfrm>
+            <a:off x="11137392" y="6510528"/>
+            <a:ext cx="411480" cy="201168"/>
+          </a:xfrm>
+          <a:prstGeom prst="rect">
+            <a:avLst/>
+          </a:prstGeom>
+          <a:noFill/>
+          <a:ln/>
+        </p:spPr>
+        <p:txBody>
+          <a:bodyPr wrap="square" lIns="0" tIns="0" rIns="0" bIns="0" rtlCol="0" anchor="ctr"/>
+          <a:lstStyle/>
+          <a:p>
+            <a:pPr algn="r" indent="0" marL="0">
+              <a:buNone/>
+            </a:pPr>
+            <a:r>
+              <a:rPr lang="en-US" sz="900" dirty="0">
+                <a:solidFill>
+                  <a:srgbClr val="5F7181"/>
+                </a:solidFill>
+                <a:latin typeface="Aptos" pitchFamily="34" charset="0"/>
+                <a:ea typeface="Aptos" pitchFamily="34" charset="-122"/>
+                <a:cs typeface="Aptos" pitchFamily="34" charset="-120"/>
+              </a:rPr>
+              <a:t>8</a:t>
+            </a:r>
+            <a:endParaRPr lang="en-US" sz="900" dirty="0"/>
+          </a:p>
+        </p:txBody>
+      </p:sp>
+      <p:sp>
+        <p:nvSpPr>
+          <p:cNvPr id="8" name="Shape 6"/>
           <p:cNvSpPr/>
           <p:nvPr/>
         </p:nvSpPr>
@@ -13408,7 +14587,7 @@
       </p:sp>
       <p:sp>
         <p:nvSpPr>
-          <p:cNvPr id="8" name="Text 6"/>
+          <p:cNvPr id="9" name="Text 7"/>
           <p:cNvSpPr/>
           <p:nvPr/>
         </p:nvSpPr>
@@ -13447,14 +14626,14 @@
       </p:sp>
       <p:sp>
         <p:nvSpPr>
-          <p:cNvPr id="9" name="Text 7"/>
+          <p:cNvPr id="10" name="Text 8"/>
           <p:cNvSpPr/>
           <p:nvPr/>
         </p:nvSpPr>
         <p:spPr>
           <a:xfrm>
             <a:off x="640080" y="621792"/>
-            <a:ext cx="10881360" cy="566928"/>
+            <a:ext cx="10881360" cy="713232"/>
           </a:xfrm>
           <a:prstGeom prst="rect">
             <a:avLst/>
@@ -13472,7 +14651,7 @@
               <a:buNone/>
             </a:pPr>
             <a:r>
-              <a:rPr lang="en-US" sz="2700" b="1" dirty="0">
+              <a:rPr lang="en-US" sz="3400" b="1" dirty="0">
                 <a:solidFill>
                   <a:srgbClr val="003A63"/>
                 </a:solidFill>
@@ -13482,20 +14661,20 @@
               </a:rPr>
               <a:t>Why This Topic Matters for Public Health AI</a:t>
             </a:r>
-            <a:endParaRPr lang="en-US" sz="2700" dirty="0"/>
-          </a:p>
-        </p:txBody>
-      </p:sp>
-      <p:sp>
-        <p:nvSpPr>
-          <p:cNvPr id="10" name="Text 8"/>
-          <p:cNvSpPr/>
-          <p:nvPr/>
-        </p:nvSpPr>
-        <p:spPr>
-          <a:xfrm>
-            <a:off x="868680" y="1417320"/>
-            <a:ext cx="6675120" cy="4434840"/>
+            <a:endParaRPr lang="en-US" sz="3400" dirty="0"/>
+          </a:p>
+        </p:txBody>
+      </p:sp>
+      <p:sp>
+        <p:nvSpPr>
+          <p:cNvPr id="11" name="Text 9"/>
+          <p:cNvSpPr/>
+          <p:nvPr/>
+        </p:nvSpPr>
+        <p:spPr>
+          <a:xfrm>
+            <a:off x="868680" y="1508760"/>
+            <a:ext cx="6537960" cy="4160520"/>
           </a:xfrm>
           <a:prstGeom prst="rect">
             <a:avLst/>
@@ -13510,7 +14689,7 @@
           <a:lstStyle/>
           <a:p>
             <a:r>
-              <a:rPr lang="en-US" sz="1700" dirty="0">
+              <a:rPr lang="en-US" sz="2100" dirty="0">
                 <a:solidFill>
                   <a:srgbClr val="17364A"/>
                 </a:solidFill>
@@ -13520,11 +14699,11 @@
               </a:rPr>
               <a:t>Public health depends on trust.</a:t>
             </a:r>
-            <a:endParaRPr lang="en-US" sz="1700" dirty="0"/>
-          </a:p>
-          <a:p>
-            <a:r>
-              <a:rPr lang="en-US" sz="1700" dirty="0">
+            <a:endParaRPr lang="en-US" sz="2100" dirty="0"/>
+          </a:p>
+          <a:p>
+            <a:r>
+              <a:rPr lang="en-US" sz="2100" dirty="0">
                 <a:solidFill>
                   <a:srgbClr val="17364A"/>
                 </a:solidFill>
@@ -13532,13 +14711,13 @@
                 <a:ea typeface="Aptos" pitchFamily="34" charset="-122"/>
                 <a:cs typeface="Aptos" pitchFamily="34" charset="-120"/>
               </a:rPr>
-              <a:t>If communities discover that AI is being used in surveillance, communication, service routing, or resource allocation.</a:t>
-            </a:r>
-            <a:endParaRPr lang="en-US" sz="1700" dirty="0"/>
-          </a:p>
-          <a:p>
-            <a:r>
-              <a:rPr lang="en-US" sz="1700" dirty="0">
+              <a:t>If communities discover that AI is being used in surveillance, communication, service routing, or.</a:t>
+            </a:r>
+            <a:endParaRPr lang="en-US" sz="2100" dirty="0"/>
+          </a:p>
+          <a:p>
+            <a:r>
+              <a:rPr lang="en-US" sz="2100" dirty="0">
                 <a:solidFill>
                   <a:srgbClr val="17364A"/>
                 </a:solidFill>
@@ -13546,29 +14725,15 @@
                 <a:ea typeface="Aptos" pitchFamily="34" charset="-122"/>
                 <a:cs typeface="Aptos" pitchFamily="34" charset="-120"/>
               </a:rPr>
-              <a:t>Transparency does not require agencies to disclose every technical detail, but it does require clear communication about.</a:t>
-            </a:r>
-            <a:endParaRPr lang="en-US" sz="1700" dirty="0"/>
-          </a:p>
-          <a:p>
-            <a:r>
-              <a:rPr lang="en-US" sz="1700" dirty="0">
-                <a:solidFill>
-                  <a:srgbClr val="17364A"/>
-                </a:solidFill>
-                <a:latin typeface="Aptos" pitchFamily="34" charset="0"/>
-                <a:ea typeface="Aptos" pitchFamily="34" charset="-122"/>
-                <a:cs typeface="Aptos" pitchFamily="34" charset="-120"/>
-              </a:rPr>
-              <a:t>Transparency also improves internal accountability.</a:t>
-            </a:r>
-            <a:endParaRPr lang="en-US" sz="1700" dirty="0"/>
-          </a:p>
-        </p:txBody>
-      </p:sp>
-      <p:sp>
-        <p:nvSpPr>
-          <p:cNvPr id="11" name="Shape 9"/>
+              <a:t>Transparency does not require agencies to disclose every technical detail, but it does require clear.</a:t>
+            </a:r>
+            <a:endParaRPr lang="en-US" sz="2100" dirty="0"/>
+          </a:p>
+        </p:txBody>
+      </p:sp>
+      <p:sp>
+        <p:nvSpPr>
+          <p:cNvPr id="12" name="Shape 10"/>
           <p:cNvSpPr/>
           <p:nvPr/>
         </p:nvSpPr>
@@ -13595,14 +14760,14 @@
       </p:sp>
       <p:sp>
         <p:nvSpPr>
-          <p:cNvPr id="12" name="Text 10"/>
+          <p:cNvPr id="13" name="Text 11"/>
           <p:cNvSpPr/>
           <p:nvPr/>
         </p:nvSpPr>
         <p:spPr>
           <a:xfrm>
             <a:off x="8074152" y="1563624"/>
-            <a:ext cx="2825496" cy="201168"/>
+            <a:ext cx="2825496" cy="256032"/>
           </a:xfrm>
           <a:prstGeom prst="rect">
             <a:avLst/>
@@ -13618,7 +14783,7 @@
               <a:buNone/>
             </a:pPr>
             <a:r>
-              <a:rPr lang="en-US" sz="950" b="1" dirty="0">
+              <a:rPr lang="en-US" sz="1300" b="1" dirty="0">
                 <a:solidFill>
                   <a:srgbClr val="0068B7"/>
                 </a:solidFill>
@@ -13628,20 +14793,20 @@
               </a:rPr>
               <a:t>Key idea</a:t>
             </a:r>
-            <a:endParaRPr lang="en-US" sz="950" dirty="0"/>
-          </a:p>
-        </p:txBody>
-      </p:sp>
-      <p:sp>
-        <p:nvSpPr>
-          <p:cNvPr id="13" name="Text 11"/>
-          <p:cNvSpPr/>
-          <p:nvPr/>
-        </p:nvSpPr>
-        <p:spPr>
-          <a:xfrm>
-            <a:off x="8074152" y="1856232"/>
-            <a:ext cx="2825496" cy="1261872"/>
+            <a:endParaRPr lang="en-US" sz="1300" dirty="0"/>
+          </a:p>
+        </p:txBody>
+      </p:sp>
+      <p:sp>
+        <p:nvSpPr>
+          <p:cNvPr id="14" name="Text 12"/>
+          <p:cNvSpPr/>
+          <p:nvPr/>
+        </p:nvSpPr>
+        <p:spPr>
+          <a:xfrm>
+            <a:off x="8074152" y="1920240"/>
+            <a:ext cx="2825496" cy="1188720"/>
           </a:xfrm>
           <a:prstGeom prst="rect">
             <a:avLst/>
@@ -13659,7 +14824,7 @@
               <a:buNone/>
             </a:pPr>
             <a:r>
-              <a:rPr lang="en-US" sz="1250" dirty="0">
+              <a:rPr lang="en-US" sz="1550" dirty="0">
                 <a:solidFill>
                   <a:srgbClr val="17364A"/>
                 </a:solidFill>
@@ -13669,13 +14834,13 @@
               </a:rPr>
               <a:t>Public health depends on trust.</a:t>
             </a:r>
-            <a:endParaRPr lang="en-US" sz="1250" dirty="0"/>
-          </a:p>
-        </p:txBody>
-      </p:sp>
-      <p:sp>
-        <p:nvSpPr>
-          <p:cNvPr id="14" name="Shape 12"/>
+            <a:endParaRPr lang="en-US" sz="1550" dirty="0"/>
+          </a:p>
+        </p:txBody>
+      </p:sp>
+      <p:sp>
+        <p:nvSpPr>
+          <p:cNvPr id="15" name="Shape 13"/>
           <p:cNvSpPr/>
           <p:nvPr/>
         </p:nvSpPr>
@@ -13702,14 +14867,14 @@
       </p:sp>
       <p:sp>
         <p:nvSpPr>
-          <p:cNvPr id="15" name="Text 13"/>
+          <p:cNvPr id="16" name="Text 14"/>
           <p:cNvSpPr/>
           <p:nvPr/>
         </p:nvSpPr>
         <p:spPr>
           <a:xfrm>
             <a:off x="8074152" y="3666744"/>
-            <a:ext cx="2825496" cy="201168"/>
+            <a:ext cx="2825496" cy="256032"/>
           </a:xfrm>
           <a:prstGeom prst="rect">
             <a:avLst/>
@@ -13725,7 +14890,7 @@
               <a:buNone/>
             </a:pPr>
             <a:r>
-              <a:rPr lang="en-US" sz="950" b="1" dirty="0">
+              <a:rPr lang="en-US" sz="1300" b="1" dirty="0">
                 <a:solidFill>
                   <a:srgbClr val="0068B7"/>
                 </a:solidFill>
@@ -13735,20 +14900,20 @@
               </a:rPr>
               <a:t>Use this for</a:t>
             </a:r>
-            <a:endParaRPr lang="en-US" sz="950" dirty="0"/>
-          </a:p>
-        </p:txBody>
-      </p:sp>
-      <p:sp>
-        <p:nvSpPr>
-          <p:cNvPr id="16" name="Text 14"/>
-          <p:cNvSpPr/>
-          <p:nvPr/>
-        </p:nvSpPr>
-        <p:spPr>
-          <a:xfrm>
-            <a:off x="8074152" y="3959352"/>
-            <a:ext cx="2825496" cy="1170432"/>
+            <a:endParaRPr lang="en-US" sz="1300" dirty="0"/>
+          </a:p>
+        </p:txBody>
+      </p:sp>
+      <p:sp>
+        <p:nvSpPr>
+          <p:cNvPr id="17" name="Text 15"/>
+          <p:cNvSpPr/>
+          <p:nvPr/>
+        </p:nvSpPr>
+        <p:spPr>
+          <a:xfrm>
+            <a:off x="8074152" y="4023360"/>
+            <a:ext cx="2825496" cy="1097280"/>
           </a:xfrm>
           <a:prstGeom prst="rect">
             <a:avLst/>
@@ -13766,7 +14931,7 @@
               <a:buNone/>
             </a:pPr>
             <a:r>
-              <a:rPr lang="en-US" sz="1250" dirty="0">
+              <a:rPr lang="en-US" sz="1550" dirty="0">
                 <a:solidFill>
                   <a:srgbClr val="17364A"/>
                 </a:solidFill>
@@ -13776,7 +14941,7 @@
               </a:rPr>
               <a:t>Connect the concept to public health decisions, safeguards, documentation, or implementation work.</a:t>
             </a:r>
-            <a:endParaRPr lang="en-US" sz="1250" dirty="0"/>
+            <a:endParaRPr lang="en-US" sz="1550" dirty="0"/>
           </a:p>
         </p:txBody>
       </p:sp>
@@ -13973,7 +15138,7 @@
                 <a:ea typeface="Aptos" pitchFamily="34" charset="-122"/>
                 <a:cs typeface="Aptos" pitchFamily="34" charset="-120"/>
               </a:rPr>
-              <a:t>© Paula Soper</a:t>
+              <a:t>Â© Paula Soper</a:t>
             </a:r>
             <a:endParaRPr lang="en-US" sz="800" dirty="0"/>
           </a:p>
@@ -13981,7 +15146,46 @@
       </p:sp>
       <p:sp>
         <p:nvSpPr>
-          <p:cNvPr id="7" name="Shape 5"/>
+          <p:cNvPr id="7" name="Text 5"/>
+          <p:cNvSpPr/>
+          <p:nvPr/>
+        </p:nvSpPr>
+        <p:spPr>
+          <a:xfrm>
+            <a:off x="11137392" y="6510528"/>
+            <a:ext cx="411480" cy="201168"/>
+          </a:xfrm>
+          <a:prstGeom prst="rect">
+            <a:avLst/>
+          </a:prstGeom>
+          <a:noFill/>
+          <a:ln/>
+        </p:spPr>
+        <p:txBody>
+          <a:bodyPr wrap="square" lIns="0" tIns="0" rIns="0" bIns="0" rtlCol="0" anchor="ctr"/>
+          <a:lstStyle/>
+          <a:p>
+            <a:pPr algn="r" indent="0" marL="0">
+              <a:buNone/>
+            </a:pPr>
+            <a:r>
+              <a:rPr lang="en-US" sz="900" dirty="0">
+                <a:solidFill>
+                  <a:srgbClr val="5F7181"/>
+                </a:solidFill>
+                <a:latin typeface="Aptos" pitchFamily="34" charset="0"/>
+                <a:ea typeface="Aptos" pitchFamily="34" charset="-122"/>
+                <a:cs typeface="Aptos" pitchFamily="34" charset="-120"/>
+              </a:rPr>
+              <a:t>9</a:t>
+            </a:r>
+            <a:endParaRPr lang="en-US" sz="900" dirty="0"/>
+          </a:p>
+        </p:txBody>
+      </p:sp>
+      <p:sp>
+        <p:nvSpPr>
+          <p:cNvPr id="8" name="Shape 6"/>
           <p:cNvSpPr/>
           <p:nvPr/>
         </p:nvSpPr>
@@ -14006,7 +15210,7 @@
       </p:sp>
       <p:sp>
         <p:nvSpPr>
-          <p:cNvPr id="8" name="Text 6"/>
+          <p:cNvPr id="9" name="Text 7"/>
           <p:cNvSpPr/>
           <p:nvPr/>
         </p:nvSpPr>
@@ -14045,14 +15249,14 @@
       </p:sp>
       <p:sp>
         <p:nvSpPr>
-          <p:cNvPr id="9" name="Text 7"/>
+          <p:cNvPr id="10" name="Text 8"/>
           <p:cNvSpPr/>
           <p:nvPr/>
         </p:nvSpPr>
         <p:spPr>
           <a:xfrm>
             <a:off x="640080" y="621792"/>
-            <a:ext cx="10881360" cy="566928"/>
+            <a:ext cx="10881360" cy="713232"/>
           </a:xfrm>
           <a:prstGeom prst="rect">
             <a:avLst/>
@@ -14070,7 +15274,7 @@
               <a:buNone/>
             </a:pPr>
             <a:r>
-              <a:rPr lang="en-US" sz="2700" b="1" dirty="0">
+              <a:rPr lang="en-US" sz="3400" b="1" dirty="0">
                 <a:solidFill>
                   <a:srgbClr val="003A63"/>
                 </a:solidFill>
@@ -14080,20 +15284,20 @@
               </a:rPr>
               <a:t>Public Health Example</a:t>
             </a:r>
-            <a:endParaRPr lang="en-US" sz="2700" dirty="0"/>
-          </a:p>
-        </p:txBody>
-      </p:sp>
-      <p:sp>
-        <p:nvSpPr>
-          <p:cNvPr id="10" name="Text 8"/>
-          <p:cNvSpPr/>
-          <p:nvPr/>
-        </p:nvSpPr>
-        <p:spPr>
-          <a:xfrm>
-            <a:off x="868680" y="1417320"/>
-            <a:ext cx="6675120" cy="4434840"/>
+            <a:endParaRPr lang="en-US" sz="3400" dirty="0"/>
+          </a:p>
+        </p:txBody>
+      </p:sp>
+      <p:sp>
+        <p:nvSpPr>
+          <p:cNvPr id="11" name="Text 9"/>
+          <p:cNvSpPr/>
+          <p:nvPr/>
+        </p:nvSpPr>
+        <p:spPr>
+          <a:xfrm>
+            <a:off x="868680" y="1508760"/>
+            <a:ext cx="6537960" cy="4160520"/>
           </a:xfrm>
           <a:prstGeom prst="rect">
             <a:avLst/>
@@ -14108,7 +15312,7 @@
           <a:lstStyle/>
           <a:p>
             <a:r>
-              <a:rPr lang="en-US" sz="1700" dirty="0">
+              <a:rPr lang="en-US" sz="2100" dirty="0">
                 <a:solidFill>
                   <a:srgbClr val="17364A"/>
                 </a:solidFill>
@@ -14116,13 +15320,13 @@
                 <a:ea typeface="Aptos" pitchFamily="34" charset="-122"/>
                 <a:cs typeface="Aptos" pitchFamily="34" charset="-120"/>
               </a:rPr>
-              <a:t>A health department uses AI to draft public health messages, summarize internal reports, and prioritize inspection follow-up.</a:t>
-            </a:r>
-            <a:endParaRPr lang="en-US" sz="1700" dirty="0"/>
-          </a:p>
-          <a:p>
-            <a:r>
-              <a:rPr lang="en-US" sz="1700" dirty="0">
+              <a:t>A health department uses AI to draft public health messages, summarize internal reports, and prioritize.</a:t>
+            </a:r>
+            <a:endParaRPr lang="en-US" sz="2100" dirty="0"/>
+          </a:p>
+          <a:p>
+            <a:r>
+              <a:rPr lang="en-US" sz="2100" dirty="0">
                 <a:solidFill>
                   <a:srgbClr val="17364A"/>
                 </a:solidFill>
@@ -14130,13 +15334,13 @@
                 <a:ea typeface="Aptos" pitchFamily="34" charset="-122"/>
                 <a:cs typeface="Aptos" pitchFamily="34" charset="-120"/>
               </a:rPr>
-              <a:t>Some uses may not require broad public disclosure, while others may affect public services and should be listed in an AI.</a:t>
-            </a:r>
-            <a:endParaRPr lang="en-US" sz="1700" dirty="0"/>
-          </a:p>
-          <a:p>
-            <a:r>
-              <a:rPr lang="en-US" sz="1700" dirty="0">
+              <a:t>Some uses may not require broad public disclosure, while others may affect public services and should.</a:t>
+            </a:r>
+            <a:endParaRPr lang="en-US" sz="2100" dirty="0"/>
+          </a:p>
+          <a:p>
+            <a:r>
+              <a:rPr lang="en-US" sz="2100" dirty="0">
                 <a:solidFill>
                   <a:srgbClr val="17364A"/>
                 </a:solidFill>
@@ -14144,29 +15348,15 @@
                 <a:ea typeface="Aptos" pitchFamily="34" charset="-122"/>
                 <a:cs typeface="Aptos" pitchFamily="34" charset="-120"/>
               </a:rPr>
-              <a:t>The registry does not need to reveal sensitive security details, but it should identify the purpose, owner, data.</a:t>
-            </a:r>
-            <a:endParaRPr lang="en-US" sz="1700" dirty="0"/>
-          </a:p>
-          <a:p>
-            <a:r>
-              <a:rPr lang="en-US" sz="1700" dirty="0">
-                <a:solidFill>
-                  <a:srgbClr val="17364A"/>
-                </a:solidFill>
-                <a:latin typeface="Aptos" pitchFamily="34" charset="0"/>
-                <a:ea typeface="Aptos" pitchFamily="34" charset="-122"/>
-                <a:cs typeface="Aptos" pitchFamily="34" charset="-120"/>
-              </a:rPr>
-              <a:t>For a public-facing tool, the agency may also create a plain-language notice explaining that AI assists with initial.</a:t>
-            </a:r>
-            <a:endParaRPr lang="en-US" sz="1700" dirty="0"/>
-          </a:p>
-        </p:txBody>
-      </p:sp>
-      <p:sp>
-        <p:nvSpPr>
-          <p:cNvPr id="11" name="Shape 9"/>
+              <a:t>The registry does not need to reveal sensitive security details, but it should identify the purpose,.</a:t>
+            </a:r>
+            <a:endParaRPr lang="en-US" sz="2100" dirty="0"/>
+          </a:p>
+        </p:txBody>
+      </p:sp>
+      <p:sp>
+        <p:nvSpPr>
+          <p:cNvPr id="12" name="Shape 10"/>
           <p:cNvSpPr/>
           <p:nvPr/>
         </p:nvSpPr>
@@ -14193,14 +15383,14 @@
       </p:sp>
       <p:sp>
         <p:nvSpPr>
-          <p:cNvPr id="12" name="Text 10"/>
+          <p:cNvPr id="13" name="Text 11"/>
           <p:cNvSpPr/>
           <p:nvPr/>
         </p:nvSpPr>
         <p:spPr>
           <a:xfrm>
             <a:off x="8074152" y="1563624"/>
-            <a:ext cx="2825496" cy="201168"/>
+            <a:ext cx="2825496" cy="256032"/>
           </a:xfrm>
           <a:prstGeom prst="rect">
             <a:avLst/>
@@ -14216,7 +15406,7 @@
               <a:buNone/>
             </a:pPr>
             <a:r>
-              <a:rPr lang="en-US" sz="950" b="1" dirty="0">
+              <a:rPr lang="en-US" sz="1300" b="1" dirty="0">
                 <a:solidFill>
                   <a:srgbClr val="0068B7"/>
                 </a:solidFill>
@@ -14226,20 +15416,20 @@
               </a:rPr>
               <a:t>Key idea</a:t>
             </a:r>
-            <a:endParaRPr lang="en-US" sz="950" dirty="0"/>
-          </a:p>
-        </p:txBody>
-      </p:sp>
-      <p:sp>
-        <p:nvSpPr>
-          <p:cNvPr id="13" name="Text 11"/>
-          <p:cNvSpPr/>
-          <p:nvPr/>
-        </p:nvSpPr>
-        <p:spPr>
-          <a:xfrm>
-            <a:off x="8074152" y="1856232"/>
-            <a:ext cx="2825496" cy="1261872"/>
+            <a:endParaRPr lang="en-US" sz="1300" dirty="0"/>
+          </a:p>
+        </p:txBody>
+      </p:sp>
+      <p:sp>
+        <p:nvSpPr>
+          <p:cNvPr id="14" name="Text 12"/>
+          <p:cNvSpPr/>
+          <p:nvPr/>
+        </p:nvSpPr>
+        <p:spPr>
+          <a:xfrm>
+            <a:off x="8074152" y="1920240"/>
+            <a:ext cx="2825496" cy="1188720"/>
           </a:xfrm>
           <a:prstGeom prst="rect">
             <a:avLst/>
@@ -14257,7 +15447,7 @@
               <a:buNone/>
             </a:pPr>
             <a:r>
-              <a:rPr lang="en-US" sz="1250" dirty="0">
+              <a:rPr lang="en-US" sz="1550" dirty="0">
                 <a:solidFill>
                   <a:srgbClr val="17364A"/>
                 </a:solidFill>
@@ -14265,15 +15455,15 @@
                 <a:ea typeface="Aptos" pitchFamily="34" charset="-122"/>
                 <a:cs typeface="Aptos" pitchFamily="34" charset="-120"/>
               </a:rPr>
-              <a:t>A health department uses AI to draft public health messages, summarize internal reports, and prioritize inspection follow-up.</a:t>
-            </a:r>
-            <a:endParaRPr lang="en-US" sz="1250" dirty="0"/>
-          </a:p>
-        </p:txBody>
-      </p:sp>
-      <p:sp>
-        <p:nvSpPr>
-          <p:cNvPr id="14" name="Shape 12"/>
+              <a:t>A health department uses AI to draft public health messages, summarize internal reports, and prioritize.</a:t>
+            </a:r>
+            <a:endParaRPr lang="en-US" sz="1550" dirty="0"/>
+          </a:p>
+        </p:txBody>
+      </p:sp>
+      <p:sp>
+        <p:nvSpPr>
+          <p:cNvPr id="15" name="Shape 13"/>
           <p:cNvSpPr/>
           <p:nvPr/>
         </p:nvSpPr>
@@ -14300,14 +15490,14 @@
       </p:sp>
       <p:sp>
         <p:nvSpPr>
-          <p:cNvPr id="15" name="Text 13"/>
+          <p:cNvPr id="16" name="Text 14"/>
           <p:cNvSpPr/>
           <p:nvPr/>
         </p:nvSpPr>
         <p:spPr>
           <a:xfrm>
             <a:off x="8074152" y="3666744"/>
-            <a:ext cx="2825496" cy="201168"/>
+            <a:ext cx="2825496" cy="256032"/>
           </a:xfrm>
           <a:prstGeom prst="rect">
             <a:avLst/>
@@ -14323,7 +15513,7 @@
               <a:buNone/>
             </a:pPr>
             <a:r>
-              <a:rPr lang="en-US" sz="950" b="1" dirty="0">
+              <a:rPr lang="en-US" sz="1300" b="1" dirty="0">
                 <a:solidFill>
                   <a:srgbClr val="0068B7"/>
                 </a:solidFill>
@@ -14333,20 +15523,20 @@
               </a:rPr>
               <a:t>Use this for</a:t>
             </a:r>
-            <a:endParaRPr lang="en-US" sz="950" dirty="0"/>
-          </a:p>
-        </p:txBody>
-      </p:sp>
-      <p:sp>
-        <p:nvSpPr>
-          <p:cNvPr id="16" name="Text 14"/>
-          <p:cNvSpPr/>
-          <p:nvPr/>
-        </p:nvSpPr>
-        <p:spPr>
-          <a:xfrm>
-            <a:off x="8074152" y="3959352"/>
-            <a:ext cx="2825496" cy="1170432"/>
+            <a:endParaRPr lang="en-US" sz="1300" dirty="0"/>
+          </a:p>
+        </p:txBody>
+      </p:sp>
+      <p:sp>
+        <p:nvSpPr>
+          <p:cNvPr id="17" name="Text 15"/>
+          <p:cNvSpPr/>
+          <p:nvPr/>
+        </p:nvSpPr>
+        <p:spPr>
+          <a:xfrm>
+            <a:off x="8074152" y="4023360"/>
+            <a:ext cx="2825496" cy="1097280"/>
           </a:xfrm>
           <a:prstGeom prst="rect">
             <a:avLst/>
@@ -14364,7 +15554,7 @@
               <a:buNone/>
             </a:pPr>
             <a:r>
-              <a:rPr lang="en-US" sz="1250" dirty="0">
+              <a:rPr lang="en-US" sz="1550" dirty="0">
                 <a:solidFill>
                   <a:srgbClr val="17364A"/>
                 </a:solidFill>
@@ -14374,7 +15564,7 @@
               </a:rPr>
               <a:t>Connect the concept to public health decisions, safeguards, documentation, or implementation work.</a:t>
             </a:r>
-            <a:endParaRPr lang="en-US" sz="1250" dirty="0"/>
+            <a:endParaRPr lang="en-US" sz="1550" dirty="0"/>
           </a:p>
         </p:txBody>
       </p:sp>
